--- a/docs/初赛文档/RespOS初赛进展汇报.pptx
+++ b/docs/初赛文档/RespOS初赛进展汇报.pptx
@@ -131,10 +131,25 @@
 </p:presentation>
 </file>
 
-<file path=ppt/charts/chart1.xml><?xml version="1.0" encoding="utf-8"?>
+<file path=ppt/charts/chart4.xml><?xml version="1.0" encoding="utf-8"?>
 <c:chartSpace xmlns:c="http://schemas.openxmlformats.org/drawingml/2006/chart" xmlns:a="http://schemas.openxmlformats.org/drawingml/2006/main" xmlns:r="http://schemas.openxmlformats.org/officeDocument/2006/relationships">
   <c:date1904 val="0"/>
   <c:chart>
+    <c:title>
+      <c:tx>
+        <c:rich>
+          <a:bodyPr/>
+          <a:lstStyle/>
+          <a:p>
+            <a:r>
+              <a:t>LTP 用例通过率（case 口径，%）</a:t>
+            </a:r>
+          </a:p>
+        </c:rich>
+      </c:tx>
+      <c:layout/>
+      <c:overlay val="0"/>
+    </c:title>
     <c:autoTitleDeleted val="0"/>
     <c:plotArea>
       <c:barChart>
@@ -149,7 +164,7 @@
               <c:strCache>
                 <c:ptCount val="1"/>
                 <c:pt idx="0">
-                  <c:v>TPASS</c:v>
+                  <c:v>用例通过率</c:v>
                 </c:pt>
               </c:strCache>
             </c:strRef>
@@ -181,133 +196,32 @@
                 <c:formatCode>General</c:formatCode>
                 <c:ptCount val="4"/>
                 <c:pt idx="0">
-                  <c:v>108</c:v>
+                  <c:v>93.6</c:v>
                 </c:pt>
                 <c:pt idx="1">
-                  <c:v>110</c:v>
+                  <c:v>93.8</c:v>
                 </c:pt>
                 <c:pt idx="2">
-                  <c:v>116</c:v>
+                  <c:v>93.7</c:v>
                 </c:pt>
                 <c:pt idx="3">
-                  <c:v>111</c:v>
+                  <c:v>93.1</c:v>
                 </c:pt>
               </c:numCache>
             </c:numRef>
           </c:val>
         </c:ser>
-        <c:ser>
-          <c:idx val="1"/>
-          <c:order val="1"/>
-          <c:tx>
-            <c:strRef>
-              <c:f>Sheet1!$C$1</c:f>
-              <c:strCache>
-                <c:ptCount val="1"/>
-                <c:pt idx="0">
-                  <c:v>TFAIL</c:v>
-                </c:pt>
-              </c:strCache>
-            </c:strRef>
-          </c:tx>
-          <c:cat>
-            <c:strRef>
-              <c:f>Sheet1!$A$2:$A$5</c:f>
-              <c:strCache>
-                <c:ptCount val="4"/>
-                <c:pt idx="0">
-                  <c:v>RV glibc</c:v>
-                </c:pt>
-                <c:pt idx="1">
-                  <c:v>RV musl</c:v>
-                </c:pt>
-                <c:pt idx="2">
-                  <c:v>LA glibc</c:v>
-                </c:pt>
-                <c:pt idx="3">
-                  <c:v>LA musl</c:v>
-                </c:pt>
-              </c:strCache>
-            </c:strRef>
-          </c:cat>
-          <c:val>
-            <c:numRef>
-              <c:f>Sheet1!$C$2:$C$5</c:f>
-              <c:numCache>
-                <c:formatCode>General</c:formatCode>
-                <c:ptCount val="4"/>
-                <c:pt idx="0">
-                  <c:v>30</c:v>
-                </c:pt>
-                <c:pt idx="1">
-                  <c:v>39</c:v>
-                </c:pt>
-                <c:pt idx="2">
-                  <c:v>37</c:v>
-                </c:pt>
-                <c:pt idx="3">
-                  <c:v>40</c:v>
-                </c:pt>
-              </c:numCache>
-            </c:numRef>
-          </c:val>
-        </c:ser>
-        <c:ser>
-          <c:idx val="2"/>
-          <c:order val="2"/>
-          <c:tx>
-            <c:strRef>
-              <c:f>Sheet1!$D$1</c:f>
-              <c:strCache>
-                <c:ptCount val="1"/>
-                <c:pt idx="0">
-                  <c:v>TBROK</c:v>
-                </c:pt>
-              </c:strCache>
-            </c:strRef>
-          </c:tx>
-          <c:cat>
-            <c:strRef>
-              <c:f>Sheet1!$A$2:$A$5</c:f>
-              <c:strCache>
-                <c:ptCount val="4"/>
-                <c:pt idx="0">
-                  <c:v>RV glibc</c:v>
-                </c:pt>
-                <c:pt idx="1">
-                  <c:v>RV musl</c:v>
-                </c:pt>
-                <c:pt idx="2">
-                  <c:v>LA glibc</c:v>
-                </c:pt>
-                <c:pt idx="3">
-                  <c:v>LA musl</c:v>
-                </c:pt>
-              </c:strCache>
-            </c:strRef>
-          </c:cat>
-          <c:val>
-            <c:numRef>
-              <c:f>Sheet1!$D$2:$D$5</c:f>
-              <c:numCache>
-                <c:formatCode>General</c:formatCode>
-                <c:ptCount val="4"/>
-                <c:pt idx="0">
-                  <c:v>15</c:v>
-                </c:pt>
-                <c:pt idx="1">
-                  <c:v>24</c:v>
-                </c:pt>
-                <c:pt idx="2">
-                  <c:v>21</c:v>
-                </c:pt>
-                <c:pt idx="3">
-                  <c:v>20</c:v>
-                </c:pt>
-              </c:numCache>
-            </c:numRef>
-          </c:val>
-        </c:ser>
+        <c:dLbls>
+          <c:numFmt formatCode="0.0%" sourceLinked="0"/>
+          <c:dLblPos val="outEnd"/>
+          <c:showLegendKey val="0"/>
+          <c:showVal val="1"/>
+          <c:showCatName val="0"/>
+          <c:showSerName val="0"/>
+          <c:showPercent val="0"/>
+          <c:showBubbleSize val="0"/>
+          <c:showLeaderLines val="1"/>
+        </c:dLbls>
         <c:axId val="-2068027336"/>
         <c:axId val="-2113994440"/>
       </c:barChart>
@@ -326,7 +240,7 @@
           <a:lstStyle/>
           <a:p>
             <a:pPr>
-              <a:defRPr sz="900"/>
+              <a:defRPr sz="800"/>
             </a:pPr>
           </a:p>
         </c:txPr>
@@ -339,7 +253,10 @@
       </c:catAx>
       <c:valAx>
         <c:axId val="-2113994440"/>
-        <c:scaling/>
+        <c:scaling>
+          <c:max val="100.0"/>
+          <c:min val="90.0"/>
+        </c:scaling>
         <c:delete val="0"/>
         <c:axPos val="l"/>
         <c:majorGridlines/>
@@ -351,15 +268,237 @@
           <a:lstStyle/>
           <a:p>
             <a:pPr>
-              <a:defRPr sz="900"/>
+              <a:defRPr sz="800"/>
             </a:pPr>
           </a:p>
         </c:txPr>
         <c:crossAx val="-2068027336"/>
         <c:crosses val="autoZero"/>
+        <c:majorUnit val="2.0"/>
+      </c:valAx>
+    </c:plotArea>
+    <c:dispBlanksAs val="gap"/>
+  </c:chart>
+  <c:txPr>
+    <a:bodyPr/>
+    <a:lstStyle/>
+    <a:p>
+      <a:pPr>
+        <a:defRPr sz="1800"/>
+      </a:pPr>
+      <a:endParaRPr lang="en-US"/>
+    </a:p>
+  </c:txPr>
+  <c:externalData r:id="rId1">
+    <c:autoUpdate val="0"/>
+  </c:externalData>
+</c:chartSpace>
+</file>
+
+<file path=ppt/charts/chart5.xml><?xml version="1.0" encoding="utf-8"?>
+<c:chartSpace xmlns:c="http://schemas.openxmlformats.org/drawingml/2006/chart" xmlns:a="http://schemas.openxmlformats.org/drawingml/2006/main" xmlns:r="http://schemas.openxmlformats.org/officeDocument/2006/relationships">
+  <c:date1904 val="0"/>
+  <c:chart>
+    <c:title>
+      <c:tx>
+        <c:rich>
+          <a:bodyPr/>
+          <a:lstStyle/>
+          <a:p>
+            <a:r>
+              <a:t>iperf BASIC 吞吐（Mbits/s）</a:t>
+            </a:r>
+          </a:p>
+        </c:rich>
+      </c:tx>
+      <c:layout/>
+      <c:overlay val="0"/>
+    </c:title>
+    <c:autoTitleDeleted val="0"/>
+    <c:plotArea>
+      <c:barChart>
+        <c:barDir val="col"/>
+        <c:grouping val="clustered"/>
+        <c:ser>
+          <c:idx val="0"/>
+          <c:order val="0"/>
+          <c:tx>
+            <c:strRef>
+              <c:f>Sheet1!$B$1</c:f>
+              <c:strCache>
+                <c:ptCount val="1"/>
+                <c:pt idx="0">
+                  <c:v>UDP receiver</c:v>
+                </c:pt>
+              </c:strCache>
+            </c:strRef>
+          </c:tx>
+          <c:cat>
+            <c:strRef>
+              <c:f>Sheet1!$A$2:$A$5</c:f>
+              <c:strCache>
+                <c:ptCount val="4"/>
+                <c:pt idx="0">
+                  <c:v>RV musl</c:v>
+                </c:pt>
+                <c:pt idx="1">
+                  <c:v>RV glibc</c:v>
+                </c:pt>
+                <c:pt idx="2">
+                  <c:v>LA musl</c:v>
+                </c:pt>
+                <c:pt idx="3">
+                  <c:v>LA glibc</c:v>
+                </c:pt>
+              </c:strCache>
+            </c:strRef>
+          </c:cat>
+          <c:val>
+            <c:numRef>
+              <c:f>Sheet1!$B$2:$B$5</c:f>
+              <c:numCache>
+                <c:formatCode>General</c:formatCode>
+                <c:ptCount val="4"/>
+                <c:pt idx="0">
+                  <c:v>50.7</c:v>
+                </c:pt>
+                <c:pt idx="1">
+                  <c:v>51.1</c:v>
+                </c:pt>
+                <c:pt idx="2">
+                  <c:v>50.4</c:v>
+                </c:pt>
+                <c:pt idx="3">
+                  <c:v>50.6</c:v>
+                </c:pt>
+              </c:numCache>
+            </c:numRef>
+          </c:val>
+        </c:ser>
+        <c:ser>
+          <c:idx val="1"/>
+          <c:order val="1"/>
+          <c:tx>
+            <c:strRef>
+              <c:f>Sheet1!$C$1</c:f>
+              <c:strCache>
+                <c:ptCount val="1"/>
+                <c:pt idx="0">
+                  <c:v>TCP receiver</c:v>
+                </c:pt>
+              </c:strCache>
+            </c:strRef>
+          </c:tx>
+          <c:cat>
+            <c:strRef>
+              <c:f>Sheet1!$A$2:$A$5</c:f>
+              <c:strCache>
+                <c:ptCount val="4"/>
+                <c:pt idx="0">
+                  <c:v>RV musl</c:v>
+                </c:pt>
+                <c:pt idx="1">
+                  <c:v>RV glibc</c:v>
+                </c:pt>
+                <c:pt idx="2">
+                  <c:v>LA musl</c:v>
+                </c:pt>
+                <c:pt idx="3">
+                  <c:v>LA glibc</c:v>
+                </c:pt>
+              </c:strCache>
+            </c:strRef>
+          </c:cat>
+          <c:val>
+            <c:numRef>
+              <c:f>Sheet1!$C$2:$C$5</c:f>
+              <c:numCache>
+                <c:formatCode>General</c:formatCode>
+                <c:ptCount val="4"/>
+                <c:pt idx="0">
+                  <c:v>28.0</c:v>
+                </c:pt>
+                <c:pt idx="1">
+                  <c:v>27.1</c:v>
+                </c:pt>
+                <c:pt idx="2">
+                  <c:v>39.9</c:v>
+                </c:pt>
+                <c:pt idx="3">
+                  <c:v>40.1</c:v>
+                </c:pt>
+              </c:numCache>
+            </c:numRef>
+          </c:val>
+        </c:ser>
+        <c:dLbls>
+          <c:numFmt formatCode="0.0" sourceLinked="0"/>
+          <c:dLblPos val="outEnd"/>
+          <c:showLegendKey val="0"/>
+          <c:showVal val="1"/>
+          <c:showCatName val="0"/>
+          <c:showSerName val="0"/>
+          <c:showPercent val="0"/>
+          <c:showBubbleSize val="0"/>
+          <c:showLeaderLines val="1"/>
+        </c:dLbls>
+        <c:axId val="-2068027336"/>
+        <c:axId val="-2113994440"/>
+      </c:barChart>
+      <c:catAx>
+        <c:axId val="-2068027336"/>
+        <c:scaling>
+          <c:orientation val="minMax"/>
+        </c:scaling>
+        <c:delete val="0"/>
+        <c:axPos val="b"/>
+        <c:majorTickMark val="out"/>
+        <c:minorTickMark val="none"/>
+        <c:tickLblPos val="nextTo"/>
+        <c:txPr>
+          <a:bodyPr/>
+          <a:lstStyle/>
+          <a:p>
+            <a:pPr>
+              <a:defRPr sz="800"/>
+            </a:pPr>
+          </a:p>
+        </c:txPr>
+        <c:crossAx val="-2113994440"/>
+        <c:crosses val="autoZero"/>
+        <c:auto val="1"/>
+        <c:lblAlgn val="ctr"/>
+        <c:lblOffset val="100"/>
+        <c:noMultiLvlLbl val="0"/>
+      </c:catAx>
+      <c:valAx>
+        <c:axId val="-2113994440"/>
+        <c:scaling>
+          <c:max val="60.0"/>
+          <c:min val="0.0"/>
+        </c:scaling>
+        <c:delete val="0"/>
+        <c:axPos val="l"/>
+        <c:majorGridlines/>
+        <c:majorTickMark val="out"/>
+        <c:minorTickMark val="none"/>
+        <c:tickLblPos val="nextTo"/>
+        <c:txPr>
+          <a:bodyPr/>
+          <a:lstStyle/>
+          <a:p>
+            <a:pPr>
+              <a:defRPr sz="800"/>
+            </a:pPr>
+          </a:p>
+        </c:txPr>
+        <c:crossAx val="-2068027336"/>
+        <c:crosses val="autoZero"/>
+        <c:majorUnit val="15.0"/>
       </c:valAx>
     </c:plotArea>
     <c:legend>
+      <c:legendPos val="b"/>
       <c:overlay val="0"/>
     </c:legend>
     <c:dispBlanksAs val="gap"/>
@@ -4067,9 +4206,6 @@
               </a:defRPr>
             </a:pPr>
             <a:r>
-              <a:rPr>
-                <a:latin typeface="Microsoft YaHei"/>
-              </a:rPr>
               <a:t>10 / 25</a:t>
             </a:r>
           </a:p>
@@ -4084,7 +4220,7 @@
         <p:spPr>
           <a:xfrm>
             <a:off x="502920" y="347472"/>
-            <a:ext cx="9144000" cy="411480"/>
+            <a:ext cx="9509760" cy="384048"/>
           </a:xfrm>
           <a:prstGeom prst="rect">
             <a:avLst/>
@@ -4098,7 +4234,7 @@
           <a:lstStyle/>
           <a:p>
             <a:pPr algn="l">
-              <a:defRPr sz="2250" b="1">
+              <a:defRPr sz="2200" b="1">
                 <a:solidFill>
                   <a:srgbClr val="202124"/>
                 </a:solidFill>
@@ -4106,9 +4242,6 @@
               </a:defRPr>
             </a:pPr>
             <a:r>
-              <a:rPr>
-                <a:latin typeface="Microsoft YaHei"/>
-              </a:rPr>
               <a:t>进程与线程管理</a:t>
             </a:r>
           </a:p>
@@ -4123,7 +4256,7 @@
         <p:spPr>
           <a:xfrm>
             <a:off x="530352" y="768096"/>
-            <a:ext cx="10515600" cy="310896"/>
+            <a:ext cx="10424160" cy="274320"/>
           </a:xfrm>
           <a:prstGeom prst="rect">
             <a:avLst/>
@@ -4137,7 +4270,7 @@
           <a:lstStyle/>
           <a:p>
             <a:pPr algn="l">
-              <a:defRPr sz="1050" b="0">
+              <a:defRPr sz="1019" b="0">
                 <a:solidFill>
                   <a:srgbClr val="667085"/>
                 </a:solidFill>
@@ -4145,10 +4278,7 @@
               </a:defRPr>
             </a:pPr>
             <a:r>
-              <a:rPr>
-                <a:latin typeface="Microsoft YaHei"/>
-              </a:rPr>
-              <a:t>调度单位是任务，用户可见语义接近 Linux 线程组</a:t>
+              <a:t>任务状态图和线程组语义</a:t>
             </a:r>
           </a:p>
         </p:txBody>
@@ -4161,7 +4291,7 @@
         </p:nvSpPr>
         <p:spPr>
           <a:xfrm>
-            <a:off x="530352" y="1069848"/>
+            <a:off x="530352" y="1060704"/>
             <a:ext cx="1143000" cy="32004"/>
           </a:xfrm>
           <a:prstGeom prst="rect">
@@ -4198,14 +4328,14 @@
       </p:sp>
       <p:sp>
         <p:nvSpPr>
-          <p:cNvPr id="8" name="Rounded Rectangle 7"/>
+          <p:cNvPr id="22" name="Rounded Rectangle 21"/>
           <p:cNvSpPr/>
           <p:nvPr/>
         </p:nvSpPr>
         <p:spPr>
           <a:xfrm>
-            <a:off x="685800" y="1280160"/>
-            <a:ext cx="5303520" cy="4800600"/>
+            <a:off x="777240" y="4572000"/>
+            <a:ext cx="5074920" cy="1097280"/>
           </a:xfrm>
           <a:prstGeom prst="roundRect">
             <a:avLst/>
@@ -4243,14 +4373,14 @@
       </p:sp>
       <p:sp>
         <p:nvSpPr>
-          <p:cNvPr id="9" name="Rectangle 8"/>
+          <p:cNvPr id="23" name="Rectangle 22"/>
           <p:cNvSpPr/>
           <p:nvPr/>
         </p:nvSpPr>
         <p:spPr>
           <a:xfrm>
-            <a:off x="685800" y="1280160"/>
-            <a:ext cx="68580" cy="4800600"/>
+            <a:off x="777240" y="4572000"/>
+            <a:ext cx="64008" cy="1097280"/>
           </a:xfrm>
           <a:prstGeom prst="rect">
             <a:avLst/>
@@ -4286,14 +4416,14 @@
       </p:sp>
       <p:sp>
         <p:nvSpPr>
-          <p:cNvPr id="10" name="TextBox 9"/>
+          <p:cNvPr id="24" name="TextBox 23"/>
           <p:cNvSpPr txBox="1"/>
           <p:nvPr/>
         </p:nvSpPr>
         <p:spPr>
           <a:xfrm>
-            <a:off x="832104" y="1389888"/>
-            <a:ext cx="5029200" cy="256032"/>
+            <a:off x="914400" y="4663440"/>
+            <a:ext cx="4800600" cy="256032"/>
           </a:xfrm>
           <a:prstGeom prst="rect">
             <a:avLst/>
@@ -4307,7 +4437,7 @@
           <a:lstStyle/>
           <a:p>
             <a:pPr algn="l">
-              <a:defRPr sz="1250" b="1">
+              <a:defRPr sz="1150" b="1">
                 <a:solidFill>
                   <a:srgbClr val="202124"/>
                 </a:solidFill>
@@ -4315,9 +4445,6 @@
               </a:defRPr>
             </a:pPr>
             <a:r>
-              <a:rPr>
-                <a:latin typeface="Microsoft YaHei"/>
-              </a:rPr>
               <a:t>已完成主路径</a:t>
             </a:r>
           </a:p>
@@ -4325,14 +4452,14 @@
       </p:sp>
       <p:sp>
         <p:nvSpPr>
-          <p:cNvPr id="11" name="TextBox 10"/>
+          <p:cNvPr id="25" name="TextBox 24"/>
           <p:cNvSpPr txBox="1"/>
           <p:nvPr/>
         </p:nvSpPr>
         <p:spPr>
           <a:xfrm>
-            <a:off x="960120" y="1783080"/>
-            <a:ext cx="4709160" cy="3977639"/>
+            <a:off x="914400" y="4965192"/>
+            <a:ext cx="4800600" cy="676656"/>
           </a:xfrm>
           <a:prstGeom prst="rect">
             <a:avLst/>
@@ -4340,16 +4467,13 @@
           <a:noFill/>
         </p:spPr>
         <p:txBody>
-          <a:bodyPr wrap="square" lIns="73152" rIns="27432">
+          <a:bodyPr wrap="square" lIns="27432" rIns="27432" anchor="t">
             <a:spAutoFit/>
           </a:bodyPr>
           <a:lstStyle/>
           <a:p>
-            <a:pPr marL="210000" hanging="105000">
-              <a:spcAft>
-                <a:spcPts val="500"/>
-              </a:spcAft>
-              <a:defRPr sz="1019">
+            <a:pPr algn="l">
+              <a:defRPr sz="900" b="0">
                 <a:solidFill>
                   <a:srgbClr val="475467"/>
                 </a:solidFill>
@@ -4357,81 +4481,21 @@
               </a:defRPr>
             </a:pPr>
             <a:r>
-              <a:rPr>
-                <a:latin typeface="Microsoft YaHei"/>
-              </a:rPr>
-              <a:t>TaskControlBlock 保存执行上下文、地址空间、fd 表、信号状态和父子关系</a:t>
-            </a:r>
-          </a:p>
-          <a:p>
-            <a:pPr marL="210000" hanging="105000">
-              <a:spcAft>
-                <a:spcPts val="500"/>
-              </a:spcAft>
-              <a:defRPr sz="1019">
-                <a:solidFill>
-                  <a:srgbClr val="475467"/>
-                </a:solidFill>
-                <a:latin typeface="Microsoft YaHei"/>
-              </a:defRPr>
-            </a:pPr>
-            <a:r>
-              <a:rPr>
-                <a:latin typeface="Microsoft YaHei"/>
-              </a:rPr>
-              <a:t>ThreadGroup 区分 TID 与 TGID，支持 gettid/getpid 语义</a:t>
-            </a:r>
-          </a:p>
-          <a:p>
-            <a:pPr marL="210000" hanging="105000">
-              <a:spcAft>
-                <a:spcPts val="500"/>
-              </a:spcAft>
-              <a:defRPr sz="1019">
-                <a:solidFill>
-                  <a:srgbClr val="475467"/>
-                </a:solidFill>
-                <a:latin typeface="Microsoft YaHei"/>
-              </a:defRPr>
-            </a:pPr>
-            <a:r>
-              <a:rPr>
-                <a:latin typeface="Microsoft YaHei"/>
-              </a:rPr>
-              <a:t>fork/clone 复制或共享资源，execve 重建用户地址空间</a:t>
-            </a:r>
-          </a:p>
-          <a:p>
-            <a:pPr marL="210000" hanging="105000">
-              <a:spcAft>
-                <a:spcPts val="500"/>
-              </a:spcAft>
-              <a:defRPr sz="1019">
-                <a:solidFill>
-                  <a:srgbClr val="475467"/>
-                </a:solidFill>
-                <a:latin typeface="Microsoft YaHei"/>
-              </a:defRPr>
-            </a:pPr>
-            <a:r>
-              <a:rPr>
-                <a:latin typeface="Microsoft YaHei"/>
-              </a:rPr>
-              <a:t>wait4 观察子进程退出状态，退出后保留必要僵尸元数据</a:t>
-            </a:r>
-          </a:p>
-        </p:txBody>
-      </p:sp>
-      <p:sp>
-        <p:nvSpPr>
-          <p:cNvPr id="12" name="Rounded Rectangle 11"/>
+              <a:t>TCB 聚合执行上下文、地址空间、fd 表、信号状态和父子关系；ThreadGroup 区分 TGID/TID，支撑 fork/clone/execve/wait。</a:t>
+            </a:r>
+          </a:p>
+        </p:txBody>
+      </p:sp>
+      <p:sp>
+        <p:nvSpPr>
+          <p:cNvPr id="26" name="Rounded Rectangle 25"/>
           <p:cNvSpPr/>
           <p:nvPr/>
         </p:nvSpPr>
         <p:spPr>
           <a:xfrm>
-            <a:off x="6263640" y="1280160"/>
-            <a:ext cx="5303520" cy="4800600"/>
+            <a:off x="6217920" y="4572000"/>
+            <a:ext cx="5074920" cy="1097280"/>
           </a:xfrm>
           <a:prstGeom prst="roundRect">
             <a:avLst/>
@@ -4469,20 +4533,20 @@
       </p:sp>
       <p:sp>
         <p:nvSpPr>
-          <p:cNvPr id="13" name="Rectangle 12"/>
+          <p:cNvPr id="27" name="Rectangle 26"/>
           <p:cNvSpPr/>
           <p:nvPr/>
         </p:nvSpPr>
         <p:spPr>
           <a:xfrm>
-            <a:off x="6263640" y="1280160"/>
-            <a:ext cx="68580" cy="4800600"/>
-          </a:xfrm>
-          <a:prstGeom prst="rect">
-            <a:avLst/>
-          </a:prstGeom>
-          <a:solidFill>
-            <a:srgbClr val="129675"/>
+            <a:off x="6217920" y="4572000"/>
+            <a:ext cx="64008" cy="1097280"/>
+          </a:xfrm>
+          <a:prstGeom prst="rect">
+            <a:avLst/>
+          </a:prstGeom>
+          <a:solidFill>
+            <a:srgbClr val="F58220"/>
           </a:solidFill>
           <a:ln>
             <a:noFill/>
@@ -4512,14 +4576,14 @@
       </p:sp>
       <p:sp>
         <p:nvSpPr>
-          <p:cNvPr id="14" name="TextBox 13"/>
+          <p:cNvPr id="28" name="TextBox 27"/>
           <p:cNvSpPr txBox="1"/>
           <p:nvPr/>
         </p:nvSpPr>
         <p:spPr>
           <a:xfrm>
-            <a:off x="6409944" y="1389888"/>
-            <a:ext cx="5029200" cy="256032"/>
+            <a:off x="6355080" y="4663440"/>
+            <a:ext cx="4800600" cy="256032"/>
           </a:xfrm>
           <a:prstGeom prst="rect">
             <a:avLst/>
@@ -4533,7 +4597,7 @@
           <a:lstStyle/>
           <a:p>
             <a:pPr algn="l">
-              <a:defRPr sz="1250" b="1">
+              <a:defRPr sz="1150" b="1">
                 <a:solidFill>
                   <a:srgbClr val="202124"/>
                 </a:solidFill>
@@ -4541,24 +4605,21 @@
               </a:defRPr>
             </a:pPr>
             <a:r>
-              <a:rPr>
-                <a:latin typeface="Microsoft YaHei"/>
-              </a:rPr>
-              <a:t>当前边界</a:t>
-            </a:r>
-          </a:p>
-        </p:txBody>
-      </p:sp>
-      <p:sp>
-        <p:nvSpPr>
-          <p:cNvPr id="15" name="TextBox 14"/>
+              <a:t>当前关注点</a:t>
+            </a:r>
+          </a:p>
+        </p:txBody>
+      </p:sp>
+      <p:sp>
+        <p:nvSpPr>
+          <p:cNvPr id="29" name="TextBox 28"/>
           <p:cNvSpPr txBox="1"/>
           <p:nvPr/>
         </p:nvSpPr>
         <p:spPr>
           <a:xfrm>
-            <a:off x="6537960" y="1783080"/>
-            <a:ext cx="4709160" cy="3977639"/>
+            <a:off x="6355080" y="4965192"/>
+            <a:ext cx="4800600" cy="676656"/>
           </a:xfrm>
           <a:prstGeom prst="rect">
             <a:avLst/>
@@ -4566,16 +4627,13 @@
           <a:noFill/>
         </p:spPr>
         <p:txBody>
-          <a:bodyPr wrap="square" lIns="73152" rIns="27432">
+          <a:bodyPr wrap="square" lIns="27432" rIns="27432" anchor="t">
             <a:spAutoFit/>
           </a:bodyPr>
           <a:lstStyle/>
           <a:p>
-            <a:pPr marL="210000" hanging="105000">
-              <a:spcAft>
-                <a:spcPts val="500"/>
-              </a:spcAft>
-              <a:defRPr sz="1019">
+            <a:pPr algn="l">
+              <a:defRPr sz="900" b="0">
                 <a:solidFill>
                   <a:srgbClr val="475467"/>
                 </a:solidFill>
@@ -4583,52 +4641,35 @@
               </a:defRPr>
             </a:pPr>
             <a:r>
-              <a:rPr>
-                <a:latin typeface="Microsoft YaHei"/>
-              </a:rPr>
-              <a:t>调度策略仍为 FIFO，优先保证语义清晰和状态转换稳定</a:t>
-            </a:r>
-          </a:p>
-          <a:p>
-            <a:pPr marL="210000" hanging="105000">
-              <a:spcAft>
-                <a:spcPts val="500"/>
-              </a:spcAft>
-              <a:defRPr sz="1019">
-                <a:solidFill>
-                  <a:srgbClr val="475467"/>
-                </a:solidFill>
-                <a:latin typeface="Microsoft YaHei"/>
-              </a:defRPr>
-            </a:pPr>
-            <a:r>
-              <a:rPr>
-                <a:latin typeface="Microsoft YaHei"/>
-              </a:rPr>
-              <a:t>线程组退出、clear_child_tid、robust list 和 futex 交互仍需持续长测</a:t>
-            </a:r>
-          </a:p>
-          <a:p>
-            <a:pPr marL="210000" hanging="105000">
-              <a:spcAft>
-                <a:spcPts val="500"/>
-              </a:spcAft>
-              <a:defRPr sz="1019">
-                <a:solidFill>
-                  <a:srgbClr val="475467"/>
-                </a:solidFill>
-                <a:latin typeface="Microsoft YaHei"/>
-              </a:defRPr>
-            </a:pPr>
-            <a:r>
-              <a:rPr>
-                <a:latin typeface="Microsoft YaHei"/>
-              </a:rPr>
-              <a:t>高并发短进程场景需要继续观察资源回收和页表页复用问题</a:t>
-            </a:r>
-          </a:p>
-        </p:txBody>
-      </p:sp>
+              <a:t>线程组退出、clear_child_tid、robust list 和 futex 交互仍是长测稳定性的重点。</a:t>
+            </a:r>
+          </a:p>
+        </p:txBody>
+      </p:sp>
+      <p:pic>
+        <p:nvPicPr>
+          <p:cNvPr id="30" name="Picture 29" descr="task-state.png"/>
+          <p:cNvPicPr>
+            <a:picLocks noChangeAspect="1"/>
+          </p:cNvPicPr>
+          <p:nvPr/>
+        </p:nvPicPr>
+        <p:blipFill>
+          <a:blip r:embed="rId2"/>
+          <a:stretch>
+            <a:fillRect/>
+          </a:stretch>
+        </p:blipFill>
+        <p:spPr>
+          <a:xfrm>
+            <a:off x="1729587" y="1170432"/>
+            <a:ext cx="8732520" cy="3493008"/>
+          </a:xfrm>
+          <a:prstGeom prst="rect">
+            <a:avLst/>
+          </a:prstGeom>
+        </p:spPr>
+      </p:pic>
     </p:spTree>
   </p:cSld>
   <p:clrMapOvr>
@@ -4764,9 +4805,6 @@
               </a:defRPr>
             </a:pPr>
             <a:r>
-              <a:rPr>
-                <a:latin typeface="Microsoft YaHei"/>
-              </a:rPr>
               <a:t>11 / 25</a:t>
             </a:r>
           </a:p>
@@ -4781,7 +4819,7 @@
         <p:spPr>
           <a:xfrm>
             <a:off x="502920" y="347472"/>
-            <a:ext cx="9144000" cy="411480"/>
+            <a:ext cx="9509760" cy="384048"/>
           </a:xfrm>
           <a:prstGeom prst="rect">
             <a:avLst/>
@@ -4795,7 +4833,7 @@
           <a:lstStyle/>
           <a:p>
             <a:pPr algn="l">
-              <a:defRPr sz="2250" b="1">
+              <a:defRPr sz="2200" b="1">
                 <a:solidFill>
                   <a:srgbClr val="202124"/>
                 </a:solidFill>
@@ -4803,9 +4841,6 @@
               </a:defRPr>
             </a:pPr>
             <a:r>
-              <a:rPr>
-                <a:latin typeface="Microsoft YaHei"/>
-              </a:rPr>
               <a:t>调度、阻塞与生命周期</a:t>
             </a:r>
           </a:p>
@@ -4820,7 +4855,7 @@
         <p:spPr>
           <a:xfrm>
             <a:off x="530352" y="768096"/>
-            <a:ext cx="10515600" cy="310896"/>
+            <a:ext cx="10424160" cy="274320"/>
           </a:xfrm>
           <a:prstGeom prst="rect">
             <a:avLst/>
@@ -4834,7 +4869,7 @@
           <a:lstStyle/>
           <a:p>
             <a:pPr algn="l">
-              <a:defRPr sz="1050" b="0">
+              <a:defRPr sz="1019" b="0">
                 <a:solidFill>
                   <a:srgbClr val="667085"/>
                 </a:solidFill>
@@ -4842,33 +4877,32 @@
               </a:defRPr>
             </a:pPr>
             <a:r>
-              <a:rPr>
-                <a:latin typeface="Microsoft YaHei"/>
-              </a:rPr>
-              <a:t>稳定性重点在状态转换，而不是复杂调度策略</a:t>
-            </a:r>
-          </a:p>
-        </p:txBody>
-      </p:sp>
-      <p:sp>
-        <p:nvSpPr>
-          <p:cNvPr id="7" name="Rectangle 6"/>
+              <a:t>FIFO 调度队列和等待路径</a:t>
+            </a:r>
+          </a:p>
+        </p:txBody>
+      </p:sp>
+      <p:sp>
+        <p:nvSpPr>
+          <p:cNvPr id="39" name="Rounded Rectangle 38"/>
           <p:cNvSpPr/>
           <p:nvPr/>
         </p:nvSpPr>
         <p:spPr>
           <a:xfrm>
-            <a:off x="530352" y="1069848"/>
-            <a:ext cx="1143000" cy="32004"/>
-          </a:xfrm>
-          <a:prstGeom prst="rect">
-            <a:avLst/>
-          </a:prstGeom>
-          <a:solidFill>
-            <a:srgbClr val="8B1A2B"/>
-          </a:solidFill>
-          <a:ln>
-            <a:noFill/>
+            <a:off x="4434840" y="4663440"/>
+            <a:ext cx="6720840" cy="1005840"/>
+          </a:xfrm>
+          <a:prstGeom prst="roundRect">
+            <a:avLst/>
+          </a:prstGeom>
+          <a:solidFill>
+            <a:srgbClr val="FFFFFF"/>
+          </a:solidFill>
+          <a:ln w="12700">
+            <a:solidFill>
+              <a:srgbClr val="E2E8F0"/>
+            </a:solidFill>
           </a:ln>
         </p:spPr>
         <p:style>
@@ -4895,25 +4929,23 @@
       </p:sp>
       <p:sp>
         <p:nvSpPr>
-          <p:cNvPr id="8" name="Rounded Rectangle 7"/>
+          <p:cNvPr id="40" name="Rectangle 39"/>
           <p:cNvSpPr/>
           <p:nvPr/>
         </p:nvSpPr>
         <p:spPr>
           <a:xfrm>
-            <a:off x="731520" y="1234440"/>
-            <a:ext cx="3429000" cy="4206240"/>
-          </a:xfrm>
-          <a:prstGeom prst="roundRect">
-            <a:avLst/>
-          </a:prstGeom>
-          <a:solidFill>
-            <a:srgbClr val="FFFFFF"/>
-          </a:solidFill>
-          <a:ln w="12700">
-            <a:solidFill>
-              <a:srgbClr val="E2E8F0"/>
-            </a:solidFill>
+            <a:off x="4434840" y="4663440"/>
+            <a:ext cx="64008" cy="1005840"/>
+          </a:xfrm>
+          <a:prstGeom prst="rect">
+            <a:avLst/>
+          </a:prstGeom>
+          <a:solidFill>
+            <a:srgbClr val="8B1A2B"/>
+          </a:solidFill>
+          <a:ln>
+            <a:noFill/>
           </a:ln>
         </p:spPr>
         <p:style>
@@ -4940,57 +4972,14 @@
       </p:sp>
       <p:sp>
         <p:nvSpPr>
-          <p:cNvPr id="9" name="Rectangle 8"/>
-          <p:cNvSpPr/>
-          <p:nvPr/>
-        </p:nvSpPr>
-        <p:spPr>
-          <a:xfrm>
-            <a:off x="731520" y="1234440"/>
-            <a:ext cx="68580" cy="4206240"/>
-          </a:xfrm>
-          <a:prstGeom prst="rect">
-            <a:avLst/>
-          </a:prstGeom>
-          <a:solidFill>
-            <a:srgbClr val="8B1A2B"/>
-          </a:solidFill>
-          <a:ln>
-            <a:noFill/>
-          </a:ln>
-        </p:spPr>
-        <p:style>
-          <a:lnRef idx="1">
-            <a:schemeClr val="accent1"/>
-          </a:lnRef>
-          <a:fillRef idx="3">
-            <a:schemeClr val="accent1"/>
-          </a:fillRef>
-          <a:effectRef idx="2">
-            <a:schemeClr val="accent1"/>
-          </a:effectRef>
-          <a:fontRef idx="minor">
-            <a:schemeClr val="lt1"/>
-          </a:fontRef>
-        </p:style>
-        <p:txBody>
-          <a:bodyPr rtlCol="0" anchor="ctr"/>
-          <a:lstStyle/>
-          <a:p>
-            <a:pPr algn="ctr"/>
-          </a:p>
-        </p:txBody>
-      </p:sp>
-      <p:sp>
-        <p:nvSpPr>
-          <p:cNvPr id="10" name="TextBox 9"/>
+          <p:cNvPr id="41" name="TextBox 40"/>
           <p:cNvSpPr txBox="1"/>
           <p:nvPr/>
         </p:nvSpPr>
         <p:spPr>
           <a:xfrm>
-            <a:off x="877824" y="1344168"/>
-            <a:ext cx="3154680" cy="256032"/>
+            <a:off x="4572000" y="4754879"/>
+            <a:ext cx="6446520" cy="256032"/>
           </a:xfrm>
           <a:prstGeom prst="rect">
             <a:avLst/>
@@ -5004,7 +4993,7 @@
           <a:lstStyle/>
           <a:p>
             <a:pPr algn="l">
-              <a:defRPr sz="1250" b="1">
+              <a:defRPr sz="1150" b="1">
                 <a:solidFill>
                   <a:srgbClr val="202124"/>
                 </a:solidFill>
@@ -5012,24 +5001,21 @@
               </a:defRPr>
             </a:pPr>
             <a:r>
-              <a:rPr>
-                <a:latin typeface="Microsoft YaHei"/>
-              </a:rPr>
-              <a:t>调度队列</a:t>
-            </a:r>
-          </a:p>
-        </p:txBody>
-      </p:sp>
-      <p:sp>
-        <p:nvSpPr>
-          <p:cNvPr id="11" name="TextBox 10"/>
+              <a:t>生命周期边界</a:t>
+            </a:r>
+          </a:p>
+        </p:txBody>
+      </p:sp>
+      <p:sp>
+        <p:nvSpPr>
+          <p:cNvPr id="42" name="TextBox 41"/>
           <p:cNvSpPr txBox="1"/>
           <p:nvPr/>
         </p:nvSpPr>
         <p:spPr>
           <a:xfrm>
-            <a:off x="877824" y="1673352"/>
-            <a:ext cx="3154680" cy="3730752"/>
+            <a:off x="4572000" y="5056631"/>
+            <a:ext cx="6446520" cy="585216"/>
           </a:xfrm>
           <a:prstGeom prst="rect">
             <a:avLst/>
@@ -5043,7 +5029,7 @@
           <a:lstStyle/>
           <a:p>
             <a:pPr algn="l">
-              <a:defRPr sz="969" b="0">
+              <a:defRPr sz="880" b="0">
                 <a:solidFill>
                   <a:srgbClr val="475467"/>
                 </a:solidFill>
@@ -5051,112 +5037,45 @@
               </a:defRPr>
             </a:pPr>
             <a:r>
-              <a:rPr>
-                <a:latin typeface="Microsoft YaHei"/>
-              </a:rPr>
-              <a:t>ready_queue 维护可运行任务；任务主动 yield、阻塞或被时钟中断抢占后返回调度器；__switch 只切换内核上下文。</a:t>
-            </a:r>
-          </a:p>
-        </p:txBody>
-      </p:sp>
-      <p:sp>
-        <p:nvSpPr>
-          <p:cNvPr id="12" name="Rounded Rectangle 11"/>
-          <p:cNvSpPr/>
-          <p:nvPr/>
-        </p:nvSpPr>
-        <p:spPr>
-          <a:xfrm>
-            <a:off x="4389120" y="1234440"/>
-            <a:ext cx="3429000" cy="4206240"/>
-          </a:xfrm>
-          <a:prstGeom prst="roundRect">
-            <a:avLst/>
-          </a:prstGeom>
-          <a:solidFill>
-            <a:srgbClr val="FFFFFF"/>
-          </a:solidFill>
-          <a:ln w="12700">
-            <a:solidFill>
-              <a:srgbClr val="E2E8F0"/>
-            </a:solidFill>
-          </a:ln>
-        </p:spPr>
-        <p:style>
-          <a:lnRef idx="1">
-            <a:schemeClr val="accent1"/>
-          </a:lnRef>
-          <a:fillRef idx="3">
-            <a:schemeClr val="accent1"/>
-          </a:fillRef>
-          <a:effectRef idx="2">
-            <a:schemeClr val="accent1"/>
-          </a:effectRef>
-          <a:fontRef idx="minor">
-            <a:schemeClr val="lt1"/>
-          </a:fontRef>
-        </p:style>
-        <p:txBody>
-          <a:bodyPr rtlCol="0" anchor="ctr"/>
-          <a:lstStyle/>
-          <a:p>
-            <a:pPr algn="ctr"/>
-          </a:p>
-        </p:txBody>
-      </p:sp>
-      <p:sp>
-        <p:nvSpPr>
-          <p:cNvPr id="13" name="Rectangle 12"/>
-          <p:cNvSpPr/>
-          <p:nvPr/>
-        </p:nvSpPr>
-        <p:spPr>
-          <a:xfrm>
-            <a:off x="4389120" y="1234440"/>
-            <a:ext cx="68580" cy="4206240"/>
-          </a:xfrm>
-          <a:prstGeom prst="rect">
-            <a:avLst/>
-          </a:prstGeom>
-          <a:solidFill>
-            <a:srgbClr val="2D64E6"/>
-          </a:solidFill>
-          <a:ln>
-            <a:noFill/>
-          </a:ln>
-        </p:spPr>
-        <p:style>
-          <a:lnRef idx="1">
-            <a:schemeClr val="accent1"/>
-          </a:lnRef>
-          <a:fillRef idx="3">
-            <a:schemeClr val="accent1"/>
-          </a:fillRef>
-          <a:effectRef idx="2">
-            <a:schemeClr val="accent1"/>
-          </a:effectRef>
-          <a:fontRef idx="minor">
-            <a:schemeClr val="lt1"/>
-          </a:fontRef>
-        </p:style>
-        <p:txBody>
-          <a:bodyPr rtlCol="0" anchor="ctr"/>
-          <a:lstStyle/>
-          <a:p>
-            <a:pPr algn="ctr"/>
-          </a:p>
-        </p:txBody>
-      </p:sp>
-      <p:sp>
-        <p:nvSpPr>
-          <p:cNvPr id="14" name="TextBox 13"/>
+              <a:t>普通子进程退出后保留退出码和元数据，直到父进程 wait4 回收；线程退出还需要清理 clear_child_tid 并执行 futex wake。</a:t>
+            </a:r>
+          </a:p>
+        </p:txBody>
+      </p:sp>
+      <p:pic>
+        <p:nvPicPr>
+          <p:cNvPr id="43" name="Picture 42" descr="scheduler-queues.png"/>
+          <p:cNvPicPr>
+            <a:picLocks noChangeAspect="1"/>
+          </p:cNvPicPr>
+          <p:nvPr/>
+        </p:nvPicPr>
+        <p:blipFill>
+          <a:blip r:embed="rId2"/>
+          <a:stretch>
+            <a:fillRect/>
+          </a:stretch>
+        </p:blipFill>
+        <p:spPr>
+          <a:xfrm>
+            <a:off x="1592427" y="1417320"/>
+            <a:ext cx="9006840" cy="2448735"/>
+          </a:xfrm>
+          <a:prstGeom prst="rect">
+            <a:avLst/>
+          </a:prstGeom>
+        </p:spPr>
+      </p:pic>
+      <p:sp>
+        <p:nvSpPr>
+          <p:cNvPr id="44" name="TextBox 43"/>
           <p:cNvSpPr txBox="1"/>
           <p:nvPr/>
         </p:nvSpPr>
         <p:spPr>
           <a:xfrm>
-            <a:off x="4535424" y="1344168"/>
-            <a:ext cx="3154680" cy="256032"/>
+            <a:off x="4434840" y="3767328"/>
+            <a:ext cx="5715000" cy="310896"/>
           </a:xfrm>
           <a:prstGeom prst="rect">
             <a:avLst/>
@@ -5164,52 +5083,13 @@
           <a:noFill/>
         </p:spPr>
         <p:txBody>
-          <a:bodyPr wrap="square" lIns="27432" rIns="27432" anchor="t">
+          <a:bodyPr wrap="none">
             <a:spAutoFit/>
           </a:bodyPr>
           <a:lstStyle/>
           <a:p>
-            <a:pPr algn="l">
-              <a:defRPr sz="1250" b="1">
-                <a:solidFill>
-                  <a:srgbClr val="202124"/>
-                </a:solidFill>
-                <a:latin typeface="Microsoft YaHei"/>
-              </a:defRPr>
-            </a:pPr>
-            <a:r>
-              <a:rPr>
-                <a:latin typeface="Microsoft YaHei"/>
-              </a:rPr>
-              <a:t>阻塞唤醒</a:t>
-            </a:r>
-          </a:p>
-        </p:txBody>
-      </p:sp>
-      <p:sp>
-        <p:nvSpPr>
-          <p:cNvPr id="15" name="TextBox 14"/>
-          <p:cNvSpPr txBox="1"/>
-          <p:nvPr/>
-        </p:nvSpPr>
-        <p:spPr>
-          <a:xfrm>
-            <a:off x="4535424" y="1673352"/>
-            <a:ext cx="3154680" cy="3730752"/>
-          </a:xfrm>
-          <a:prstGeom prst="rect">
-            <a:avLst/>
-          </a:prstGeom>
-          <a:noFill/>
-        </p:spPr>
-        <p:txBody>
-          <a:bodyPr wrap="square" lIns="27432" rIns="27432" anchor="t">
-            <a:spAutoFit/>
-          </a:bodyPr>
-          <a:lstStyle/>
-          <a:p>
-            <a:pPr algn="l">
-              <a:defRPr sz="969" b="0">
+            <a:pPr>
+              <a:defRPr sz="1300">
                 <a:solidFill>
                   <a:srgbClr val="475467"/>
                 </a:solidFill>
@@ -5217,176 +5097,7 @@
               </a:defRPr>
             </a:pPr>
             <a:r>
-              <a:rPr>
-                <a:latin typeface="Microsoft YaHei"/>
-              </a:rPr>
-              <a:t>pipe、futex、socket、timerfd 和 nanosleep 等路径通过等待条件反复检查，避免丢失唤醒和错误返回。</a:t>
-            </a:r>
-          </a:p>
-        </p:txBody>
-      </p:sp>
-      <p:sp>
-        <p:nvSpPr>
-          <p:cNvPr id="16" name="Rounded Rectangle 15"/>
-          <p:cNvSpPr/>
-          <p:nvPr/>
-        </p:nvSpPr>
-        <p:spPr>
-          <a:xfrm>
-            <a:off x="8046720" y="1234440"/>
-            <a:ext cx="3429000" cy="4206240"/>
-          </a:xfrm>
-          <a:prstGeom prst="roundRect">
-            <a:avLst/>
-          </a:prstGeom>
-          <a:solidFill>
-            <a:srgbClr val="FFFFFF"/>
-          </a:solidFill>
-          <a:ln w="12700">
-            <a:solidFill>
-              <a:srgbClr val="E2E8F0"/>
-            </a:solidFill>
-          </a:ln>
-        </p:spPr>
-        <p:style>
-          <a:lnRef idx="1">
-            <a:schemeClr val="accent1"/>
-          </a:lnRef>
-          <a:fillRef idx="3">
-            <a:schemeClr val="accent1"/>
-          </a:fillRef>
-          <a:effectRef idx="2">
-            <a:schemeClr val="accent1"/>
-          </a:effectRef>
-          <a:fontRef idx="minor">
-            <a:schemeClr val="lt1"/>
-          </a:fontRef>
-        </p:style>
-        <p:txBody>
-          <a:bodyPr rtlCol="0" anchor="ctr"/>
-          <a:lstStyle/>
-          <a:p>
-            <a:pPr algn="ctr"/>
-          </a:p>
-        </p:txBody>
-      </p:sp>
-      <p:sp>
-        <p:nvSpPr>
-          <p:cNvPr id="17" name="Rectangle 16"/>
-          <p:cNvSpPr/>
-          <p:nvPr/>
-        </p:nvSpPr>
-        <p:spPr>
-          <a:xfrm>
-            <a:off x="8046720" y="1234440"/>
-            <a:ext cx="68580" cy="4206240"/>
-          </a:xfrm>
-          <a:prstGeom prst="rect">
-            <a:avLst/>
-          </a:prstGeom>
-          <a:solidFill>
-            <a:srgbClr val="129675"/>
-          </a:solidFill>
-          <a:ln>
-            <a:noFill/>
-          </a:ln>
-        </p:spPr>
-        <p:style>
-          <a:lnRef idx="1">
-            <a:schemeClr val="accent1"/>
-          </a:lnRef>
-          <a:fillRef idx="3">
-            <a:schemeClr val="accent1"/>
-          </a:fillRef>
-          <a:effectRef idx="2">
-            <a:schemeClr val="accent1"/>
-          </a:effectRef>
-          <a:fontRef idx="minor">
-            <a:schemeClr val="lt1"/>
-          </a:fontRef>
-        </p:style>
-        <p:txBody>
-          <a:bodyPr rtlCol="0" anchor="ctr"/>
-          <a:lstStyle/>
-          <a:p>
-            <a:pPr algn="ctr"/>
-          </a:p>
-        </p:txBody>
-      </p:sp>
-      <p:sp>
-        <p:nvSpPr>
-          <p:cNvPr id="18" name="TextBox 17"/>
-          <p:cNvSpPr txBox="1"/>
-          <p:nvPr/>
-        </p:nvSpPr>
-        <p:spPr>
-          <a:xfrm>
-            <a:off x="8193024" y="1344168"/>
-            <a:ext cx="3154680" cy="256032"/>
-          </a:xfrm>
-          <a:prstGeom prst="rect">
-            <a:avLst/>
-          </a:prstGeom>
-          <a:noFill/>
-        </p:spPr>
-        <p:txBody>
-          <a:bodyPr wrap="square" lIns="27432" rIns="27432" anchor="t">
-            <a:spAutoFit/>
-          </a:bodyPr>
-          <a:lstStyle/>
-          <a:p>
-            <a:pPr algn="l">
-              <a:defRPr sz="1250" b="1">
-                <a:solidFill>
-                  <a:srgbClr val="202124"/>
-                </a:solidFill>
-                <a:latin typeface="Microsoft YaHei"/>
-              </a:defRPr>
-            </a:pPr>
-            <a:r>
-              <a:rPr>
-                <a:latin typeface="Microsoft YaHei"/>
-              </a:rPr>
-              <a:t>退出回收</a:t>
-            </a:r>
-          </a:p>
-        </p:txBody>
-      </p:sp>
-      <p:sp>
-        <p:nvSpPr>
-          <p:cNvPr id="19" name="TextBox 18"/>
-          <p:cNvSpPr txBox="1"/>
-          <p:nvPr/>
-        </p:nvSpPr>
-        <p:spPr>
-          <a:xfrm>
-            <a:off x="8193024" y="1673352"/>
-            <a:ext cx="3154680" cy="3730752"/>
-          </a:xfrm>
-          <a:prstGeom prst="rect">
-            <a:avLst/>
-          </a:prstGeom>
-          <a:noFill/>
-        </p:spPr>
-        <p:txBody>
-          <a:bodyPr wrap="square" lIns="27432" rIns="27432" anchor="t">
-            <a:spAutoFit/>
-          </a:bodyPr>
-          <a:lstStyle/>
-          <a:p>
-            <a:pPr algn="l">
-              <a:defRPr sz="969" b="0">
-                <a:solidFill>
-                  <a:srgbClr val="475467"/>
-                </a:solidFill>
-                <a:latin typeface="Microsoft YaHei"/>
-              </a:defRPr>
-            </a:pPr>
-            <a:r>
-              <a:rPr>
-                <a:latin typeface="Microsoft YaHei"/>
-              </a:rPr>
-              <a:t>进程退出不立即释放所有用户可见状态；父进程 wait4 后才完成观察和回收，线程退出还要配合 futex。</a:t>
+              <a:t>调度队列图来自 scheduler-queues.svg：ready_queue、Processor 与 blocked_queue 之间只表达任务流转，不混入具体系统调用细节。</a:t>
             </a:r>
           </a:p>
         </p:txBody>
@@ -5526,9 +5237,6 @@
               </a:defRPr>
             </a:pPr>
             <a:r>
-              <a:rPr>
-                <a:latin typeface="Microsoft YaHei"/>
-              </a:rPr>
               <a:t>12 / 25</a:t>
             </a:r>
           </a:p>
@@ -5543,7 +5251,7 @@
         <p:spPr>
           <a:xfrm>
             <a:off x="502920" y="347472"/>
-            <a:ext cx="9144000" cy="411480"/>
+            <a:ext cx="9509760" cy="384048"/>
           </a:xfrm>
           <a:prstGeom prst="rect">
             <a:avLst/>
@@ -5557,7 +5265,7 @@
           <a:lstStyle/>
           <a:p>
             <a:pPr algn="l">
-              <a:defRPr sz="2250" b="1">
+              <a:defRPr sz="2200" b="1">
                 <a:solidFill>
                   <a:srgbClr val="202124"/>
                 </a:solidFill>
@@ -5565,10 +5273,7 @@
               </a:defRPr>
             </a:pPr>
             <a:r>
-              <a:rPr>
-                <a:latin typeface="Microsoft YaHei"/>
-              </a:rPr>
-              <a:t>内存管理完成度</a:t>
+              <a:t>功能完成度总览</a:t>
             </a:r>
           </a:p>
         </p:txBody>
@@ -5582,7 +5287,7 @@
         <p:spPr>
           <a:xfrm>
             <a:off x="530352" y="768096"/>
-            <a:ext cx="10515600" cy="310896"/>
+            <a:ext cx="10424160" cy="274320"/>
           </a:xfrm>
           <a:prstGeom prst="rect">
             <a:avLst/>
@@ -5596,7 +5301,7 @@
           <a:lstStyle/>
           <a:p>
             <a:pPr algn="l">
-              <a:defRPr sz="1050" b="0">
+              <a:defRPr sz="1019" b="0">
                 <a:solidFill>
                   <a:srgbClr val="667085"/>
                 </a:solidFill>
@@ -5604,10 +5309,7 @@
               </a:defRPr>
             </a:pPr>
             <a:r>
-              <a:rPr>
-                <a:latin typeface="Microsoft YaHei"/>
-              </a:rPr>
-              <a:t>MemorySet 是 exec/fork/mmap/page fault 的共同基础</a:t>
+              <a:t>以最终源码和全量 LTP 报告衡量主路径成熟度</a:t>
             </a:r>
           </a:p>
         </p:txBody>
@@ -5620,7 +5322,7 @@
         </p:nvSpPr>
         <p:spPr>
           <a:xfrm>
-            <a:off x="530352" y="1069848"/>
+            <a:off x="530352" y="1060704"/>
             <a:ext cx="1143000" cy="32004"/>
           </a:xfrm>
           <a:prstGeom prst="rect">
@@ -5663,8 +5365,8 @@
         </p:nvSpPr>
         <p:spPr>
           <a:xfrm>
-            <a:off x="822960" y="1234440"/>
-            <a:ext cx="4206240" cy="201168"/>
+            <a:off x="868680" y="1234440"/>
+            <a:ext cx="4114800" cy="201168"/>
           </a:xfrm>
           <a:prstGeom prst="rect">
             <a:avLst/>
@@ -5678,7 +5380,7 @@
           <a:lstStyle/>
           <a:p>
             <a:pPr algn="l">
-              <a:defRPr sz="1050" b="1">
+              <a:defRPr sz="980" b="1">
                 <a:solidFill>
                   <a:srgbClr val="202124"/>
                 </a:solidFill>
@@ -5686,10 +5388,7 @@
               </a:defRPr>
             </a:pPr>
             <a:r>
-              <a:rPr>
-                <a:latin typeface="Microsoft YaHei"/>
-              </a:rPr>
-              <a:t>ELF 装载与用户栈</a:t>
+              <a:t>系统调用分发</a:t>
             </a:r>
           </a:p>
         </p:txBody>
@@ -5702,8 +5401,8 @@
         </p:nvSpPr>
         <p:spPr>
           <a:xfrm>
-            <a:off x="822960" y="1508760"/>
-            <a:ext cx="4206240" cy="146304"/>
+            <a:off x="868680" y="1499616"/>
+            <a:ext cx="4114800" cy="128016"/>
           </a:xfrm>
           <a:prstGeom prst="roundRect">
             <a:avLst/>
@@ -5745,8 +5444,8 @@
         </p:nvSpPr>
         <p:spPr>
           <a:xfrm>
-            <a:off x="822960" y="1508760"/>
-            <a:ext cx="3533241" cy="146304"/>
+            <a:off x="868680" y="1499616"/>
+            <a:ext cx="4114800" cy="128016"/>
           </a:xfrm>
           <a:prstGeom prst="roundRect">
             <a:avLst/>
@@ -5788,8 +5487,8 @@
         </p:nvSpPr>
         <p:spPr>
           <a:xfrm>
-            <a:off x="5120640" y="1426464"/>
-            <a:ext cx="502920" cy="219456"/>
+            <a:off x="5056632" y="1417320"/>
+            <a:ext cx="502920" cy="201168"/>
           </a:xfrm>
           <a:prstGeom prst="rect">
             <a:avLst/>
@@ -5803,7 +5502,7 @@
           <a:lstStyle/>
           <a:p>
             <a:pPr algn="l">
-              <a:defRPr sz="900" b="1">
+              <a:defRPr sz="800" b="1">
                 <a:solidFill>
                   <a:srgbClr val="129675"/>
                 </a:solidFill>
@@ -5811,10 +5510,7 @@
               </a:defRPr>
             </a:pPr>
             <a:r>
-              <a:rPr>
-                <a:latin typeface="Microsoft YaHei"/>
-              </a:rPr>
-              <a:t>84%</a:t>
+              <a:t>100.0%</a:t>
             </a:r>
           </a:p>
         </p:txBody>
@@ -5827,8 +5523,8 @@
         </p:nvSpPr>
         <p:spPr>
           <a:xfrm>
-            <a:off x="822960" y="1709928"/>
-            <a:ext cx="4617720" cy="384048"/>
+            <a:off x="868680" y="1682496"/>
+            <a:ext cx="4526280" cy="274320"/>
           </a:xfrm>
           <a:prstGeom prst="rect">
             <a:avLst/>
@@ -5842,7 +5538,7 @@
           <a:lstStyle/>
           <a:p>
             <a:pPr algn="l">
-              <a:defRPr sz="850" b="0">
+              <a:defRPr sz="780" b="0">
                 <a:solidFill>
                   <a:srgbClr val="667085"/>
                 </a:solidFill>
@@ -5850,10 +5546,7 @@
               </a:defRPr>
             </a:pPr>
             <a:r>
-              <a:rPr>
-                <a:latin typeface="Microsoft YaHei"/>
-              </a:rPr>
-              <a:t>解析 PT_LOAD、构造 argc/argv/envp/auxv 和用户栈。</a:t>
+              <a:t>216 个 dispatch arm 一一对应。</a:t>
             </a:r>
           </a:p>
         </p:txBody>
@@ -5866,8 +5559,8 @@
         </p:nvSpPr>
         <p:spPr>
           <a:xfrm>
-            <a:off x="822960" y="2331720"/>
-            <a:ext cx="4206240" cy="201168"/>
+            <a:off x="6309360" y="1234440"/>
+            <a:ext cx="4114800" cy="201168"/>
           </a:xfrm>
           <a:prstGeom prst="rect">
             <a:avLst/>
@@ -5881,7 +5574,7 @@
           <a:lstStyle/>
           <a:p>
             <a:pPr algn="l">
-              <a:defRPr sz="1050" b="1">
+              <a:defRPr sz="980" b="1">
                 <a:solidFill>
                   <a:srgbClr val="202124"/>
                 </a:solidFill>
@@ -5889,10 +5582,7 @@
               </a:defRPr>
             </a:pPr>
             <a:r>
-              <a:rPr>
-                <a:latin typeface="Microsoft YaHei"/>
-              </a:rPr>
-              <a:t>mmap / munmap / mprotect</a:t>
+              <a:t>文件系统与 fd</a:t>
             </a:r>
           </a:p>
         </p:txBody>
@@ -5905,8 +5595,8 @@
         </p:nvSpPr>
         <p:spPr>
           <a:xfrm>
-            <a:off x="822960" y="2606039"/>
-            <a:ext cx="4206240" cy="146304"/>
+            <a:off x="6309360" y="1499616"/>
+            <a:ext cx="4114800" cy="128016"/>
           </a:xfrm>
           <a:prstGeom prst="roundRect">
             <a:avLst/>
@@ -5948,8 +5638,8 @@
         </p:nvSpPr>
         <p:spPr>
           <a:xfrm>
-            <a:off x="822960" y="2606039"/>
-            <a:ext cx="3196742" cy="146304"/>
+            <a:off x="6309360" y="1499616"/>
+            <a:ext cx="3867911" cy="128016"/>
           </a:xfrm>
           <a:prstGeom prst="roundRect">
             <a:avLst/>
@@ -5991,8 +5681,8 @@
         </p:nvSpPr>
         <p:spPr>
           <a:xfrm>
-            <a:off x="5120640" y="2523744"/>
-            <a:ext cx="502920" cy="219456"/>
+            <a:off x="10497312" y="1417320"/>
+            <a:ext cx="502920" cy="201168"/>
           </a:xfrm>
           <a:prstGeom prst="rect">
             <a:avLst/>
@@ -6006,7 +5696,7 @@
           <a:lstStyle/>
           <a:p>
             <a:pPr algn="l">
-              <a:defRPr sz="900" b="1">
+              <a:defRPr sz="800" b="1">
                 <a:solidFill>
                   <a:srgbClr val="2D64E6"/>
                 </a:solidFill>
@@ -6014,10 +5704,7 @@
               </a:defRPr>
             </a:pPr>
             <a:r>
-              <a:rPr>
-                <a:latin typeface="Microsoft YaHei"/>
-              </a:rPr>
-              <a:t>76%</a:t>
+              <a:t>94.0%</a:t>
             </a:r>
           </a:p>
         </p:txBody>
@@ -6030,8 +5717,8 @@
         </p:nvSpPr>
         <p:spPr>
           <a:xfrm>
-            <a:off x="822960" y="2807208"/>
-            <a:ext cx="4617720" cy="384048"/>
+            <a:off x="6309360" y="1682496"/>
+            <a:ext cx="4526280" cy="274320"/>
           </a:xfrm>
           <a:prstGeom prst="rect">
             <a:avLst/>
@@ -6045,7 +5732,7 @@
           <a:lstStyle/>
           <a:p>
             <a:pPr algn="l">
-              <a:defRPr sz="850" b="0">
+              <a:defRPr sz="780" b="0">
                 <a:solidFill>
                   <a:srgbClr val="667085"/>
                 </a:solidFill>
@@ -6053,10 +5740,7 @@
               </a:defRPr>
             </a:pPr>
             <a:r>
-              <a:rPr>
-                <a:latin typeface="Microsoft YaHei"/>
-              </a:rPr>
-              <a:t>支持匿名、文件映射、权限修改和重叠区域裁剪。</a:t>
+              <a:t>剩余差异集中在文件/I/O 边界。</a:t>
             </a:r>
           </a:p>
         </p:txBody>
@@ -6069,8 +5753,8 @@
         </p:nvSpPr>
         <p:spPr>
           <a:xfrm>
-            <a:off x="822960" y="3429000"/>
-            <a:ext cx="4206240" cy="201168"/>
+            <a:off x="868680" y="2377440"/>
+            <a:ext cx="4114800" cy="201168"/>
           </a:xfrm>
           <a:prstGeom prst="rect">
             <a:avLst/>
@@ -6084,7 +5768,7 @@
           <a:lstStyle/>
           <a:p>
             <a:pPr algn="l">
-              <a:defRPr sz="1050" b="1">
+              <a:defRPr sz="980" b="1">
                 <a:solidFill>
                   <a:srgbClr val="202124"/>
                 </a:solidFill>
@@ -6092,10 +5776,7 @@
               </a:defRPr>
             </a:pPr>
             <a:r>
-              <a:rPr>
-                <a:latin typeface="Microsoft YaHei"/>
-              </a:rPr>
-              <a:t>COW 与 lazy fault</a:t>
+              <a:t>进程/线程/调度</a:t>
             </a:r>
           </a:p>
         </p:txBody>
@@ -6108,8 +5789,8 @@
         </p:nvSpPr>
         <p:spPr>
           <a:xfrm>
-            <a:off x="822960" y="3703320"/>
-            <a:ext cx="4206240" cy="146304"/>
+            <a:off x="868680" y="2642616"/>
+            <a:ext cx="4114800" cy="128016"/>
           </a:xfrm>
           <a:prstGeom prst="roundRect">
             <a:avLst/>
@@ -6151,14 +5832,14 @@
         </p:nvSpPr>
         <p:spPr>
           <a:xfrm>
-            <a:off x="822960" y="3703320"/>
-            <a:ext cx="3112617" cy="146304"/>
+            <a:off x="868680" y="2642616"/>
+            <a:ext cx="3909059" cy="128016"/>
           </a:xfrm>
           <a:prstGeom prst="roundRect">
             <a:avLst/>
           </a:prstGeom>
           <a:solidFill>
-            <a:srgbClr val="F58220"/>
+            <a:srgbClr val="129675"/>
           </a:solidFill>
           <a:ln>
             <a:noFill/>
@@ -6194,8 +5875,8 @@
         </p:nvSpPr>
         <p:spPr>
           <a:xfrm>
-            <a:off x="5120640" y="3621024"/>
-            <a:ext cx="502920" cy="219456"/>
+            <a:off x="5056632" y="2560320"/>
+            <a:ext cx="502920" cy="201168"/>
           </a:xfrm>
           <a:prstGeom prst="rect">
             <a:avLst/>
@@ -6209,18 +5890,15 @@
           <a:lstStyle/>
           <a:p>
             <a:pPr algn="l">
-              <a:defRPr sz="900" b="1">
-                <a:solidFill>
-                  <a:srgbClr val="F58220"/>
-                </a:solidFill>
-                <a:latin typeface="Microsoft YaHei"/>
-              </a:defRPr>
-            </a:pPr>
-            <a:r>
-              <a:rPr>
-                <a:latin typeface="Microsoft YaHei"/>
-              </a:rPr>
-              <a:t>74%</a:t>
+              <a:defRPr sz="800" b="1">
+                <a:solidFill>
+                  <a:srgbClr val="129675"/>
+                </a:solidFill>
+                <a:latin typeface="Microsoft YaHei"/>
+              </a:defRPr>
+            </a:pPr>
+            <a:r>
+              <a:t>95.0%</a:t>
             </a:r>
           </a:p>
         </p:txBody>
@@ -6233,8 +5911,8 @@
         </p:nvSpPr>
         <p:spPr>
           <a:xfrm>
-            <a:off x="822960" y="3904487"/>
-            <a:ext cx="4617720" cy="384048"/>
+            <a:off x="868680" y="2825496"/>
+            <a:ext cx="4526280" cy="274320"/>
           </a:xfrm>
           <a:prstGeom prst="rect">
             <a:avLst/>
@@ -6248,7 +5926,7 @@
           <a:lstStyle/>
           <a:p>
             <a:pPr algn="l">
-              <a:defRPr sz="850" b="0">
+              <a:defRPr sz="780" b="0">
                 <a:solidFill>
                   <a:srgbClr val="667085"/>
                 </a:solidFill>
@@ -6256,10 +5934,7 @@
               </a:defRPr>
             </a:pPr>
             <a:r>
-              <a:rPr>
-                <a:latin typeface="Microsoft YaHei"/>
-              </a:rPr>
-              <a:t>fork 和懒分配主路径可用，组合边界仍需长测。</a:t>
+              <a:t>fork/clone/exec/wait/futex 主路径可用。</a:t>
             </a:r>
           </a:p>
         </p:txBody>
@@ -6272,8 +5947,8 @@
         </p:nvSpPr>
         <p:spPr>
           <a:xfrm>
-            <a:off x="822960" y="4526280"/>
-            <a:ext cx="4206240" cy="201168"/>
+            <a:off x="6309360" y="2377440"/>
+            <a:ext cx="4114800" cy="201168"/>
           </a:xfrm>
           <a:prstGeom prst="rect">
             <a:avLst/>
@@ -6287,7 +5962,7 @@
           <a:lstStyle/>
           <a:p>
             <a:pPr algn="l">
-              <a:defRPr sz="1050" b="1">
+              <a:defRPr sz="980" b="1">
                 <a:solidFill>
                   <a:srgbClr val="202124"/>
                 </a:solidFill>
@@ -6295,10 +5970,7 @@
               </a:defRPr>
             </a:pPr>
             <a:r>
-              <a:rPr>
-                <a:latin typeface="Microsoft YaHei"/>
-              </a:rPr>
-              <a:t>双架构页表后端</a:t>
+              <a:t>内存管理</a:t>
             </a:r>
           </a:p>
         </p:txBody>
@@ -6311,8 +5983,8 @@
         </p:nvSpPr>
         <p:spPr>
           <a:xfrm>
-            <a:off x="822960" y="4800600"/>
-            <a:ext cx="4206240" cy="146304"/>
+            <a:off x="6309360" y="2642616"/>
+            <a:ext cx="4114800" cy="128016"/>
           </a:xfrm>
           <a:prstGeom prst="roundRect">
             <a:avLst/>
@@ -6354,8 +6026,8 @@
         </p:nvSpPr>
         <p:spPr>
           <a:xfrm>
-            <a:off x="822960" y="4800600"/>
-            <a:ext cx="3280867" cy="146304"/>
+            <a:off x="6309360" y="2642616"/>
+            <a:ext cx="3826764" cy="128016"/>
           </a:xfrm>
           <a:prstGeom prst="roundRect">
             <a:avLst/>
@@ -6397,8 +6069,8 @@
         </p:nvSpPr>
         <p:spPr>
           <a:xfrm>
-            <a:off x="5120640" y="4718304"/>
-            <a:ext cx="502920" cy="219456"/>
+            <a:off x="10497312" y="2560320"/>
+            <a:ext cx="502920" cy="201168"/>
           </a:xfrm>
           <a:prstGeom prst="rect">
             <a:avLst/>
@@ -6412,7 +6084,7 @@
           <a:lstStyle/>
           <a:p>
             <a:pPr algn="l">
-              <a:defRPr sz="900" b="1">
+              <a:defRPr sz="800" b="1">
                 <a:solidFill>
                   <a:srgbClr val="704CB6"/>
                 </a:solidFill>
@@ -6420,10 +6092,7 @@
               </a:defRPr>
             </a:pPr>
             <a:r>
-              <a:rPr>
-                <a:latin typeface="Microsoft YaHei"/>
-              </a:rPr>
-              <a:t>78%</a:t>
+              <a:t>93.0%</a:t>
             </a:r>
           </a:p>
         </p:txBody>
@@ -6436,8 +6105,8 @@
         </p:nvSpPr>
         <p:spPr>
           <a:xfrm>
-            <a:off x="822960" y="5001768"/>
-            <a:ext cx="4617720" cy="384048"/>
+            <a:off x="6309360" y="2825496"/>
+            <a:ext cx="4526280" cy="274320"/>
           </a:xfrm>
           <a:prstGeom prst="rect">
             <a:avLst/>
@@ -6451,7 +6120,7 @@
           <a:lstStyle/>
           <a:p>
             <a:pPr algn="l">
-              <a:defRPr sz="850" b="0">
+              <a:defRPr sz="780" b="0">
                 <a:solidFill>
                   <a:srgbClr val="667085"/>
                 </a:solidFill>
@@ -6459,24 +6128,409 @@
               </a:defRPr>
             </a:pPr>
             <a:r>
-              <a:rPr>
-                <a:latin typeface="Microsoft YaHei"/>
-              </a:rPr>
-              <a:t>RISC-V Sv39 与 LoongArch LA64 后端共享接口。</a:t>
-            </a:r>
-          </a:p>
-        </p:txBody>
-      </p:sp>
-      <p:sp>
-        <p:nvSpPr>
-          <p:cNvPr id="28" name="Rounded Rectangle 27"/>
+              <a:t>ELF、mmap、COW、双架构页表稳定。</a:t>
+            </a:r>
+          </a:p>
+        </p:txBody>
+      </p:sp>
+      <p:sp>
+        <p:nvSpPr>
+          <p:cNvPr id="28" name="TextBox 27"/>
+          <p:cNvSpPr txBox="1"/>
+          <p:nvPr/>
+        </p:nvSpPr>
+        <p:spPr>
+          <a:xfrm>
+            <a:off x="868680" y="3520440"/>
+            <a:ext cx="4114800" cy="201168"/>
+          </a:xfrm>
+          <a:prstGeom prst="rect">
+            <a:avLst/>
+          </a:prstGeom>
+          <a:noFill/>
+        </p:spPr>
+        <p:txBody>
+          <a:bodyPr wrap="square" lIns="27432" rIns="27432" anchor="t">
+            <a:spAutoFit/>
+          </a:bodyPr>
+          <a:lstStyle/>
+          <a:p>
+            <a:pPr algn="l">
+              <a:defRPr sz="980" b="1">
+                <a:solidFill>
+                  <a:srgbClr val="202124"/>
+                </a:solidFill>
+                <a:latin typeface="Microsoft YaHei"/>
+              </a:defRPr>
+            </a:pPr>
+            <a:r>
+              <a:t>时间与 special fd</a:t>
+            </a:r>
+          </a:p>
+        </p:txBody>
+      </p:sp>
+      <p:sp>
+        <p:nvSpPr>
+          <p:cNvPr id="29" name="Rounded Rectangle 28"/>
           <p:cNvSpPr/>
           <p:nvPr/>
         </p:nvSpPr>
         <p:spPr>
           <a:xfrm>
-            <a:off x="6035040" y="1234440"/>
-            <a:ext cx="5212080" cy="4343400"/>
+            <a:off x="868680" y="3785615"/>
+            <a:ext cx="4114800" cy="128016"/>
+          </a:xfrm>
+          <a:prstGeom prst="roundRect">
+            <a:avLst/>
+          </a:prstGeom>
+          <a:solidFill>
+            <a:srgbClr val="EBEEF2"/>
+          </a:solidFill>
+          <a:ln>
+            <a:noFill/>
+          </a:ln>
+        </p:spPr>
+        <p:style>
+          <a:lnRef idx="1">
+            <a:schemeClr val="accent1"/>
+          </a:lnRef>
+          <a:fillRef idx="3">
+            <a:schemeClr val="accent1"/>
+          </a:fillRef>
+          <a:effectRef idx="2">
+            <a:schemeClr val="accent1"/>
+          </a:effectRef>
+          <a:fontRef idx="minor">
+            <a:schemeClr val="lt1"/>
+          </a:fontRef>
+        </p:style>
+        <p:txBody>
+          <a:bodyPr rtlCol="0" anchor="ctr"/>
+          <a:lstStyle/>
+          <a:p>
+            <a:pPr algn="ctr"/>
+          </a:p>
+        </p:txBody>
+      </p:sp>
+      <p:sp>
+        <p:nvSpPr>
+          <p:cNvPr id="30" name="Rounded Rectangle 29"/>
+          <p:cNvSpPr/>
+          <p:nvPr/>
+        </p:nvSpPr>
+        <p:spPr>
+          <a:xfrm>
+            <a:off x="868680" y="3785615"/>
+            <a:ext cx="3950208" cy="128016"/>
+          </a:xfrm>
+          <a:prstGeom prst="roundRect">
+            <a:avLst/>
+          </a:prstGeom>
+          <a:solidFill>
+            <a:srgbClr val="129675"/>
+          </a:solidFill>
+          <a:ln>
+            <a:noFill/>
+          </a:ln>
+        </p:spPr>
+        <p:style>
+          <a:lnRef idx="1">
+            <a:schemeClr val="accent1"/>
+          </a:lnRef>
+          <a:fillRef idx="3">
+            <a:schemeClr val="accent1"/>
+          </a:fillRef>
+          <a:effectRef idx="2">
+            <a:schemeClr val="accent1"/>
+          </a:effectRef>
+          <a:fontRef idx="minor">
+            <a:schemeClr val="lt1"/>
+          </a:fontRef>
+        </p:style>
+        <p:txBody>
+          <a:bodyPr rtlCol="0" anchor="ctr"/>
+          <a:lstStyle/>
+          <a:p>
+            <a:pPr algn="ctr"/>
+          </a:p>
+        </p:txBody>
+      </p:sp>
+      <p:sp>
+        <p:nvSpPr>
+          <p:cNvPr id="31" name="TextBox 30"/>
+          <p:cNvSpPr txBox="1"/>
+          <p:nvPr/>
+        </p:nvSpPr>
+        <p:spPr>
+          <a:xfrm>
+            <a:off x="5056632" y="3703320"/>
+            <a:ext cx="502920" cy="201168"/>
+          </a:xfrm>
+          <a:prstGeom prst="rect">
+            <a:avLst/>
+          </a:prstGeom>
+          <a:noFill/>
+        </p:spPr>
+        <p:txBody>
+          <a:bodyPr wrap="square" lIns="27432" rIns="27432" anchor="t">
+            <a:spAutoFit/>
+          </a:bodyPr>
+          <a:lstStyle/>
+          <a:p>
+            <a:pPr algn="l">
+              <a:defRPr sz="800" b="1">
+                <a:solidFill>
+                  <a:srgbClr val="129675"/>
+                </a:solidFill>
+                <a:latin typeface="Microsoft YaHei"/>
+              </a:defRPr>
+            </a:pPr>
+            <a:r>
+              <a:t>96.0%</a:t>
+            </a:r>
+          </a:p>
+        </p:txBody>
+      </p:sp>
+      <p:sp>
+        <p:nvSpPr>
+          <p:cNvPr id="32" name="TextBox 31"/>
+          <p:cNvSpPr txBox="1"/>
+          <p:nvPr/>
+        </p:nvSpPr>
+        <p:spPr>
+          <a:xfrm>
+            <a:off x="868680" y="3968496"/>
+            <a:ext cx="4526280" cy="274320"/>
+          </a:xfrm>
+          <a:prstGeom prst="rect">
+            <a:avLst/>
+          </a:prstGeom>
+          <a:noFill/>
+        </p:spPr>
+        <p:txBody>
+          <a:bodyPr wrap="square" lIns="27432" rIns="27432" anchor="t">
+            <a:spAutoFit/>
+          </a:bodyPr>
+          <a:lstStyle/>
+          <a:p>
+            <a:pPr algn="l">
+              <a:defRPr sz="780" b="0">
+                <a:solidFill>
+                  <a:srgbClr val="667085"/>
+                </a:solidFill>
+                <a:latin typeface="Microsoft YaHei"/>
+              </a:defRPr>
+            </a:pPr>
+            <a:r>
+              <a:t>timerfd、epoll、eventfd 等接入 fd。</a:t>
+            </a:r>
+          </a:p>
+        </p:txBody>
+      </p:sp>
+      <p:sp>
+        <p:nvSpPr>
+          <p:cNvPr id="33" name="TextBox 32"/>
+          <p:cNvSpPr txBox="1"/>
+          <p:nvPr/>
+        </p:nvSpPr>
+        <p:spPr>
+          <a:xfrm>
+            <a:off x="6309360" y="3520440"/>
+            <a:ext cx="4114800" cy="201168"/>
+          </a:xfrm>
+          <a:prstGeom prst="rect">
+            <a:avLst/>
+          </a:prstGeom>
+          <a:noFill/>
+        </p:spPr>
+        <p:txBody>
+          <a:bodyPr wrap="square" lIns="27432" rIns="27432" anchor="t">
+            <a:spAutoFit/>
+          </a:bodyPr>
+          <a:lstStyle/>
+          <a:p>
+            <a:pPr algn="l">
+              <a:defRPr sz="980" b="1">
+                <a:solidFill>
+                  <a:srgbClr val="202124"/>
+                </a:solidFill>
+                <a:latin typeface="Microsoft YaHei"/>
+              </a:defRPr>
+            </a:pPr>
+            <a:r>
+              <a:t>网络回环</a:t>
+            </a:r>
+          </a:p>
+        </p:txBody>
+      </p:sp>
+      <p:sp>
+        <p:nvSpPr>
+          <p:cNvPr id="34" name="Rounded Rectangle 33"/>
+          <p:cNvSpPr/>
+          <p:nvPr/>
+        </p:nvSpPr>
+        <p:spPr>
+          <a:xfrm>
+            <a:off x="6309360" y="3785615"/>
+            <a:ext cx="4114800" cy="128016"/>
+          </a:xfrm>
+          <a:prstGeom prst="roundRect">
+            <a:avLst/>
+          </a:prstGeom>
+          <a:solidFill>
+            <a:srgbClr val="EBEEF2"/>
+          </a:solidFill>
+          <a:ln>
+            <a:noFill/>
+          </a:ln>
+        </p:spPr>
+        <p:style>
+          <a:lnRef idx="1">
+            <a:schemeClr val="accent1"/>
+          </a:lnRef>
+          <a:fillRef idx="3">
+            <a:schemeClr val="accent1"/>
+          </a:fillRef>
+          <a:effectRef idx="2">
+            <a:schemeClr val="accent1"/>
+          </a:effectRef>
+          <a:fontRef idx="minor">
+            <a:schemeClr val="lt1"/>
+          </a:fontRef>
+        </p:style>
+        <p:txBody>
+          <a:bodyPr rtlCol="0" anchor="ctr"/>
+          <a:lstStyle/>
+          <a:p>
+            <a:pPr algn="ctr"/>
+          </a:p>
+        </p:txBody>
+      </p:sp>
+      <p:sp>
+        <p:nvSpPr>
+          <p:cNvPr id="35" name="Rounded Rectangle 34"/>
+          <p:cNvSpPr/>
+          <p:nvPr/>
+        </p:nvSpPr>
+        <p:spPr>
+          <a:xfrm>
+            <a:off x="6309360" y="3785615"/>
+            <a:ext cx="3621024" cy="128016"/>
+          </a:xfrm>
+          <a:prstGeom prst="roundRect">
+            <a:avLst/>
+          </a:prstGeom>
+          <a:solidFill>
+            <a:srgbClr val="F58220"/>
+          </a:solidFill>
+          <a:ln>
+            <a:noFill/>
+          </a:ln>
+        </p:spPr>
+        <p:style>
+          <a:lnRef idx="1">
+            <a:schemeClr val="accent1"/>
+          </a:lnRef>
+          <a:fillRef idx="3">
+            <a:schemeClr val="accent1"/>
+          </a:fillRef>
+          <a:effectRef idx="2">
+            <a:schemeClr val="accent1"/>
+          </a:effectRef>
+          <a:fontRef idx="minor">
+            <a:schemeClr val="lt1"/>
+          </a:fontRef>
+        </p:style>
+        <p:txBody>
+          <a:bodyPr rtlCol="0" anchor="ctr"/>
+          <a:lstStyle/>
+          <a:p>
+            <a:pPr algn="ctr"/>
+          </a:p>
+        </p:txBody>
+      </p:sp>
+      <p:sp>
+        <p:nvSpPr>
+          <p:cNvPr id="36" name="TextBox 35"/>
+          <p:cNvSpPr txBox="1"/>
+          <p:nvPr/>
+        </p:nvSpPr>
+        <p:spPr>
+          <a:xfrm>
+            <a:off x="10497312" y="3703320"/>
+            <a:ext cx="502920" cy="201168"/>
+          </a:xfrm>
+          <a:prstGeom prst="rect">
+            <a:avLst/>
+          </a:prstGeom>
+          <a:noFill/>
+        </p:spPr>
+        <p:txBody>
+          <a:bodyPr wrap="square" lIns="27432" rIns="27432" anchor="t">
+            <a:spAutoFit/>
+          </a:bodyPr>
+          <a:lstStyle/>
+          <a:p>
+            <a:pPr algn="l">
+              <a:defRPr sz="800" b="1">
+                <a:solidFill>
+                  <a:srgbClr val="F58220"/>
+                </a:solidFill>
+                <a:latin typeface="Microsoft YaHei"/>
+              </a:defRPr>
+            </a:pPr>
+            <a:r>
+              <a:t>88.0%</a:t>
+            </a:r>
+          </a:p>
+        </p:txBody>
+      </p:sp>
+      <p:sp>
+        <p:nvSpPr>
+          <p:cNvPr id="37" name="TextBox 36"/>
+          <p:cNvSpPr txBox="1"/>
+          <p:nvPr/>
+        </p:nvSpPr>
+        <p:spPr>
+          <a:xfrm>
+            <a:off x="6309360" y="3968496"/>
+            <a:ext cx="4526280" cy="274320"/>
+          </a:xfrm>
+          <a:prstGeom prst="rect">
+            <a:avLst/>
+          </a:prstGeom>
+          <a:noFill/>
+        </p:spPr>
+        <p:txBody>
+          <a:bodyPr wrap="square" lIns="27432" rIns="27432" anchor="t">
+            <a:spAutoFit/>
+          </a:bodyPr>
+          <a:lstStyle/>
+          <a:p>
+            <a:pPr algn="l">
+              <a:defRPr sz="780" b="0">
+                <a:solidFill>
+                  <a:srgbClr val="667085"/>
+                </a:solidFill>
+                <a:latin typeface="Microsoft YaHei"/>
+              </a:defRPr>
+            </a:pPr>
+            <a:r>
+              <a:t>IPv4 TCP/UDP 回环；真实网卡暂未接入。</a:t>
+            </a:r>
+          </a:p>
+        </p:txBody>
+      </p:sp>
+      <p:sp>
+        <p:nvSpPr>
+          <p:cNvPr id="38" name="Rounded Rectangle 37"/>
+          <p:cNvSpPr/>
+          <p:nvPr/>
+        </p:nvSpPr>
+        <p:spPr>
+          <a:xfrm>
+            <a:off x="868680" y="5074920"/>
+            <a:ext cx="10378440" cy="685800"/>
           </a:xfrm>
           <a:prstGeom prst="roundRect">
             <a:avLst/>
@@ -6514,14 +6568,14 @@
       </p:sp>
       <p:sp>
         <p:nvSpPr>
-          <p:cNvPr id="29" name="Rectangle 28"/>
+          <p:cNvPr id="39" name="Rectangle 38"/>
           <p:cNvSpPr/>
           <p:nvPr/>
         </p:nvSpPr>
         <p:spPr>
           <a:xfrm>
-            <a:off x="6035040" y="1234440"/>
-            <a:ext cx="68580" cy="4343400"/>
+            <a:off x="868680" y="5074920"/>
+            <a:ext cx="64008" cy="685800"/>
           </a:xfrm>
           <a:prstGeom prst="rect">
             <a:avLst/>
@@ -6557,14 +6611,14 @@
       </p:sp>
       <p:sp>
         <p:nvSpPr>
-          <p:cNvPr id="30" name="TextBox 29"/>
+          <p:cNvPr id="40" name="TextBox 39"/>
           <p:cNvSpPr txBox="1"/>
           <p:nvPr/>
         </p:nvSpPr>
         <p:spPr>
           <a:xfrm>
-            <a:off x="6181344" y="1344168"/>
-            <a:ext cx="4937760" cy="256032"/>
+            <a:off x="1005839" y="5166359"/>
+            <a:ext cx="10104119" cy="256032"/>
           </a:xfrm>
           <a:prstGeom prst="rect">
             <a:avLst/>
@@ -6578,7 +6632,7 @@
           <a:lstStyle/>
           <a:p>
             <a:pPr algn="l">
-              <a:defRPr sz="1300" b="1">
+              <a:defRPr sz="1120" b="1">
                 <a:solidFill>
                   <a:srgbClr val="202124"/>
                 </a:solidFill>
@@ -6586,24 +6640,21 @@
               </a:defRPr>
             </a:pPr>
             <a:r>
-              <a:rPr>
-                <a:latin typeface="Microsoft YaHei"/>
-              </a:rPr>
-              <a:t>关键工程点</a:t>
-            </a:r>
-          </a:p>
-        </p:txBody>
-      </p:sp>
-      <p:sp>
-        <p:nvSpPr>
-          <p:cNvPr id="31" name="TextBox 30"/>
+              <a:t>口径说明</a:t>
+            </a:r>
+          </a:p>
+        </p:txBody>
+      </p:sp>
+      <p:sp>
+        <p:nvSpPr>
+          <p:cNvPr id="41" name="TextBox 40"/>
           <p:cNvSpPr txBox="1"/>
           <p:nvPr/>
         </p:nvSpPr>
         <p:spPr>
           <a:xfrm>
-            <a:off x="6181344" y="1673352"/>
-            <a:ext cx="4937760" cy="3867912"/>
+            <a:off x="1005839" y="5468112"/>
+            <a:ext cx="10104119" cy="265176"/>
           </a:xfrm>
           <a:prstGeom prst="rect">
             <a:avLst/>
@@ -6617,7 +6668,7 @@
           <a:lstStyle/>
           <a:p>
             <a:pPr algn="l">
-              <a:defRPr sz="1100" b="0">
+              <a:defRPr sz="880" b="0">
                 <a:solidFill>
                   <a:srgbClr val="475467"/>
                 </a:solidFill>
@@ -6625,10 +6676,7 @@
               </a:defRPr>
             </a:pPr>
             <a:r>
-              <a:rPr>
-                <a:latin typeface="Microsoft YaHei"/>
-              </a:rPr>
-              <a:t>用户地址访问前需要检查 VMA 权限，并在必要时主动处理 lazy fault 或 COW。LoongArch 当前还有页表页延迟回收和 mmap 地址对齐策略，用来规避短进程密集退出和硬件页表行为差异。</a:t>
+              <a:t>这里是汇报用主路径成熟度；真实验证看 LTP 断言统计和 compare CSV。四组 LTP 断言通过率为 96.91%-97.63%。</a:t>
             </a:r>
           </a:p>
         </p:txBody>
@@ -7484,9 +7532,6 @@
               </a:defRPr>
             </a:pPr>
             <a:r>
-              <a:rPr>
-                <a:latin typeface="Microsoft YaHei"/>
-              </a:rPr>
               <a:t>14 / 25</a:t>
             </a:r>
           </a:p>
@@ -7501,7 +7546,7 @@
         <p:spPr>
           <a:xfrm>
             <a:off x="502920" y="347472"/>
-            <a:ext cx="9144000" cy="411480"/>
+            <a:ext cx="9326880" cy="411480"/>
           </a:xfrm>
           <a:prstGeom prst="rect">
             <a:avLst/>
@@ -7523,9 +7568,6 @@
               </a:defRPr>
             </a:pPr>
             <a:r>
-              <a:rPr>
-                <a:latin typeface="Microsoft YaHei"/>
-              </a:rPr>
               <a:t>系统调用与 fd 表</a:t>
             </a:r>
           </a:p>
@@ -7562,10 +7604,7 @@
               </a:defRPr>
             </a:pPr>
             <a:r>
-              <a:rPr>
-                <a:latin typeface="Microsoft YaHei"/>
-              </a:rPr>
-              <a:t>参数检查和错误码映射是通过率的关键细节</a:t>
+              <a:t>最终版 syscall 分发规模与实现分布</a:t>
             </a:r>
           </a:p>
         </p:txBody>
@@ -7621,8 +7660,8 @@
         </p:nvSpPr>
         <p:spPr>
           <a:xfrm>
-            <a:off x="777240" y="1234440"/>
-            <a:ext cx="5074920" cy="4434840"/>
+            <a:off x="685800" y="1234440"/>
+            <a:ext cx="3429000" cy="4526280"/>
           </a:xfrm>
           <a:prstGeom prst="roundRect">
             <a:avLst/>
@@ -7666,14 +7705,14 @@
         </p:nvSpPr>
         <p:spPr>
           <a:xfrm>
-            <a:off x="777240" y="1234440"/>
-            <a:ext cx="68580" cy="4434840"/>
-          </a:xfrm>
-          <a:prstGeom prst="rect">
-            <a:avLst/>
-          </a:prstGeom>
-          <a:solidFill>
-            <a:srgbClr val="2D64E6"/>
+            <a:off x="685800" y="1234440"/>
+            <a:ext cx="68580" cy="4526280"/>
+          </a:xfrm>
+          <a:prstGeom prst="rect">
+            <a:avLst/>
+          </a:prstGeom>
+          <a:solidFill>
+            <a:srgbClr val="8B1A2B"/>
           </a:solidFill>
           <a:ln>
             <a:noFill/>
@@ -7709,8 +7748,8 @@
         </p:nvSpPr>
         <p:spPr>
           <a:xfrm>
-            <a:off x="923544" y="1344168"/>
-            <a:ext cx="4800600" cy="256032"/>
+            <a:off x="832104" y="1344168"/>
+            <a:ext cx="3154680" cy="256032"/>
           </a:xfrm>
           <a:prstGeom prst="rect">
             <a:avLst/>
@@ -7724,7 +7763,7 @@
           <a:lstStyle/>
           <a:p>
             <a:pPr algn="l">
-              <a:defRPr sz="1250" b="1">
+              <a:defRPr sz="1300" b="1">
                 <a:solidFill>
                   <a:srgbClr val="202124"/>
                 </a:solidFill>
@@ -7732,10 +7771,7 @@
               </a:defRPr>
             </a:pPr>
             <a:r>
-              <a:rPr>
-                <a:latin typeface="Microsoft YaHei"/>
-              </a:rPr>
-              <a:t>系统调用入口</a:t>
+              <a:t>分发规模</a:t>
             </a:r>
           </a:p>
         </p:txBody>
@@ -7748,8 +7784,8 @@
         </p:nvSpPr>
         <p:spPr>
           <a:xfrm>
-            <a:off x="923544" y="1673352"/>
-            <a:ext cx="4800600" cy="3959352"/>
+            <a:off x="832104" y="1673352"/>
+            <a:ext cx="3154680" cy="4050791"/>
           </a:xfrm>
           <a:prstGeom prst="rect">
             <a:avLst/>
@@ -7763,7 +7799,7 @@
           <a:lstStyle/>
           <a:p>
             <a:pPr algn="l">
-              <a:defRPr sz="969" b="0">
+              <a:defRPr sz="1050" b="0">
                 <a:solidFill>
                   <a:srgbClr val="475467"/>
                 </a:solidFill>
@@ -7771,10 +7807,7 @@
               </a:defRPr>
             </a:pPr>
             <a:r>
-              <a:rPr>
-                <a:latin typeface="Microsoft YaHei"/>
-              </a:rPr>
-              <a:t>syscall 层负责从 TrapContext 取 syscall id 和参数，完成用户指针复制、结构体转换、fd 校验、flag 解析和 errno 映射。文件、网络、时间等接口都尽量把 ABI 细节收敛在 syscall 层。</a:t>
+              <a:t>syscall/mod.rs 维护 216 个 Linux syscall 分发入口。分发层负责 syscall id、参数数组、返回值和 errno 的统一出口。</a:t>
             </a:r>
           </a:p>
         </p:txBody>
@@ -7787,8 +7820,8 @@
         </p:nvSpPr>
         <p:spPr>
           <a:xfrm>
-            <a:off x="6263640" y="1234440"/>
-            <a:ext cx="5074920" cy="4434840"/>
+            <a:off x="4389120" y="1234440"/>
+            <a:ext cx="3429000" cy="4526280"/>
           </a:xfrm>
           <a:prstGeom prst="roundRect">
             <a:avLst/>
@@ -7832,14 +7865,14 @@
         </p:nvSpPr>
         <p:spPr>
           <a:xfrm>
-            <a:off x="6263640" y="1234440"/>
-            <a:ext cx="68580" cy="4434840"/>
-          </a:xfrm>
-          <a:prstGeom prst="rect">
-            <a:avLst/>
-          </a:prstGeom>
-          <a:solidFill>
-            <a:srgbClr val="129675"/>
+            <a:off x="4389120" y="1234440"/>
+            <a:ext cx="68580" cy="4526280"/>
+          </a:xfrm>
+          <a:prstGeom prst="rect">
+            <a:avLst/>
+          </a:prstGeom>
+          <a:solidFill>
+            <a:srgbClr val="2D64E6"/>
           </a:solidFill>
           <a:ln>
             <a:noFill/>
@@ -7875,8 +7908,8 @@
         </p:nvSpPr>
         <p:spPr>
           <a:xfrm>
-            <a:off x="6409944" y="1344168"/>
-            <a:ext cx="4800600" cy="256032"/>
+            <a:off x="4535424" y="1344168"/>
+            <a:ext cx="3154680" cy="256032"/>
           </a:xfrm>
           <a:prstGeom prst="rect">
             <a:avLst/>
@@ -7890,7 +7923,7 @@
           <a:lstStyle/>
           <a:p>
             <a:pPr algn="l">
-              <a:defRPr sz="1250" b="1">
+              <a:defRPr sz="1300" b="1">
                 <a:solidFill>
                   <a:srgbClr val="202124"/>
                 </a:solidFill>
@@ -7898,10 +7931,7 @@
               </a:defRPr>
             </a:pPr>
             <a:r>
-              <a:rPr>
-                <a:latin typeface="Microsoft YaHei"/>
-              </a:rPr>
-              <a:t>fd 资源模型</a:t>
+              <a:t>实现分布</a:t>
             </a:r>
           </a:p>
         </p:txBody>
@@ -7914,8 +7944,8 @@
         </p:nvSpPr>
         <p:spPr>
           <a:xfrm>
-            <a:off x="6409944" y="1673352"/>
-            <a:ext cx="4800600" cy="3959352"/>
+            <a:off x="4535424" y="1673352"/>
+            <a:ext cx="3154680" cy="4050791"/>
           </a:xfrm>
           <a:prstGeom prst="rect">
             <a:avLst/>
@@ -7929,7 +7959,7 @@
           <a:lstStyle/>
           <a:p>
             <a:pPr algn="l">
-              <a:defRPr sz="969" b="0">
+              <a:defRPr sz="1050" b="0">
                 <a:solidFill>
                   <a:srgbClr val="475467"/>
                 </a:solidFill>
@@ -7937,10 +7967,167 @@
               </a:defRPr>
             </a:pPr>
             <a:r>
-              <a:rPr>
-                <a:latin typeface="Microsoft YaHei"/>
-              </a:rPr>
-              <a:t>fd 表把用户态整数句柄映射到 FileOp 对象，普通文件、目录、pipe、socket、timerfd、stdin/stdout/devfs 文件都可以进入统一 read/write/poll/close 路径。</a:t>
+              <a:t>fs.rs 73 个入口，process.rs 56 个入口，special_fd.rs 20 个入口，net.rs 18 个入口，time.rs 17 个入口，signal.rs 12 个入口。</a:t>
+            </a:r>
+          </a:p>
+        </p:txBody>
+      </p:sp>
+      <p:sp>
+        <p:nvSpPr>
+          <p:cNvPr id="16" name="Rounded Rectangle 15"/>
+          <p:cNvSpPr/>
+          <p:nvPr/>
+        </p:nvSpPr>
+        <p:spPr>
+          <a:xfrm>
+            <a:off x="8092440" y="1234440"/>
+            <a:ext cx="3429000" cy="4526280"/>
+          </a:xfrm>
+          <a:prstGeom prst="roundRect">
+            <a:avLst/>
+          </a:prstGeom>
+          <a:solidFill>
+            <a:srgbClr val="FFFFFF"/>
+          </a:solidFill>
+          <a:ln w="12700">
+            <a:solidFill>
+              <a:srgbClr val="E2E8F0"/>
+            </a:solidFill>
+          </a:ln>
+        </p:spPr>
+        <p:style>
+          <a:lnRef idx="1">
+            <a:schemeClr val="accent1"/>
+          </a:lnRef>
+          <a:fillRef idx="3">
+            <a:schemeClr val="accent1"/>
+          </a:fillRef>
+          <a:effectRef idx="2">
+            <a:schemeClr val="accent1"/>
+          </a:effectRef>
+          <a:fontRef idx="minor">
+            <a:schemeClr val="lt1"/>
+          </a:fontRef>
+        </p:style>
+        <p:txBody>
+          <a:bodyPr rtlCol="0" anchor="ctr"/>
+          <a:lstStyle/>
+          <a:p>
+            <a:pPr algn="ctr"/>
+          </a:p>
+        </p:txBody>
+      </p:sp>
+      <p:sp>
+        <p:nvSpPr>
+          <p:cNvPr id="17" name="Rectangle 16"/>
+          <p:cNvSpPr/>
+          <p:nvPr/>
+        </p:nvSpPr>
+        <p:spPr>
+          <a:xfrm>
+            <a:off x="8092440" y="1234440"/>
+            <a:ext cx="68580" cy="4526280"/>
+          </a:xfrm>
+          <a:prstGeom prst="rect">
+            <a:avLst/>
+          </a:prstGeom>
+          <a:solidFill>
+            <a:srgbClr val="129675"/>
+          </a:solidFill>
+          <a:ln>
+            <a:noFill/>
+          </a:ln>
+        </p:spPr>
+        <p:style>
+          <a:lnRef idx="1">
+            <a:schemeClr val="accent1"/>
+          </a:lnRef>
+          <a:fillRef idx="3">
+            <a:schemeClr val="accent1"/>
+          </a:fillRef>
+          <a:effectRef idx="2">
+            <a:schemeClr val="accent1"/>
+          </a:effectRef>
+          <a:fontRef idx="minor">
+            <a:schemeClr val="lt1"/>
+          </a:fontRef>
+        </p:style>
+        <p:txBody>
+          <a:bodyPr rtlCol="0" anchor="ctr"/>
+          <a:lstStyle/>
+          <a:p>
+            <a:pPr algn="ctr"/>
+          </a:p>
+        </p:txBody>
+      </p:sp>
+      <p:sp>
+        <p:nvSpPr>
+          <p:cNvPr id="18" name="TextBox 17"/>
+          <p:cNvSpPr txBox="1"/>
+          <p:nvPr/>
+        </p:nvSpPr>
+        <p:spPr>
+          <a:xfrm>
+            <a:off x="8238744" y="1344168"/>
+            <a:ext cx="3154680" cy="256032"/>
+          </a:xfrm>
+          <a:prstGeom prst="rect">
+            <a:avLst/>
+          </a:prstGeom>
+          <a:noFill/>
+        </p:spPr>
+        <p:txBody>
+          <a:bodyPr wrap="square" lIns="27432" rIns="27432" anchor="t">
+            <a:spAutoFit/>
+          </a:bodyPr>
+          <a:lstStyle/>
+          <a:p>
+            <a:pPr algn="l">
+              <a:defRPr sz="1300" b="1">
+                <a:solidFill>
+                  <a:srgbClr val="202124"/>
+                </a:solidFill>
+                <a:latin typeface="Microsoft YaHei"/>
+              </a:defRPr>
+            </a:pPr>
+            <a:r>
+              <a:t>fd 资源模型</a:t>
+            </a:r>
+          </a:p>
+        </p:txBody>
+      </p:sp>
+      <p:sp>
+        <p:nvSpPr>
+          <p:cNvPr id="19" name="TextBox 18"/>
+          <p:cNvSpPr txBox="1"/>
+          <p:nvPr/>
+        </p:nvSpPr>
+        <p:spPr>
+          <a:xfrm>
+            <a:off x="8238744" y="1673352"/>
+            <a:ext cx="3154680" cy="4050791"/>
+          </a:xfrm>
+          <a:prstGeom prst="rect">
+            <a:avLst/>
+          </a:prstGeom>
+          <a:noFill/>
+        </p:spPr>
+        <p:txBody>
+          <a:bodyPr wrap="square" lIns="27432" rIns="27432" anchor="t">
+            <a:spAutoFit/>
+          </a:bodyPr>
+          <a:lstStyle/>
+          <a:p>
+            <a:pPr algn="l">
+              <a:defRPr sz="1050" b="0">
+                <a:solidFill>
+                  <a:srgbClr val="475467"/>
+                </a:solidFill>
+                <a:latin typeface="Microsoft YaHei"/>
+              </a:defRPr>
+            </a:pPr>
+            <a:r>
+              <a:t>普通文件、目录、pipe、socket、timerfd、eventfd、epoll、stdio 和 devfs 文件都通过 FileOp 进入 read/write/poll/close 路径。</a:t>
             </a:r>
           </a:p>
         </p:txBody>
@@ -12810,9 +12997,6 @@
               </a:defRPr>
             </a:pPr>
             <a:r>
-              <a:rPr>
-                <a:latin typeface="Microsoft YaHei"/>
-              </a:rPr>
               <a:t>20 / 25</a:t>
             </a:r>
           </a:p>
@@ -12827,7 +13011,7 @@
         <p:spPr>
           <a:xfrm>
             <a:off x="502920" y="347472"/>
-            <a:ext cx="9144000" cy="411480"/>
+            <a:ext cx="9326880" cy="411480"/>
           </a:xfrm>
           <a:prstGeom prst="rect">
             <a:avLst/>
@@ -12849,9 +13033,6 @@
               </a:defRPr>
             </a:pPr>
             <a:r>
-              <a:rPr>
-                <a:latin typeface="Microsoft YaHei"/>
-              </a:rPr>
               <a:t>测试方法</a:t>
             </a:r>
           </a:p>
@@ -12888,10 +13069,7 @@
               </a:defRPr>
             </a:pPr>
             <a:r>
-              <a:rPr>
-                <a:latin typeface="Microsoft YaHei"/>
-              </a:rPr>
-              <a:t>从单次运行转为报告化、可对比的回归流程</a:t>
+              <a:t>全量输出、逐用例报告和 Linux baseline 对比</a:t>
             </a:r>
           </a:p>
         </p:txBody>
@@ -12948,7 +13126,7 @@
         <p:spPr>
           <a:xfrm>
             <a:off x="685800" y="1234440"/>
-            <a:ext cx="3383280" cy="4389120"/>
+            <a:ext cx="3383280" cy="4434840"/>
           </a:xfrm>
           <a:prstGeom prst="roundRect">
             <a:avLst/>
@@ -12993,7 +13171,7 @@
         <p:spPr>
           <a:xfrm>
             <a:off x="685800" y="1234440"/>
-            <a:ext cx="68580" cy="4389120"/>
+            <a:ext cx="68580" cy="4434840"/>
           </a:xfrm>
           <a:prstGeom prst="rect">
             <a:avLst/>
@@ -13058,10 +13236,7 @@
               </a:defRPr>
             </a:pPr>
             <a:r>
-              <a:rPr>
-                <a:latin typeface="Microsoft YaHei"/>
-              </a:rPr>
-              <a:t>测试输入</a:t>
+              <a:t>输入与平台</a:t>
             </a:r>
           </a:p>
         </p:txBody>
@@ -13075,7 +13250,7 @@
         <p:spPr>
           <a:xfrm>
             <a:off x="832104" y="1673352"/>
-            <a:ext cx="3108960" cy="3913631"/>
+            <a:ext cx="3108960" cy="3959352"/>
           </a:xfrm>
           <a:prstGeom prst="rect">
             <a:avLst/>
@@ -13089,7 +13264,7 @@
           <a:lstStyle/>
           <a:p>
             <a:pPr algn="l">
-              <a:defRPr sz="969" b="0">
+              <a:defRPr sz="960" b="0">
                 <a:solidFill>
                   <a:srgbClr val="475467"/>
                 </a:solidFill>
@@ -13097,38 +13272,19 @@
               </a:defRPr>
             </a:pPr>
             <a:r>
-              <a:rPr>
-                <a:latin typeface="Microsoft YaHei"/>
-              </a:rPr>
-              <a:t>user/oscomp_ltp_list.txt</a:t>
+              <a:t>rv-output.txt：RISC-V 64 全量测例输出</a:t>
             </a:r>
             <a:br/>
             <a:r>
-              <a:rPr>
-                <a:latin typeface="Microsoft YaHei"/>
-              </a:rPr>
-              <a:t>分阶段测例列表</a:t>
+              <a:t>la-output.txt：LoongArch 64 全量测例输出</a:t>
             </a:r>
             <a:br/>
             <a:r>
-              <a:rPr>
-                <a:latin typeface="Microsoft YaHei"/>
-              </a:rPr>
-              <a:t>跳过原因说明</a:t>
+              <a:t>glibc + musl 双 libc 组合</a:t>
             </a:r>
             <a:br/>
             <a:r>
-              <a:rPr>
-                <a:latin typeface="Microsoft YaHei"/>
-              </a:rPr>
-              <a:t>glibc/musl 组合</a:t>
-            </a:r>
-            <a:br/>
-            <a:r>
-              <a:rPr>
-                <a:latin typeface="Microsoft YaHei"/>
-              </a:rPr>
-              <a:t>RISC-V/LoongArch 平台</a:t>
+              <a:t>每个平台覆盖约 688 个 LTP case</a:t>
             </a:r>
           </a:p>
         </p:txBody>
@@ -13142,7 +13298,7 @@
         <p:spPr>
           <a:xfrm>
             <a:off x="4434840" y="1234440"/>
-            <a:ext cx="3383280" cy="4389120"/>
+            <a:ext cx="3383280" cy="4434840"/>
           </a:xfrm>
           <a:prstGeom prst="roundRect">
             <a:avLst/>
@@ -13187,7 +13343,7 @@
         <p:spPr>
           <a:xfrm>
             <a:off x="4434840" y="1234440"/>
-            <a:ext cx="68580" cy="4389120"/>
+            <a:ext cx="68580" cy="4434840"/>
           </a:xfrm>
           <a:prstGeom prst="rect">
             <a:avLst/>
@@ -13252,10 +13408,7 @@
               </a:defRPr>
             </a:pPr>
             <a:r>
-              <a:rPr>
-                <a:latin typeface="Microsoft YaHei"/>
-              </a:rPr>
-              <a:t>日志产物</a:t>
+              <a:t>报告统计</a:t>
             </a:r>
           </a:p>
         </p:txBody>
@@ -13269,7 +13422,7 @@
         <p:spPr>
           <a:xfrm>
             <a:off x="4581144" y="1673352"/>
-            <a:ext cx="3108960" cy="3913631"/>
+            <a:ext cx="3108960" cy="3959352"/>
           </a:xfrm>
           <a:prstGeom prst="rect">
             <a:avLst/>
@@ -13283,7 +13436,7 @@
           <a:lstStyle/>
           <a:p>
             <a:pPr algn="l">
-              <a:defRPr sz="969" b="0">
+              <a:defRPr sz="960" b="0">
                 <a:solidFill>
                   <a:srgbClr val="475467"/>
                 </a:solidFill>
@@ -13291,38 +13444,19 @@
               </a:defRPr>
             </a:pPr>
             <a:r>
-              <a:rPr>
-                <a:latin typeface="Microsoft YaHei"/>
-              </a:rPr>
-              <a:t>debug-rvoutput.txt</a:t>
+              <a:t>judge/local-report/ 生成逐用例 CSV</a:t>
             </a:r>
             <a:br/>
             <a:r>
-              <a:rPr>
-                <a:latin typeface="Microsoft YaHei"/>
-              </a:rPr>
-              <a:t>debug-laoutput.txt</a:t>
+              <a:t>记录 TPASS/TFAIL/TBROK/TCONF/WARN/ALL</a:t>
             </a:r>
             <a:br/>
             <a:r>
-              <a:rPr>
-                <a:latin typeface="Microsoft YaHei"/>
-              </a:rPr>
-              <a:t>rv-output.txt</a:t>
+              <a:t>TOTAL 行作为汇报统计口径</a:t>
             </a:r>
             <a:br/>
             <a:r>
-              <a:rPr>
-                <a:latin typeface="Microsoft YaHei"/>
-              </a:rPr>
-              <a:t>la-output.txt</a:t>
-            </a:r>
-            <a:br/>
-            <a:r>
-              <a:rPr>
-                <a:latin typeface="Microsoft YaHei"/>
-              </a:rPr>
-              <a:t>串口输出和测试返回码</a:t>
+              <a:t>用于观察四组合通过率</a:t>
             </a:r>
           </a:p>
         </p:txBody>
@@ -13336,7 +13470,7 @@
         <p:spPr>
           <a:xfrm>
             <a:off x="8183879" y="1234440"/>
-            <a:ext cx="3383280" cy="4389120"/>
+            <a:ext cx="3383280" cy="4434840"/>
           </a:xfrm>
           <a:prstGeom prst="roundRect">
             <a:avLst/>
@@ -13381,7 +13515,7 @@
         <p:spPr>
           <a:xfrm>
             <a:off x="8183879" y="1234440"/>
-            <a:ext cx="68580" cy="4389120"/>
+            <a:ext cx="68580" cy="4434840"/>
           </a:xfrm>
           <a:prstGeom prst="rect">
             <a:avLst/>
@@ -13446,10 +13580,7 @@
               </a:defRPr>
             </a:pPr>
             <a:r>
-              <a:rPr>
-                <a:latin typeface="Microsoft YaHei"/>
-              </a:rPr>
-              <a:t>分析脚本</a:t>
+              <a:t>差异分析</a:t>
             </a:r>
           </a:p>
         </p:txBody>
@@ -13463,7 +13594,7 @@
         <p:spPr>
           <a:xfrm>
             <a:off x="8330183" y="1673352"/>
-            <a:ext cx="3108960" cy="3913631"/>
+            <a:ext cx="3108960" cy="3959352"/>
           </a:xfrm>
           <a:prstGeom prst="rect">
             <a:avLst/>
@@ -13477,7 +13608,7 @@
           <a:lstStyle/>
           <a:p>
             <a:pPr algn="l">
-              <a:defRPr sz="969" b="0">
+              <a:defRPr sz="960" b="0">
                 <a:solidFill>
                   <a:srgbClr val="475467"/>
                 </a:solidFill>
@@ -13485,38 +13616,19 @@
               </a:defRPr>
             </a:pPr>
             <a:r>
-              <a:rPr>
-                <a:latin typeface="Microsoft YaHei"/>
-              </a:rPr>
-              <a:t>judge/local-report/</a:t>
+              <a:t>judge/local-compare/ 与 Linux baseline 对比</a:t>
             </a:r>
             <a:br/>
             <a:r>
-              <a:rPr>
-                <a:latin typeface="Microsoft YaHei"/>
-              </a:rPr>
-              <a:t>judge/local-compare/</a:t>
+              <a:t>统计 missing/failed/partial/broken/skipped</a:t>
             </a:r>
             <a:br/>
             <a:r>
-              <a:rPr>
-                <a:latin typeface="Microsoft YaHei"/>
-              </a:rPr>
-              <a:t>baseline 对比</a:t>
+              <a:t>计算 lost_passed</a:t>
             </a:r>
             <a:br/>
             <a:r>
-              <a:rPr>
-                <a:latin typeface="Microsoft YaHei"/>
-              </a:rPr>
-              <a:t>按 case 汇总 TPASS/TFAIL</a:t>
-            </a:r>
-            <a:br/>
-            <a:r>
-              <a:rPr>
-                <a:latin typeface="Microsoft YaHei"/>
-              </a:rPr>
-              <a:t>支持失败分类和收益评估</a:t>
+              <a:t>定位高收益修复项</a:t>
             </a:r>
           </a:p>
         </p:txBody>
@@ -13591,7 +13703,7 @@
         <p:spPr>
           <a:xfrm>
             <a:off x="0" y="0"/>
-            <a:ext cx="12191695" cy="128016"/>
+            <a:ext cx="164592" cy="6858000"/>
           </a:xfrm>
           <a:prstGeom prst="rect">
             <a:avLst/>
@@ -13633,8 +13745,76 @@
         </p:nvSpPr>
         <p:spPr>
           <a:xfrm>
+            <a:off x="502920" y="347472"/>
+            <a:ext cx="8961120" cy="384048"/>
+          </a:xfrm>
+          <a:prstGeom prst="rect">
+            <a:avLst/>
+          </a:prstGeom>
+          <a:noFill/>
+        </p:spPr>
+        <p:txBody>
+          <a:bodyPr wrap="square">
+            <a:spAutoFit/>
+          </a:bodyPr>
+          <a:lstStyle/>
+          <a:p>
+            <a:r>
+              <a:rPr sz="2200" b="1">
+                <a:solidFill>
+                  <a:srgbClr val="202124"/>
+                </a:solidFill>
+                <a:latin typeface="Microsoft YaHei"/>
+              </a:rPr>
+              <a:t>本地测试结果与性能观察</a:t>
+            </a:r>
+          </a:p>
+        </p:txBody>
+      </p:sp>
+      <p:sp>
+        <p:nvSpPr>
+          <p:cNvPr id="5" name="TextBox 4"/>
+          <p:cNvSpPr txBox="1"/>
+          <p:nvPr/>
+        </p:nvSpPr>
+        <p:spPr>
+          <a:xfrm>
+            <a:off x="530352" y="786384"/>
+            <a:ext cx="9509760" cy="256032"/>
+          </a:xfrm>
+          <a:prstGeom prst="rect">
+            <a:avLst/>
+          </a:prstGeom>
+          <a:noFill/>
+        </p:spPr>
+        <p:txBody>
+          <a:bodyPr wrap="square">
+            <a:spAutoFit/>
+          </a:bodyPr>
+          <a:lstStyle/>
+          <a:p>
+            <a:r>
+              <a:rPr sz="1250" b="0">
+                <a:solidFill>
+                  <a:srgbClr val="475467"/>
+                </a:solidFill>
+                <a:latin typeface="Microsoft YaHei"/>
+              </a:rPr>
+              <a:t>用例通过率、断言统计和网络吞吐分开呈现，避免不同统计口径混排</a:t>
+            </a:r>
+          </a:p>
+        </p:txBody>
+      </p:sp>
+      <p:sp>
+        <p:nvSpPr>
+          <p:cNvPr id="6" name="TextBox 5"/>
+          <p:cNvSpPr txBox="1"/>
+          <p:nvPr/>
+        </p:nvSpPr>
+        <p:spPr>
+          <a:xfrm>
             <a:off x="10378440" y="6446520"/>
-            <a:ext cx="1325880" cy="201168"/>
+            <a:ext cx="1280160" cy="201168"/>
           </a:xfrm>
           <a:prstGeom prst="rect">
             <a:avLst/>
@@ -13642,21 +13822,16 @@
           <a:noFill/>
         </p:spPr>
         <p:txBody>
-          <a:bodyPr wrap="square" lIns="27432" rIns="27432" anchor="t">
+          <a:bodyPr wrap="square">
             <a:spAutoFit/>
           </a:bodyPr>
           <a:lstStyle/>
           <a:p>
-            <a:pPr algn="r">
-              <a:defRPr sz="850" b="0">
+            <a:r>
+              <a:rPr sz="850" b="0">
                 <a:solidFill>
                   <a:srgbClr val="667085"/>
                 </a:solidFill>
-                <a:latin typeface="Microsoft YaHei"/>
-              </a:defRPr>
-            </a:pPr>
-            <a:r>
-              <a:rPr>
                 <a:latin typeface="Microsoft YaHei"/>
               </a:rPr>
               <a:t>21 / 25</a:t>
@@ -13664,127 +13839,24 @@
           </a:p>
         </p:txBody>
       </p:sp>
-      <p:sp>
-        <p:nvSpPr>
-          <p:cNvPr id="5" name="TextBox 4"/>
-          <p:cNvSpPr txBox="1"/>
-          <p:nvPr/>
-        </p:nvSpPr>
-        <p:spPr>
-          <a:xfrm>
-            <a:off x="502920" y="347472"/>
-            <a:ext cx="9144000" cy="411480"/>
-          </a:xfrm>
-          <a:prstGeom prst="rect">
-            <a:avLst/>
-          </a:prstGeom>
-          <a:noFill/>
-        </p:spPr>
-        <p:txBody>
-          <a:bodyPr wrap="square" lIns="27432" rIns="27432" anchor="t">
-            <a:spAutoFit/>
-          </a:bodyPr>
-          <a:lstStyle/>
-          <a:p>
-            <a:pPr algn="l">
-              <a:defRPr sz="2250" b="1">
-                <a:solidFill>
-                  <a:srgbClr val="202124"/>
-                </a:solidFill>
-                <a:latin typeface="Microsoft YaHei"/>
-              </a:defRPr>
-            </a:pPr>
-            <a:r>
-              <a:rPr>
-                <a:latin typeface="Microsoft YaHei"/>
-              </a:rPr>
-              <a:t>本地 LTP 阶段性统计</a:t>
-            </a:r>
-          </a:p>
-        </p:txBody>
-      </p:sp>
-      <p:sp>
-        <p:nvSpPr>
-          <p:cNvPr id="6" name="TextBox 5"/>
-          <p:cNvSpPr txBox="1"/>
-          <p:nvPr/>
-        </p:nvSpPr>
-        <p:spPr>
-          <a:xfrm>
-            <a:off x="530352" y="768096"/>
-            <a:ext cx="10515600" cy="310896"/>
-          </a:xfrm>
-          <a:prstGeom prst="rect">
-            <a:avLst/>
-          </a:prstGeom>
-          <a:noFill/>
-        </p:spPr>
-        <p:txBody>
-          <a:bodyPr wrap="square" lIns="27432" rIns="27432" anchor="t">
-            <a:spAutoFit/>
-          </a:bodyPr>
-          <a:lstStyle/>
-          <a:p>
-            <a:pPr algn="l">
-              <a:defRPr sz="1050" b="0">
-                <a:solidFill>
-                  <a:srgbClr val="667085"/>
-                </a:solidFill>
-                <a:latin typeface="Microsoft YaHei"/>
-              </a:defRPr>
-            </a:pPr>
-            <a:r>
-              <a:rPr>
-                <a:latin typeface="Microsoft YaHei"/>
-              </a:rPr>
-              <a:t>报告来自 judge/local-report/*ltp*.csv 的 TOTAL 行</a:t>
-            </a:r>
-          </a:p>
-        </p:txBody>
-      </p:sp>
-      <p:sp>
-        <p:nvSpPr>
-          <p:cNvPr id="7" name="Rectangle 6"/>
-          <p:cNvSpPr/>
-          <p:nvPr/>
-        </p:nvSpPr>
-        <p:spPr>
-          <a:xfrm>
-            <a:off x="530352" y="1069848"/>
-            <a:ext cx="1143000" cy="32004"/>
-          </a:xfrm>
-          <a:prstGeom prst="rect">
-            <a:avLst/>
-          </a:prstGeom>
-          <a:solidFill>
-            <a:srgbClr val="8B1A2B"/>
-          </a:solidFill>
-          <a:ln>
-            <a:noFill/>
-          </a:ln>
-        </p:spPr>
-        <p:style>
-          <a:lnRef idx="1">
-            <a:schemeClr val="accent1"/>
-          </a:lnRef>
-          <a:fillRef idx="3">
-            <a:schemeClr val="accent1"/>
-          </a:fillRef>
-          <a:effectRef idx="2">
-            <a:schemeClr val="accent1"/>
-          </a:effectRef>
-          <a:fontRef idx="minor">
-            <a:schemeClr val="lt1"/>
-          </a:fontRef>
-        </p:style>
-        <p:txBody>
-          <a:bodyPr rtlCol="0" anchor="ctr"/>
-          <a:lstStyle/>
-          <a:p>
-            <a:pPr algn="ctr"/>
-          </a:p>
-        </p:txBody>
-      </p:sp>
+      <p:graphicFrame>
+        <p:nvGraphicFramePr>
+          <p:cNvPr id="7" name="Chart 6"/>
+          <p:cNvGraphicFramePr>
+            <a:graphicFrameLocks noGrp="1"/>
+          </p:cNvGraphicFramePr>
+          <p:nvPr/>
+        </p:nvGraphicFramePr>
+        <p:xfrm>
+          <a:off x="566928" y="1325880"/>
+          <a:ext cx="5074920" cy="2971800"/>
+        </p:xfrm>
+        <a:graphic>
+          <a:graphicData uri="http://schemas.openxmlformats.org/drawingml/2006/chart">
+            <c:chart xmlns:c="http://schemas.openxmlformats.org/drawingml/2006/chart" r:id="rId5"/>
+          </a:graphicData>
+        </a:graphic>
+      </p:graphicFrame>
       <p:graphicFrame>
         <p:nvGraphicFramePr>
           <p:cNvPr id="8" name="Chart 7"/>
@@ -13794,12 +13866,12 @@
           <p:nvPr/>
         </p:nvGraphicFramePr>
         <p:xfrm>
-          <a:off x="731520" y="1280160"/>
-          <a:ext cx="6400800" cy="4069080"/>
+          <a:off x="5943600" y="1325880"/>
+          <a:ext cx="4800600" cy="2971800"/>
         </p:xfrm>
         <a:graphic>
           <a:graphicData uri="http://schemas.openxmlformats.org/drawingml/2006/chart">
-            <c:chart xmlns:c="http://schemas.openxmlformats.org/drawingml/2006/chart" r:id="rId2"/>
+            <c:chart xmlns:c="http://schemas.openxmlformats.org/drawingml/2006/chart" r:id="rId6"/>
           </a:graphicData>
         </a:graphic>
       </p:graphicFrame>
@@ -13811,8 +13883,8 @@
         </p:nvSpPr>
         <p:spPr>
           <a:xfrm>
-            <a:off x="7452360" y="1325880"/>
-            <a:ext cx="3931920" cy="1005840"/>
+            <a:off x="566928" y="4617720"/>
+            <a:ext cx="3291840" cy="914400"/>
           </a:xfrm>
           <a:prstGeom prst="roundRect">
             <a:avLst/>
@@ -13850,23 +13922,93 @@
       </p:sp>
       <p:sp>
         <p:nvSpPr>
-          <p:cNvPr id="10" name="Rectangle 9"/>
+          <p:cNvPr id="10" name="TextBox 9"/>
+          <p:cNvSpPr txBox="1"/>
+          <p:nvPr/>
+        </p:nvSpPr>
+        <p:spPr>
+          <a:xfrm>
+            <a:off x="713232" y="4727448"/>
+            <a:ext cx="2999232" cy="201168"/>
+          </a:xfrm>
+          <a:prstGeom prst="rect">
+            <a:avLst/>
+          </a:prstGeom>
+          <a:noFill/>
+        </p:spPr>
+        <p:txBody>
+          <a:bodyPr wrap="square">
+            <a:spAutoFit/>
+          </a:bodyPr>
+          <a:lstStyle/>
+          <a:p>
+            <a:r>
+              <a:rPr sz="1050" b="1">
+                <a:solidFill>
+                  <a:srgbClr val="202124"/>
+                </a:solidFill>
+                <a:latin typeface="Microsoft YaHei"/>
+              </a:rPr>
+              <a:t>统计口径</a:t>
+            </a:r>
+          </a:p>
+        </p:txBody>
+      </p:sp>
+      <p:sp>
+        <p:nvSpPr>
+          <p:cNvPr id="11" name="TextBox 10"/>
+          <p:cNvSpPr txBox="1"/>
+          <p:nvPr/>
+        </p:nvSpPr>
+        <p:spPr>
+          <a:xfrm>
+            <a:off x="713232" y="5001768"/>
+            <a:ext cx="2999232" cy="438912"/>
+          </a:xfrm>
+          <a:prstGeom prst="rect">
+            <a:avLst/>
+          </a:prstGeom>
+          <a:noFill/>
+        </p:spPr>
+        <p:txBody>
+          <a:bodyPr wrap="square">
+            <a:spAutoFit/>
+          </a:bodyPr>
+          <a:lstStyle/>
+          <a:p>
+            <a:r>
+              <a:rPr sz="880" b="0">
+                <a:solidFill>
+                  <a:srgbClr val="475467"/>
+                </a:solidFill>
+                <a:latin typeface="Microsoft YaHei"/>
+              </a:rPr>
+              <a:t>正文中 LTP TOTAL 行仍使用断言级 TPASS/TFAIL/TBROK；本页左图只表达用例通过率，不和断言数直接相加。</a:t>
+            </a:r>
+          </a:p>
+        </p:txBody>
+      </p:sp>
+      <p:sp>
+        <p:nvSpPr>
+          <p:cNvPr id="12" name="Rounded Rectangle 11"/>
           <p:cNvSpPr/>
           <p:nvPr/>
         </p:nvSpPr>
         <p:spPr>
           <a:xfrm>
-            <a:off x="7452360" y="1325880"/>
-            <a:ext cx="68580" cy="1005840"/>
-          </a:xfrm>
-          <a:prstGeom prst="rect">
-            <a:avLst/>
-          </a:prstGeom>
-          <a:solidFill>
-            <a:srgbClr val="2D64E6"/>
-          </a:solidFill>
-          <a:ln>
-            <a:noFill/>
+            <a:off x="4041648" y="4617720"/>
+            <a:ext cx="3291840" cy="914400"/>
+          </a:xfrm>
+          <a:prstGeom prst="roundRect">
+            <a:avLst/>
+          </a:prstGeom>
+          <a:solidFill>
+            <a:srgbClr val="FFFFFF"/>
+          </a:solidFill>
+          <a:ln w="12700">
+            <a:solidFill>
+              <a:srgbClr val="E2E8F0"/>
+            </a:solidFill>
           </a:ln>
         </p:spPr>
         <p:style>
@@ -13893,14 +14035,14 @@
       </p:sp>
       <p:sp>
         <p:nvSpPr>
-          <p:cNvPr id="11" name="TextBox 10"/>
+          <p:cNvPr id="13" name="TextBox 12"/>
           <p:cNvSpPr txBox="1"/>
           <p:nvPr/>
         </p:nvSpPr>
         <p:spPr>
           <a:xfrm>
-            <a:off x="7598664" y="1435607"/>
-            <a:ext cx="3657600" cy="256032"/>
+            <a:off x="4187952" y="4727448"/>
+            <a:ext cx="2999232" cy="201168"/>
           </a:xfrm>
           <a:prstGeom prst="rect">
             <a:avLst/>
@@ -13908,38 +14050,33 @@
           <a:noFill/>
         </p:spPr>
         <p:txBody>
-          <a:bodyPr wrap="square" lIns="27432" rIns="27432" anchor="t">
+          <a:bodyPr wrap="square">
             <a:spAutoFit/>
           </a:bodyPr>
           <a:lstStyle/>
           <a:p>
-            <a:pPr algn="l">
-              <a:defRPr sz="1250" b="1">
+            <a:r>
+              <a:rPr sz="1050" b="1">
                 <a:solidFill>
                   <a:srgbClr val="202124"/>
                 </a:solidFill>
                 <a:latin typeface="Microsoft YaHei"/>
-              </a:defRPr>
-            </a:pPr>
-            <a:r>
-              <a:rPr>
-                <a:latin typeface="Microsoft YaHei"/>
               </a:rPr>
-              <a:t>统计口径</a:t>
-            </a:r>
-          </a:p>
-        </p:txBody>
-      </p:sp>
-      <p:sp>
-        <p:nvSpPr>
-          <p:cNvPr id="12" name="TextBox 11"/>
+              <a:t>吞吐来源</a:t>
+            </a:r>
+          </a:p>
+        </p:txBody>
+      </p:sp>
+      <p:sp>
+        <p:nvSpPr>
+          <p:cNvPr id="14" name="TextBox 13"/>
           <p:cNvSpPr txBox="1"/>
           <p:nvPr/>
         </p:nvSpPr>
         <p:spPr>
           <a:xfrm>
-            <a:off x="7598664" y="1764792"/>
-            <a:ext cx="3657600" cy="530352"/>
+            <a:off x="4187952" y="5001768"/>
+            <a:ext cx="2999232" cy="438912"/>
           </a:xfrm>
           <a:prstGeom prst="rect">
             <a:avLst/>
@@ -13947,38 +14084,33 @@
           <a:noFill/>
         </p:spPr>
         <p:txBody>
-          <a:bodyPr wrap="square" lIns="27432" rIns="27432" anchor="t">
+          <a:bodyPr wrap="square">
             <a:spAutoFit/>
           </a:bodyPr>
           <a:lstStyle/>
           <a:p>
-            <a:pPr algn="l">
-              <a:defRPr sz="969" b="0">
+            <a:r>
+              <a:rPr sz="880" b="0">
                 <a:solidFill>
                   <a:srgbClr val="475467"/>
                 </a:solidFill>
                 <a:latin typeface="Microsoft YaHei"/>
-              </a:defRPr>
-            </a:pPr>
-            <a:r>
-              <a:rPr>
-                <a:latin typeface="Microsoft YaHei"/>
               </a:rPr>
-              <a:t>TPASS/TFAIL/TBROK 取各 CSV 的 TOTAL 行。</a:t>
-            </a:r>
-          </a:p>
-        </p:txBody>
-      </p:sp>
-      <p:sp>
-        <p:nvSpPr>
-          <p:cNvPr id="13" name="Rounded Rectangle 12"/>
+              <a:t>iperf 数据取自 rv-output.txt 与 la-output.txt 中 BASIC_UDP/BASIC_TCP 的 receiver 行，单位统一为 Mbits/s。</a:t>
+            </a:r>
+          </a:p>
+        </p:txBody>
+      </p:sp>
+      <p:sp>
+        <p:nvSpPr>
+          <p:cNvPr id="15" name="Rounded Rectangle 14"/>
           <p:cNvSpPr/>
           <p:nvPr/>
         </p:nvSpPr>
         <p:spPr>
           <a:xfrm>
-            <a:off x="7452360" y="2606040"/>
-            <a:ext cx="3931920" cy="1005840"/>
+            <a:off x="7516368" y="4617720"/>
+            <a:ext cx="3246120" cy="914400"/>
           </a:xfrm>
           <a:prstGeom prst="roundRect">
             <a:avLst/>
@@ -14016,96 +14148,14 @@
       </p:sp>
       <p:sp>
         <p:nvSpPr>
-          <p:cNvPr id="14" name="Rectangle 13"/>
-          <p:cNvSpPr/>
-          <p:nvPr/>
-        </p:nvSpPr>
-        <p:spPr>
-          <a:xfrm>
-            <a:off x="7452360" y="2606040"/>
-            <a:ext cx="68580" cy="1005840"/>
-          </a:xfrm>
-          <a:prstGeom prst="rect">
-            <a:avLst/>
-          </a:prstGeom>
-          <a:solidFill>
-            <a:srgbClr val="129675"/>
-          </a:solidFill>
-          <a:ln>
-            <a:noFill/>
-          </a:ln>
-        </p:spPr>
-        <p:style>
-          <a:lnRef idx="1">
-            <a:schemeClr val="accent1"/>
-          </a:lnRef>
-          <a:fillRef idx="3">
-            <a:schemeClr val="accent1"/>
-          </a:fillRef>
-          <a:effectRef idx="2">
-            <a:schemeClr val="accent1"/>
-          </a:effectRef>
-          <a:fontRef idx="minor">
-            <a:schemeClr val="lt1"/>
-          </a:fontRef>
-        </p:style>
-        <p:txBody>
-          <a:bodyPr rtlCol="0" anchor="ctr"/>
-          <a:lstStyle/>
-          <a:p>
-            <a:pPr algn="ctr"/>
-          </a:p>
-        </p:txBody>
-      </p:sp>
-      <p:sp>
-        <p:nvSpPr>
-          <p:cNvPr id="15" name="TextBox 14"/>
-          <p:cNvSpPr txBox="1"/>
-          <p:nvPr/>
-        </p:nvSpPr>
-        <p:spPr>
-          <a:xfrm>
-            <a:off x="7598664" y="2715768"/>
-            <a:ext cx="3657600" cy="256032"/>
-          </a:xfrm>
-          <a:prstGeom prst="rect">
-            <a:avLst/>
-          </a:prstGeom>
-          <a:noFill/>
-        </p:spPr>
-        <p:txBody>
-          <a:bodyPr wrap="square" lIns="27432" rIns="27432" anchor="t">
-            <a:spAutoFit/>
-          </a:bodyPr>
-          <a:lstStyle/>
-          <a:p>
-            <a:pPr algn="l">
-              <a:defRPr sz="1250" b="1">
-                <a:solidFill>
-                  <a:srgbClr val="202124"/>
-                </a:solidFill>
-                <a:latin typeface="Microsoft YaHei"/>
-              </a:defRPr>
-            </a:pPr>
-            <a:r>
-              <a:rPr>
-                <a:latin typeface="Microsoft YaHei"/>
-              </a:rPr>
-              <a:t>解读方式</a:t>
-            </a:r>
-          </a:p>
-        </p:txBody>
-      </p:sp>
-      <p:sp>
-        <p:nvSpPr>
           <p:cNvPr id="16" name="TextBox 15"/>
           <p:cNvSpPr txBox="1"/>
           <p:nvPr/>
         </p:nvSpPr>
         <p:spPr>
           <a:xfrm>
-            <a:off x="7598664" y="3044952"/>
-            <a:ext cx="3657600" cy="530352"/>
+            <a:off x="7662672" y="4727448"/>
+            <a:ext cx="2953512" cy="201168"/>
           </a:xfrm>
           <a:prstGeom prst="rect">
             <a:avLst/>
@@ -14113,126 +14163,67 @@
           <a:noFill/>
         </p:spPr>
         <p:txBody>
-          <a:bodyPr wrap="square" lIns="27432" rIns="27432" anchor="t">
+          <a:bodyPr wrap="square">
             <a:spAutoFit/>
           </a:bodyPr>
           <a:lstStyle/>
           <a:p>
-            <a:pPr algn="l">
-              <a:defRPr sz="969" b="0">
+            <a:r>
+              <a:rPr sz="1050" b="1">
+                <a:solidFill>
+                  <a:srgbClr val="202124"/>
+                </a:solidFill>
+                <a:latin typeface="Microsoft YaHei"/>
+              </a:rPr>
+              <a:t>当前结论</a:t>
+            </a:r>
+          </a:p>
+        </p:txBody>
+      </p:sp>
+      <p:sp>
+        <p:nvSpPr>
+          <p:cNvPr id="17" name="TextBox 16"/>
+          <p:cNvSpPr txBox="1"/>
+          <p:nvPr/>
+        </p:nvSpPr>
+        <p:spPr>
+          <a:xfrm>
+            <a:off x="7662672" y="5001768"/>
+            <a:ext cx="2953512" cy="438912"/>
+          </a:xfrm>
+          <a:prstGeom prst="rect">
+            <a:avLst/>
+          </a:prstGeom>
+          <a:noFill/>
+        </p:spPr>
+        <p:txBody>
+          <a:bodyPr wrap="square">
+            <a:spAutoFit/>
+          </a:bodyPr>
+          <a:lstStyle/>
+          <a:p>
+            <a:r>
+              <a:rPr sz="880" b="0">
                 <a:solidFill>
                   <a:srgbClr val="475467"/>
                 </a:solidFill>
                 <a:latin typeface="Microsoft YaHei"/>
-              </a:defRPr>
-            </a:pPr>
-            <a:r>
-              <a:rPr>
-                <a:latin typeface="Microsoft YaHei"/>
               </a:rPr>
-              <a:t>用于观察阶段性回归，不等同最终比赛排名。</a:t>
-            </a:r>
-          </a:p>
-        </p:txBody>
-      </p:sp>
-      <p:sp>
-        <p:nvSpPr>
-          <p:cNvPr id="17" name="Rounded Rectangle 16"/>
-          <p:cNvSpPr/>
-          <p:nvPr/>
-        </p:nvSpPr>
-        <p:spPr>
-          <a:xfrm>
-            <a:off x="7452360" y="3886200"/>
-            <a:ext cx="3931920" cy="1005840"/>
-          </a:xfrm>
-          <a:prstGeom prst="roundRect">
-            <a:avLst/>
-          </a:prstGeom>
-          <a:solidFill>
-            <a:srgbClr val="FFFFFF"/>
-          </a:solidFill>
-          <a:ln w="12700">
-            <a:solidFill>
-              <a:srgbClr val="E2E8F0"/>
-            </a:solidFill>
-          </a:ln>
-        </p:spPr>
-        <p:style>
-          <a:lnRef idx="1">
-            <a:schemeClr val="accent1"/>
-          </a:lnRef>
-          <a:fillRef idx="3">
-            <a:schemeClr val="accent1"/>
-          </a:fillRef>
-          <a:effectRef idx="2">
-            <a:schemeClr val="accent1"/>
-          </a:effectRef>
-          <a:fontRef idx="minor">
-            <a:schemeClr val="lt1"/>
-          </a:fontRef>
-        </p:style>
-        <p:txBody>
-          <a:bodyPr rtlCol="0" anchor="ctr"/>
-          <a:lstStyle/>
-          <a:p>
-            <a:pPr algn="ctr"/>
-          </a:p>
-        </p:txBody>
-      </p:sp>
-      <p:sp>
-        <p:nvSpPr>
-          <p:cNvPr id="18" name="Rectangle 17"/>
-          <p:cNvSpPr/>
-          <p:nvPr/>
-        </p:nvSpPr>
-        <p:spPr>
-          <a:xfrm>
-            <a:off x="7452360" y="3886200"/>
-            <a:ext cx="68580" cy="1005840"/>
-          </a:xfrm>
-          <a:prstGeom prst="rect">
-            <a:avLst/>
-          </a:prstGeom>
-          <a:solidFill>
-            <a:srgbClr val="F58220"/>
-          </a:solidFill>
-          <a:ln>
-            <a:noFill/>
-          </a:ln>
-        </p:spPr>
-        <p:style>
-          <a:lnRef idx="1">
-            <a:schemeClr val="accent1"/>
-          </a:lnRef>
-          <a:fillRef idx="3">
-            <a:schemeClr val="accent1"/>
-          </a:fillRef>
-          <a:effectRef idx="2">
-            <a:schemeClr val="accent1"/>
-          </a:effectRef>
-          <a:fontRef idx="minor">
-            <a:schemeClr val="lt1"/>
-          </a:fontRef>
-        </p:style>
-        <p:txBody>
-          <a:bodyPr rtlCol="0" anchor="ctr"/>
-          <a:lstStyle/>
-          <a:p>
-            <a:pPr algn="ctr"/>
-          </a:p>
-        </p:txBody>
-      </p:sp>
-      <p:sp>
-        <p:nvSpPr>
-          <p:cNvPr id="19" name="TextBox 18"/>
+              <a:t>UDP 回环吞吐四组接近 50 Mbits/s；TCP 在 LoongArch 上约 40 Mbits/s，RISC-V 上约 27-28 Mbits/s。</a:t>
+            </a:r>
+          </a:p>
+        </p:txBody>
+      </p:sp>
+      <p:sp>
+        <p:nvSpPr>
+          <p:cNvPr id="18" name="TextBox 17"/>
           <p:cNvSpPr txBox="1"/>
           <p:nvPr/>
         </p:nvSpPr>
         <p:spPr>
           <a:xfrm>
-            <a:off x="7598664" y="3995928"/>
-            <a:ext cx="3657600" cy="256032"/>
+            <a:off x="566928" y="5715000"/>
+            <a:ext cx="9966960" cy="256032"/>
           </a:xfrm>
           <a:prstGeom prst="rect">
             <a:avLst/>
@@ -14240,63 +14231,19 @@
           <a:noFill/>
         </p:spPr>
         <p:txBody>
-          <a:bodyPr wrap="square" lIns="27432" rIns="27432" anchor="t">
+          <a:bodyPr wrap="square">
             <a:spAutoFit/>
           </a:bodyPr>
           <a:lstStyle/>
           <a:p>
-            <a:pPr algn="l">
-              <a:defRPr sz="1250" b="1">
-                <a:solidFill>
-                  <a:srgbClr val="202124"/>
-                </a:solidFill>
-                <a:latin typeface="Microsoft YaHei"/>
-              </a:defRPr>
-            </a:pPr>
-            <a:r>
-              <a:rPr>
+            <a:r>
+              <a:rPr sz="1050" b="0">
+                <a:solidFill>
+                  <a:srgbClr val="475467"/>
+                </a:solidFill>
                 <a:latin typeface="Microsoft YaHei"/>
               </a:rPr>
-              <a:t>下一步</a:t>
-            </a:r>
-          </a:p>
-        </p:txBody>
-      </p:sp>
-      <p:sp>
-        <p:nvSpPr>
-          <p:cNvPr id="20" name="TextBox 19"/>
-          <p:cNvSpPr txBox="1"/>
-          <p:nvPr/>
-        </p:nvSpPr>
-        <p:spPr>
-          <a:xfrm>
-            <a:off x="7598664" y="4325112"/>
-            <a:ext cx="3657600" cy="530352"/>
-          </a:xfrm>
-          <a:prstGeom prst="rect">
-            <a:avLst/>
-          </a:prstGeom>
-          <a:noFill/>
-        </p:spPr>
-        <p:txBody>
-          <a:bodyPr wrap="square" lIns="27432" rIns="27432" anchor="t">
-            <a:spAutoFit/>
-          </a:bodyPr>
-          <a:lstStyle/>
-          <a:p>
-            <a:pPr algn="l">
-              <a:defRPr sz="969" b="0">
-                <a:solidFill>
-                  <a:srgbClr val="475467"/>
-                </a:solidFill>
-                <a:latin typeface="Microsoft YaHei"/>
-              </a:defRPr>
-            </a:pPr>
-            <a:r>
-              <a:rPr>
-                <a:latin typeface="Microsoft YaHei"/>
-              </a:rPr>
-              <a:t>结合失败日志继续按模块归因，优先修复高收益测例。</a:t>
+              <a:t>补充：四组 LTP 断言统计为 TPASS 4992 / 5005 / 5054 / 5035，对应详细表格保留在文档正文和汇报前文中。</a:t>
             </a:r>
           </a:p>
         </p:txBody>
@@ -14436,9 +14383,6 @@
               </a:defRPr>
             </a:pPr>
             <a:r>
-              <a:rPr>
-                <a:latin typeface="Microsoft YaHei"/>
-              </a:rPr>
               <a:t>22 / 25</a:t>
             </a:r>
           </a:p>
@@ -14453,7 +14397,7 @@
         <p:spPr>
           <a:xfrm>
             <a:off x="502920" y="347472"/>
-            <a:ext cx="9144000" cy="411480"/>
+            <a:ext cx="9326880" cy="411480"/>
           </a:xfrm>
           <a:prstGeom prst="rect">
             <a:avLst/>
@@ -14475,10 +14419,7 @@
               </a:defRPr>
             </a:pPr>
             <a:r>
-              <a:rPr>
-                <a:latin typeface="Microsoft YaHei"/>
-              </a:rPr>
-              <a:t>当前问题与边界</a:t>
+              <a:t>与 Linux baseline 的差异分析</a:t>
             </a:r>
           </a:p>
         </p:txBody>
@@ -14514,10 +14455,7 @@
               </a:defRPr>
             </a:pPr>
             <a:r>
-              <a:rPr>
-                <a:latin typeface="Microsoft YaHei"/>
-              </a:rPr>
-              <a:t>剩余工作主要是 Linux ABI 细节和稳定性</a:t>
+              <a:t>剩余差距集中在文件系统与 I/O 边界</a:t>
             </a:r>
           </a:p>
         </p:txBody>
@@ -14573,8 +14511,8 @@
         </p:nvSpPr>
         <p:spPr>
           <a:xfrm>
-            <a:off x="777240" y="1143000"/>
-            <a:ext cx="10652760" cy="621792"/>
+            <a:off x="685800" y="1234440"/>
+            <a:ext cx="5166360" cy="1051560"/>
           </a:xfrm>
           <a:prstGeom prst="roundRect">
             <a:avLst/>
@@ -14618,14 +14556,14 @@
         </p:nvSpPr>
         <p:spPr>
           <a:xfrm>
-            <a:off x="777240" y="1143000"/>
-            <a:ext cx="68580" cy="621792"/>
-          </a:xfrm>
-          <a:prstGeom prst="rect">
-            <a:avLst/>
-          </a:prstGeom>
-          <a:solidFill>
-            <a:srgbClr val="8B1A2B"/>
+            <a:off x="685800" y="1234440"/>
+            <a:ext cx="68580" cy="1051560"/>
+          </a:xfrm>
+          <a:prstGeom prst="rect">
+            <a:avLst/>
+          </a:prstGeom>
+          <a:solidFill>
+            <a:srgbClr val="2D64E6"/>
           </a:solidFill>
           <a:ln>
             <a:noFill/>
@@ -14661,8 +14599,8 @@
         </p:nvSpPr>
         <p:spPr>
           <a:xfrm>
-            <a:off x="923544" y="1252728"/>
-            <a:ext cx="10378440" cy="256032"/>
+            <a:off x="832104" y="1344168"/>
+            <a:ext cx="4892040" cy="256032"/>
           </a:xfrm>
           <a:prstGeom prst="rect">
             <a:avLst/>
@@ -14684,10 +14622,7 @@
               </a:defRPr>
             </a:pPr>
             <a:r>
-              <a:rPr>
-                <a:latin typeface="Microsoft YaHei"/>
-              </a:rPr>
-              <a:t>文件系统细节</a:t>
+              <a:t>compare 总览</a:t>
             </a:r>
           </a:p>
         </p:txBody>
@@ -14700,8 +14635,8 @@
         </p:nvSpPr>
         <p:spPr>
           <a:xfrm>
-            <a:off x="923544" y="1581912"/>
-            <a:ext cx="10378440" cy="146304"/>
+            <a:off x="832104" y="1673352"/>
+            <a:ext cx="4892040" cy="576071"/>
           </a:xfrm>
           <a:prstGeom prst="rect">
             <a:avLst/>
@@ -14715,7 +14650,7 @@
           <a:lstStyle/>
           <a:p>
             <a:pPr algn="l">
-              <a:defRPr sz="969" b="0">
+              <a:defRPr sz="950" b="0">
                 <a:solidFill>
                   <a:srgbClr val="475467"/>
                 </a:solidFill>
@@ -14723,10 +14658,7 @@
               </a:defRPr>
             </a:pPr>
             <a:r>
-              <a:rPr>
-                <a:latin typeface="Microsoft YaHei"/>
-              </a:rPr>
-              <a:t>openat、link/rename/unlink、xattr、mount、软链接、权限和路径错误码</a:t>
+              <a:t>RISC-V compare 记录数 glibc/musl 为 105/105，lost_passed 为 766/761；LoongArch compare 记录数为 107/119，lost_passed 为 715/738。</a:t>
             </a:r>
           </a:p>
         </p:txBody>
@@ -14739,8 +14671,8 @@
         </p:nvSpPr>
         <p:spPr>
           <a:xfrm>
-            <a:off x="777240" y="2020824"/>
-            <a:ext cx="10652760" cy="621792"/>
+            <a:off x="6172200" y="1234440"/>
+            <a:ext cx="5166360" cy="1051560"/>
           </a:xfrm>
           <a:prstGeom prst="roundRect">
             <a:avLst/>
@@ -14784,14 +14716,14 @@
         </p:nvSpPr>
         <p:spPr>
           <a:xfrm>
-            <a:off x="777240" y="2020824"/>
-            <a:ext cx="68580" cy="621792"/>
-          </a:xfrm>
-          <a:prstGeom prst="rect">
-            <a:avLst/>
-          </a:prstGeom>
-          <a:solidFill>
-            <a:srgbClr val="2D64E6"/>
+            <a:off x="6172200" y="1234440"/>
+            <a:ext cx="68580" cy="1051560"/>
+          </a:xfrm>
+          <a:prstGeom prst="rect">
+            <a:avLst/>
+          </a:prstGeom>
+          <a:solidFill>
+            <a:srgbClr val="129675"/>
           </a:solidFill>
           <a:ln>
             <a:noFill/>
@@ -14827,8 +14759,8 @@
         </p:nvSpPr>
         <p:spPr>
           <a:xfrm>
-            <a:off x="923544" y="2130552"/>
-            <a:ext cx="10378440" cy="256032"/>
+            <a:off x="6318504" y="1344168"/>
+            <a:ext cx="4892040" cy="256032"/>
           </a:xfrm>
           <a:prstGeom prst="rect">
             <a:avLst/>
@@ -14850,10 +14782,7 @@
               </a:defRPr>
             </a:pPr>
             <a:r>
-              <a:rPr>
-                <a:latin typeface="Microsoft YaHei"/>
-              </a:rPr>
-              <a:t>内存进程组合</a:t>
+              <a:t>架构差异</a:t>
             </a:r>
           </a:p>
         </p:txBody>
@@ -14866,8 +14795,8 @@
         </p:nvSpPr>
         <p:spPr>
           <a:xfrm>
-            <a:off x="923544" y="2459736"/>
-            <a:ext cx="10378440" cy="146304"/>
+            <a:off x="6318504" y="1673352"/>
+            <a:ext cx="4892040" cy="576071"/>
           </a:xfrm>
           <a:prstGeom prst="rect">
             <a:avLst/>
@@ -14881,7 +14810,7 @@
           <a:lstStyle/>
           <a:p>
             <a:pPr algn="l">
-              <a:defRPr sz="969" b="0">
+              <a:defRPr sz="950" b="0">
                 <a:solidFill>
                   <a:srgbClr val="475467"/>
                 </a:solidFill>
@@ -14889,10 +14818,7 @@
               </a:defRPr>
             </a:pPr>
             <a:r>
-              <a:rPr>
-                <a:latin typeface="Microsoft YaHei"/>
-              </a:rPr>
-              <a:t>fork/clone/execve/exit/wait4 与 COW、mmap、futex 的组合场景</a:t>
+              <a:t>LoongArch 合计通过率略高；RISC-V glibc 差异最高，主要受到 splice07、chdir01 等 I/O 与目录语义影响。</a:t>
             </a:r>
           </a:p>
         </p:txBody>
@@ -14905,8 +14831,8 @@
         </p:nvSpPr>
         <p:spPr>
           <a:xfrm>
-            <a:off x="777240" y="2898648"/>
-            <a:ext cx="10652760" cy="621792"/>
+            <a:off x="685800" y="2606040"/>
+            <a:ext cx="3337560" cy="2560320"/>
           </a:xfrm>
           <a:prstGeom prst="roundRect">
             <a:avLst/>
@@ -14950,14 +14876,14 @@
         </p:nvSpPr>
         <p:spPr>
           <a:xfrm>
-            <a:off x="777240" y="2898648"/>
-            <a:ext cx="68580" cy="621792"/>
-          </a:xfrm>
-          <a:prstGeom prst="rect">
-            <a:avLst/>
-          </a:prstGeom>
-          <a:solidFill>
-            <a:srgbClr val="F58220"/>
+            <a:off x="685800" y="2606040"/>
+            <a:ext cx="68580" cy="2560320"/>
+          </a:xfrm>
+          <a:prstGeom prst="rect">
+            <a:avLst/>
+          </a:prstGeom>
+          <a:solidFill>
+            <a:srgbClr val="8B1A2B"/>
           </a:solidFill>
           <a:ln>
             <a:noFill/>
@@ -14993,8 +14919,8 @@
         </p:nvSpPr>
         <p:spPr>
           <a:xfrm>
-            <a:off x="923544" y="3008376"/>
-            <a:ext cx="10378440" cy="256032"/>
+            <a:off x="832104" y="2715768"/>
+            <a:ext cx="3063240" cy="256032"/>
           </a:xfrm>
           <a:prstGeom prst="rect">
             <a:avLst/>
@@ -15016,10 +14942,7 @@
               </a:defRPr>
             </a:pPr>
             <a:r>
-              <a:rPr>
-                <a:latin typeface="Microsoft YaHei"/>
-              </a:rPr>
-              <a:t>网络 socket 语义</a:t>
+              <a:t>主要 missing</a:t>
             </a:r>
           </a:p>
         </p:txBody>
@@ -15032,8 +14955,8 @@
         </p:nvSpPr>
         <p:spPr>
           <a:xfrm>
-            <a:off x="923544" y="3337560"/>
-            <a:ext cx="10378440" cy="146304"/>
+            <a:off x="832104" y="3044952"/>
+            <a:ext cx="3063240" cy="2084831"/>
           </a:xfrm>
           <a:prstGeom prst="rect">
             <a:avLst/>
@@ -15047,7 +14970,7 @@
           <a:lstStyle/>
           <a:p>
             <a:pPr algn="l">
-              <a:defRPr sz="969" b="0">
+              <a:defRPr sz="1019" b="0">
                 <a:solidFill>
                   <a:srgbClr val="475467"/>
                 </a:solidFill>
@@ -15055,10 +14978,23 @@
               </a:defRPr>
             </a:pPr>
             <a:r>
-              <a:rPr>
-                <a:latin typeface="Microsoft YaHei"/>
-              </a:rPr>
-              <a:t>非阻塞、poll 状态、option 查询、对端关闭和错误码映射</a:t>
+              <a:t>tar_tests.sh：68</a:t>
+            </a:r>
+            <a:br/>
+            <a:r>
+              <a:t>creat09：48</a:t>
+            </a:r>
+            <a:br/>
+            <a:r>
+              <a:t>file01.sh：36</a:t>
+            </a:r>
+            <a:br/>
+            <a:r>
+              <a:t>du01.sh：23</a:t>
+            </a:r>
+            <a:br/>
+            <a:r>
+              <a:t>这些项在四个组合中反复出现。</a:t>
             </a:r>
           </a:p>
         </p:txBody>
@@ -15071,8 +15007,8 @@
         </p:nvSpPr>
         <p:spPr>
           <a:xfrm>
-            <a:off x="777240" y="3776472"/>
-            <a:ext cx="10652760" cy="621792"/>
+            <a:off x="4389120" y="2606040"/>
+            <a:ext cx="3337560" cy="2560320"/>
           </a:xfrm>
           <a:prstGeom prst="roundRect">
             <a:avLst/>
@@ -15116,14 +15052,14 @@
         </p:nvSpPr>
         <p:spPr>
           <a:xfrm>
-            <a:off x="777240" y="3776472"/>
-            <a:ext cx="68580" cy="621792"/>
-          </a:xfrm>
-          <a:prstGeom prst="rect">
-            <a:avLst/>
-          </a:prstGeom>
-          <a:solidFill>
-            <a:srgbClr val="704CB6"/>
+            <a:off x="4389120" y="2606040"/>
+            <a:ext cx="68580" cy="2560320"/>
+          </a:xfrm>
+          <a:prstGeom prst="rect">
+            <a:avLst/>
+          </a:prstGeom>
+          <a:solidFill>
+            <a:srgbClr val="F58220"/>
           </a:solidFill>
           <a:ln>
             <a:noFill/>
@@ -15159,8 +15095,8 @@
         </p:nvSpPr>
         <p:spPr>
           <a:xfrm>
-            <a:off x="923544" y="3886200"/>
-            <a:ext cx="10378440" cy="256032"/>
+            <a:off x="4535424" y="2715768"/>
+            <a:ext cx="3063240" cy="256032"/>
           </a:xfrm>
           <a:prstGeom prst="rect">
             <a:avLst/>
@@ -15182,10 +15118,7 @@
               </a:defRPr>
             </a:pPr>
             <a:r>
-              <a:rPr>
-                <a:latin typeface="Microsoft YaHei"/>
-              </a:rPr>
-              <a:t>双架构一致性</a:t>
+              <a:t>主要 failed / partial</a:t>
             </a:r>
           </a:p>
         </p:txBody>
@@ -15198,8 +15131,8 @@
         </p:nvSpPr>
         <p:spPr>
           <a:xfrm>
-            <a:off x="923544" y="4215383"/>
-            <a:ext cx="10378440" cy="146304"/>
+            <a:off x="4535424" y="3044952"/>
+            <a:ext cx="3063240" cy="2084831"/>
           </a:xfrm>
           <a:prstGeom prst="rect">
             <a:avLst/>
@@ -15213,7 +15146,7 @@
           <a:lstStyle/>
           <a:p>
             <a:pPr algn="l">
-              <a:defRPr sz="969" b="0">
+              <a:defRPr sz="1019" b="0">
                 <a:solidFill>
                   <a:srgbClr val="475467"/>
                 </a:solidFill>
@@ -15221,10 +15154,19 @@
               </a:defRPr>
             </a:pPr>
             <a:r>
-              <a:rPr>
-                <a:latin typeface="Microsoft YaHei"/>
-              </a:rPr>
-              <a:t>LoongArch TLB refill、页表页回收、时钟频率和用户 ABI 差异</a:t>
+              <a:t>splice07：RISC-V lost 50</a:t>
+            </a:r>
+            <a:br/>
+            <a:r>
+              <a:t>chdir01：lost 42-46</a:t>
+            </a:r>
+            <a:br/>
+            <a:r>
+              <a:t>fsync01：lost 30</a:t>
+            </a:r>
+            <a:br/>
+            <a:r>
+              <a:t>rename01/03：lost 24 左右</a:t>
             </a:r>
           </a:p>
         </p:txBody>
@@ -15237,8 +15179,8 @@
         </p:nvSpPr>
         <p:spPr>
           <a:xfrm>
-            <a:off x="777240" y="4654296"/>
-            <a:ext cx="10652760" cy="621792"/>
+            <a:off x="8092440" y="2606040"/>
+            <a:ext cx="3337560" cy="2560320"/>
           </a:xfrm>
           <a:prstGeom prst="roundRect">
             <a:avLst/>
@@ -15282,14 +15224,14 @@
         </p:nvSpPr>
         <p:spPr>
           <a:xfrm>
-            <a:off x="777240" y="4654296"/>
-            <a:ext cx="68580" cy="621792"/>
-          </a:xfrm>
-          <a:prstGeom prst="rect">
-            <a:avLst/>
-          </a:prstGeom>
-          <a:solidFill>
-            <a:srgbClr val="129675"/>
+            <a:off x="8092440" y="2606040"/>
+            <a:ext cx="68580" cy="2560320"/>
+          </a:xfrm>
+          <a:prstGeom prst="rect">
+            <a:avLst/>
+          </a:prstGeom>
+          <a:solidFill>
+            <a:srgbClr val="704CB6"/>
           </a:solidFill>
           <a:ln>
             <a:noFill/>
@@ -15325,8 +15267,8 @@
         </p:nvSpPr>
         <p:spPr>
           <a:xfrm>
-            <a:off x="923544" y="4764024"/>
-            <a:ext cx="10378440" cy="256032"/>
+            <a:off x="8238744" y="2715768"/>
+            <a:ext cx="3063240" cy="256032"/>
           </a:xfrm>
           <a:prstGeom prst="rect">
             <a:avLst/>
@@ -15348,10 +15290,7 @@
               </a:defRPr>
             </a:pPr>
             <a:r>
-              <a:rPr>
-                <a:latin typeface="Microsoft YaHei"/>
-              </a:rPr>
-              <a:t>测试基础设施</a:t>
+              <a:t>修复方向</a:t>
             </a:r>
           </a:p>
         </p:txBody>
@@ -15364,8 +15303,8 @@
         </p:nvSpPr>
         <p:spPr>
           <a:xfrm>
-            <a:off x="923544" y="5093208"/>
-            <a:ext cx="10378440" cy="146304"/>
+            <a:off x="8238744" y="3044952"/>
+            <a:ext cx="3063240" cy="2084831"/>
           </a:xfrm>
           <a:prstGeom prst="rect">
             <a:avLst/>
@@ -15379,7 +15318,7 @@
           <a:lstStyle/>
           <a:p>
             <a:pPr algn="l">
-              <a:defRPr sz="969" b="0">
+              <a:defRPr sz="1019" b="0">
                 <a:solidFill>
                   <a:srgbClr val="475467"/>
                 </a:solidFill>
@@ -15387,10 +15326,7 @@
               </a:defRPr>
             </a:pPr>
             <a:r>
-              <a:rPr>
-                <a:latin typeface="Microsoft YaHei"/>
-              </a:rPr>
-              <a:t>失败分类、耗时统计、baseline 对比和关键日志保留还需要固定流程</a:t>
+              <a:t>优先检查目录切换、文件创建、同步写回、目录项更新、splice/sendfile 与脚本类工具依赖。</a:t>
             </a:r>
           </a:p>
         </p:txBody>
@@ -15530,9 +15466,6 @@
               </a:defRPr>
             </a:pPr>
             <a:r>
-              <a:rPr>
-                <a:latin typeface="Microsoft YaHei"/>
-              </a:rPr>
               <a:t>23 / 25</a:t>
             </a:r>
           </a:p>
@@ -15547,7 +15480,7 @@
         <p:spPr>
           <a:xfrm>
             <a:off x="502920" y="347472"/>
-            <a:ext cx="9144000" cy="411480"/>
+            <a:ext cx="9326880" cy="411480"/>
           </a:xfrm>
           <a:prstGeom prst="rect">
             <a:avLst/>
@@ -15569,9 +15502,6 @@
               </a:defRPr>
             </a:pPr>
             <a:r>
-              <a:rPr>
-                <a:latin typeface="Microsoft YaHei"/>
-              </a:rPr>
               <a:t>后续优化计划</a:t>
             </a:r>
           </a:p>
@@ -15608,10 +15538,7 @@
               </a:defRPr>
             </a:pPr>
             <a:r>
-              <a:rPr>
-                <a:latin typeface="Microsoft YaHei"/>
-              </a:rPr>
-              <a:t>按优先级推进稳定性、兼容性和可验证性</a:t>
+              <a:t>优先处理 lost_passed 最高的边界</a:t>
             </a:r>
           </a:p>
         </p:txBody>
@@ -15770,7 +15697,7 @@
           <a:lstStyle/>
           <a:p>
             <a:pPr algn="l">
-              <a:defRPr sz="1250" b="1">
+              <a:defRPr sz="1200" b="1">
                 <a:solidFill>
                   <a:srgbClr val="202124"/>
                 </a:solidFill>
@@ -15778,10 +15705,7 @@
               </a:defRPr>
             </a:pPr>
             <a:r>
-              <a:rPr>
-                <a:latin typeface="Microsoft YaHei"/>
-              </a:rPr>
-              <a:t>P0 失败测例归因</a:t>
+              <a:t>P0 文件系统差异收敛</a:t>
             </a:r>
           </a:p>
         </p:txBody>
@@ -15809,7 +15733,7 @@
           <a:lstStyle/>
           <a:p>
             <a:pPr algn="l">
-              <a:defRPr sz="969" b="0">
+              <a:defRPr sz="950" b="0">
                 <a:solidFill>
                   <a:srgbClr val="475467"/>
                 </a:solidFill>
@@ -15817,10 +15741,7 @@
               </a:defRPr>
             </a:pPr>
             <a:r>
-              <a:rPr>
-                <a:latin typeface="Microsoft YaHei"/>
-              </a:rPr>
-              <a:t>把失败按 syscall、模块、libc 差异、超时/跳过原因分类，建立固定回归表。</a:t>
+              <a:t>tar_tests.sh、creat09、file01.sh、chdir01、fsync01、rename01/03、splice07。</a:t>
             </a:r>
           </a:p>
         </p:txBody>
@@ -15936,7 +15857,7 @@
           <a:lstStyle/>
           <a:p>
             <a:pPr algn="l">
-              <a:defRPr sz="1250" b="1">
+              <a:defRPr sz="1200" b="1">
                 <a:solidFill>
                   <a:srgbClr val="202124"/>
                 </a:solidFill>
@@ -15944,10 +15865,7 @@
               </a:defRPr>
             </a:pPr>
             <a:r>
-              <a:rPr>
-                <a:latin typeface="Microsoft YaHei"/>
-              </a:rPr>
-              <a:t>P0 ABI 边界修复</a:t>
+              <a:t>P0 ABI 细节补齐</a:t>
             </a:r>
           </a:p>
         </p:txBody>
@@ -15975,7 +15893,7 @@
           <a:lstStyle/>
           <a:p>
             <a:pPr algn="l">
-              <a:defRPr sz="969" b="0">
+              <a:defRPr sz="950" b="0">
                 <a:solidFill>
                   <a:srgbClr val="475467"/>
                 </a:solidFill>
@@ -15983,10 +15901,7 @@
               </a:defRPr>
             </a:pPr>
             <a:r>
-              <a:rPr>
-                <a:latin typeface="Microsoft YaHei"/>
-              </a:rPr>
-              <a:t>集中处理错误码、权限、flag、特殊路径、阻塞/非阻塞和 poll 状态。</a:t>
+              <a:t>openat/openat2、权限检查、xattr、mount、socket option、SysV IPC、资源限制。</a:t>
             </a:r>
           </a:p>
         </p:txBody>
@@ -16102,7 +16017,7 @@
           <a:lstStyle/>
           <a:p>
             <a:pPr algn="l">
-              <a:defRPr sz="1250" b="1">
+              <a:defRPr sz="1200" b="1">
                 <a:solidFill>
                   <a:srgbClr val="202124"/>
                 </a:solidFill>
@@ -16110,10 +16025,7 @@
               </a:defRPr>
             </a:pPr>
             <a:r>
-              <a:rPr>
-                <a:latin typeface="Microsoft YaHei"/>
-              </a:rPr>
-              <a:t>P1 文件系统和内存稳定</a:t>
+              <a:t>P1 生命周期稳定</a:t>
             </a:r>
           </a:p>
         </p:txBody>
@@ -16141,7 +16053,7 @@
           <a:lstStyle/>
           <a:p>
             <a:pPr algn="l">
-              <a:defRPr sz="969" b="0">
+              <a:defRPr sz="950" b="0">
                 <a:solidFill>
                   <a:srgbClr val="475467"/>
                 </a:solidFill>
@@ -16149,10 +16061,7 @@
               </a:defRPr>
             </a:pPr>
             <a:r>
-              <a:rPr>
-                <a:latin typeface="Microsoft YaHei"/>
-              </a:rPr>
-              <a:t>加强 cache 一致性、Ext4 写回、mmap/COW/fork/exit 组合测试。</a:t>
+              <a:t>fork/clone/execve/exit/wait4 与 COW、mmap、futex、robust list 的组合场景。</a:t>
             </a:r>
           </a:p>
         </p:txBody>
@@ -16268,7 +16177,7 @@
           <a:lstStyle/>
           <a:p>
             <a:pPr algn="l">
-              <a:defRPr sz="1250" b="1">
+              <a:defRPr sz="1200" b="1">
                 <a:solidFill>
                   <a:srgbClr val="202124"/>
                 </a:solidFill>
@@ -16276,10 +16185,7 @@
               </a:defRPr>
             </a:pPr>
             <a:r>
-              <a:rPr>
-                <a:latin typeface="Microsoft YaHei"/>
-              </a:rPr>
-              <a:t>P1 双架构对照回归</a:t>
+              <a:t>P1 双架构对照</a:t>
             </a:r>
           </a:p>
         </p:txBody>
@@ -16307,7 +16213,7 @@
           <a:lstStyle/>
           <a:p>
             <a:pPr algn="l">
-              <a:defRPr sz="969" b="0">
+              <a:defRPr sz="950" b="0">
                 <a:solidFill>
                   <a:srgbClr val="475467"/>
                 </a:solidFill>
@@ -16315,10 +16221,7 @@
               </a:defRPr>
             </a:pPr>
             <a:r>
-              <a:rPr>
-                <a:latin typeface="Microsoft YaHei"/>
-              </a:rPr>
-              <a:t>RISC-V 与 LoongArch 同步验证 trap、时钟、页表、设备和用户 ABI。</a:t>
+              <a:t>固定 RISC-V 与 LoongArch 在 trap、页表、时钟、设备、用户 ABI 上的回归矩阵。</a:t>
             </a:r>
           </a:p>
         </p:txBody>
@@ -16434,7 +16337,7 @@
           <a:lstStyle/>
           <a:p>
             <a:pPr algn="l">
-              <a:defRPr sz="1250" b="1">
+              <a:defRPr sz="1200" b="1">
                 <a:solidFill>
                   <a:srgbClr val="202124"/>
                 </a:solidFill>
@@ -16442,9 +16345,6 @@
               </a:defRPr>
             </a:pPr>
             <a:r>
-              <a:rPr>
-                <a:latin typeface="Microsoft YaHei"/>
-              </a:rPr>
               <a:t>P2 网络与设备扩展</a:t>
             </a:r>
           </a:p>
@@ -16473,7 +16373,7 @@
           <a:lstStyle/>
           <a:p>
             <a:pPr algn="l">
-              <a:defRPr sz="969" b="0">
+              <a:defRPr sz="950" b="0">
                 <a:solidFill>
                   <a:srgbClr val="475467"/>
                 </a:solidFill>
@@ -16481,10 +16381,7 @@
               </a:defRPr>
             </a:pPr>
             <a:r>
-              <a:rPr>
-                <a:latin typeface="Microsoft YaHei"/>
-              </a:rPr>
-              <a:t>评估 VirtIO-net，完善 tty/random/rtc/loop 等设备文件语义。</a:t>
+              <a:t>在回环网络基础上评估 VirtIO-net，完善 tty/random/rtc/loop 等设备文件语义。</a:t>
             </a:r>
           </a:p>
         </p:txBody>
@@ -16624,9 +16521,6 @@
               </a:defRPr>
             </a:pPr>
             <a:r>
-              <a:rPr>
-                <a:latin typeface="Microsoft YaHei"/>
-              </a:rPr>
               <a:t>24 / 25</a:t>
             </a:r>
           </a:p>
@@ -16641,7 +16535,7 @@
         <p:spPr>
           <a:xfrm>
             <a:off x="502920" y="347472"/>
-            <a:ext cx="9144000" cy="411480"/>
+            <a:ext cx="9326880" cy="411480"/>
           </a:xfrm>
           <a:prstGeom prst="rect">
             <a:avLst/>
@@ -16663,9 +16557,6 @@
               </a:defRPr>
             </a:pPr>
             <a:r>
-              <a:rPr>
-                <a:latin typeface="Microsoft YaHei"/>
-              </a:rPr>
               <a:t>近期里程碑</a:t>
             </a:r>
           </a:p>
@@ -16702,10 +16593,7 @@
               </a:defRPr>
             </a:pPr>
             <a:r>
-              <a:rPr>
-                <a:latin typeface="Microsoft YaHei"/>
-              </a:rPr>
-              <a:t>把优化计划落到可执行任务</a:t>
+              <a:t>把全量报告转化为固定回归流程</a:t>
             </a:r>
           </a:p>
         </p:txBody>
@@ -16762,7 +16650,7 @@
         <p:spPr>
           <a:xfrm>
             <a:off x="731520" y="1234440"/>
-            <a:ext cx="3474720" cy="4389120"/>
+            <a:ext cx="3474720" cy="4434840"/>
           </a:xfrm>
           <a:prstGeom prst="roundRect">
             <a:avLst/>
@@ -16807,7 +16695,7 @@
         <p:spPr>
           <a:xfrm>
             <a:off x="731520" y="1234440"/>
-            <a:ext cx="68580" cy="4389120"/>
+            <a:ext cx="68580" cy="4434840"/>
           </a:xfrm>
           <a:prstGeom prst="rect">
             <a:avLst/>
@@ -16872,10 +16760,7 @@
               </a:defRPr>
             </a:pPr>
             <a:r>
-              <a:rPr>
-                <a:latin typeface="Microsoft YaHei"/>
-              </a:rPr>
-              <a:t>短期：测例收敛</a:t>
+              <a:t>短期：差异收敛</a:t>
             </a:r>
           </a:p>
         </p:txBody>
@@ -16889,7 +16774,7 @@
         <p:spPr>
           <a:xfrm>
             <a:off x="877824" y="1673352"/>
-            <a:ext cx="3200400" cy="3913631"/>
+            <a:ext cx="3200400" cy="3959352"/>
           </a:xfrm>
           <a:prstGeom prst="rect">
             <a:avLst/>
@@ -16903,7 +16788,7 @@
           <a:lstStyle/>
           <a:p>
             <a:pPr algn="l">
-              <a:defRPr sz="969" b="0">
+              <a:defRPr sz="960" b="0">
                 <a:solidFill>
                   <a:srgbClr val="475467"/>
                 </a:solidFill>
@@ -16911,31 +16796,19 @@
               </a:defRPr>
             </a:pPr>
             <a:r>
-              <a:rPr>
-                <a:latin typeface="Microsoft YaHei"/>
-              </a:rPr>
-              <a:t>整理当前失败列表</a:t>
+              <a:t>按 lost_passed 排序建立修复队列</a:t>
             </a:r>
             <a:br/>
             <a:r>
-              <a:rPr>
-                <a:latin typeface="Microsoft YaHei"/>
-              </a:rPr>
-              <a:t>优先修复高频 errno/flag 问题</a:t>
+              <a:t>优先处理文件系统与 I/O 边界</a:t>
             </a:r>
             <a:br/>
             <a:r>
-              <a:rPr>
-                <a:latin typeface="Microsoft YaHei"/>
-              </a:rPr>
-              <a:t>补充关键日志和复现命令</a:t>
+              <a:t>保留对应 rv/la 日志片段</a:t>
             </a:r>
             <a:br/>
             <a:r>
-              <a:rPr>
-                <a:latin typeface="Microsoft YaHei"/>
-              </a:rPr>
-              <a:t>稳定四组合本地报告</a:t>
+              <a:t>每次修复同步更新 local-report</a:t>
             </a:r>
           </a:p>
         </p:txBody>
@@ -16949,7 +16822,7 @@
         <p:spPr>
           <a:xfrm>
             <a:off x="4343400" y="1234440"/>
-            <a:ext cx="3474720" cy="4389120"/>
+            <a:ext cx="3474720" cy="4434840"/>
           </a:xfrm>
           <a:prstGeom prst="roundRect">
             <a:avLst/>
@@ -16994,7 +16867,7 @@
         <p:spPr>
           <a:xfrm>
             <a:off x="4343400" y="1234440"/>
-            <a:ext cx="68580" cy="4389120"/>
+            <a:ext cx="68580" cy="4434840"/>
           </a:xfrm>
           <a:prstGeom prst="rect">
             <a:avLst/>
@@ -17059,9 +16932,6 @@
               </a:defRPr>
             </a:pPr>
             <a:r>
-              <a:rPr>
-                <a:latin typeface="Microsoft YaHei"/>
-              </a:rPr>
               <a:t>中期：路径加固</a:t>
             </a:r>
           </a:p>
@@ -17076,7 +16946,7 @@
         <p:spPr>
           <a:xfrm>
             <a:off x="4489704" y="1673352"/>
-            <a:ext cx="3200400" cy="3913631"/>
+            <a:ext cx="3200400" cy="3959352"/>
           </a:xfrm>
           <a:prstGeom prst="rect">
             <a:avLst/>
@@ -17090,7 +16960,7 @@
           <a:lstStyle/>
           <a:p>
             <a:pPr algn="l">
-              <a:defRPr sz="969" b="0">
+              <a:defRPr sz="960" b="0">
                 <a:solidFill>
                   <a:srgbClr val="475467"/>
                 </a:solidFill>
@@ -17098,31 +16968,19 @@
               </a:defRPr>
             </a:pPr>
             <a:r>
-              <a:rPr>
-                <a:latin typeface="Microsoft YaHei"/>
-              </a:rPr>
-              <a:t>文件系统写回和目录操作</a:t>
+              <a:t>Ext4 写回和目录项更新</a:t>
             </a:r>
             <a:br/>
             <a:r>
-              <a:rPr>
-                <a:latin typeface="Microsoft YaHei"/>
-              </a:rPr>
-              <a:t>COW/mmap/fork 组合</a:t>
+              <a:t>COW/mmap/fork/exit 组合</a:t>
             </a:r>
             <a:br/>
             <a:r>
-              <a:rPr>
-                <a:latin typeface="Microsoft YaHei"/>
-              </a:rPr>
-              <a:t>futex/robust list 边界</a:t>
+              <a:t>futex/robust list 退出边界</a:t>
             </a:r>
             <a:br/>
             <a:r>
-              <a:rPr>
-                <a:latin typeface="Microsoft YaHei"/>
-              </a:rPr>
-              <a:t>socket 非阻塞与 poll</a:t>
+              <a:t>socket 非阻塞和 poll 状态</a:t>
             </a:r>
           </a:p>
         </p:txBody>
@@ -17136,7 +16994,7 @@
         <p:spPr>
           <a:xfrm>
             <a:off x="7955279" y="1234440"/>
-            <a:ext cx="3474720" cy="4389120"/>
+            <a:ext cx="3474720" cy="4434840"/>
           </a:xfrm>
           <a:prstGeom prst="roundRect">
             <a:avLst/>
@@ -17181,7 +17039,7 @@
         <p:spPr>
           <a:xfrm>
             <a:off x="7955279" y="1234440"/>
-            <a:ext cx="68580" cy="4389120"/>
+            <a:ext cx="68580" cy="4434840"/>
           </a:xfrm>
           <a:prstGeom prst="rect">
             <a:avLst/>
@@ -17246,9 +17104,6 @@
               </a:defRPr>
             </a:pPr>
             <a:r>
-              <a:rPr>
-                <a:latin typeface="Microsoft YaHei"/>
-              </a:rPr>
               <a:t>长期：能力扩展</a:t>
             </a:r>
           </a:p>
@@ -17263,7 +17118,7 @@
         <p:spPr>
           <a:xfrm>
             <a:off x="8101583" y="1673352"/>
-            <a:ext cx="3200400" cy="3913631"/>
+            <a:ext cx="3200400" cy="3959352"/>
           </a:xfrm>
           <a:prstGeom prst="rect">
             <a:avLst/>
@@ -17277,7 +17132,7 @@
           <a:lstStyle/>
           <a:p>
             <a:pPr algn="l">
-              <a:defRPr sz="969" b="0">
+              <a:defRPr sz="960" b="0">
                 <a:solidFill>
                   <a:srgbClr val="475467"/>
                 </a:solidFill>
@@ -17285,31 +17140,19 @@
               </a:defRPr>
             </a:pPr>
             <a:r>
-              <a:rPr>
-                <a:latin typeface="Microsoft YaHei"/>
-              </a:rPr>
-              <a:t>真实网卡或 VirtIO-net</a:t>
+              <a:t>VirtIO-net 或更完整网络设备</a:t>
             </a:r>
             <a:br/>
             <a:r>
-              <a:rPr>
-                <a:latin typeface="Microsoft YaHei"/>
-              </a:rPr>
-              <a:t>更完整设备文件</a:t>
+              <a:t>更完整 tty/random/rtc/loop 语义</a:t>
             </a:r>
             <a:br/>
             <a:r>
-              <a:rPr>
-                <a:latin typeface="Microsoft YaHei"/>
-              </a:rPr>
-              <a:t>更系统的双架构 CI</a:t>
+              <a:t>双架构固定回归脚本</a:t>
             </a:r>
             <a:br/>
             <a:r>
-              <a:rPr>
-                <a:latin typeface="Microsoft YaHei"/>
-              </a:rPr>
-              <a:t>文档与测试同步维护</a:t>
+              <a:t>文档与测试数据同步维护</a:t>
             </a:r>
           </a:p>
         </p:txBody>
@@ -17449,9 +17292,6 @@
               </a:defRPr>
             </a:pPr>
             <a:r>
-              <a:rPr>
-                <a:latin typeface="Microsoft YaHei"/>
-              </a:rPr>
               <a:t>25 / 25</a:t>
             </a:r>
           </a:p>
@@ -17466,7 +17306,7 @@
         <p:spPr>
           <a:xfrm>
             <a:off x="502920" y="347472"/>
-            <a:ext cx="9144000" cy="411480"/>
+            <a:ext cx="9509760" cy="384048"/>
           </a:xfrm>
           <a:prstGeom prst="rect">
             <a:avLst/>
@@ -17480,7 +17320,7 @@
           <a:lstStyle/>
           <a:p>
             <a:pPr algn="l">
-              <a:defRPr sz="2250" b="1">
+              <a:defRPr sz="2200" b="1">
                 <a:solidFill>
                   <a:srgbClr val="202124"/>
                 </a:solidFill>
@@ -17488,9 +17328,6 @@
               </a:defRPr>
             </a:pPr>
             <a:r>
-              <a:rPr>
-                <a:latin typeface="Microsoft YaHei"/>
-              </a:rPr>
               <a:t>总结</a:t>
             </a:r>
           </a:p>
@@ -17505,7 +17342,7 @@
         <p:spPr>
           <a:xfrm>
             <a:off x="530352" y="768096"/>
-            <a:ext cx="10515600" cy="310896"/>
+            <a:ext cx="10424160" cy="274320"/>
           </a:xfrm>
           <a:prstGeom prst="rect">
             <a:avLst/>
@@ -17519,7 +17356,7 @@
           <a:lstStyle/>
           <a:p>
             <a:pPr algn="l">
-              <a:defRPr sz="1050" b="0">
+              <a:defRPr sz="1019" b="0">
                 <a:solidFill>
                   <a:srgbClr val="667085"/>
                 </a:solidFill>
@@ -17527,10 +17364,7 @@
               </a:defRPr>
             </a:pPr>
             <a:r>
-              <a:rPr>
-                <a:latin typeface="Microsoft YaHei"/>
-              </a:rPr>
-              <a:t>RespOS 已进入“主路径成形、细节收敛”的阶段</a:t>
+              <a:t>最终版 RespOS 已进入测试驱动收敛阶段</a:t>
             </a:r>
           </a:p>
         </p:txBody>
@@ -17543,7 +17377,7 @@
         </p:nvSpPr>
         <p:spPr>
           <a:xfrm>
-            <a:off x="530352" y="1069848"/>
+            <a:off x="530352" y="1060704"/>
             <a:ext cx="1143000" cy="32004"/>
           </a:xfrm>
           <a:prstGeom prst="rect">
@@ -17586,8 +17420,8 @@
         </p:nvSpPr>
         <p:spPr>
           <a:xfrm>
-            <a:off x="777240" y="1234440"/>
-            <a:ext cx="10607040" cy="914400"/>
+            <a:off x="868680" y="1234440"/>
+            <a:ext cx="10378440" cy="822960"/>
           </a:xfrm>
           <a:prstGeom prst="roundRect">
             <a:avLst/>
@@ -17631,8 +17465,8 @@
         </p:nvSpPr>
         <p:spPr>
           <a:xfrm>
-            <a:off x="777240" y="1234440"/>
-            <a:ext cx="68580" cy="914400"/>
+            <a:off x="868680" y="1234440"/>
+            <a:ext cx="64008" cy="822960"/>
           </a:xfrm>
           <a:prstGeom prst="rect">
             <a:avLst/>
@@ -17674,8 +17508,8 @@
         </p:nvSpPr>
         <p:spPr>
           <a:xfrm>
-            <a:off x="923544" y="1344168"/>
-            <a:ext cx="10332719" cy="256032"/>
+            <a:off x="1005839" y="1325880"/>
+            <a:ext cx="10104119" cy="256032"/>
           </a:xfrm>
           <a:prstGeom prst="rect">
             <a:avLst/>
@@ -17689,7 +17523,7 @@
           <a:lstStyle/>
           <a:p>
             <a:pPr algn="l">
-              <a:defRPr sz="1250" b="1">
+              <a:defRPr sz="1200" b="1">
                 <a:solidFill>
                   <a:srgbClr val="202124"/>
                 </a:solidFill>
@@ -17697,9 +17531,6 @@
               </a:defRPr>
             </a:pPr>
             <a:r>
-              <a:rPr>
-                <a:latin typeface="Microsoft YaHei"/>
-              </a:rPr>
               <a:t>当前成果</a:t>
             </a:r>
           </a:p>
@@ -17713,8 +17544,8 @@
         </p:nvSpPr>
         <p:spPr>
           <a:xfrm>
-            <a:off x="923544" y="1673352"/>
-            <a:ext cx="10332719" cy="438912"/>
+            <a:off x="1005839" y="1627632"/>
+            <a:ext cx="10104119" cy="402336"/>
           </a:xfrm>
           <a:prstGeom prst="rect">
             <a:avLst/>
@@ -17728,7 +17559,7 @@
           <a:lstStyle/>
           <a:p>
             <a:pPr algn="l">
-              <a:defRPr sz="969" b="0">
+              <a:defRPr sz="919" b="0">
                 <a:solidFill>
                   <a:srgbClr val="475467"/>
                 </a:solidFill>
@@ -17736,10 +17567,7 @@
               </a:defRPr>
             </a:pPr>
             <a:r>
-              <a:rPr>
-                <a:latin typeface="Microsoft YaHei"/>
-              </a:rPr>
-              <a:t>双架构宏内核主体已经具备用户态程序运行所需的任务、内存、文件、信号、IPC、时间、网络和设备主路径。</a:t>
+              <a:t>216 个 syscall dispatch；四组 LTP 断言通过率 96.91%-97.63%；RISC-V 与 LoongArch 均完成全量输出和 CSV 报告。</a:t>
             </a:r>
           </a:p>
         </p:txBody>
@@ -17752,8 +17580,8 @@
         </p:nvSpPr>
         <p:spPr>
           <a:xfrm>
-            <a:off x="777240" y="2423160"/>
-            <a:ext cx="10607040" cy="914400"/>
+            <a:off x="868680" y="2331720"/>
+            <a:ext cx="10378440" cy="822960"/>
           </a:xfrm>
           <a:prstGeom prst="roundRect">
             <a:avLst/>
@@ -17797,8 +17625,8 @@
         </p:nvSpPr>
         <p:spPr>
           <a:xfrm>
-            <a:off x="777240" y="2423160"/>
-            <a:ext cx="68580" cy="914400"/>
+            <a:off x="868680" y="2331720"/>
+            <a:ext cx="64008" cy="822960"/>
           </a:xfrm>
           <a:prstGeom prst="rect">
             <a:avLst/>
@@ -17840,8 +17668,8 @@
         </p:nvSpPr>
         <p:spPr>
           <a:xfrm>
-            <a:off x="923544" y="2532888"/>
-            <a:ext cx="10332719" cy="256032"/>
+            <a:off x="1005839" y="2423160"/>
+            <a:ext cx="10104119" cy="256032"/>
           </a:xfrm>
           <a:prstGeom prst="rect">
             <a:avLst/>
@@ -17855,7 +17683,7 @@
           <a:lstStyle/>
           <a:p>
             <a:pPr algn="l">
-              <a:defRPr sz="1250" b="1">
+              <a:defRPr sz="1200" b="1">
                 <a:solidFill>
                   <a:srgbClr val="202124"/>
                 </a:solidFill>
@@ -17863,9 +17691,6 @@
               </a:defRPr>
             </a:pPr>
             <a:r>
-              <a:rPr>
-                <a:latin typeface="Microsoft YaHei"/>
-              </a:rPr>
               <a:t>当前重点</a:t>
             </a:r>
           </a:p>
@@ -17879,8 +17704,8 @@
         </p:nvSpPr>
         <p:spPr>
           <a:xfrm>
-            <a:off x="923544" y="2862072"/>
-            <a:ext cx="10332719" cy="438912"/>
+            <a:off x="1005839" y="2724912"/>
+            <a:ext cx="10104119" cy="402336"/>
           </a:xfrm>
           <a:prstGeom prst="rect">
             <a:avLst/>
@@ -17894,7 +17719,7 @@
           <a:lstStyle/>
           <a:p>
             <a:pPr algn="l">
-              <a:defRPr sz="969" b="0">
+              <a:defRPr sz="919" b="0">
                 <a:solidFill>
                   <a:srgbClr val="475467"/>
                 </a:solidFill>
@@ -17902,10 +17727,7 @@
               </a:defRPr>
             </a:pPr>
             <a:r>
-              <a:rPr>
-                <a:latin typeface="Microsoft YaHei"/>
-              </a:rPr>
-              <a:t>用本地 LTP 报告驱动失败分类和模块修复，持续压缩 Linux ABI 差异和长测不稳定点。</a:t>
+              <a:t>差异集中在文件系统和 I/O：tar/file 脚本、creat、chdir、fsync、rename、splice/sendfile、权限与路径错误码。</a:t>
             </a:r>
           </a:p>
         </p:txBody>
@@ -17918,8 +17740,8 @@
         </p:nvSpPr>
         <p:spPr>
           <a:xfrm>
-            <a:off x="777240" y="3611880"/>
-            <a:ext cx="10607040" cy="914400"/>
+            <a:off x="868680" y="3429000"/>
+            <a:ext cx="10378440" cy="822960"/>
           </a:xfrm>
           <a:prstGeom prst="roundRect">
             <a:avLst/>
@@ -17963,8 +17785,8 @@
         </p:nvSpPr>
         <p:spPr>
           <a:xfrm>
-            <a:off x="777240" y="3611880"/>
-            <a:ext cx="68580" cy="914400"/>
+            <a:off x="868680" y="3429000"/>
+            <a:ext cx="64008" cy="822960"/>
           </a:xfrm>
           <a:prstGeom prst="rect">
             <a:avLst/>
@@ -18006,8 +17828,8 @@
         </p:nvSpPr>
         <p:spPr>
           <a:xfrm>
-            <a:off x="923544" y="3721608"/>
-            <a:ext cx="10332719" cy="256032"/>
+            <a:off x="1005839" y="3520440"/>
+            <a:ext cx="10104119" cy="256032"/>
           </a:xfrm>
           <a:prstGeom prst="rect">
             <a:avLst/>
@@ -18021,7 +17843,7 @@
           <a:lstStyle/>
           <a:p>
             <a:pPr algn="l">
-              <a:defRPr sz="1250" b="1">
+              <a:defRPr sz="1200" b="1">
                 <a:solidFill>
                   <a:srgbClr val="202124"/>
                 </a:solidFill>
@@ -18029,9 +17851,6 @@
               </a:defRPr>
             </a:pPr>
             <a:r>
-              <a:rPr>
-                <a:latin typeface="Microsoft YaHei"/>
-              </a:rPr>
               <a:t>后续方向</a:t>
             </a:r>
           </a:p>
@@ -18045,8 +17864,8 @@
         </p:nvSpPr>
         <p:spPr>
           <a:xfrm>
-            <a:off x="923544" y="4050791"/>
-            <a:ext cx="10332719" cy="438912"/>
+            <a:off x="1005839" y="3822191"/>
+            <a:ext cx="10104119" cy="402336"/>
           </a:xfrm>
           <a:prstGeom prst="rect">
             <a:avLst/>
@@ -18060,7 +17879,7 @@
           <a:lstStyle/>
           <a:p>
             <a:pPr algn="l">
-              <a:defRPr sz="969" b="0">
+              <a:defRPr sz="919" b="0">
                 <a:solidFill>
                   <a:srgbClr val="475467"/>
                 </a:solidFill>
@@ -18068,10 +17887,7 @@
               </a:defRPr>
             </a:pPr>
             <a:r>
-              <a:rPr>
-                <a:latin typeface="Microsoft YaHei"/>
-              </a:rPr>
-              <a:t>稳定性优先于大范围扩展；先固定回归流程和高收益修复，再扩展网络设备、设备文件和更完整兼容语义。</a:t>
+              <a:t>按 lost_passed 排序推进高收益修复，并固定 RISC-V/LoongArch 与 glibc/musl 四组合回归。</a:t>
             </a:r>
           </a:p>
         </p:txBody>
@@ -18084,8 +17900,8 @@
         </p:nvSpPr>
         <p:spPr>
           <a:xfrm>
-            <a:off x="777240" y="5715000"/>
-            <a:ext cx="10607040" cy="411480"/>
+            <a:off x="868680" y="5715000"/>
+            <a:ext cx="10378440" cy="365760"/>
           </a:xfrm>
           <a:prstGeom prst="rect">
             <a:avLst/>
@@ -18099,7 +17915,7 @@
           <a:lstStyle/>
           <a:p>
             <a:pPr algn="ctr">
-              <a:defRPr sz="2400" b="1">
+              <a:defRPr sz="1800" b="1">
                 <a:solidFill>
                   <a:srgbClr val="8B1A2B"/>
                 </a:solidFill>
@@ -18107,10 +17923,7 @@
               </a:defRPr>
             </a:pPr>
             <a:r>
-              <a:rPr>
-                <a:latin typeface="Microsoft YaHei"/>
-              </a:rPr>
-              <a:t>谢谢</a:t>
+              <a:t>RespOS 初赛进展汇报</a:t>
             </a:r>
           </a:p>
         </p:txBody>
@@ -20792,9 +20605,6 @@
               </a:defRPr>
             </a:pPr>
             <a:r>
-              <a:rPr>
-                <a:latin typeface="Microsoft YaHei"/>
-              </a:rPr>
               <a:t>06 / 25</a:t>
             </a:r>
           </a:p>
@@ -20809,7 +20619,7 @@
         <p:spPr>
           <a:xfrm>
             <a:off x="502920" y="347472"/>
-            <a:ext cx="9144000" cy="411480"/>
+            <a:ext cx="9326880" cy="411480"/>
           </a:xfrm>
           <a:prstGeom prst="rect">
             <a:avLst/>
@@ -20831,9 +20641,6 @@
               </a:defRPr>
             </a:pPr>
             <a:r>
-              <a:rPr>
-                <a:latin typeface="Microsoft YaHei"/>
-              </a:rPr>
               <a:t>开发进度时间线</a:t>
             </a:r>
           </a:p>
@@ -20870,10 +20677,7 @@
               </a:defRPr>
             </a:pPr>
             <a:r>
-              <a:rPr>
-                <a:latin typeface="Microsoft YaHei"/>
-              </a:rPr>
-              <a:t>从基础启动到可系统性跑测例</a:t>
+              <a:t>最终版已经完成双架构全量测例回归</a:t>
             </a:r>
           </a:p>
         </p:txBody>
@@ -20929,8 +20733,8 @@
         </p:nvSpPr>
         <p:spPr>
           <a:xfrm>
-            <a:off x="822960" y="1417320"/>
-            <a:ext cx="1920240" cy="3383280"/>
+            <a:off x="685800" y="1325880"/>
+            <a:ext cx="1993392" cy="3337560"/>
           </a:xfrm>
           <a:prstGeom prst="roundRect">
             <a:avLst/>
@@ -20974,8 +20778,8 @@
         </p:nvSpPr>
         <p:spPr>
           <a:xfrm>
-            <a:off x="822960" y="1417320"/>
-            <a:ext cx="68580" cy="3383280"/>
+            <a:off x="685800" y="1325880"/>
+            <a:ext cx="68580" cy="3337560"/>
           </a:xfrm>
           <a:prstGeom prst="rect">
             <a:avLst/>
@@ -21017,8 +20821,8 @@
         </p:nvSpPr>
         <p:spPr>
           <a:xfrm>
-            <a:off x="969264" y="1527048"/>
-            <a:ext cx="1645920" cy="256032"/>
+            <a:off x="832104" y="1435607"/>
+            <a:ext cx="1719072" cy="256032"/>
           </a:xfrm>
           <a:prstGeom prst="rect">
             <a:avLst/>
@@ -21032,7 +20836,7 @@
           <a:lstStyle/>
           <a:p>
             <a:pPr algn="l">
-              <a:defRPr sz="1150" b="1">
+              <a:defRPr sz="1120" b="1">
                 <a:solidFill>
                   <a:srgbClr val="202124"/>
                 </a:solidFill>
@@ -21040,10 +20844,7 @@
               </a:defRPr>
             </a:pPr>
             <a:r>
-              <a:rPr>
-                <a:latin typeface="Microsoft YaHei"/>
-              </a:rPr>
-              <a:t>启动与内存</a:t>
+              <a:t>基础内核</a:t>
             </a:r>
           </a:p>
         </p:txBody>
@@ -21056,8 +20857,8 @@
         </p:nvSpPr>
         <p:spPr>
           <a:xfrm>
-            <a:off x="969264" y="1856232"/>
-            <a:ext cx="1645920" cy="2907792"/>
+            <a:off x="832104" y="1764792"/>
+            <a:ext cx="1719072" cy="2862072"/>
           </a:xfrm>
           <a:prstGeom prst="rect">
             <a:avLst/>
@@ -21071,7 +20872,7 @@
           <a:lstStyle/>
           <a:p>
             <a:pPr algn="l">
-              <a:defRPr sz="919" b="0">
+              <a:defRPr sz="890" b="0">
                 <a:solidFill>
                   <a:srgbClr val="475467"/>
                 </a:solidFill>
@@ -21079,10 +20880,7 @@
               </a:defRPr>
             </a:pPr>
             <a:r>
-              <a:rPr>
-                <a:latin typeface="Microsoft YaHei"/>
-              </a:rPr>
-              <a:t>entry、trap、页表、堆和页帧分配</a:t>
+              <a:t>启动、trap、页表、堆和页帧分配</a:t>
             </a:r>
           </a:p>
         </p:txBody>
@@ -21095,8 +20893,8 @@
         </p:nvSpPr>
         <p:spPr>
           <a:xfrm>
-            <a:off x="2670048" y="2788920"/>
-            <a:ext cx="384048" cy="201168"/>
+            <a:off x="2606040" y="2697480"/>
+            <a:ext cx="320040" cy="182880"/>
           </a:xfrm>
           <a:prstGeom prst="rightArrow">
             <a:avLst/>
@@ -21138,8 +20936,8 @@
         </p:nvSpPr>
         <p:spPr>
           <a:xfrm>
-            <a:off x="3063240" y="1417320"/>
-            <a:ext cx="1920240" cy="3383280"/>
+            <a:off x="2990088" y="1325880"/>
+            <a:ext cx="1993392" cy="3337560"/>
           </a:xfrm>
           <a:prstGeom prst="roundRect">
             <a:avLst/>
@@ -21183,8 +20981,8 @@
         </p:nvSpPr>
         <p:spPr>
           <a:xfrm>
-            <a:off x="3063240" y="1417320"/>
-            <a:ext cx="68580" cy="3383280"/>
+            <a:off x="2990088" y="1325880"/>
+            <a:ext cx="68580" cy="3337560"/>
           </a:xfrm>
           <a:prstGeom prst="rect">
             <a:avLst/>
@@ -21226,8 +21024,8 @@
         </p:nvSpPr>
         <p:spPr>
           <a:xfrm>
-            <a:off x="3209544" y="1527048"/>
-            <a:ext cx="1645920" cy="256032"/>
+            <a:off x="3136392" y="1435607"/>
+            <a:ext cx="1719072" cy="256032"/>
           </a:xfrm>
           <a:prstGeom prst="rect">
             <a:avLst/>
@@ -21241,7 +21039,7 @@
           <a:lstStyle/>
           <a:p>
             <a:pPr algn="l">
-              <a:defRPr sz="1150" b="1">
+              <a:defRPr sz="1120" b="1">
                 <a:solidFill>
                   <a:srgbClr val="202124"/>
                 </a:solidFill>
@@ -21249,10 +21047,7 @@
               </a:defRPr>
             </a:pPr>
             <a:r>
-              <a:rPr>
-                <a:latin typeface="Microsoft YaHei"/>
-              </a:rPr>
-              <a:t>进程文件</a:t>
+              <a:t>用户态链路</a:t>
             </a:r>
           </a:p>
         </p:txBody>
@@ -21265,8 +21060,8 @@
         </p:nvSpPr>
         <p:spPr>
           <a:xfrm>
-            <a:off x="3209544" y="1856232"/>
-            <a:ext cx="1645920" cy="2907792"/>
+            <a:off x="3136392" y="1764792"/>
+            <a:ext cx="1719072" cy="2862072"/>
           </a:xfrm>
           <a:prstGeom prst="rect">
             <a:avLst/>
@@ -21280,7 +21075,7 @@
           <a:lstStyle/>
           <a:p>
             <a:pPr algn="l">
-              <a:defRPr sz="919" b="0">
+              <a:defRPr sz="890" b="0">
                 <a:solidFill>
                   <a:srgbClr val="475467"/>
                 </a:solidFill>
@@ -21288,10 +21083,7 @@
               </a:defRPr>
             </a:pPr>
             <a:r>
-              <a:rPr>
-                <a:latin typeface="Microsoft YaHei"/>
-              </a:rPr>
-              <a:t>TCB、调度、fd、VFS、Ext4</a:t>
+              <a:t>TCB、调度、fd、VFS、Ext4、ELF</a:t>
             </a:r>
           </a:p>
         </p:txBody>
@@ -21304,8 +21096,8 @@
         </p:nvSpPr>
         <p:spPr>
           <a:xfrm>
-            <a:off x="4910328" y="2788920"/>
-            <a:ext cx="384048" cy="201168"/>
+            <a:off x="4910328" y="2697480"/>
+            <a:ext cx="320040" cy="182880"/>
           </a:xfrm>
           <a:prstGeom prst="rightArrow">
             <a:avLst/>
@@ -21347,8 +21139,8 @@
         </p:nvSpPr>
         <p:spPr>
           <a:xfrm>
-            <a:off x="5303520" y="1417320"/>
-            <a:ext cx="1920240" cy="3383280"/>
+            <a:off x="5294376" y="1325880"/>
+            <a:ext cx="1993392" cy="3337560"/>
           </a:xfrm>
           <a:prstGeom prst="roundRect">
             <a:avLst/>
@@ -21392,8 +21184,8 @@
         </p:nvSpPr>
         <p:spPr>
           <a:xfrm>
-            <a:off x="5303520" y="1417320"/>
-            <a:ext cx="68580" cy="3383280"/>
+            <a:off x="5294376" y="1325880"/>
+            <a:ext cx="68580" cy="3337560"/>
           </a:xfrm>
           <a:prstGeom prst="rect">
             <a:avLst/>
@@ -21435,8 +21227,8 @@
         </p:nvSpPr>
         <p:spPr>
           <a:xfrm>
-            <a:off x="5449824" y="1527048"/>
-            <a:ext cx="1645920" cy="256032"/>
+            <a:off x="5440680" y="1435607"/>
+            <a:ext cx="1719072" cy="256032"/>
           </a:xfrm>
           <a:prstGeom prst="rect">
             <a:avLst/>
@@ -21450,7 +21242,7 @@
           <a:lstStyle/>
           <a:p>
             <a:pPr algn="l">
-              <a:defRPr sz="1150" b="1">
+              <a:defRPr sz="1120" b="1">
                 <a:solidFill>
                   <a:srgbClr val="202124"/>
                 </a:solidFill>
@@ -21458,9 +21250,6 @@
               </a:defRPr>
             </a:pPr>
             <a:r>
-              <a:rPr>
-                <a:latin typeface="Microsoft YaHei"/>
-              </a:rPr>
               <a:t>兼容语义</a:t>
             </a:r>
           </a:p>
@@ -21474,8 +21263,8 @@
         </p:nvSpPr>
         <p:spPr>
           <a:xfrm>
-            <a:off x="5449824" y="1856232"/>
-            <a:ext cx="1645920" cy="2907792"/>
+            <a:off x="5440680" y="1764792"/>
+            <a:ext cx="1719072" cy="2862072"/>
           </a:xfrm>
           <a:prstGeom prst="rect">
             <a:avLst/>
@@ -21489,7 +21278,7 @@
           <a:lstStyle/>
           <a:p>
             <a:pPr algn="l">
-              <a:defRPr sz="919" b="0">
+              <a:defRPr sz="890" b="0">
                 <a:solidFill>
                   <a:srgbClr val="475467"/>
                 </a:solidFill>
@@ -21497,10 +21286,7 @@
               </a:defRPr>
             </a:pPr>
             <a:r>
-              <a:rPr>
-                <a:latin typeface="Microsoft YaHei"/>
-              </a:rPr>
-              <a:t>mmap/COW、信号、IPC、时间</a:t>
+              <a:t>mmap/COW、信号、IPC、时间、socket</a:t>
             </a:r>
           </a:p>
         </p:txBody>
@@ -21513,8 +21299,8 @@
         </p:nvSpPr>
         <p:spPr>
           <a:xfrm>
-            <a:off x="7150608" y="2788920"/>
-            <a:ext cx="384048" cy="201168"/>
+            <a:off x="7214616" y="2697480"/>
+            <a:ext cx="320040" cy="182880"/>
           </a:xfrm>
           <a:prstGeom prst="rightArrow">
             <a:avLst/>
@@ -21556,8 +21342,8 @@
         </p:nvSpPr>
         <p:spPr>
           <a:xfrm>
-            <a:off x="7543800" y="1417320"/>
-            <a:ext cx="1920240" cy="3383280"/>
+            <a:off x="7598664" y="1325880"/>
+            <a:ext cx="1993392" cy="3337560"/>
           </a:xfrm>
           <a:prstGeom prst="roundRect">
             <a:avLst/>
@@ -21601,8 +21387,8 @@
         </p:nvSpPr>
         <p:spPr>
           <a:xfrm>
-            <a:off x="7543800" y="1417320"/>
-            <a:ext cx="68580" cy="3383280"/>
+            <a:off x="7598664" y="1325880"/>
+            <a:ext cx="68580" cy="3337560"/>
           </a:xfrm>
           <a:prstGeom prst="rect">
             <a:avLst/>
@@ -21644,8 +21430,8 @@
         </p:nvSpPr>
         <p:spPr>
           <a:xfrm>
-            <a:off x="7690104" y="1527048"/>
-            <a:ext cx="1645920" cy="256032"/>
+            <a:off x="7744968" y="1435607"/>
+            <a:ext cx="1719072" cy="256032"/>
           </a:xfrm>
           <a:prstGeom prst="rect">
             <a:avLst/>
@@ -21659,7 +21445,7 @@
           <a:lstStyle/>
           <a:p>
             <a:pPr algn="l">
-              <a:defRPr sz="1150" b="1">
+              <a:defRPr sz="1120" b="1">
                 <a:solidFill>
                   <a:srgbClr val="202124"/>
                 </a:solidFill>
@@ -21667,10 +21453,7 @@
               </a:defRPr>
             </a:pPr>
             <a:r>
-              <a:rPr>
-                <a:latin typeface="Microsoft YaHei"/>
-              </a:rPr>
-              <a:t>双架构扩展</a:t>
+              <a:t>双架构收敛</a:t>
             </a:r>
           </a:p>
         </p:txBody>
@@ -21683,8 +21466,8 @@
         </p:nvSpPr>
         <p:spPr>
           <a:xfrm>
-            <a:off x="7690104" y="1856232"/>
-            <a:ext cx="1645920" cy="2907792"/>
+            <a:off x="7744968" y="1764792"/>
+            <a:ext cx="1719072" cy="2862072"/>
           </a:xfrm>
           <a:prstGeom prst="rect">
             <a:avLst/>
@@ -21698,7 +21481,7 @@
           <a:lstStyle/>
           <a:p>
             <a:pPr algn="l">
-              <a:defRPr sz="919" b="0">
+              <a:defRPr sz="890" b="0">
                 <a:solidFill>
                   <a:srgbClr val="475467"/>
                 </a:solidFill>
@@ -21706,10 +21489,7 @@
               </a:defRPr>
             </a:pPr>
             <a:r>
-              <a:rPr>
-                <a:latin typeface="Microsoft YaHei"/>
-              </a:rPr>
-              <a:t>LoongArch 启动、页表、trap、设备</a:t>
+              <a:t>LoongArch 页表/TLB、PCI、UART、RISC-V SBI</a:t>
             </a:r>
           </a:p>
         </p:txBody>
@@ -21722,8 +21502,8 @@
         </p:nvSpPr>
         <p:spPr>
           <a:xfrm>
-            <a:off x="9390888" y="2788920"/>
-            <a:ext cx="384048" cy="201168"/>
+            <a:off x="9518904" y="2697480"/>
+            <a:ext cx="320040" cy="182880"/>
           </a:xfrm>
           <a:prstGeom prst="rightArrow">
             <a:avLst/>
@@ -21765,8 +21545,8 @@
         </p:nvSpPr>
         <p:spPr>
           <a:xfrm>
-            <a:off x="9784080" y="1417320"/>
-            <a:ext cx="1920240" cy="3383280"/>
+            <a:off x="9902952" y="1325880"/>
+            <a:ext cx="1993392" cy="3337560"/>
           </a:xfrm>
           <a:prstGeom prst="roundRect">
             <a:avLst/>
@@ -21810,8 +21590,8 @@
         </p:nvSpPr>
         <p:spPr>
           <a:xfrm>
-            <a:off x="9784080" y="1417320"/>
-            <a:ext cx="68580" cy="3383280"/>
+            <a:off x="9902952" y="1325880"/>
+            <a:ext cx="68580" cy="3337560"/>
           </a:xfrm>
           <a:prstGeom prst="rect">
             <a:avLst/>
@@ -21853,8 +21633,8 @@
         </p:nvSpPr>
         <p:spPr>
           <a:xfrm>
-            <a:off x="9930384" y="1527048"/>
-            <a:ext cx="1645920" cy="256032"/>
+            <a:off x="10049256" y="1435607"/>
+            <a:ext cx="1719072" cy="256032"/>
           </a:xfrm>
           <a:prstGeom prst="rect">
             <a:avLst/>
@@ -21868,7 +21648,7 @@
           <a:lstStyle/>
           <a:p>
             <a:pPr algn="l">
-              <a:defRPr sz="1150" b="1">
+              <a:defRPr sz="1120" b="1">
                 <a:solidFill>
                   <a:srgbClr val="202124"/>
                 </a:solidFill>
@@ -21876,10 +21656,7 @@
               </a:defRPr>
             </a:pPr>
             <a:r>
-              <a:rPr>
-                <a:latin typeface="Microsoft YaHei"/>
-              </a:rPr>
-              <a:t>回归整理</a:t>
+              <a:t>全量回归</a:t>
             </a:r>
           </a:p>
         </p:txBody>
@@ -21892,8 +21669,8 @@
         </p:nvSpPr>
         <p:spPr>
           <a:xfrm>
-            <a:off x="9930384" y="1856232"/>
-            <a:ext cx="1645920" cy="2907792"/>
+            <a:off x="10049256" y="1764792"/>
+            <a:ext cx="1719072" cy="2862072"/>
           </a:xfrm>
           <a:prstGeom prst="rect">
             <a:avLst/>
@@ -21907,7 +21684,7 @@
           <a:lstStyle/>
           <a:p>
             <a:pPr algn="l">
-              <a:defRPr sz="919" b="0">
+              <a:defRPr sz="890" b="0">
                 <a:solidFill>
                   <a:srgbClr val="475467"/>
                 </a:solidFill>
@@ -21915,10 +21692,7 @@
               </a:defRPr>
             </a:pPr>
             <a:r>
-              <a:rPr>
-                <a:latin typeface="Microsoft YaHei"/>
-              </a:rPr>
-              <a:t>LTP 报告、失败分类、文档汇总</a:t>
+              <a:t>rv-output/la-output、local-report、local-compare</a:t>
             </a:r>
           </a:p>
         </p:txBody>
@@ -21931,8 +21705,8 @@
         </p:nvSpPr>
         <p:spPr>
           <a:xfrm>
-            <a:off x="822960" y="5212080"/>
-            <a:ext cx="10652760" cy="640080"/>
+            <a:off x="777240" y="5166360"/>
+            <a:ext cx="10607040" cy="731520"/>
           </a:xfrm>
           <a:prstGeom prst="roundRect">
             <a:avLst/>
@@ -21976,8 +21750,8 @@
         </p:nvSpPr>
         <p:spPr>
           <a:xfrm>
-            <a:off x="822960" y="5212080"/>
-            <a:ext cx="68580" cy="640080"/>
+            <a:off x="777240" y="5166360"/>
+            <a:ext cx="68580" cy="731520"/>
           </a:xfrm>
           <a:prstGeom prst="rect">
             <a:avLst/>
@@ -22019,8 +21793,8 @@
         </p:nvSpPr>
         <p:spPr>
           <a:xfrm>
-            <a:off x="969264" y="5321808"/>
-            <a:ext cx="10378440" cy="256032"/>
+            <a:off x="923544" y="5276088"/>
+            <a:ext cx="10332719" cy="256032"/>
           </a:xfrm>
           <a:prstGeom prst="rect">
             <a:avLst/>
@@ -22042,9 +21816,6 @@
               </a:defRPr>
             </a:pPr>
             <a:r>
-              <a:rPr>
-                <a:latin typeface="Microsoft YaHei"/>
-              </a:rPr>
               <a:t>当前判断</a:t>
             </a:r>
           </a:p>
@@ -22058,8 +21829,8 @@
         </p:nvSpPr>
         <p:spPr>
           <a:xfrm>
-            <a:off x="969264" y="5650992"/>
-            <a:ext cx="10378440" cy="164591"/>
+            <a:off x="923544" y="5605272"/>
+            <a:ext cx="10332719" cy="256032"/>
           </a:xfrm>
           <a:prstGeom prst="rect">
             <a:avLst/>
@@ -22073,7 +21844,7 @@
           <a:lstStyle/>
           <a:p>
             <a:pPr algn="l">
-              <a:defRPr sz="969" b="0">
+              <a:defRPr sz="960" b="0">
                 <a:solidFill>
                   <a:srgbClr val="475467"/>
                 </a:solidFill>
@@ -22081,10 +21852,7 @@
               </a:defRPr>
             </a:pPr>
             <a:r>
-              <a:rPr>
-                <a:latin typeface="Microsoft YaHei"/>
-              </a:rPr>
-              <a:t>核心功能主路径已经成形，后续开发更依赖高质量回归和对 Linux ABI 细节的持续收敛。</a:t>
+              <a:t>主路径已经打通并完成全量 LTP 回归；后续收益最高的工作是按 compare CSV 收敛文件系统/I/O 差异，而不是继续扩张模块数量。</a:t>
             </a:r>
           </a:p>
         </p:txBody>
@@ -22109,92 +21877,6 @@
       <p:grpSpPr/>
       <p:sp>
         <p:nvSpPr>
-          <p:cNvPr id="2" name="Rectangle 1"/>
-          <p:cNvSpPr/>
-          <p:nvPr/>
-        </p:nvSpPr>
-        <p:spPr>
-          <a:xfrm>
-            <a:off x="0" y="0"/>
-            <a:ext cx="12191695" cy="6858000"/>
-          </a:xfrm>
-          <a:prstGeom prst="rect">
-            <a:avLst/>
-          </a:prstGeom>
-          <a:solidFill>
-            <a:srgbClr val="FFFFFF"/>
-          </a:solidFill>
-          <a:ln>
-            <a:noFill/>
-          </a:ln>
-        </p:spPr>
-        <p:style>
-          <a:lnRef idx="1">
-            <a:schemeClr val="accent1"/>
-          </a:lnRef>
-          <a:fillRef idx="3">
-            <a:schemeClr val="accent1"/>
-          </a:fillRef>
-          <a:effectRef idx="2">
-            <a:schemeClr val="accent1"/>
-          </a:effectRef>
-          <a:fontRef idx="minor">
-            <a:schemeClr val="lt1"/>
-          </a:fontRef>
-        </p:style>
-        <p:txBody>
-          <a:bodyPr rtlCol="0" anchor="ctr"/>
-          <a:lstStyle/>
-          <a:p>
-            <a:pPr algn="ctr"/>
-          </a:p>
-        </p:txBody>
-      </p:sp>
-      <p:sp>
-        <p:nvSpPr>
-          <p:cNvPr id="3" name="Rectangle 2"/>
-          <p:cNvSpPr/>
-          <p:nvPr/>
-        </p:nvSpPr>
-        <p:spPr>
-          <a:xfrm>
-            <a:off x="0" y="0"/>
-            <a:ext cx="12191695" cy="128016"/>
-          </a:xfrm>
-          <a:prstGeom prst="rect">
-            <a:avLst/>
-          </a:prstGeom>
-          <a:solidFill>
-            <a:srgbClr val="8B1A2B"/>
-          </a:solidFill>
-          <a:ln>
-            <a:noFill/>
-          </a:ln>
-        </p:spPr>
-        <p:style>
-          <a:lnRef idx="1">
-            <a:schemeClr val="accent1"/>
-          </a:lnRef>
-          <a:fillRef idx="3">
-            <a:schemeClr val="accent1"/>
-          </a:fillRef>
-          <a:effectRef idx="2">
-            <a:schemeClr val="accent1"/>
-          </a:effectRef>
-          <a:fontRef idx="minor">
-            <a:schemeClr val="lt1"/>
-          </a:fontRef>
-        </p:style>
-        <p:txBody>
-          <a:bodyPr rtlCol="0" anchor="ctr"/>
-          <a:lstStyle/>
-          <a:p>
-            <a:pPr algn="ctr"/>
-          </a:p>
-        </p:txBody>
-      </p:sp>
-      <p:sp>
-        <p:nvSpPr>
           <p:cNvPr id="4" name="TextBox 3"/>
           <p:cNvSpPr txBox="1"/>
           <p:nvPr/>
@@ -22224,9 +21906,6 @@
               </a:defRPr>
             </a:pPr>
             <a:r>
-              <a:rPr>
-                <a:latin typeface="Microsoft YaHei"/>
-              </a:rPr>
               <a:t>07 / 25</a:t>
             </a:r>
           </a:p>
@@ -22241,7 +21920,7 @@
         <p:spPr>
           <a:xfrm>
             <a:off x="502920" y="347472"/>
-            <a:ext cx="9144000" cy="411480"/>
+            <a:ext cx="9509760" cy="384048"/>
           </a:xfrm>
           <a:prstGeom prst="rect">
             <a:avLst/>
@@ -22255,7 +21934,7 @@
           <a:lstStyle/>
           <a:p>
             <a:pPr algn="l">
-              <a:defRPr sz="2250" b="1">
+              <a:defRPr sz="2200" b="1">
                 <a:solidFill>
                   <a:srgbClr val="202124"/>
                 </a:solidFill>
@@ -22263,9 +21942,6 @@
               </a:defRPr>
             </a:pPr>
             <a:r>
-              <a:rPr>
-                <a:latin typeface="Microsoft YaHei"/>
-              </a:rPr>
               <a:t>总体架构</a:t>
             </a:r>
           </a:p>
@@ -22280,7 +21956,7 @@
         <p:spPr>
           <a:xfrm>
             <a:off x="530352" y="768096"/>
-            <a:ext cx="10515600" cy="310896"/>
+            <a:ext cx="10424160" cy="274320"/>
           </a:xfrm>
           <a:prstGeom prst="rect">
             <a:avLst/>
@@ -22294,7 +21970,7 @@
           <a:lstStyle/>
           <a:p>
             <a:pPr algn="l">
-              <a:defRPr sz="1050" b="0">
+              <a:defRPr sz="1019" b="0">
                 <a:solidFill>
                   <a:srgbClr val="667085"/>
                 </a:solidFill>
@@ -22302,99 +21978,68 @@
               </a:defRPr>
             </a:pPr>
             <a:r>
-              <a:rPr>
-                <a:latin typeface="Microsoft YaHei"/>
-              </a:rPr>
               <a:t>宏内核结构，关键路径直接协作</a:t>
             </a:r>
           </a:p>
         </p:txBody>
       </p:sp>
-      <p:sp>
-        <p:nvSpPr>
-          <p:cNvPr id="7" name="Rectangle 6"/>
-          <p:cNvSpPr/>
-          <p:nvPr/>
-        </p:nvSpPr>
-        <p:spPr>
-          <a:xfrm>
-            <a:off x="530352" y="1069848"/>
-            <a:ext cx="1143000" cy="32004"/>
-          </a:xfrm>
-          <a:prstGeom prst="rect">
-            <a:avLst/>
-          </a:prstGeom>
-          <a:solidFill>
-            <a:srgbClr val="8B1A2B"/>
-          </a:solidFill>
-          <a:ln>
-            <a:noFill/>
-          </a:ln>
-        </p:spPr>
-        <p:style>
-          <a:lnRef idx="1">
-            <a:schemeClr val="accent1"/>
-          </a:lnRef>
-          <a:fillRef idx="3">
-            <a:schemeClr val="accent1"/>
-          </a:fillRef>
-          <a:effectRef idx="2">
-            <a:schemeClr val="accent1"/>
-          </a:effectRef>
-          <a:fontRef idx="minor">
-            <a:schemeClr val="lt1"/>
-          </a:fontRef>
-        </p:style>
-        <p:txBody>
-          <a:bodyPr rtlCol="0" anchor="ctr"/>
-          <a:lstStyle/>
-          <a:p>
-            <a:pPr algn="ctr"/>
-          </a:p>
-        </p:txBody>
-      </p:sp>
-      <p:sp>
-        <p:nvSpPr>
-          <p:cNvPr id="8" name="Rounded Rectangle 7"/>
-          <p:cNvSpPr/>
-          <p:nvPr/>
-        </p:nvSpPr>
-        <p:spPr>
-          <a:xfrm>
-            <a:off x="1051560" y="1234440"/>
-            <a:ext cx="10058400" cy="566928"/>
-          </a:xfrm>
-          <a:prstGeom prst="roundRect">
-            <a:avLst/>
-          </a:prstGeom>
-          <a:solidFill>
-            <a:srgbClr val="F8FAFC"/>
-          </a:solidFill>
-          <a:ln w="12700">
-            <a:solidFill>
-              <a:srgbClr val="D2DAE6"/>
-            </a:solidFill>
-          </a:ln>
-        </p:spPr>
-        <p:style>
-          <a:lnRef idx="1">
-            <a:schemeClr val="accent1"/>
-          </a:lnRef>
-          <a:fillRef idx="3">
-            <a:schemeClr val="accent1"/>
-          </a:fillRef>
-          <a:effectRef idx="2">
-            <a:schemeClr val="accent1"/>
-          </a:effectRef>
-          <a:fontRef idx="minor">
-            <a:schemeClr val="lt1"/>
-          </a:fontRef>
-        </p:style>
-        <p:txBody>
-          <a:bodyPr rtlCol="0" anchor="ctr"/>
-          <a:lstStyle/>
-          <a:p>
-            <a:pPr algn="ctr"/>
+      <p:pic>
+        <p:nvPicPr>
+          <p:cNvPr id="7" name="Picture 6" descr="architecture.png"/>
+          <p:cNvPicPr>
+            <a:picLocks noChangeAspect="1"/>
+          </p:cNvPicPr>
+          <p:nvPr/>
+        </p:nvPicPr>
+        <p:blipFill>
+          <a:blip r:embed="rId2"/>
+          <a:stretch>
+            <a:fillRect/>
+          </a:stretch>
+        </p:blipFill>
+        <p:spPr>
+          <a:xfrm>
+            <a:off x="1363827" y="1078992"/>
+            <a:ext cx="9464040" cy="5364928"/>
+          </a:xfrm>
+          <a:prstGeom prst="rect">
+            <a:avLst/>
+          </a:prstGeom>
+        </p:spPr>
+      </p:pic>
+      <p:sp>
+        <p:nvSpPr>
+          <p:cNvPr id="8" name="TextBox 7"/>
+          <p:cNvSpPr txBox="1"/>
+          <p:nvPr/>
+        </p:nvSpPr>
+        <p:spPr>
+          <a:xfrm>
+            <a:off x="658368" y="5870448"/>
+            <a:ext cx="10561320" cy="347472"/>
+          </a:xfrm>
+          <a:prstGeom prst="rect">
+            <a:avLst/>
+          </a:prstGeom>
+          <a:noFill/>
+        </p:spPr>
+        <p:txBody>
+          <a:bodyPr wrap="none">
+            <a:spAutoFit/>
+          </a:bodyPr>
+          <a:lstStyle/>
+          <a:p>
+            <a:pPr>
+              <a:defRPr sz="1300">
+                <a:solidFill>
+                  <a:srgbClr val="475467"/>
+                </a:solidFill>
+                <a:latin typeface="Microsoft YaHei"/>
+              </a:defRPr>
+            </a:pPr>
+            <a:r>
+              <a:t>架构图来自 docs/初赛文档/figures/architecture.svg，展示用户态测试负载、系统调用入口、内核核心服务与双架构硬件抽象的协作边界。</a:t>
+            </a:r>
           </a:p>
         </p:txBody>
       </p:sp>
@@ -22406,8 +22051,8 @@
         </p:nvSpPr>
         <p:spPr>
           <a:xfrm>
-            <a:off x="1325880" y="1344168"/>
-            <a:ext cx="1828800" cy="228600"/>
+            <a:off x="10378440" y="6446520"/>
+            <a:ext cx="1280160" cy="201168"/>
           </a:xfrm>
           <a:prstGeom prst="rect">
             <a:avLst/>
@@ -22415,52 +22060,13 @@
           <a:noFill/>
         </p:spPr>
         <p:txBody>
-          <a:bodyPr wrap="square" lIns="27432" rIns="27432" anchor="t">
+          <a:bodyPr wrap="none">
             <a:spAutoFit/>
           </a:bodyPr>
           <a:lstStyle/>
           <a:p>
-            <a:pPr algn="l">
-              <a:defRPr sz="1200" b="1">
-                <a:solidFill>
-                  <a:srgbClr val="202124"/>
-                </a:solidFill>
-                <a:latin typeface="Microsoft YaHei"/>
-              </a:defRPr>
-            </a:pPr>
-            <a:r>
-              <a:rPr>
-                <a:latin typeface="Microsoft YaHei"/>
-              </a:rPr>
-              <a:t>用户态</a:t>
-            </a:r>
-          </a:p>
-        </p:txBody>
-      </p:sp>
-      <p:sp>
-        <p:nvSpPr>
-          <p:cNvPr id="10" name="TextBox 9"/>
-          <p:cNvSpPr txBox="1"/>
-          <p:nvPr/>
-        </p:nvSpPr>
-        <p:spPr>
-          <a:xfrm>
-            <a:off x="2971800" y="1362456"/>
-            <a:ext cx="7680960" cy="228600"/>
-          </a:xfrm>
-          <a:prstGeom prst="rect">
-            <a:avLst/>
-          </a:prstGeom>
-          <a:noFill/>
-        </p:spPr>
-        <p:txBody>
-          <a:bodyPr wrap="square" lIns="27432" rIns="27432" anchor="t">
-            <a:spAutoFit/>
-          </a:bodyPr>
-          <a:lstStyle/>
-          <a:p>
-            <a:pPr algn="l">
-              <a:defRPr sz="1050" b="0">
+            <a:pPr>
+              <a:defRPr sz="1300">
                 <a:solidFill>
                   <a:srgbClr val="475467"/>
                 </a:solidFill>
@@ -22468,668 +22074,7 @@
               </a:defRPr>
             </a:pPr>
             <a:r>
-              <a:rPr>
-                <a:latin typeface="Microsoft YaHei"/>
-              </a:rPr>
-              <a:t>busybox / libc / LTP / shell</a:t>
-            </a:r>
-          </a:p>
-        </p:txBody>
-      </p:sp>
-      <p:sp>
-        <p:nvSpPr>
-          <p:cNvPr id="11" name="Rounded Rectangle 10"/>
-          <p:cNvSpPr/>
-          <p:nvPr/>
-        </p:nvSpPr>
-        <p:spPr>
-          <a:xfrm>
-            <a:off x="1051560" y="2039112"/>
-            <a:ext cx="10058400" cy="566928"/>
-          </a:xfrm>
-          <a:prstGeom prst="roundRect">
-            <a:avLst/>
-          </a:prstGeom>
-          <a:solidFill>
-            <a:srgbClr val="F1F5FF"/>
-          </a:solidFill>
-          <a:ln w="12700">
-            <a:solidFill>
-              <a:srgbClr val="D2DAE6"/>
-            </a:solidFill>
-          </a:ln>
-        </p:spPr>
-        <p:style>
-          <a:lnRef idx="1">
-            <a:schemeClr val="accent1"/>
-          </a:lnRef>
-          <a:fillRef idx="3">
-            <a:schemeClr val="accent1"/>
-          </a:fillRef>
-          <a:effectRef idx="2">
-            <a:schemeClr val="accent1"/>
-          </a:effectRef>
-          <a:fontRef idx="minor">
-            <a:schemeClr val="lt1"/>
-          </a:fontRef>
-        </p:style>
-        <p:txBody>
-          <a:bodyPr rtlCol="0" anchor="ctr"/>
-          <a:lstStyle/>
-          <a:p>
-            <a:pPr algn="ctr"/>
-          </a:p>
-        </p:txBody>
-      </p:sp>
-      <p:sp>
-        <p:nvSpPr>
-          <p:cNvPr id="12" name="TextBox 11"/>
-          <p:cNvSpPr txBox="1"/>
-          <p:nvPr/>
-        </p:nvSpPr>
-        <p:spPr>
-          <a:xfrm>
-            <a:off x="1325880" y="2148840"/>
-            <a:ext cx="1828800" cy="228600"/>
-          </a:xfrm>
-          <a:prstGeom prst="rect">
-            <a:avLst/>
-          </a:prstGeom>
-          <a:noFill/>
-        </p:spPr>
-        <p:txBody>
-          <a:bodyPr wrap="square" lIns="27432" rIns="27432" anchor="t">
-            <a:spAutoFit/>
-          </a:bodyPr>
-          <a:lstStyle/>
-          <a:p>
-            <a:pPr algn="l">
-              <a:defRPr sz="1200" b="1">
-                <a:solidFill>
-                  <a:srgbClr val="202124"/>
-                </a:solidFill>
-                <a:latin typeface="Microsoft YaHei"/>
-              </a:defRPr>
-            </a:pPr>
-            <a:r>
-              <a:rPr>
-                <a:latin typeface="Microsoft YaHei"/>
-              </a:rPr>
-              <a:t>系统调用层</a:t>
-            </a:r>
-          </a:p>
-        </p:txBody>
-      </p:sp>
-      <p:sp>
-        <p:nvSpPr>
-          <p:cNvPr id="13" name="TextBox 12"/>
-          <p:cNvSpPr txBox="1"/>
-          <p:nvPr/>
-        </p:nvSpPr>
-        <p:spPr>
-          <a:xfrm>
-            <a:off x="2971800" y="2167128"/>
-            <a:ext cx="7680960" cy="228600"/>
-          </a:xfrm>
-          <a:prstGeom prst="rect">
-            <a:avLst/>
-          </a:prstGeom>
-          <a:noFill/>
-        </p:spPr>
-        <p:txBody>
-          <a:bodyPr wrap="square" lIns="27432" rIns="27432" anchor="t">
-            <a:spAutoFit/>
-          </a:bodyPr>
-          <a:lstStyle/>
-          <a:p>
-            <a:pPr algn="l">
-              <a:defRPr sz="1050" b="0">
-                <a:solidFill>
-                  <a:srgbClr val="475467"/>
-                </a:solidFill>
-                <a:latin typeface="Microsoft YaHei"/>
-              </a:defRPr>
-            </a:pPr>
-            <a:r>
-              <a:rPr>
-                <a:latin typeface="Microsoft YaHei"/>
-              </a:rPr>
-              <a:t>fs / process / mm / time / net / ipc / special_fd</a:t>
-            </a:r>
-          </a:p>
-        </p:txBody>
-      </p:sp>
-      <p:sp>
-        <p:nvSpPr>
-          <p:cNvPr id="14" name="Rounded Rectangle 13"/>
-          <p:cNvSpPr/>
-          <p:nvPr/>
-        </p:nvSpPr>
-        <p:spPr>
-          <a:xfrm>
-            <a:off x="1051560" y="2843784"/>
-            <a:ext cx="10058400" cy="566928"/>
-          </a:xfrm>
-          <a:prstGeom prst="roundRect">
-            <a:avLst/>
-          </a:prstGeom>
-          <a:solidFill>
-            <a:srgbClr val="ECFDF5"/>
-          </a:solidFill>
-          <a:ln w="12700">
-            <a:solidFill>
-              <a:srgbClr val="D2DAE6"/>
-            </a:solidFill>
-          </a:ln>
-        </p:spPr>
-        <p:style>
-          <a:lnRef idx="1">
-            <a:schemeClr val="accent1"/>
-          </a:lnRef>
-          <a:fillRef idx="3">
-            <a:schemeClr val="accent1"/>
-          </a:fillRef>
-          <a:effectRef idx="2">
-            <a:schemeClr val="accent1"/>
-          </a:effectRef>
-          <a:fontRef idx="minor">
-            <a:schemeClr val="lt1"/>
-          </a:fontRef>
-        </p:style>
-        <p:txBody>
-          <a:bodyPr rtlCol="0" anchor="ctr"/>
-          <a:lstStyle/>
-          <a:p>
-            <a:pPr algn="ctr"/>
-          </a:p>
-        </p:txBody>
-      </p:sp>
-      <p:sp>
-        <p:nvSpPr>
-          <p:cNvPr id="15" name="TextBox 14"/>
-          <p:cNvSpPr txBox="1"/>
-          <p:nvPr/>
-        </p:nvSpPr>
-        <p:spPr>
-          <a:xfrm>
-            <a:off x="1325880" y="2953512"/>
-            <a:ext cx="1828800" cy="228600"/>
-          </a:xfrm>
-          <a:prstGeom prst="rect">
-            <a:avLst/>
-          </a:prstGeom>
-          <a:noFill/>
-        </p:spPr>
-        <p:txBody>
-          <a:bodyPr wrap="square" lIns="27432" rIns="27432" anchor="t">
-            <a:spAutoFit/>
-          </a:bodyPr>
-          <a:lstStyle/>
-          <a:p>
-            <a:pPr algn="l">
-              <a:defRPr sz="1200" b="1">
-                <a:solidFill>
-                  <a:srgbClr val="202124"/>
-                </a:solidFill>
-                <a:latin typeface="Microsoft YaHei"/>
-              </a:defRPr>
-            </a:pPr>
-            <a:r>
-              <a:rPr>
-                <a:latin typeface="Microsoft YaHei"/>
-              </a:rPr>
-              <a:t>核心服务</a:t>
-            </a:r>
-          </a:p>
-        </p:txBody>
-      </p:sp>
-      <p:sp>
-        <p:nvSpPr>
-          <p:cNvPr id="16" name="TextBox 15"/>
-          <p:cNvSpPr txBox="1"/>
-          <p:nvPr/>
-        </p:nvSpPr>
-        <p:spPr>
-          <a:xfrm>
-            <a:off x="2971800" y="2971800"/>
-            <a:ext cx="7680960" cy="228600"/>
-          </a:xfrm>
-          <a:prstGeom prst="rect">
-            <a:avLst/>
-          </a:prstGeom>
-          <a:noFill/>
-        </p:spPr>
-        <p:txBody>
-          <a:bodyPr wrap="square" lIns="27432" rIns="27432" anchor="t">
-            <a:spAutoFit/>
-          </a:bodyPr>
-          <a:lstStyle/>
-          <a:p>
-            <a:pPr algn="l">
-              <a:defRPr sz="1050" b="0">
-                <a:solidFill>
-                  <a:srgbClr val="475467"/>
-                </a:solidFill>
-                <a:latin typeface="Microsoft YaHei"/>
-              </a:defRPr>
-            </a:pPr>
-            <a:r>
-              <a:rPr>
-                <a:latin typeface="Microsoft YaHei"/>
-              </a:rPr>
-              <a:t>task / mm / fs / signal / timer / net</a:t>
-            </a:r>
-          </a:p>
-        </p:txBody>
-      </p:sp>
-      <p:sp>
-        <p:nvSpPr>
-          <p:cNvPr id="17" name="Rounded Rectangle 16"/>
-          <p:cNvSpPr/>
-          <p:nvPr/>
-        </p:nvSpPr>
-        <p:spPr>
-          <a:xfrm>
-            <a:off x="1051560" y="3648456"/>
-            <a:ext cx="10058400" cy="566928"/>
-          </a:xfrm>
-          <a:prstGeom prst="roundRect">
-            <a:avLst/>
-          </a:prstGeom>
-          <a:solidFill>
-            <a:srgbClr val="FFF7ED"/>
-          </a:solidFill>
-          <a:ln w="12700">
-            <a:solidFill>
-              <a:srgbClr val="D2DAE6"/>
-            </a:solidFill>
-          </a:ln>
-        </p:spPr>
-        <p:style>
-          <a:lnRef idx="1">
-            <a:schemeClr val="accent1"/>
-          </a:lnRef>
-          <a:fillRef idx="3">
-            <a:schemeClr val="accent1"/>
-          </a:fillRef>
-          <a:effectRef idx="2">
-            <a:schemeClr val="accent1"/>
-          </a:effectRef>
-          <a:fontRef idx="minor">
-            <a:schemeClr val="lt1"/>
-          </a:fontRef>
-        </p:style>
-        <p:txBody>
-          <a:bodyPr rtlCol="0" anchor="ctr"/>
-          <a:lstStyle/>
-          <a:p>
-            <a:pPr algn="ctr"/>
-          </a:p>
-        </p:txBody>
-      </p:sp>
-      <p:sp>
-        <p:nvSpPr>
-          <p:cNvPr id="18" name="TextBox 17"/>
-          <p:cNvSpPr txBox="1"/>
-          <p:nvPr/>
-        </p:nvSpPr>
-        <p:spPr>
-          <a:xfrm>
-            <a:off x="1325880" y="3758184"/>
-            <a:ext cx="1828800" cy="228600"/>
-          </a:xfrm>
-          <a:prstGeom prst="rect">
-            <a:avLst/>
-          </a:prstGeom>
-          <a:noFill/>
-        </p:spPr>
-        <p:txBody>
-          <a:bodyPr wrap="square" lIns="27432" rIns="27432" anchor="t">
-            <a:spAutoFit/>
-          </a:bodyPr>
-          <a:lstStyle/>
-          <a:p>
-            <a:pPr algn="l">
-              <a:defRPr sz="1200" b="1">
-                <a:solidFill>
-                  <a:srgbClr val="202124"/>
-                </a:solidFill>
-                <a:latin typeface="Microsoft YaHei"/>
-              </a:defRPr>
-            </a:pPr>
-            <a:r>
-              <a:rPr>
-                <a:latin typeface="Microsoft YaHei"/>
-              </a:rPr>
-              <a:t>设备与 HAL</a:t>
-            </a:r>
-          </a:p>
-        </p:txBody>
-      </p:sp>
-      <p:sp>
-        <p:nvSpPr>
-          <p:cNvPr id="19" name="TextBox 18"/>
-          <p:cNvSpPr txBox="1"/>
-          <p:nvPr/>
-        </p:nvSpPr>
-        <p:spPr>
-          <a:xfrm>
-            <a:off x="2971800" y="3776472"/>
-            <a:ext cx="7680960" cy="228600"/>
-          </a:xfrm>
-          <a:prstGeom prst="rect">
-            <a:avLst/>
-          </a:prstGeom>
-          <a:noFill/>
-        </p:spPr>
-        <p:txBody>
-          <a:bodyPr wrap="square" lIns="27432" rIns="27432" anchor="t">
-            <a:spAutoFit/>
-          </a:bodyPr>
-          <a:lstStyle/>
-          <a:p>
-            <a:pPr algn="l">
-              <a:defRPr sz="1050" b="0">
-                <a:solidFill>
-                  <a:srgbClr val="475467"/>
-                </a:solidFill>
-                <a:latin typeface="Microsoft YaHei"/>
-              </a:defRPr>
-            </a:pPr>
-            <a:r>
-              <a:rPr>
-                <a:latin typeface="Microsoft YaHei"/>
-              </a:rPr>
-              <a:t>VirtIO block / devfs / arch / trap / timer</a:t>
-            </a:r>
-          </a:p>
-        </p:txBody>
-      </p:sp>
-      <p:sp>
-        <p:nvSpPr>
-          <p:cNvPr id="20" name="Rounded Rectangle 19"/>
-          <p:cNvSpPr/>
-          <p:nvPr/>
-        </p:nvSpPr>
-        <p:spPr>
-          <a:xfrm>
-            <a:off x="1051560" y="4453128"/>
-            <a:ext cx="10058400" cy="566928"/>
-          </a:xfrm>
-          <a:prstGeom prst="roundRect">
-            <a:avLst/>
-          </a:prstGeom>
-          <a:solidFill>
-            <a:srgbClr val="FFF1F3"/>
-          </a:solidFill>
-          <a:ln w="12700">
-            <a:solidFill>
-              <a:srgbClr val="D2DAE6"/>
-            </a:solidFill>
-          </a:ln>
-        </p:spPr>
-        <p:style>
-          <a:lnRef idx="1">
-            <a:schemeClr val="accent1"/>
-          </a:lnRef>
-          <a:fillRef idx="3">
-            <a:schemeClr val="accent1"/>
-          </a:fillRef>
-          <a:effectRef idx="2">
-            <a:schemeClr val="accent1"/>
-          </a:effectRef>
-          <a:fontRef idx="minor">
-            <a:schemeClr val="lt1"/>
-          </a:fontRef>
-        </p:style>
-        <p:txBody>
-          <a:bodyPr rtlCol="0" anchor="ctr"/>
-          <a:lstStyle/>
-          <a:p>
-            <a:pPr algn="ctr"/>
-          </a:p>
-        </p:txBody>
-      </p:sp>
-      <p:sp>
-        <p:nvSpPr>
-          <p:cNvPr id="21" name="TextBox 20"/>
-          <p:cNvSpPr txBox="1"/>
-          <p:nvPr/>
-        </p:nvSpPr>
-        <p:spPr>
-          <a:xfrm>
-            <a:off x="1325880" y="4562856"/>
-            <a:ext cx="1828800" cy="228600"/>
-          </a:xfrm>
-          <a:prstGeom prst="rect">
-            <a:avLst/>
-          </a:prstGeom>
-          <a:noFill/>
-        </p:spPr>
-        <p:txBody>
-          <a:bodyPr wrap="square" lIns="27432" rIns="27432" anchor="t">
-            <a:spAutoFit/>
-          </a:bodyPr>
-          <a:lstStyle/>
-          <a:p>
-            <a:pPr algn="l">
-              <a:defRPr sz="1200" b="1">
-                <a:solidFill>
-                  <a:srgbClr val="202124"/>
-                </a:solidFill>
-                <a:latin typeface="Microsoft YaHei"/>
-              </a:defRPr>
-            </a:pPr>
-            <a:r>
-              <a:rPr>
-                <a:latin typeface="Microsoft YaHei"/>
-              </a:rPr>
-              <a:t>平台</a:t>
-            </a:r>
-          </a:p>
-        </p:txBody>
-      </p:sp>
-      <p:sp>
-        <p:nvSpPr>
-          <p:cNvPr id="22" name="TextBox 21"/>
-          <p:cNvSpPr txBox="1"/>
-          <p:nvPr/>
-        </p:nvSpPr>
-        <p:spPr>
-          <a:xfrm>
-            <a:off x="2971800" y="4581144"/>
-            <a:ext cx="7680960" cy="228600"/>
-          </a:xfrm>
-          <a:prstGeom prst="rect">
-            <a:avLst/>
-          </a:prstGeom>
-          <a:noFill/>
-        </p:spPr>
-        <p:txBody>
-          <a:bodyPr wrap="square" lIns="27432" rIns="27432" anchor="t">
-            <a:spAutoFit/>
-          </a:bodyPr>
-          <a:lstStyle/>
-          <a:p>
-            <a:pPr algn="l">
-              <a:defRPr sz="1050" b="0">
-                <a:solidFill>
-                  <a:srgbClr val="475467"/>
-                </a:solidFill>
-                <a:latin typeface="Microsoft YaHei"/>
-              </a:defRPr>
-            </a:pPr>
-            <a:r>
-              <a:rPr>
-                <a:latin typeface="Microsoft YaHei"/>
-              </a:rPr>
-              <a:t>RISC-V 64 / LoongArch 64 / QEMU virt</a:t>
-            </a:r>
-          </a:p>
-        </p:txBody>
-      </p:sp>
-      <p:sp>
-        <p:nvSpPr>
-          <p:cNvPr id="23" name="Rounded Rectangle 22"/>
-          <p:cNvSpPr/>
-          <p:nvPr/>
-        </p:nvSpPr>
-        <p:spPr>
-          <a:xfrm>
-            <a:off x="1051560" y="5486400"/>
-            <a:ext cx="10058400" cy="594360"/>
-          </a:xfrm>
-          <a:prstGeom prst="roundRect">
-            <a:avLst/>
-          </a:prstGeom>
-          <a:solidFill>
-            <a:srgbClr val="FFFFFF"/>
-          </a:solidFill>
-          <a:ln w="12700">
-            <a:solidFill>
-              <a:srgbClr val="E2E8F0"/>
-            </a:solidFill>
-          </a:ln>
-        </p:spPr>
-        <p:style>
-          <a:lnRef idx="1">
-            <a:schemeClr val="accent1"/>
-          </a:lnRef>
-          <a:fillRef idx="3">
-            <a:schemeClr val="accent1"/>
-          </a:fillRef>
-          <a:effectRef idx="2">
-            <a:schemeClr val="accent1"/>
-          </a:effectRef>
-          <a:fontRef idx="minor">
-            <a:schemeClr val="lt1"/>
-          </a:fontRef>
-        </p:style>
-        <p:txBody>
-          <a:bodyPr rtlCol="0" anchor="ctr"/>
-          <a:lstStyle/>
-          <a:p>
-            <a:pPr algn="ctr"/>
-          </a:p>
-        </p:txBody>
-      </p:sp>
-      <p:sp>
-        <p:nvSpPr>
-          <p:cNvPr id="24" name="Rectangle 23"/>
-          <p:cNvSpPr/>
-          <p:nvPr/>
-        </p:nvSpPr>
-        <p:spPr>
-          <a:xfrm>
-            <a:off x="1051560" y="5486400"/>
-            <a:ext cx="68580" cy="594360"/>
-          </a:xfrm>
-          <a:prstGeom prst="rect">
-            <a:avLst/>
-          </a:prstGeom>
-          <a:solidFill>
-            <a:srgbClr val="8B1A2B"/>
-          </a:solidFill>
-          <a:ln>
-            <a:noFill/>
-          </a:ln>
-        </p:spPr>
-        <p:style>
-          <a:lnRef idx="1">
-            <a:schemeClr val="accent1"/>
-          </a:lnRef>
-          <a:fillRef idx="3">
-            <a:schemeClr val="accent1"/>
-          </a:fillRef>
-          <a:effectRef idx="2">
-            <a:schemeClr val="accent1"/>
-          </a:effectRef>
-          <a:fontRef idx="minor">
-            <a:schemeClr val="lt1"/>
-          </a:fontRef>
-        </p:style>
-        <p:txBody>
-          <a:bodyPr rtlCol="0" anchor="ctr"/>
-          <a:lstStyle/>
-          <a:p>
-            <a:pPr algn="ctr"/>
-          </a:p>
-        </p:txBody>
-      </p:sp>
-      <p:sp>
-        <p:nvSpPr>
-          <p:cNvPr id="25" name="TextBox 24"/>
-          <p:cNvSpPr txBox="1"/>
-          <p:nvPr/>
-        </p:nvSpPr>
-        <p:spPr>
-          <a:xfrm>
-            <a:off x="1197863" y="5596128"/>
-            <a:ext cx="9784080" cy="256032"/>
-          </a:xfrm>
-          <a:prstGeom prst="rect">
-            <a:avLst/>
-          </a:prstGeom>
-          <a:noFill/>
-        </p:spPr>
-        <p:txBody>
-          <a:bodyPr wrap="square" lIns="27432" rIns="27432" anchor="t">
-            <a:spAutoFit/>
-          </a:bodyPr>
-          <a:lstStyle/>
-          <a:p>
-            <a:pPr algn="l">
-              <a:defRPr sz="1250" b="1">
-                <a:solidFill>
-                  <a:srgbClr val="202124"/>
-                </a:solidFill>
-                <a:latin typeface="Microsoft YaHei"/>
-              </a:defRPr>
-            </a:pPr>
-            <a:r>
-              <a:rPr>
-                <a:latin typeface="Microsoft YaHei"/>
-              </a:rPr>
-              <a:t>设计取舍</a:t>
-            </a:r>
-          </a:p>
-        </p:txBody>
-      </p:sp>
-      <p:sp>
-        <p:nvSpPr>
-          <p:cNvPr id="26" name="TextBox 25"/>
-          <p:cNvSpPr txBox="1"/>
-          <p:nvPr/>
-        </p:nvSpPr>
-        <p:spPr>
-          <a:xfrm>
-            <a:off x="1197863" y="5925312"/>
-            <a:ext cx="9784080" cy="118872"/>
-          </a:xfrm>
-          <a:prstGeom prst="rect">
-            <a:avLst/>
-          </a:prstGeom>
-          <a:noFill/>
-        </p:spPr>
-        <p:txBody>
-          <a:bodyPr wrap="square" lIns="27432" rIns="27432" anchor="t">
-            <a:spAutoFit/>
-          </a:bodyPr>
-          <a:lstStyle/>
-          <a:p>
-            <a:pPr algn="l">
-              <a:defRPr sz="969" b="0">
-                <a:solidFill>
-                  <a:srgbClr val="475467"/>
-                </a:solidFill>
-                <a:latin typeface="Microsoft YaHei"/>
-              </a:defRPr>
-            </a:pPr>
-            <a:r>
-              <a:rPr>
-                <a:latin typeface="Microsoft YaHei"/>
-              </a:rPr>
-              <a:t>宏内核让复杂系统调用可以在一次内核入口中协调任务、地址空间、文件对象和信号状态，适合初赛阶段快速补齐 Linux ABI。</a:t>
+              <a:t>07 / 25</a:t>
             </a:r>
           </a:p>
         </p:txBody>
@@ -24491,16 +23436,40 @@
           </a:p>
         </p:txBody>
       </p:sp>
-      <p:sp>
-        <p:nvSpPr>
-          <p:cNvPr id="17" name="TextBox 16"/>
+      <p:pic>
+        <p:nvPicPr>
+          <p:cNvPr id="17" name="Picture 16" descr="trap-flow.png"/>
+          <p:cNvPicPr>
+            <a:picLocks noChangeAspect="1"/>
+          </p:cNvPicPr>
+          <p:nvPr/>
+        </p:nvPicPr>
+        <p:blipFill>
+          <a:blip r:embed="rId2"/>
+          <a:stretch>
+            <a:fillRect/>
+          </a:stretch>
+        </p:blipFill>
+        <p:spPr>
+          <a:xfrm>
+            <a:off x="2323947" y="2871216"/>
+            <a:ext cx="7543800" cy="3852053"/>
+          </a:xfrm>
+          <a:prstGeom prst="rect">
+            <a:avLst/>
+          </a:prstGeom>
+        </p:spPr>
+      </p:pic>
+      <p:sp>
+        <p:nvSpPr>
+          <p:cNvPr id="18" name="TextBox 17"/>
           <p:cNvSpPr txBox="1"/>
           <p:nvPr/>
         </p:nvSpPr>
         <p:spPr>
           <a:xfrm>
-            <a:off x="1078992" y="3895344"/>
-            <a:ext cx="9820656" cy="795527"/>
+            <a:off x="868680" y="5989320"/>
+            <a:ext cx="9875520" cy="320040"/>
           </a:xfrm>
           <a:prstGeom prst="rect">
             <a:avLst/>
@@ -24508,31 +23477,21 @@
           <a:noFill/>
         </p:spPr>
         <p:txBody>
-          <a:bodyPr wrap="square" lIns="27432" rIns="27432" anchor="t">
+          <a:bodyPr wrap="none">
             <a:spAutoFit/>
           </a:bodyPr>
           <a:lstStyle/>
           <a:p>
-            <a:pPr algn="l">
-              <a:defRPr sz="850" b="0">
+            <a:pPr>
+              <a:defRPr sz="1300">
                 <a:solidFill>
                   <a:srgbClr val="475467"/>
                 </a:solidFill>
-                <a:latin typeface="Cascadia Mono"/>
-              </a:defRPr>
-            </a:pPr>
-            <a:r>
-              <a:rPr>
-                <a:latin typeface="Microsoft YaHei"/>
-              </a:rPr>
-              <a:t>用户程序 -&gt; ecall / exception -&gt; TrapContext -&gt; syscall(id,args)</a:t>
-            </a:r>
-            <a:br/>
-            <a:r>
-              <a:rPr>
-                <a:latin typeface="Microsoft YaHei"/>
-              </a:rPr>
-              <a:t>          -&gt; 文件/任务/内存/网络等模块 -&gt; signal/timer check -&gt; __restore -&gt; 用户态</a:t>
+                <a:latin typeface="Microsoft YaHei"/>
+              </a:defRPr>
+            </a:pPr>
+            <a:r>
+              <a:t>trap-flow.svg 对应系统调用、异常和时钟中断的共同入口：保存 TrapContext 后进入 Rust 分发，再按 syscall、page fault、timer/yield 等路径返回或调度。</a:t>
             </a:r>
           </a:p>
         </p:txBody>

--- a/docs/初赛文档/RespOS初赛进展汇报.pptx
+++ b/docs/初赛文档/RespOS初赛进展汇报.pptx
@@ -142,6 +142,9 @@
           <a:lstStyle/>
           <a:p>
             <a:r>
+              <a:rPr sz="1300">
+                <a:latin typeface="Microsoft YaHei"/>
+              </a:rPr>
               <a:t>LTP 用例通过率（case 口径，%）</a:t>
             </a:r>
           </a:p>
@@ -212,7 +215,16 @@
           </c:val>
         </c:ser>
         <c:dLbls>
-          <c:numFmt formatCode="0.0%" sourceLinked="0"/>
+          <c:numFmt formatCode="0.0" sourceLinked="0"/>
+          <c:txPr>
+            <a:bodyPr/>
+            <a:lstStyle/>
+            <a:p>
+              <a:pPr>
+                <a:defRPr sz="850"/>
+              </a:pPr>
+            </a:p>
+          </c:txPr>
           <c:dLblPos val="outEnd"/>
           <c:showLegendKey val="0"/>
           <c:showVal val="1"/>
@@ -240,7 +252,7 @@
           <a:lstStyle/>
           <a:p>
             <a:pPr>
-              <a:defRPr sz="800"/>
+              <a:defRPr sz="850"/>
             </a:pPr>
           </a:p>
         </c:txPr>
@@ -260,6 +272,7 @@
         <c:delete val="0"/>
         <c:axPos val="l"/>
         <c:majorGridlines/>
+        <c:numFmt formatCode="0" sourceLinked="0"/>
         <c:majorTickMark val="out"/>
         <c:minorTickMark val="none"/>
         <c:tickLblPos val="nextTo"/>
@@ -268,7 +281,7 @@
           <a:lstStyle/>
           <a:p>
             <a:pPr>
-              <a:defRPr sz="800"/>
+              <a:defRPr sz="850"/>
             </a:pPr>
           </a:p>
         </c:txPr>
@@ -306,6 +319,9 @@
           <a:lstStyle/>
           <a:p>
             <a:r>
+              <a:rPr sz="1300">
+                <a:latin typeface="Microsoft YaHei"/>
+              </a:rPr>
               <a:t>iperf BASIC 吞吐（Mbits/s）</a:t>
             </a:r>
           </a:p>
@@ -433,6 +449,15 @@
         </c:ser>
         <c:dLbls>
           <c:numFmt formatCode="0.0" sourceLinked="0"/>
+          <c:txPr>
+            <a:bodyPr/>
+            <a:lstStyle/>
+            <a:p>
+              <a:pPr>
+                <a:defRPr sz="850"/>
+              </a:pPr>
+            </a:p>
+          </c:txPr>
           <c:dLblPos val="outEnd"/>
           <c:showLegendKey val="0"/>
           <c:showVal val="1"/>
@@ -460,7 +485,7 @@
           <a:lstStyle/>
           <a:p>
             <a:pPr>
-              <a:defRPr sz="800"/>
+              <a:defRPr sz="850"/>
             </a:pPr>
           </a:p>
         </c:txPr>
@@ -488,7 +513,7 @@
           <a:lstStyle/>
           <a:p>
             <a:pPr>
-              <a:defRPr sz="800"/>
+              <a:defRPr sz="850"/>
             </a:pPr>
           </a:p>
         </c:txPr>
@@ -500,6 +525,15 @@
     <c:legend>
       <c:legendPos val="b"/>
       <c:overlay val="0"/>
+      <c:txPr>
+        <a:bodyPr/>
+        <a:lstStyle/>
+        <a:p>
+          <a:pPr>
+            <a:defRPr sz="850"/>
+          </a:pPr>
+        </a:p>
+      </c:txPr>
     </c:legend>
     <c:dispBlanksAs val="gap"/>
   </c:chart>
@@ -3604,7 +3638,7 @@
         </p:spPr>
         <p:txBody>
           <a:bodyPr wrap="square" lIns="27432" rIns="27432" anchor="t">
-            <a:spAutoFit/>
+            <a:normAutofit/>
           </a:bodyPr>
           <a:lstStyle/>
           <a:p>
@@ -3617,7 +3651,10 @@
               </a:defRPr>
             </a:pPr>
             <a:r>
-              <a:rPr>
+              <a:rPr sz="900" b="0">
+                <a:solidFill>
+                  <a:srgbClr val="667085"/>
+                </a:solidFill>
                 <a:latin typeface="Microsoft YaHei"/>
               </a:rPr>
               <a:t>01 / 25</a:t>
@@ -3643,7 +3680,7 @@
         </p:spPr>
         <p:txBody>
           <a:bodyPr wrap="square" lIns="27432" rIns="27432" anchor="t">
-            <a:spAutoFit/>
+            <a:normAutofit/>
           </a:bodyPr>
           <a:lstStyle/>
           <a:p>
@@ -3656,7 +3693,10 @@
               </a:defRPr>
             </a:pPr>
             <a:r>
-              <a:rPr>
+              <a:rPr sz="1350" b="0">
+                <a:solidFill>
+                  <a:srgbClr val="475467"/>
+                </a:solidFill>
                 <a:latin typeface="Microsoft YaHei"/>
               </a:rPr>
               <a:t>全国大学生计算机系统能力大赛</a:t>
@@ -3682,7 +3722,7 @@
         </p:spPr>
         <p:txBody>
           <a:bodyPr wrap="square" lIns="27432" rIns="27432" anchor="t">
-            <a:spAutoFit/>
+            <a:normAutofit/>
           </a:bodyPr>
           <a:lstStyle/>
           <a:p>
@@ -3695,7 +3735,10 @@
               </a:defRPr>
             </a:pPr>
             <a:r>
-              <a:rPr>
+              <a:rPr sz="1220" b="0">
+                <a:solidFill>
+                  <a:srgbClr val="475467"/>
+                </a:solidFill>
                 <a:latin typeface="Microsoft YaHei"/>
               </a:rPr>
               <a:t>RespOS</a:t>
@@ -3764,7 +3807,7 @@
         </p:spPr>
         <p:txBody>
           <a:bodyPr wrap="square" lIns="27432" rIns="27432" anchor="t">
-            <a:spAutoFit/>
+            <a:normAutofit/>
           </a:bodyPr>
           <a:lstStyle/>
           <a:p>
@@ -3777,7 +3820,10 @@
               </a:defRPr>
             </a:pPr>
             <a:r>
-              <a:rPr>
+              <a:rPr sz="1220" b="0">
+                <a:solidFill>
+                  <a:srgbClr val="475467"/>
+                </a:solidFill>
                 <a:latin typeface="Microsoft YaHei"/>
               </a:rPr>
               <a:t>初赛进展汇报</a:t>
@@ -3803,7 +3849,7 @@
         </p:spPr>
         <p:txBody>
           <a:bodyPr wrap="square" lIns="27432" rIns="27432" anchor="t">
-            <a:spAutoFit/>
+            <a:normAutofit/>
           </a:bodyPr>
           <a:lstStyle/>
           <a:p>
@@ -3816,7 +3862,10 @@
               </a:defRPr>
             </a:pPr>
             <a:r>
-              <a:rPr>
+              <a:rPr sz="1350" b="1">
+                <a:solidFill>
+                  <a:srgbClr val="202124"/>
+                </a:solidFill>
                 <a:latin typeface="Microsoft YaHei"/>
               </a:rPr>
               <a:t>开发进度 · 功能完成度 · 后续优化计划</a:t>
@@ -3930,7 +3979,7 @@
         </p:spPr>
         <p:txBody>
           <a:bodyPr wrap="square" lIns="27432" rIns="27432" anchor="t">
-            <a:spAutoFit/>
+            <a:normAutofit/>
           </a:bodyPr>
           <a:lstStyle/>
           <a:p>
@@ -3943,7 +3992,10 @@
               </a:defRPr>
             </a:pPr>
             <a:r>
-              <a:rPr>
+              <a:rPr sz="1500" b="1">
+                <a:solidFill>
+                  <a:srgbClr val="202124"/>
+                </a:solidFill>
                 <a:latin typeface="Microsoft YaHei"/>
               </a:rPr>
               <a:t>汇报关键词</a:t>
@@ -3969,7 +4021,7 @@
         </p:spPr>
         <p:txBody>
           <a:bodyPr wrap="square" lIns="27432" rIns="27432" anchor="t">
-            <a:spAutoFit/>
+            <a:normAutofit/>
           </a:bodyPr>
           <a:lstStyle/>
           <a:p>
@@ -3982,49 +4034,70 @@
               </a:defRPr>
             </a:pPr>
             <a:r>
-              <a:rPr>
+              <a:rPr sz="1220" b="0">
+                <a:solidFill>
+                  <a:srgbClr val="475467"/>
+                </a:solidFill>
                 <a:latin typeface="Microsoft YaHei"/>
               </a:rPr>
               <a:t>Rust 类 Unix 宏内核</a:t>
             </a:r>
             <a:br/>
             <a:r>
-              <a:rPr>
+              <a:rPr sz="1220" b="0">
+                <a:solidFill>
+                  <a:srgbClr val="475467"/>
+                </a:solidFill>
                 <a:latin typeface="Microsoft YaHei"/>
               </a:rPr>
               <a:t>RISC-V 64 / LoongArch 64</a:t>
             </a:r>
             <a:br/>
             <a:r>
-              <a:rPr>
+              <a:rPr sz="1220" b="0">
+                <a:solidFill>
+                  <a:srgbClr val="475467"/>
+                </a:solidFill>
                 <a:latin typeface="Microsoft YaHei"/>
               </a:rPr>
               <a:t>Linux ABI 兼容</a:t>
             </a:r>
             <a:br/>
             <a:r>
-              <a:rPr>
+              <a:rPr sz="1220" b="0">
+                <a:solidFill>
+                  <a:srgbClr val="475467"/>
+                </a:solidFill>
                 <a:latin typeface="Microsoft YaHei"/>
               </a:rPr>
               <a:t>Ext4 + VFS</a:t>
             </a:r>
             <a:br/>
             <a:r>
-              <a:rPr>
+              <a:rPr sz="1220" b="0">
+                <a:solidFill>
+                  <a:srgbClr val="475467"/>
+                </a:solidFill>
                 <a:latin typeface="Microsoft YaHei"/>
               </a:rPr>
               <a:t>LTP 驱动开发</a:t>
             </a:r>
             <a:br/>
             <a:r>
-              <a:rPr>
+              <a:rPr sz="1220" b="0">
+                <a:solidFill>
+                  <a:srgbClr val="475467"/>
+                </a:solidFill>
                 <a:latin typeface="Microsoft YaHei"/>
               </a:rPr>
               <a:t>smoltcp 回环网络</a:t>
             </a:r>
             <a:br/>
             <a:r>
-              <a:rPr>
+              <a:rPr sz="1220" b="0">
+                <a:solidFill>
+                  <a:srgbClr val="475467"/>
+                </a:solidFill>
                 <a:latin typeface="Microsoft YaHei"/>
               </a:rPr>
               <a:t>VirtIO block 设备</a:t>
@@ -4050,7 +4123,7 @@
         </p:spPr>
         <p:txBody>
           <a:bodyPr wrap="square" lIns="27432" rIns="27432" anchor="t">
-            <a:spAutoFit/>
+            <a:normAutofit/>
           </a:bodyPr>
           <a:lstStyle/>
           <a:p>
@@ -4063,7 +4136,10 @@
               </a:defRPr>
             </a:pPr>
             <a:r>
-              <a:rPr>
+              <a:rPr sz="1200" b="0">
+                <a:solidFill>
+                  <a:srgbClr val="475467"/>
+                </a:solidFill>
                 <a:latin typeface="Microsoft YaHei"/>
               </a:rPr>
               <a:t>比特工匠队 · 山东大学（青岛） · 2026 年 6 月</a:t>
@@ -4193,7 +4269,7 @@
         </p:spPr>
         <p:txBody>
           <a:bodyPr wrap="square" lIns="27432" rIns="27432" anchor="t">
-            <a:spAutoFit/>
+            <a:normAutofit/>
           </a:bodyPr>
           <a:lstStyle/>
           <a:p>
@@ -4206,6 +4282,12 @@
               </a:defRPr>
             </a:pPr>
             <a:r>
+              <a:rPr sz="900" b="0">
+                <a:solidFill>
+                  <a:srgbClr val="667085"/>
+                </a:solidFill>
+                <a:latin typeface="Microsoft YaHei"/>
+              </a:rPr>
               <a:t>10 / 25</a:t>
             </a:r>
           </a:p>
@@ -4229,7 +4311,7 @@
         </p:spPr>
         <p:txBody>
           <a:bodyPr wrap="square" lIns="27432" rIns="27432" anchor="t">
-            <a:spAutoFit/>
+            <a:normAutofit/>
           </a:bodyPr>
           <a:lstStyle/>
           <a:p>
@@ -4242,6 +4324,12 @@
               </a:defRPr>
             </a:pPr>
             <a:r>
+              <a:rPr sz="2400" b="1">
+                <a:solidFill>
+                  <a:srgbClr val="202124"/>
+                </a:solidFill>
+                <a:latin typeface="Microsoft YaHei"/>
+              </a:rPr>
               <a:t>进程与线程管理</a:t>
             </a:r>
           </a:p>
@@ -4265,7 +4353,7 @@
         </p:spPr>
         <p:txBody>
           <a:bodyPr wrap="square" lIns="27432" rIns="27432" anchor="t">
-            <a:spAutoFit/>
+            <a:normAutofit/>
           </a:bodyPr>
           <a:lstStyle/>
           <a:p>
@@ -4278,6 +4366,12 @@
               </a:defRPr>
             </a:pPr>
             <a:r>
+              <a:rPr sz="1350" b="0">
+                <a:solidFill>
+                  <a:srgbClr val="475467"/>
+                </a:solidFill>
+                <a:latin typeface="Microsoft YaHei"/>
+              </a:rPr>
               <a:t>任务状态图和线程组语义</a:t>
             </a:r>
           </a:p>
@@ -4422,7 +4516,7 @@
         </p:nvSpPr>
         <p:spPr>
           <a:xfrm>
-            <a:off x="914400" y="4663440"/>
+            <a:off x="914400" y="4800600"/>
             <a:ext cx="4800600" cy="256032"/>
           </a:xfrm>
           <a:prstGeom prst="rect">
@@ -4432,7 +4526,7 @@
         </p:spPr>
         <p:txBody>
           <a:bodyPr wrap="square" lIns="27432" rIns="27432" anchor="t">
-            <a:spAutoFit/>
+            <a:normAutofit/>
           </a:bodyPr>
           <a:lstStyle/>
           <a:p>
@@ -4445,6 +4539,12 @@
               </a:defRPr>
             </a:pPr>
             <a:r>
+              <a:rPr sz="1500" b="1">
+                <a:solidFill>
+                  <a:srgbClr val="202124"/>
+                </a:solidFill>
+                <a:latin typeface="Microsoft YaHei"/>
+              </a:rPr>
               <a:t>已完成主路径</a:t>
             </a:r>
           </a:p>
@@ -4458,8 +4558,8 @@
         </p:nvSpPr>
         <p:spPr>
           <a:xfrm>
-            <a:off x="914400" y="4965192"/>
-            <a:ext cx="4800600" cy="676656"/>
+            <a:off x="914400" y="5138928"/>
+            <a:ext cx="4800600" cy="749808"/>
           </a:xfrm>
           <a:prstGeom prst="rect">
             <a:avLst/>
@@ -4468,7 +4568,7 @@
         </p:spPr>
         <p:txBody>
           <a:bodyPr wrap="square" lIns="27432" rIns="27432" anchor="t">
-            <a:spAutoFit/>
+            <a:normAutofit/>
           </a:bodyPr>
           <a:lstStyle/>
           <a:p>
@@ -4481,6 +4581,12 @@
               </a:defRPr>
             </a:pPr>
             <a:r>
+              <a:rPr sz="1250" b="0">
+                <a:solidFill>
+                  <a:srgbClr val="475467"/>
+                </a:solidFill>
+                <a:latin typeface="Microsoft YaHei"/>
+              </a:rPr>
               <a:t>TCB 聚合执行上下文、地址空间、fd 表、信号状态和父子关系；ThreadGroup 区分 TGID/TID，支撑 fork/clone/execve/wait。</a:t>
             </a:r>
           </a:p>
@@ -4582,7 +4688,7 @@
         </p:nvSpPr>
         <p:spPr>
           <a:xfrm>
-            <a:off x="6355080" y="4663440"/>
+            <a:off x="6355080" y="4800600"/>
             <a:ext cx="4800600" cy="256032"/>
           </a:xfrm>
           <a:prstGeom prst="rect">
@@ -4592,7 +4698,7 @@
         </p:spPr>
         <p:txBody>
           <a:bodyPr wrap="square" lIns="27432" rIns="27432" anchor="t">
-            <a:spAutoFit/>
+            <a:normAutofit/>
           </a:bodyPr>
           <a:lstStyle/>
           <a:p>
@@ -4605,6 +4711,12 @@
               </a:defRPr>
             </a:pPr>
             <a:r>
+              <a:rPr sz="1500" b="1">
+                <a:solidFill>
+                  <a:srgbClr val="202124"/>
+                </a:solidFill>
+                <a:latin typeface="Microsoft YaHei"/>
+              </a:rPr>
               <a:t>当前关注点</a:t>
             </a:r>
           </a:p>
@@ -4618,8 +4730,8 @@
         </p:nvSpPr>
         <p:spPr>
           <a:xfrm>
-            <a:off x="6355080" y="4965192"/>
-            <a:ext cx="4800600" cy="676656"/>
+            <a:off x="6355080" y="5138928"/>
+            <a:ext cx="4800600" cy="749808"/>
           </a:xfrm>
           <a:prstGeom prst="rect">
             <a:avLst/>
@@ -4628,7 +4740,7 @@
         </p:spPr>
         <p:txBody>
           <a:bodyPr wrap="square" lIns="27432" rIns="27432" anchor="t">
-            <a:spAutoFit/>
+            <a:normAutofit/>
           </a:bodyPr>
           <a:lstStyle/>
           <a:p>
@@ -4641,6 +4753,12 @@
               </a:defRPr>
             </a:pPr>
             <a:r>
+              <a:rPr sz="1250" b="0">
+                <a:solidFill>
+                  <a:srgbClr val="475467"/>
+                </a:solidFill>
+                <a:latin typeface="Microsoft YaHei"/>
+              </a:rPr>
               <a:t>线程组退出、clear_child_tid、robust list 和 futex 交互仍是长测稳定性的重点。</a:t>
             </a:r>
           </a:p>
@@ -4662,8 +4780,8 @@
         </p:blipFill>
         <p:spPr>
           <a:xfrm>
-            <a:off x="1729587" y="1170432"/>
-            <a:ext cx="8732520" cy="3493008"/>
+            <a:off x="1234440" y="1115568"/>
+            <a:ext cx="9144000" cy="3520440"/>
           </a:xfrm>
           <a:prstGeom prst="rect">
             <a:avLst/>
@@ -4792,7 +4910,7 @@
         </p:spPr>
         <p:txBody>
           <a:bodyPr wrap="square" lIns="27432" rIns="27432" anchor="t">
-            <a:spAutoFit/>
+            <a:normAutofit/>
           </a:bodyPr>
           <a:lstStyle/>
           <a:p>
@@ -4805,6 +4923,12 @@
               </a:defRPr>
             </a:pPr>
             <a:r>
+              <a:rPr sz="900" b="0">
+                <a:solidFill>
+                  <a:srgbClr val="667085"/>
+                </a:solidFill>
+                <a:latin typeface="Microsoft YaHei"/>
+              </a:rPr>
               <a:t>11 / 25</a:t>
             </a:r>
           </a:p>
@@ -4828,7 +4952,7 @@
         </p:spPr>
         <p:txBody>
           <a:bodyPr wrap="square" lIns="27432" rIns="27432" anchor="t">
-            <a:spAutoFit/>
+            <a:normAutofit/>
           </a:bodyPr>
           <a:lstStyle/>
           <a:p>
@@ -4841,6 +4965,12 @@
               </a:defRPr>
             </a:pPr>
             <a:r>
+              <a:rPr sz="2400" b="1">
+                <a:solidFill>
+                  <a:srgbClr val="202124"/>
+                </a:solidFill>
+                <a:latin typeface="Microsoft YaHei"/>
+              </a:rPr>
               <a:t>调度、阻塞与生命周期</a:t>
             </a:r>
           </a:p>
@@ -4864,7 +4994,7 @@
         </p:spPr>
         <p:txBody>
           <a:bodyPr wrap="square" lIns="27432" rIns="27432" anchor="t">
-            <a:spAutoFit/>
+            <a:normAutofit/>
           </a:bodyPr>
           <a:lstStyle/>
           <a:p>
@@ -4877,6 +5007,12 @@
               </a:defRPr>
             </a:pPr>
             <a:r>
+              <a:rPr sz="1350" b="0">
+                <a:solidFill>
+                  <a:srgbClr val="475467"/>
+                </a:solidFill>
+                <a:latin typeface="Microsoft YaHei"/>
+              </a:rPr>
               <a:t>FIFO 调度队列和等待路径</a:t>
             </a:r>
           </a:p>
@@ -4978,8 +5114,8 @@
         </p:nvSpPr>
         <p:spPr>
           <a:xfrm>
-            <a:off x="4572000" y="4754879"/>
-            <a:ext cx="6446520" cy="256032"/>
+            <a:off x="5806440" y="3913632"/>
+            <a:ext cx="4389120" cy="256032"/>
           </a:xfrm>
           <a:prstGeom prst="rect">
             <a:avLst/>
@@ -4988,7 +5124,7 @@
         </p:spPr>
         <p:txBody>
           <a:bodyPr wrap="square" lIns="27432" rIns="27432" anchor="t">
-            <a:spAutoFit/>
+            <a:normAutofit/>
           </a:bodyPr>
           <a:lstStyle/>
           <a:p>
@@ -5001,6 +5137,12 @@
               </a:defRPr>
             </a:pPr>
             <a:r>
+              <a:rPr sz="1500" b="1">
+                <a:solidFill>
+                  <a:srgbClr val="202124"/>
+                </a:solidFill>
+                <a:latin typeface="Microsoft YaHei"/>
+              </a:rPr>
               <a:t>生命周期边界</a:t>
             </a:r>
           </a:p>
@@ -5014,8 +5156,8 @@
         </p:nvSpPr>
         <p:spPr>
           <a:xfrm>
-            <a:off x="4572000" y="5056631"/>
-            <a:ext cx="6446520" cy="585216"/>
+            <a:off x="5806440" y="4279392"/>
+            <a:ext cx="4480560" cy="822960"/>
           </a:xfrm>
           <a:prstGeom prst="rect">
             <a:avLst/>
@@ -5024,7 +5166,7 @@
         </p:spPr>
         <p:txBody>
           <a:bodyPr wrap="square" lIns="27432" rIns="27432" anchor="t">
-            <a:spAutoFit/>
+            <a:normAutofit/>
           </a:bodyPr>
           <a:lstStyle/>
           <a:p>
@@ -5037,6 +5179,12 @@
               </a:defRPr>
             </a:pPr>
             <a:r>
+              <a:rPr sz="1250" b="0">
+                <a:solidFill>
+                  <a:srgbClr val="475467"/>
+                </a:solidFill>
+                <a:latin typeface="Microsoft YaHei"/>
+              </a:rPr>
               <a:t>普通子进程退出后保留退出码和元数据，直到父进程 wait4 回收；线程退出还需要清理 clear_child_tid 并执行 futex wake。</a:t>
             </a:r>
           </a:p>
@@ -5058,8 +5206,8 @@
         </p:blipFill>
         <p:spPr>
           <a:xfrm>
-            <a:off x="1592427" y="1417320"/>
-            <a:ext cx="9006840" cy="2448735"/>
+            <a:off x="1143000" y="1207008"/>
+            <a:ext cx="9326880" cy="2560320"/>
           </a:xfrm>
           <a:prstGeom prst="rect">
             <a:avLst/>
@@ -5074,8 +5222,8 @@
         </p:nvSpPr>
         <p:spPr>
           <a:xfrm>
-            <a:off x="4434840" y="3767328"/>
-            <a:ext cx="5715000" cy="310896"/>
+            <a:off x="731520" y="3913632"/>
+            <a:ext cx="4663440" cy="640080"/>
           </a:xfrm>
           <a:prstGeom prst="rect">
             <a:avLst/>
@@ -5083,21 +5231,19 @@
           <a:noFill/>
         </p:spPr>
         <p:txBody>
-          <a:bodyPr wrap="none">
-            <a:spAutoFit/>
+          <a:bodyPr wrap="square">
+            <a:normAutofit/>
           </a:bodyPr>
           <a:lstStyle/>
           <a:p>
-            <a:pPr>
-              <a:defRPr sz="1300">
-                <a:solidFill>
-                  <a:srgbClr val="475467"/>
-                </a:solidFill>
-                <a:latin typeface="Microsoft YaHei"/>
-              </a:defRPr>
-            </a:pPr>
-            <a:r>
-              <a:t>调度队列图来自 scheduler-queues.svg：ready_queue、Processor 与 blocked_queue 之间只表达任务流转，不混入具体系统调用细节。</a:t>
+            <a:r>
+              <a:rPr sz="1160" b="0">
+                <a:solidFill>
+                  <a:srgbClr val="475467"/>
+                </a:solidFill>
+                <a:latin typeface="Microsoft YaHei"/>
+              </a:rPr>
+              <a:t>调度队列图表达 ready_queue、Processor 与 blocked_queue 之间的任务流转；具体等待原因在生命周期边界中展开。</a:t>
             </a:r>
           </a:p>
         </p:txBody>
@@ -5224,7 +5370,7 @@
         </p:spPr>
         <p:txBody>
           <a:bodyPr wrap="square" lIns="27432" rIns="27432" anchor="t">
-            <a:spAutoFit/>
+            <a:normAutofit/>
           </a:bodyPr>
           <a:lstStyle/>
           <a:p>
@@ -5237,6 +5383,12 @@
               </a:defRPr>
             </a:pPr>
             <a:r>
+              <a:rPr sz="900" b="0">
+                <a:solidFill>
+                  <a:srgbClr val="667085"/>
+                </a:solidFill>
+                <a:latin typeface="Microsoft YaHei"/>
+              </a:rPr>
               <a:t>12 / 25</a:t>
             </a:r>
           </a:p>
@@ -5260,7 +5412,7 @@
         </p:spPr>
         <p:txBody>
           <a:bodyPr wrap="square" lIns="27432" rIns="27432" anchor="t">
-            <a:spAutoFit/>
+            <a:normAutofit/>
           </a:bodyPr>
           <a:lstStyle/>
           <a:p>
@@ -5273,6 +5425,12 @@
               </a:defRPr>
             </a:pPr>
             <a:r>
+              <a:rPr sz="2400" b="1">
+                <a:solidFill>
+                  <a:srgbClr val="202124"/>
+                </a:solidFill>
+                <a:latin typeface="Microsoft YaHei"/>
+              </a:rPr>
               <a:t>功能完成度总览</a:t>
             </a:r>
           </a:p>
@@ -5296,7 +5454,7 @@
         </p:spPr>
         <p:txBody>
           <a:bodyPr wrap="square" lIns="27432" rIns="27432" anchor="t">
-            <a:spAutoFit/>
+            <a:normAutofit/>
           </a:bodyPr>
           <a:lstStyle/>
           <a:p>
@@ -5309,6 +5467,12 @@
               </a:defRPr>
             </a:pPr>
             <a:r>
+              <a:rPr sz="1350" b="0">
+                <a:solidFill>
+                  <a:srgbClr val="475467"/>
+                </a:solidFill>
+                <a:latin typeface="Microsoft YaHei"/>
+              </a:rPr>
               <a:t>以最终源码和全量 LTP 报告衡量主路径成熟度</a:t>
             </a:r>
           </a:p>
@@ -5375,7 +5539,7 @@
         </p:spPr>
         <p:txBody>
           <a:bodyPr wrap="square" lIns="27432" rIns="27432" anchor="t">
-            <a:spAutoFit/>
+            <a:normAutofit/>
           </a:bodyPr>
           <a:lstStyle/>
           <a:p>
@@ -5388,6 +5552,12 @@
               </a:defRPr>
             </a:pPr>
             <a:r>
+              <a:rPr sz="1500" b="1">
+                <a:solidFill>
+                  <a:srgbClr val="202124"/>
+                </a:solidFill>
+                <a:latin typeface="Microsoft YaHei"/>
+              </a:rPr>
               <a:t>系统调用分发</a:t>
             </a:r>
           </a:p>
@@ -5497,7 +5667,7 @@
         </p:spPr>
         <p:txBody>
           <a:bodyPr wrap="square" lIns="27432" rIns="27432" anchor="t">
-            <a:spAutoFit/>
+            <a:normAutofit/>
           </a:bodyPr>
           <a:lstStyle/>
           <a:p>
@@ -5510,6 +5680,12 @@
               </a:defRPr>
             </a:pPr>
             <a:r>
+              <a:rPr sz="1500" b="1">
+                <a:solidFill>
+                  <a:srgbClr val="202124"/>
+                </a:solidFill>
+                <a:latin typeface="Microsoft YaHei"/>
+              </a:rPr>
               <a:t>100.0%</a:t>
             </a:r>
           </a:p>
@@ -5533,7 +5709,7 @@
         </p:spPr>
         <p:txBody>
           <a:bodyPr wrap="square" lIns="27432" rIns="27432" anchor="t">
-            <a:spAutoFit/>
+            <a:normAutofit/>
           </a:bodyPr>
           <a:lstStyle/>
           <a:p>
@@ -5546,6 +5722,12 @@
               </a:defRPr>
             </a:pPr>
             <a:r>
+              <a:rPr sz="1350" b="1">
+                <a:solidFill>
+                  <a:srgbClr val="202124"/>
+                </a:solidFill>
+                <a:latin typeface="Microsoft YaHei"/>
+              </a:rPr>
               <a:t>216 个 dispatch arm 一一对应。</a:t>
             </a:r>
           </a:p>
@@ -5569,7 +5751,7 @@
         </p:spPr>
         <p:txBody>
           <a:bodyPr wrap="square" lIns="27432" rIns="27432" anchor="t">
-            <a:spAutoFit/>
+            <a:normAutofit/>
           </a:bodyPr>
           <a:lstStyle/>
           <a:p>
@@ -5582,6 +5764,12 @@
               </a:defRPr>
             </a:pPr>
             <a:r>
+              <a:rPr sz="1500" b="1">
+                <a:solidFill>
+                  <a:srgbClr val="202124"/>
+                </a:solidFill>
+                <a:latin typeface="Microsoft YaHei"/>
+              </a:rPr>
               <a:t>文件系统与 fd</a:t>
             </a:r>
           </a:p>
@@ -5691,7 +5879,7 @@
         </p:spPr>
         <p:txBody>
           <a:bodyPr wrap="square" lIns="27432" rIns="27432" anchor="t">
-            <a:spAutoFit/>
+            <a:normAutofit/>
           </a:bodyPr>
           <a:lstStyle/>
           <a:p>
@@ -5704,6 +5892,12 @@
               </a:defRPr>
             </a:pPr>
             <a:r>
+              <a:rPr sz="1500" b="1">
+                <a:solidFill>
+                  <a:srgbClr val="202124"/>
+                </a:solidFill>
+                <a:latin typeface="Microsoft YaHei"/>
+              </a:rPr>
               <a:t>94.0%</a:t>
             </a:r>
           </a:p>
@@ -5727,7 +5921,7 @@
         </p:spPr>
         <p:txBody>
           <a:bodyPr wrap="square" lIns="27432" rIns="27432" anchor="t">
-            <a:spAutoFit/>
+            <a:normAutofit/>
           </a:bodyPr>
           <a:lstStyle/>
           <a:p>
@@ -5740,6 +5934,12 @@
               </a:defRPr>
             </a:pPr>
             <a:r>
+              <a:rPr sz="1350" b="1">
+                <a:solidFill>
+                  <a:srgbClr val="202124"/>
+                </a:solidFill>
+                <a:latin typeface="Microsoft YaHei"/>
+              </a:rPr>
               <a:t>剩余差异集中在文件/I/O 边界。</a:t>
             </a:r>
           </a:p>
@@ -5763,7 +5963,7 @@
         </p:spPr>
         <p:txBody>
           <a:bodyPr wrap="square" lIns="27432" rIns="27432" anchor="t">
-            <a:spAutoFit/>
+            <a:normAutofit/>
           </a:bodyPr>
           <a:lstStyle/>
           <a:p>
@@ -5776,6 +5976,12 @@
               </a:defRPr>
             </a:pPr>
             <a:r>
+              <a:rPr sz="1500" b="1">
+                <a:solidFill>
+                  <a:srgbClr val="202124"/>
+                </a:solidFill>
+                <a:latin typeface="Microsoft YaHei"/>
+              </a:rPr>
               <a:t>进程/线程/调度</a:t>
             </a:r>
           </a:p>
@@ -5885,7 +6091,7 @@
         </p:spPr>
         <p:txBody>
           <a:bodyPr wrap="square" lIns="27432" rIns="27432" anchor="t">
-            <a:spAutoFit/>
+            <a:normAutofit/>
           </a:bodyPr>
           <a:lstStyle/>
           <a:p>
@@ -5898,6 +6104,12 @@
               </a:defRPr>
             </a:pPr>
             <a:r>
+              <a:rPr sz="1500" b="1">
+                <a:solidFill>
+                  <a:srgbClr val="202124"/>
+                </a:solidFill>
+                <a:latin typeface="Microsoft YaHei"/>
+              </a:rPr>
               <a:t>95.0%</a:t>
             </a:r>
           </a:p>
@@ -5921,7 +6133,7 @@
         </p:spPr>
         <p:txBody>
           <a:bodyPr wrap="square" lIns="27432" rIns="27432" anchor="t">
-            <a:spAutoFit/>
+            <a:normAutofit/>
           </a:bodyPr>
           <a:lstStyle/>
           <a:p>
@@ -5934,6 +6146,12 @@
               </a:defRPr>
             </a:pPr>
             <a:r>
+              <a:rPr sz="1200" b="0">
+                <a:solidFill>
+                  <a:srgbClr val="475467"/>
+                </a:solidFill>
+                <a:latin typeface="Microsoft YaHei"/>
+              </a:rPr>
               <a:t>fork/clone/exec/wait/futex 主路径可用。</a:t>
             </a:r>
           </a:p>
@@ -5957,7 +6175,7 @@
         </p:spPr>
         <p:txBody>
           <a:bodyPr wrap="square" lIns="27432" rIns="27432" anchor="t">
-            <a:spAutoFit/>
+            <a:normAutofit/>
           </a:bodyPr>
           <a:lstStyle/>
           <a:p>
@@ -5970,6 +6188,12 @@
               </a:defRPr>
             </a:pPr>
             <a:r>
+              <a:rPr sz="1500" b="1">
+                <a:solidFill>
+                  <a:srgbClr val="202124"/>
+                </a:solidFill>
+                <a:latin typeface="Microsoft YaHei"/>
+              </a:rPr>
               <a:t>内存管理</a:t>
             </a:r>
           </a:p>
@@ -6079,7 +6303,7 @@
         </p:spPr>
         <p:txBody>
           <a:bodyPr wrap="square" lIns="27432" rIns="27432" anchor="t">
-            <a:spAutoFit/>
+            <a:normAutofit/>
           </a:bodyPr>
           <a:lstStyle/>
           <a:p>
@@ -6092,6 +6316,12 @@
               </a:defRPr>
             </a:pPr>
             <a:r>
+              <a:rPr sz="1500" b="1">
+                <a:solidFill>
+                  <a:srgbClr val="202124"/>
+                </a:solidFill>
+                <a:latin typeface="Microsoft YaHei"/>
+              </a:rPr>
               <a:t>93.0%</a:t>
             </a:r>
           </a:p>
@@ -6115,7 +6345,7 @@
         </p:spPr>
         <p:txBody>
           <a:bodyPr wrap="square" lIns="27432" rIns="27432" anchor="t">
-            <a:spAutoFit/>
+            <a:normAutofit/>
           </a:bodyPr>
           <a:lstStyle/>
           <a:p>
@@ -6128,6 +6358,12 @@
               </a:defRPr>
             </a:pPr>
             <a:r>
+              <a:rPr sz="1350" b="1">
+                <a:solidFill>
+                  <a:srgbClr val="202124"/>
+                </a:solidFill>
+                <a:latin typeface="Microsoft YaHei"/>
+              </a:rPr>
               <a:t>ELF、mmap、COW、双架构页表稳定。</a:t>
             </a:r>
           </a:p>
@@ -6151,7 +6387,7 @@
         </p:spPr>
         <p:txBody>
           <a:bodyPr wrap="square" lIns="27432" rIns="27432" anchor="t">
-            <a:spAutoFit/>
+            <a:normAutofit/>
           </a:bodyPr>
           <a:lstStyle/>
           <a:p>
@@ -6164,6 +6400,12 @@
               </a:defRPr>
             </a:pPr>
             <a:r>
+              <a:rPr sz="1350" b="1">
+                <a:solidFill>
+                  <a:srgbClr val="202124"/>
+                </a:solidFill>
+                <a:latin typeface="Microsoft YaHei"/>
+              </a:rPr>
               <a:t>时间与 special fd</a:t>
             </a:r>
           </a:p>
@@ -6273,7 +6515,7 @@
         </p:spPr>
         <p:txBody>
           <a:bodyPr wrap="square" lIns="27432" rIns="27432" anchor="t">
-            <a:spAutoFit/>
+            <a:normAutofit/>
           </a:bodyPr>
           <a:lstStyle/>
           <a:p>
@@ -6286,6 +6528,12 @@
               </a:defRPr>
             </a:pPr>
             <a:r>
+              <a:rPr sz="1500" b="1">
+                <a:solidFill>
+                  <a:srgbClr val="202124"/>
+                </a:solidFill>
+                <a:latin typeface="Microsoft YaHei"/>
+              </a:rPr>
               <a:t>96.0%</a:t>
             </a:r>
           </a:p>
@@ -6309,7 +6557,7 @@
         </p:spPr>
         <p:txBody>
           <a:bodyPr wrap="square" lIns="27432" rIns="27432" anchor="t">
-            <a:spAutoFit/>
+            <a:normAutofit/>
           </a:bodyPr>
           <a:lstStyle/>
           <a:p>
@@ -6322,6 +6570,12 @@
               </a:defRPr>
             </a:pPr>
             <a:r>
+              <a:rPr sz="1200" b="0">
+                <a:solidFill>
+                  <a:srgbClr val="475467"/>
+                </a:solidFill>
+                <a:latin typeface="Microsoft YaHei"/>
+              </a:rPr>
               <a:t>timerfd、epoll、eventfd 等接入 fd。</a:t>
             </a:r>
           </a:p>
@@ -6345,7 +6599,7 @@
         </p:spPr>
         <p:txBody>
           <a:bodyPr wrap="square" lIns="27432" rIns="27432" anchor="t">
-            <a:spAutoFit/>
+            <a:normAutofit/>
           </a:bodyPr>
           <a:lstStyle/>
           <a:p>
@@ -6358,6 +6612,12 @@
               </a:defRPr>
             </a:pPr>
             <a:r>
+              <a:rPr sz="1500" b="1">
+                <a:solidFill>
+                  <a:srgbClr val="202124"/>
+                </a:solidFill>
+                <a:latin typeface="Microsoft YaHei"/>
+              </a:rPr>
               <a:t>网络回环</a:t>
             </a:r>
           </a:p>
@@ -6467,7 +6727,7 @@
         </p:spPr>
         <p:txBody>
           <a:bodyPr wrap="square" lIns="27432" rIns="27432" anchor="t">
-            <a:spAutoFit/>
+            <a:normAutofit/>
           </a:bodyPr>
           <a:lstStyle/>
           <a:p>
@@ -6480,6 +6740,12 @@
               </a:defRPr>
             </a:pPr>
             <a:r>
+              <a:rPr sz="1500" b="1">
+                <a:solidFill>
+                  <a:srgbClr val="202124"/>
+                </a:solidFill>
+                <a:latin typeface="Microsoft YaHei"/>
+              </a:rPr>
               <a:t>88.0%</a:t>
             </a:r>
           </a:p>
@@ -6503,7 +6769,7 @@
         </p:spPr>
         <p:txBody>
           <a:bodyPr wrap="square" lIns="27432" rIns="27432" anchor="t">
-            <a:spAutoFit/>
+            <a:normAutofit/>
           </a:bodyPr>
           <a:lstStyle/>
           <a:p>
@@ -6516,6 +6782,12 @@
               </a:defRPr>
             </a:pPr>
             <a:r>
+              <a:rPr sz="1350" b="1">
+                <a:solidFill>
+                  <a:srgbClr val="202124"/>
+                </a:solidFill>
+                <a:latin typeface="Microsoft YaHei"/>
+              </a:rPr>
               <a:t>IPv4 TCP/UDP 回环；真实网卡暂未接入。</a:t>
             </a:r>
           </a:p>
@@ -6627,7 +6899,7 @@
         </p:spPr>
         <p:txBody>
           <a:bodyPr wrap="square" lIns="27432" rIns="27432" anchor="t">
-            <a:spAutoFit/>
+            <a:normAutofit/>
           </a:bodyPr>
           <a:lstStyle/>
           <a:p>
@@ -6640,6 +6912,12 @@
               </a:defRPr>
             </a:pPr>
             <a:r>
+              <a:rPr sz="1500" b="1">
+                <a:solidFill>
+                  <a:srgbClr val="202124"/>
+                </a:solidFill>
+                <a:latin typeface="Microsoft YaHei"/>
+              </a:rPr>
               <a:t>口径说明</a:t>
             </a:r>
           </a:p>
@@ -6663,7 +6941,7 @@
         </p:spPr>
         <p:txBody>
           <a:bodyPr wrap="square" lIns="27432" rIns="27432" anchor="t">
-            <a:spAutoFit/>
+            <a:normAutofit/>
           </a:bodyPr>
           <a:lstStyle/>
           <a:p>
@@ -6676,6 +6954,12 @@
               </a:defRPr>
             </a:pPr>
             <a:r>
+              <a:rPr sz="1200" b="0">
+                <a:solidFill>
+                  <a:srgbClr val="475467"/>
+                </a:solidFill>
+                <a:latin typeface="Microsoft YaHei"/>
+              </a:rPr>
               <a:t>这里是汇报用主路径成熟度；真实验证看 LTP 断言统计和 compare CSV。四组 LTP 断言通过率为 96.91%-97.63%。</a:t>
             </a:r>
           </a:p>
@@ -6803,7 +7087,7 @@
         </p:spPr>
         <p:txBody>
           <a:bodyPr wrap="square" lIns="27432" rIns="27432" anchor="t">
-            <a:spAutoFit/>
+            <a:normAutofit/>
           </a:bodyPr>
           <a:lstStyle/>
           <a:p>
@@ -6816,7 +7100,10 @@
               </a:defRPr>
             </a:pPr>
             <a:r>
-              <a:rPr>
+              <a:rPr sz="900" b="0">
+                <a:solidFill>
+                  <a:srgbClr val="667085"/>
+                </a:solidFill>
                 <a:latin typeface="Microsoft YaHei"/>
               </a:rPr>
               <a:t>13 / 25</a:t>
@@ -6842,7 +7129,7 @@
         </p:spPr>
         <p:txBody>
           <a:bodyPr wrap="square" lIns="27432" rIns="27432" anchor="t">
-            <a:spAutoFit/>
+            <a:normAutofit/>
           </a:bodyPr>
           <a:lstStyle/>
           <a:p>
@@ -6855,7 +7142,10 @@
               </a:defRPr>
             </a:pPr>
             <a:r>
-              <a:rPr>
+              <a:rPr sz="2400" b="1">
+                <a:solidFill>
+                  <a:srgbClr val="202124"/>
+                </a:solidFill>
                 <a:latin typeface="Microsoft YaHei"/>
               </a:rPr>
               <a:t>文件系统模块完成度</a:t>
@@ -6881,7 +7171,7 @@
         </p:spPr>
         <p:txBody>
           <a:bodyPr wrap="square" lIns="27432" rIns="27432" anchor="t">
-            <a:spAutoFit/>
+            <a:normAutofit/>
           </a:bodyPr>
           <a:lstStyle/>
           <a:p>
@@ -6894,7 +7184,10 @@
               </a:defRPr>
             </a:pPr>
             <a:r>
-              <a:rPr>
+              <a:rPr sz="1350" b="0">
+                <a:solidFill>
+                  <a:srgbClr val="475467"/>
+                </a:solidFill>
                 <a:latin typeface="Microsoft YaHei"/>
               </a:rPr>
               <a:t>VFS 抽象支撑常规文件、目录、procfs 和 devfs</a:t>
@@ -7051,7 +7344,7 @@
         </p:spPr>
         <p:txBody>
           <a:bodyPr wrap="square" lIns="27432" rIns="27432" anchor="t">
-            <a:spAutoFit/>
+            <a:normAutofit/>
           </a:bodyPr>
           <a:lstStyle/>
           <a:p>
@@ -7064,7 +7357,10 @@
               </a:defRPr>
             </a:pPr>
             <a:r>
-              <a:rPr>
+              <a:rPr sz="1500" b="1">
+                <a:solidFill>
+                  <a:srgbClr val="202124"/>
+                </a:solidFill>
                 <a:latin typeface="Microsoft YaHei"/>
               </a:rPr>
               <a:t>VFS 与后端</a:t>
@@ -7090,7 +7386,7 @@
         </p:spPr>
         <p:txBody>
           <a:bodyPr wrap="square" lIns="73152" rIns="27432">
-            <a:spAutoFit/>
+            <a:normAutofit/>
           </a:bodyPr>
           <a:lstStyle/>
           <a:p>
@@ -7106,7 +7402,10 @@
               </a:defRPr>
             </a:pPr>
             <a:r>
-              <a:rPr>
+              <a:rPr sz="1220" b="0">
+                <a:solidFill>
+                  <a:srgbClr val="475467"/>
+                </a:solidFill>
                 <a:latin typeface="Microsoft YaHei"/>
               </a:rPr>
               <a:t>inode/dentry/file/superblock 抽象统一常规文件和特殊文件</a:t>
@@ -7125,7 +7424,10 @@
               </a:defRPr>
             </a:pPr>
             <a:r>
-              <a:rPr>
+              <a:rPr sz="1220" b="0">
+                <a:solidFill>
+                  <a:srgbClr val="475467"/>
+                </a:solidFill>
                 <a:latin typeface="Microsoft YaHei"/>
               </a:rPr>
               <a:t>Ext4 通过 lwext4_rust 和 Disk 适配层接入块设备</a:t>
@@ -7144,7 +7446,10 @@
               </a:defRPr>
             </a:pPr>
             <a:r>
-              <a:rPr>
+              <a:rPr sz="1220" b="0">
+                <a:solidFill>
+                  <a:srgbClr val="475467"/>
+                </a:solidFill>
                 <a:latin typeface="Microsoft YaHei"/>
               </a:rPr>
               <a:t>procfs 动态生成 cpuinfo、mounts、meminfo、status 等兼容入口</a:t>
@@ -7163,7 +7468,10 @@
               </a:defRPr>
             </a:pPr>
             <a:r>
-              <a:rPr>
+              <a:rPr sz="1220" b="0">
+                <a:solidFill>
+                  <a:srgbClr val="475467"/>
+                </a:solidFill>
                 <a:latin typeface="Microsoft YaHei"/>
               </a:rPr>
               <a:t>devfs 暴露 null、zero、random、misc/rtc、loop-control、loop0</a:t>
@@ -7277,7 +7585,7 @@
         </p:spPr>
         <p:txBody>
           <a:bodyPr wrap="square" lIns="27432" rIns="27432" anchor="t">
-            <a:spAutoFit/>
+            <a:normAutofit/>
           </a:bodyPr>
           <a:lstStyle/>
           <a:p>
@@ -7290,7 +7598,10 @@
               </a:defRPr>
             </a:pPr>
             <a:r>
-              <a:rPr>
+              <a:rPr sz="1500" b="1">
+                <a:solidFill>
+                  <a:srgbClr val="202124"/>
+                </a:solidFill>
                 <a:latin typeface="Microsoft YaHei"/>
               </a:rPr>
               <a:t>需要继续强化</a:t>
@@ -7316,7 +7627,7 @@
         </p:spPr>
         <p:txBody>
           <a:bodyPr wrap="square" lIns="73152" rIns="27432">
-            <a:spAutoFit/>
+            <a:normAutofit/>
           </a:bodyPr>
           <a:lstStyle/>
           <a:p>
@@ -7332,7 +7643,10 @@
               </a:defRPr>
             </a:pPr>
             <a:r>
-              <a:rPr>
+              <a:rPr sz="1220" b="0">
+                <a:solidFill>
+                  <a:srgbClr val="475467"/>
+                </a:solidFill>
                 <a:latin typeface="Microsoft YaHei"/>
               </a:rPr>
               <a:t>路径解析中的权限、软链接、AT_* 标志和错误码细节</a:t>
@@ -7351,7 +7665,10 @@
               </a:defRPr>
             </a:pPr>
             <a:r>
-              <a:rPr>
+              <a:rPr sz="1220" b="0">
+                <a:solidFill>
+                  <a:srgbClr val="475467"/>
+                </a:solidFill>
                 <a:latin typeface="Microsoft YaHei"/>
               </a:rPr>
               <a:t>page cache 与 dentry cache 在目录修改和写回路径中的一致性</a:t>
@@ -7370,7 +7687,10 @@
               </a:defRPr>
             </a:pPr>
             <a:r>
-              <a:rPr>
+              <a:rPr sz="1220" b="0">
+                <a:solidFill>
+                  <a:srgbClr val="475467"/>
+                </a:solidFill>
                 <a:latin typeface="Microsoft YaHei"/>
               </a:rPr>
               <a:t>xattr、mount、rename/link/unlink 等复杂边界</a:t>
@@ -7389,7 +7709,10 @@
               </a:defRPr>
             </a:pPr>
             <a:r>
-              <a:rPr>
+              <a:rPr sz="1220" b="0">
+                <a:solidFill>
+                  <a:srgbClr val="475467"/>
+                </a:solidFill>
                 <a:latin typeface="Microsoft YaHei"/>
               </a:rPr>
               <a:t>长测下 Ext4 写入、truncate 和目录项更新稳定性</a:t>
@@ -7519,7 +7842,7 @@
         </p:spPr>
         <p:txBody>
           <a:bodyPr wrap="square" lIns="27432" rIns="27432" anchor="t">
-            <a:spAutoFit/>
+            <a:normAutofit/>
           </a:bodyPr>
           <a:lstStyle/>
           <a:p>
@@ -7532,6 +7855,12 @@
               </a:defRPr>
             </a:pPr>
             <a:r>
+              <a:rPr sz="900" b="0">
+                <a:solidFill>
+                  <a:srgbClr val="667085"/>
+                </a:solidFill>
+                <a:latin typeface="Microsoft YaHei"/>
+              </a:rPr>
               <a:t>14 / 25</a:t>
             </a:r>
           </a:p>
@@ -7555,7 +7884,7 @@
         </p:spPr>
         <p:txBody>
           <a:bodyPr wrap="square" lIns="27432" rIns="27432" anchor="t">
-            <a:spAutoFit/>
+            <a:normAutofit/>
           </a:bodyPr>
           <a:lstStyle/>
           <a:p>
@@ -7568,6 +7897,12 @@
               </a:defRPr>
             </a:pPr>
             <a:r>
+              <a:rPr sz="2400" b="1">
+                <a:solidFill>
+                  <a:srgbClr val="202124"/>
+                </a:solidFill>
+                <a:latin typeface="Microsoft YaHei"/>
+              </a:rPr>
               <a:t>系统调用与 fd 表</a:t>
             </a:r>
           </a:p>
@@ -7591,7 +7926,7 @@
         </p:spPr>
         <p:txBody>
           <a:bodyPr wrap="square" lIns="27432" rIns="27432" anchor="t">
-            <a:spAutoFit/>
+            <a:normAutofit/>
           </a:bodyPr>
           <a:lstStyle/>
           <a:p>
@@ -7604,6 +7939,12 @@
               </a:defRPr>
             </a:pPr>
             <a:r>
+              <a:rPr sz="1350" b="0">
+                <a:solidFill>
+                  <a:srgbClr val="475467"/>
+                </a:solidFill>
+                <a:latin typeface="Microsoft YaHei"/>
+              </a:rPr>
               <a:t>最终版 syscall 分发规模与实现分布</a:t>
             </a:r>
           </a:p>
@@ -7758,7 +8099,7 @@
         </p:spPr>
         <p:txBody>
           <a:bodyPr wrap="square" lIns="27432" rIns="27432" anchor="t">
-            <a:spAutoFit/>
+            <a:normAutofit/>
           </a:bodyPr>
           <a:lstStyle/>
           <a:p>
@@ -7771,6 +8112,12 @@
               </a:defRPr>
             </a:pPr>
             <a:r>
+              <a:rPr sz="1500" b="1">
+                <a:solidFill>
+                  <a:srgbClr val="202124"/>
+                </a:solidFill>
+                <a:latin typeface="Microsoft YaHei"/>
+              </a:rPr>
               <a:t>分发规模</a:t>
             </a:r>
           </a:p>
@@ -7794,7 +8141,7 @@
         </p:spPr>
         <p:txBody>
           <a:bodyPr wrap="square" lIns="27432" rIns="27432" anchor="t">
-            <a:spAutoFit/>
+            <a:normAutofit/>
           </a:bodyPr>
           <a:lstStyle/>
           <a:p>
@@ -7807,6 +8154,12 @@
               </a:defRPr>
             </a:pPr>
             <a:r>
+              <a:rPr sz="1220" b="0">
+                <a:solidFill>
+                  <a:srgbClr val="475467"/>
+                </a:solidFill>
+                <a:latin typeface="Microsoft YaHei"/>
+              </a:rPr>
               <a:t>syscall/mod.rs 维护 216 个 Linux syscall 分发入口。分发层负责 syscall id、参数数组、返回值和 errno 的统一出口。</a:t>
             </a:r>
           </a:p>
@@ -7918,7 +8271,7 @@
         </p:spPr>
         <p:txBody>
           <a:bodyPr wrap="square" lIns="27432" rIns="27432" anchor="t">
-            <a:spAutoFit/>
+            <a:normAutofit/>
           </a:bodyPr>
           <a:lstStyle/>
           <a:p>
@@ -7931,6 +8284,12 @@
               </a:defRPr>
             </a:pPr>
             <a:r>
+              <a:rPr sz="1500" b="1">
+                <a:solidFill>
+                  <a:srgbClr val="202124"/>
+                </a:solidFill>
+                <a:latin typeface="Microsoft YaHei"/>
+              </a:rPr>
               <a:t>实现分布</a:t>
             </a:r>
           </a:p>
@@ -7954,7 +8313,7 @@
         </p:spPr>
         <p:txBody>
           <a:bodyPr wrap="square" lIns="27432" rIns="27432" anchor="t">
-            <a:spAutoFit/>
+            <a:normAutofit/>
           </a:bodyPr>
           <a:lstStyle/>
           <a:p>
@@ -7967,6 +8326,12 @@
               </a:defRPr>
             </a:pPr>
             <a:r>
+              <a:rPr sz="1220" b="0">
+                <a:solidFill>
+                  <a:srgbClr val="475467"/>
+                </a:solidFill>
+                <a:latin typeface="Microsoft YaHei"/>
+              </a:rPr>
               <a:t>fs.rs 73 个入口，process.rs 56 个入口，special_fd.rs 20 个入口，net.rs 18 个入口，time.rs 17 个入口，signal.rs 12 个入口。</a:t>
             </a:r>
           </a:p>
@@ -8078,7 +8443,7 @@
         </p:spPr>
         <p:txBody>
           <a:bodyPr wrap="square" lIns="27432" rIns="27432" anchor="t">
-            <a:spAutoFit/>
+            <a:normAutofit/>
           </a:bodyPr>
           <a:lstStyle/>
           <a:p>
@@ -8091,6 +8456,12 @@
               </a:defRPr>
             </a:pPr>
             <a:r>
+              <a:rPr sz="1500" b="1">
+                <a:solidFill>
+                  <a:srgbClr val="202124"/>
+                </a:solidFill>
+                <a:latin typeface="Microsoft YaHei"/>
+              </a:rPr>
               <a:t>fd 资源模型</a:t>
             </a:r>
           </a:p>
@@ -8114,7 +8485,7 @@
         </p:spPr>
         <p:txBody>
           <a:bodyPr wrap="square" lIns="27432" rIns="27432" anchor="t">
-            <a:spAutoFit/>
+            <a:normAutofit/>
           </a:bodyPr>
           <a:lstStyle/>
           <a:p>
@@ -8127,6 +8498,12 @@
               </a:defRPr>
             </a:pPr>
             <a:r>
+              <a:rPr sz="1220" b="0">
+                <a:solidFill>
+                  <a:srgbClr val="475467"/>
+                </a:solidFill>
+                <a:latin typeface="Microsoft YaHei"/>
+              </a:rPr>
               <a:t>普通文件、目录、pipe、socket、timerfd、eventfd、epoll、stdio 和 devfs 文件都通过 FileOp 进入 read/write/poll/close 路径。</a:t>
             </a:r>
           </a:p>
@@ -8254,7 +8631,7 @@
         </p:spPr>
         <p:txBody>
           <a:bodyPr wrap="square" lIns="27432" rIns="27432" anchor="t">
-            <a:spAutoFit/>
+            <a:normAutofit/>
           </a:bodyPr>
           <a:lstStyle/>
           <a:p>
@@ -8267,7 +8644,10 @@
               </a:defRPr>
             </a:pPr>
             <a:r>
-              <a:rPr>
+              <a:rPr sz="900" b="0">
+                <a:solidFill>
+                  <a:srgbClr val="667085"/>
+                </a:solidFill>
                 <a:latin typeface="Microsoft YaHei"/>
               </a:rPr>
               <a:t>15 / 25</a:t>
@@ -8293,7 +8673,7 @@
         </p:spPr>
         <p:txBody>
           <a:bodyPr wrap="square" lIns="27432" rIns="27432" anchor="t">
-            <a:spAutoFit/>
+            <a:normAutofit/>
           </a:bodyPr>
           <a:lstStyle/>
           <a:p>
@@ -8306,7 +8686,10 @@
               </a:defRPr>
             </a:pPr>
             <a:r>
-              <a:rPr>
+              <a:rPr sz="2400" b="1">
+                <a:solidFill>
+                  <a:srgbClr val="202124"/>
+                </a:solidFill>
                 <a:latin typeface="Microsoft YaHei"/>
               </a:rPr>
               <a:t>信号处理模块</a:t>
@@ -8332,7 +8715,7 @@
         </p:spPr>
         <p:txBody>
           <a:bodyPr wrap="square" lIns="27432" rIns="27432" anchor="t">
-            <a:spAutoFit/>
+            <a:normAutofit/>
           </a:bodyPr>
           <a:lstStyle/>
           <a:p>
@@ -8345,7 +8728,10 @@
               </a:defRPr>
             </a:pPr>
             <a:r>
-              <a:rPr>
+              <a:rPr sz="1350" b="0">
+                <a:solidFill>
+                  <a:srgbClr val="475467"/>
+                </a:solidFill>
                 <a:latin typeface="Microsoft YaHei"/>
               </a:rPr>
               <a:t>系统调用返回、缺页修复和定时器触发后统一检查信号</a:t>
@@ -8502,7 +8888,7 @@
         </p:spPr>
         <p:txBody>
           <a:bodyPr wrap="square" lIns="27432" rIns="27432" anchor="t">
-            <a:spAutoFit/>
+            <a:normAutofit/>
           </a:bodyPr>
           <a:lstStyle/>
           <a:p>
@@ -8515,7 +8901,10 @@
               </a:defRPr>
             </a:pPr>
             <a:r>
-              <a:rPr>
+              <a:rPr sz="1500" b="1">
+                <a:solidFill>
+                  <a:srgbClr val="202124"/>
+                </a:solidFill>
                 <a:latin typeface="Microsoft YaHei"/>
               </a:rPr>
               <a:t>信号状态</a:t>
@@ -8541,7 +8930,7 @@
         </p:spPr>
         <p:txBody>
           <a:bodyPr wrap="square" lIns="27432" rIns="27432" anchor="t">
-            <a:spAutoFit/>
+            <a:normAutofit/>
           </a:bodyPr>
           <a:lstStyle/>
           <a:p>
@@ -8554,7 +8943,10 @@
               </a:defRPr>
             </a:pPr>
             <a:r>
-              <a:rPr>
+              <a:rPr sz="1220" b="0">
+                <a:solidFill>
+                  <a:srgbClr val="475467"/>
+                </a:solidFill>
                 <a:latin typeface="Microsoft YaHei"/>
               </a:rPr>
               <a:t>每个任务维护 pending、mask、handler/action 等状态，支持默认、忽略和用户自定义处理。</a:t>
@@ -8668,7 +9060,7 @@
         </p:spPr>
         <p:txBody>
           <a:bodyPr wrap="square" lIns="27432" rIns="27432" anchor="t">
-            <a:spAutoFit/>
+            <a:normAutofit/>
           </a:bodyPr>
           <a:lstStyle/>
           <a:p>
@@ -8681,7 +9073,10 @@
               </a:defRPr>
             </a:pPr>
             <a:r>
-              <a:rPr>
+              <a:rPr sz="1500" b="1">
+                <a:solidFill>
+                  <a:srgbClr val="202124"/>
+                </a:solidFill>
                 <a:latin typeface="Microsoft YaHei"/>
               </a:rPr>
               <a:t>递送路径</a:t>
@@ -8707,7 +9102,7 @@
         </p:spPr>
         <p:txBody>
           <a:bodyPr wrap="square" lIns="27432" rIns="27432" anchor="t">
-            <a:spAutoFit/>
+            <a:normAutofit/>
           </a:bodyPr>
           <a:lstStyle/>
           <a:p>
@@ -8720,7 +9115,10 @@
               </a:defRPr>
             </a:pPr>
             <a:r>
-              <a:rPr>
+              <a:rPr sz="1220" b="0">
+                <a:solidFill>
+                  <a:srgbClr val="475467"/>
+                </a:solidFill>
                 <a:latin typeface="Microsoft YaHei"/>
               </a:rPr>
               <a:t>返回用户态前检查未屏蔽信号；若需要用户 handler，内核构造用户栈帧并修改 TrapContext。</a:t>
@@ -8834,7 +9232,7 @@
         </p:spPr>
         <p:txBody>
           <a:bodyPr wrap="square" lIns="27432" rIns="27432" anchor="t">
-            <a:spAutoFit/>
+            <a:normAutofit/>
           </a:bodyPr>
           <a:lstStyle/>
           <a:p>
@@ -8847,7 +9245,10 @@
               </a:defRPr>
             </a:pPr>
             <a:r>
-              <a:rPr>
+              <a:rPr sz="1500" b="1">
+                <a:solidFill>
+                  <a:srgbClr val="202124"/>
+                </a:solidFill>
                 <a:latin typeface="Microsoft YaHei"/>
               </a:rPr>
               <a:t>返回路径</a:t>
@@ -8873,7 +9274,7 @@
         </p:spPr>
         <p:txBody>
           <a:bodyPr wrap="square" lIns="27432" rIns="27432" anchor="t">
-            <a:spAutoFit/>
+            <a:normAutofit/>
           </a:bodyPr>
           <a:lstStyle/>
           <a:p>
@@ -8886,7 +9287,10 @@
               </a:defRPr>
             </a:pPr>
             <a:r>
-              <a:rPr>
+              <a:rPr sz="1220" b="0">
+                <a:solidFill>
+                  <a:srgbClr val="475467"/>
+                </a:solidFill>
                 <a:latin typeface="Microsoft YaHei"/>
               </a:rPr>
               <a:t>用户 handler 结束后通过 sigreturn 跳板回到内核，恢复原上下文和信号屏蔽状态。</a:t>
@@ -9016,7 +9420,7 @@
         </p:spPr>
         <p:txBody>
           <a:bodyPr wrap="square" lIns="27432" rIns="27432" anchor="t">
-            <a:spAutoFit/>
+            <a:normAutofit/>
           </a:bodyPr>
           <a:lstStyle/>
           <a:p>
@@ -9029,7 +9433,10 @@
               </a:defRPr>
             </a:pPr>
             <a:r>
-              <a:rPr>
+              <a:rPr sz="900" b="0">
+                <a:solidFill>
+                  <a:srgbClr val="667085"/>
+                </a:solidFill>
                 <a:latin typeface="Microsoft YaHei"/>
               </a:rPr>
               <a:t>16 / 25</a:t>
@@ -9055,7 +9462,7 @@
         </p:spPr>
         <p:txBody>
           <a:bodyPr wrap="square" lIns="27432" rIns="27432" anchor="t">
-            <a:spAutoFit/>
+            <a:normAutofit/>
           </a:bodyPr>
           <a:lstStyle/>
           <a:p>
@@ -9068,7 +9475,10 @@
               </a:defRPr>
             </a:pPr>
             <a:r>
-              <a:rPr>
+              <a:rPr sz="2400" b="1">
+                <a:solidFill>
+                  <a:srgbClr val="202124"/>
+                </a:solidFill>
                 <a:latin typeface="Microsoft YaHei"/>
               </a:rPr>
               <a:t>IPC 与同步</a:t>
@@ -9094,7 +9504,7 @@
         </p:spPr>
         <p:txBody>
           <a:bodyPr wrap="square" lIns="27432" rIns="27432" anchor="t">
-            <a:spAutoFit/>
+            <a:normAutofit/>
           </a:bodyPr>
           <a:lstStyle/>
           <a:p>
@@ -9107,7 +9517,10 @@
               </a:defRPr>
             </a:pPr>
             <a:r>
-              <a:rPr>
+              <a:rPr sz="1350" b="0">
+                <a:solidFill>
+                  <a:srgbClr val="475467"/>
+                </a:solidFill>
                 <a:latin typeface="Microsoft YaHei"/>
               </a:rPr>
               <a:t>围绕 shell、pthread 和 LTP 同步测例补齐</a:t>
@@ -9264,7 +9677,7 @@
         </p:spPr>
         <p:txBody>
           <a:bodyPr wrap="square" lIns="27432" rIns="27432" anchor="t">
-            <a:spAutoFit/>
+            <a:normAutofit/>
           </a:bodyPr>
           <a:lstStyle/>
           <a:p>
@@ -9277,7 +9690,10 @@
               </a:defRPr>
             </a:pPr>
             <a:r>
-              <a:rPr>
+              <a:rPr sz="1500" b="1">
+                <a:solidFill>
+                  <a:srgbClr val="202124"/>
+                </a:solidFill>
                 <a:latin typeface="Microsoft YaHei"/>
               </a:rPr>
               <a:t>已覆盖能力</a:t>
@@ -9303,7 +9719,7 @@
         </p:spPr>
         <p:txBody>
           <a:bodyPr wrap="square" lIns="73152" rIns="27432">
-            <a:spAutoFit/>
+            <a:normAutofit/>
           </a:bodyPr>
           <a:lstStyle/>
           <a:p>
@@ -9319,7 +9735,10 @@
               </a:defRPr>
             </a:pPr>
             <a:r>
-              <a:rPr>
+              <a:rPr sz="1220" b="0">
+                <a:solidFill>
+                  <a:srgbClr val="475467"/>
+                </a:solidFill>
                 <a:latin typeface="Microsoft YaHei"/>
               </a:rPr>
               <a:t>pipe/FIFO 支持读写端引用计数、阻塞和 poll 状态</a:t>
@@ -9338,7 +9757,10 @@
               </a:defRPr>
             </a:pPr>
             <a:r>
-              <a:rPr>
+              <a:rPr sz="1220" b="0">
+                <a:solidFill>
+                  <a:srgbClr val="475467"/>
+                </a:solidFill>
                 <a:latin typeface="Microsoft YaHei"/>
               </a:rPr>
               <a:t>futex 支持 wait/wake，服务 pthread 条件变量和线程同步</a:t>
@@ -9357,7 +9779,10 @@
               </a:defRPr>
             </a:pPr>
             <a:r>
-              <a:rPr>
+              <a:rPr sz="1220" b="0">
+                <a:solidFill>
+                  <a:srgbClr val="475467"/>
+                </a:solidFill>
                 <a:latin typeface="Microsoft YaHei"/>
               </a:rPr>
               <a:t>部分 SysV IPC 支持 shmget/shmat/shmctl 等共享内存路径</a:t>
@@ -9376,7 +9801,10 @@
               </a:defRPr>
             </a:pPr>
             <a:r>
-              <a:rPr>
+              <a:rPr sz="1220" b="0">
+                <a:solidFill>
+                  <a:srgbClr val="475467"/>
+                </a:solidFill>
                 <a:latin typeface="Microsoft YaHei"/>
               </a:rPr>
               <a:t>robust list 与 clear_child_tid 用于线程退出后的用户态同步</a:t>
@@ -9490,7 +9918,7 @@
         </p:spPr>
         <p:txBody>
           <a:bodyPr wrap="square" lIns="27432" rIns="27432" anchor="t">
-            <a:spAutoFit/>
+            <a:normAutofit/>
           </a:bodyPr>
           <a:lstStyle/>
           <a:p>
@@ -9503,7 +9931,10 @@
               </a:defRPr>
             </a:pPr>
             <a:r>
-              <a:rPr>
+              <a:rPr sz="1500" b="1">
+                <a:solidFill>
+                  <a:srgbClr val="202124"/>
+                </a:solidFill>
                 <a:latin typeface="Microsoft YaHei"/>
               </a:rPr>
               <a:t>后续重点</a:t>
@@ -9529,7 +9960,7 @@
         </p:spPr>
         <p:txBody>
           <a:bodyPr wrap="square" lIns="73152" rIns="27432">
-            <a:spAutoFit/>
+            <a:normAutofit/>
           </a:bodyPr>
           <a:lstStyle/>
           <a:p>
@@ -9545,7 +9976,10 @@
               </a:defRPr>
             </a:pPr>
             <a:r>
-              <a:rPr>
+              <a:rPr sz="1220" b="0">
+                <a:solidFill>
+                  <a:srgbClr val="475467"/>
+                </a:solidFill>
                 <a:latin typeface="Microsoft YaHei"/>
               </a:rPr>
               <a:t>futex 复杂 op、超时、信号中断和竞争窗口</a:t>
@@ -9564,7 +9998,10 @@
               </a:defRPr>
             </a:pPr>
             <a:r>
-              <a:rPr>
+              <a:rPr sz="1220" b="0">
+                <a:solidFill>
+                  <a:srgbClr val="475467"/>
+                </a:solidFill>
                 <a:latin typeface="Microsoft YaHei"/>
               </a:rPr>
               <a:t>SysV IPC 权限、标志、生命周期和错误码细节</a:t>
@@ -9583,7 +10020,10 @@
               </a:defRPr>
             </a:pPr>
             <a:r>
-              <a:rPr>
+              <a:rPr sz="1220" b="0">
+                <a:solidFill>
+                  <a:srgbClr val="475467"/>
+                </a:solidFill>
                 <a:latin typeface="Microsoft YaHei"/>
               </a:rPr>
               <a:t>pipe/splice/sendfile 等 I/O 组合路径的边界</a:t>
@@ -9602,7 +10042,10 @@
               </a:defRPr>
             </a:pPr>
             <a:r>
-              <a:rPr>
+              <a:rPr sz="1220" b="0">
+                <a:solidFill>
+                  <a:srgbClr val="475467"/>
+                </a:solidFill>
                 <a:latin typeface="Microsoft YaHei"/>
               </a:rPr>
               <a:t>多线程密集退出和等待路径下的偶发状态残留</a:t>
@@ -9732,7 +10175,7 @@
         </p:spPr>
         <p:txBody>
           <a:bodyPr wrap="square" lIns="27432" rIns="27432" anchor="t">
-            <a:spAutoFit/>
+            <a:normAutofit/>
           </a:bodyPr>
           <a:lstStyle/>
           <a:p>
@@ -9745,7 +10188,10 @@
               </a:defRPr>
             </a:pPr>
             <a:r>
-              <a:rPr>
+              <a:rPr sz="900" b="0">
+                <a:solidFill>
+                  <a:srgbClr val="667085"/>
+                </a:solidFill>
                 <a:latin typeface="Microsoft YaHei"/>
               </a:rPr>
               <a:t>17 / 25</a:t>
@@ -9771,7 +10217,7 @@
         </p:spPr>
         <p:txBody>
           <a:bodyPr wrap="square" lIns="27432" rIns="27432" anchor="t">
-            <a:spAutoFit/>
+            <a:normAutofit/>
           </a:bodyPr>
           <a:lstStyle/>
           <a:p>
@@ -9784,7 +10230,10 @@
               </a:defRPr>
             </a:pPr>
             <a:r>
-              <a:rPr>
+              <a:rPr sz="2400" b="1">
+                <a:solidFill>
+                  <a:srgbClr val="202124"/>
+                </a:solidFill>
                 <a:latin typeface="Microsoft YaHei"/>
               </a:rPr>
               <a:t>时间模块</a:t>
@@ -9810,7 +10259,7 @@
         </p:spPr>
         <p:txBody>
           <a:bodyPr wrap="square" lIns="27432" rIns="27432" anchor="t">
-            <a:spAutoFit/>
+            <a:normAutofit/>
           </a:bodyPr>
           <a:lstStyle/>
           <a:p>
@@ -9823,7 +10272,10 @@
               </a:defRPr>
             </a:pPr>
             <a:r>
-              <a:rPr>
+              <a:rPr sz="1350" b="0">
+                <a:solidFill>
+                  <a:srgbClr val="475467"/>
+                </a:solidFill>
                 <a:latin typeface="Microsoft YaHei"/>
               </a:rPr>
               <a:t>多尺度时钟支撑 libc 时间接口和超时等待</a:t>
@@ -9980,7 +10432,7 @@
         </p:spPr>
         <p:txBody>
           <a:bodyPr wrap="square" lIns="27432" rIns="27432" anchor="t">
-            <a:spAutoFit/>
+            <a:normAutofit/>
           </a:bodyPr>
           <a:lstStyle/>
           <a:p>
@@ -9993,7 +10445,10 @@
               </a:defRPr>
             </a:pPr>
             <a:r>
-              <a:rPr>
+              <a:rPr sz="1500" b="1">
+                <a:solidFill>
+                  <a:srgbClr val="202124"/>
+                </a:solidFill>
                 <a:latin typeface="Microsoft YaHei"/>
               </a:rPr>
               <a:t>基础时间</a:t>
@@ -10019,7 +10474,7 @@
         </p:spPr>
         <p:txBody>
           <a:bodyPr wrap="square" lIns="27432" rIns="27432" anchor="t">
-            <a:spAutoFit/>
+            <a:normAutofit/>
           </a:bodyPr>
           <a:lstStyle/>
           <a:p>
@@ -10032,35 +10487,50 @@
               </a:defRPr>
             </a:pPr>
             <a:r>
-              <a:rPr>
+              <a:rPr sz="1220" b="0">
+                <a:solidFill>
+                  <a:srgbClr val="475467"/>
+                </a:solidFill>
                 <a:latin typeface="Microsoft YaHei"/>
               </a:rPr>
               <a:t>gettimeofday</a:t>
             </a:r>
             <a:br/>
             <a:r>
-              <a:rPr>
+              <a:rPr sz="1220" b="0">
+                <a:solidFill>
+                  <a:srgbClr val="475467"/>
+                </a:solidFill>
                 <a:latin typeface="Microsoft YaHei"/>
               </a:rPr>
               <a:t>clock_gettime</a:t>
             </a:r>
             <a:br/>
             <a:r>
-              <a:rPr>
+              <a:rPr sz="1220" b="0">
+                <a:solidFill>
+                  <a:srgbClr val="475467"/>
+                </a:solidFill>
                 <a:latin typeface="Microsoft YaHei"/>
               </a:rPr>
               <a:t>time / times</a:t>
             </a:r>
             <a:br/>
             <a:r>
-              <a:rPr>
+              <a:rPr sz="1220" b="0">
+                <a:solidFill>
+                  <a:srgbClr val="475467"/>
+                </a:solidFill>
                 <a:latin typeface="Microsoft YaHei"/>
               </a:rPr>
               <a:t>statx timestamp</a:t>
             </a:r>
             <a:br/>
             <a:r>
-              <a:rPr>
+              <a:rPr sz="1220" b="0">
+                <a:solidFill>
+                  <a:srgbClr val="475467"/>
+                </a:solidFill>
                 <a:latin typeface="Microsoft YaHei"/>
               </a:rPr>
               <a:t>硬件 tick 换算</a:t>
@@ -10174,7 +10644,7 @@
         </p:spPr>
         <p:txBody>
           <a:bodyPr wrap="square" lIns="27432" rIns="27432" anchor="t">
-            <a:spAutoFit/>
+            <a:normAutofit/>
           </a:bodyPr>
           <a:lstStyle/>
           <a:p>
@@ -10187,7 +10657,10 @@
               </a:defRPr>
             </a:pPr>
             <a:r>
-              <a:rPr>
+              <a:rPr sz="1500" b="1">
+                <a:solidFill>
+                  <a:srgbClr val="202124"/>
+                </a:solidFill>
                 <a:latin typeface="Microsoft YaHei"/>
               </a:rPr>
               <a:t>睡眠与超时</a:t>
@@ -10213,7 +10686,7 @@
         </p:spPr>
         <p:txBody>
           <a:bodyPr wrap="square" lIns="27432" rIns="27432" anchor="t">
-            <a:spAutoFit/>
+            <a:normAutofit/>
           </a:bodyPr>
           <a:lstStyle/>
           <a:p>
@@ -10226,35 +10699,50 @@
               </a:defRPr>
             </a:pPr>
             <a:r>
-              <a:rPr>
+              <a:rPr sz="1220" b="0">
+                <a:solidFill>
+                  <a:srgbClr val="475467"/>
+                </a:solidFill>
                 <a:latin typeface="Microsoft YaHei"/>
               </a:rPr>
               <a:t>nanosleep</a:t>
             </a:r>
             <a:br/>
             <a:r>
-              <a:rPr>
+              <a:rPr sz="1220" b="0">
+                <a:solidFill>
+                  <a:srgbClr val="475467"/>
+                </a:solidFill>
                 <a:latin typeface="Microsoft YaHei"/>
               </a:rPr>
               <a:t>clock_nanosleep</a:t>
             </a:r>
             <a:br/>
             <a:r>
-              <a:rPr>
+              <a:rPr sz="1220" b="0">
+                <a:solidFill>
+                  <a:srgbClr val="475467"/>
+                </a:solidFill>
                 <a:latin typeface="Microsoft YaHei"/>
               </a:rPr>
               <a:t>socket recv/send timeout</a:t>
             </a:r>
             <a:br/>
             <a:r>
-              <a:rPr>
+              <a:rPr sz="1220" b="0">
+                <a:solidFill>
+                  <a:srgbClr val="475467"/>
+                </a:solidFill>
                 <a:latin typeface="Microsoft YaHei"/>
               </a:rPr>
               <a:t>futex timeout</a:t>
             </a:r>
             <a:br/>
             <a:r>
-              <a:rPr>
+              <a:rPr sz="1220" b="0">
+                <a:solidFill>
+                  <a:srgbClr val="475467"/>
+                </a:solidFill>
                 <a:latin typeface="Microsoft YaHei"/>
               </a:rPr>
               <a:t>阻塞等待中的 timer check</a:t>
@@ -10368,7 +10856,7 @@
         </p:spPr>
         <p:txBody>
           <a:bodyPr wrap="square" lIns="27432" rIns="27432" anchor="t">
-            <a:spAutoFit/>
+            <a:normAutofit/>
           </a:bodyPr>
           <a:lstStyle/>
           <a:p>
@@ -10381,7 +10869,10 @@
               </a:defRPr>
             </a:pPr>
             <a:r>
-              <a:rPr>
+              <a:rPr sz="1500" b="1">
+                <a:solidFill>
+                  <a:srgbClr val="202124"/>
+                </a:solidFill>
                 <a:latin typeface="Microsoft YaHei"/>
               </a:rPr>
               <a:t>定时器接口</a:t>
@@ -10407,7 +10898,7 @@
         </p:spPr>
         <p:txBody>
           <a:bodyPr wrap="square" lIns="27432" rIns="27432" anchor="t">
-            <a:spAutoFit/>
+            <a:normAutofit/>
           </a:bodyPr>
           <a:lstStyle/>
           <a:p>
@@ -10420,35 +10911,50 @@
               </a:defRPr>
             </a:pPr>
             <a:r>
-              <a:rPr>
+              <a:rPr sz="1220" b="0">
+                <a:solidFill>
+                  <a:srgbClr val="475467"/>
+                </a:solidFill>
                 <a:latin typeface="Microsoft YaHei"/>
               </a:rPr>
               <a:t>alarm</a:t>
             </a:r>
             <a:br/>
             <a:r>
-              <a:rPr>
+              <a:rPr sz="1220" b="0">
+                <a:solidFill>
+                  <a:srgbClr val="475467"/>
+                </a:solidFill>
                 <a:latin typeface="Microsoft YaHei"/>
               </a:rPr>
               <a:t>setitimer/getitimer</a:t>
             </a:r>
             <a:br/>
             <a:r>
-              <a:rPr>
+              <a:rPr sz="1220" b="0">
+                <a:solidFill>
+                  <a:srgbClr val="475467"/>
+                </a:solidFill>
                 <a:latin typeface="Microsoft YaHei"/>
               </a:rPr>
               <a:t>POSIX timer</a:t>
             </a:r>
             <a:br/>
             <a:r>
-              <a:rPr>
+              <a:rPr sz="1220" b="0">
+                <a:solidFill>
+                  <a:srgbClr val="475467"/>
+                </a:solidFill>
                 <a:latin typeface="Microsoft YaHei"/>
               </a:rPr>
               <a:t>timerfd_create</a:t>
             </a:r>
             <a:br/>
             <a:r>
-              <a:rPr>
+              <a:rPr sz="1220" b="0">
+                <a:solidFill>
+                  <a:srgbClr val="475467"/>
+                </a:solidFill>
                 <a:latin typeface="Microsoft YaHei"/>
               </a:rPr>
               <a:t>timerfd_settime/read</a:t>
@@ -10578,7 +11084,7 @@
         </p:spPr>
         <p:txBody>
           <a:bodyPr wrap="square" lIns="27432" rIns="27432" anchor="t">
-            <a:spAutoFit/>
+            <a:normAutofit/>
           </a:bodyPr>
           <a:lstStyle/>
           <a:p>
@@ -10591,7 +11097,10 @@
               </a:defRPr>
             </a:pPr>
             <a:r>
-              <a:rPr>
+              <a:rPr sz="900" b="0">
+                <a:solidFill>
+                  <a:srgbClr val="667085"/>
+                </a:solidFill>
                 <a:latin typeface="Microsoft YaHei"/>
               </a:rPr>
               <a:t>18 / 25</a:t>
@@ -10617,7 +11126,7 @@
         </p:spPr>
         <p:txBody>
           <a:bodyPr wrap="square" lIns="27432" rIns="27432" anchor="t">
-            <a:spAutoFit/>
+            <a:normAutofit/>
           </a:bodyPr>
           <a:lstStyle/>
           <a:p>
@@ -10630,7 +11139,10 @@
               </a:defRPr>
             </a:pPr>
             <a:r>
-              <a:rPr>
+              <a:rPr sz="2400" b="1">
+                <a:solidFill>
+                  <a:srgbClr val="202124"/>
+                </a:solidFill>
                 <a:latin typeface="Microsoft YaHei"/>
               </a:rPr>
               <a:t>网络模块</a:t>
@@ -10656,7 +11168,7 @@
         </p:spPr>
         <p:txBody>
           <a:bodyPr wrap="square" lIns="27432" rIns="27432" anchor="t">
-            <a:spAutoFit/>
+            <a:normAutofit/>
           </a:bodyPr>
           <a:lstStyle/>
           <a:p>
@@ -10669,7 +11181,10 @@
               </a:defRPr>
             </a:pPr>
             <a:r>
-              <a:rPr>
+              <a:rPr sz="1350" b="0">
+                <a:solidFill>
+                  <a:srgbClr val="475467"/>
+                </a:solidFill>
                 <a:latin typeface="Microsoft YaHei"/>
               </a:rPr>
               <a:t>当前重点是 IPv4 本地回环和 socket ABI</a:t>
@@ -10826,7 +11341,7 @@
         </p:spPr>
         <p:txBody>
           <a:bodyPr wrap="square" lIns="27432" rIns="27432" anchor="t">
-            <a:spAutoFit/>
+            <a:normAutofit/>
           </a:bodyPr>
           <a:lstStyle/>
           <a:p>
@@ -10839,7 +11354,10 @@
               </a:defRPr>
             </a:pPr>
             <a:r>
-              <a:rPr>
+              <a:rPr sz="1500" b="1">
+                <a:solidFill>
+                  <a:srgbClr val="202124"/>
+                </a:solidFill>
                 <a:latin typeface="Microsoft YaHei"/>
               </a:rPr>
               <a:t>完成内容</a:t>
@@ -10865,7 +11383,7 @@
         </p:spPr>
         <p:txBody>
           <a:bodyPr wrap="square" lIns="27432" rIns="27432" anchor="t">
-            <a:spAutoFit/>
+            <a:normAutofit/>
           </a:bodyPr>
           <a:lstStyle/>
           <a:p>
@@ -10878,7 +11396,10 @@
               </a:defRPr>
             </a:pPr>
             <a:r>
-              <a:rPr>
+              <a:rPr sz="1220" b="0">
+                <a:solidFill>
+                  <a:srgbClr val="475467"/>
+                </a:solidFill>
                 <a:latin typeface="Microsoft YaHei"/>
               </a:rPr>
               <a:t>socket() 解析 AF_INET/AF_UNIX、SOCK_STREAM/SOCK_DGRAM 和 NONBLOCK/CLOEXEC；TCP/UDP 通过 smoltcp SocketSet 推进状态机；LoopbackDev 把发送包放入队列并在下一次 poll 作为接收包返回。</a:t>
@@ -10992,7 +11513,7 @@
         </p:spPr>
         <p:txBody>
           <a:bodyPr wrap="square" lIns="27432" rIns="27432" anchor="t">
-            <a:spAutoFit/>
+            <a:normAutofit/>
           </a:bodyPr>
           <a:lstStyle/>
           <a:p>
@@ -11005,7 +11526,10 @@
               </a:defRPr>
             </a:pPr>
             <a:r>
-              <a:rPr>
+              <a:rPr sz="1500" b="1">
+                <a:solidFill>
+                  <a:srgbClr val="202124"/>
+                </a:solidFill>
                 <a:latin typeface="Microsoft YaHei"/>
               </a:rPr>
               <a:t>兼容边界</a:t>
@@ -11031,7 +11555,7 @@
         </p:spPr>
         <p:txBody>
           <a:bodyPr wrap="square" lIns="27432" rIns="27432" anchor="t">
-            <a:spAutoFit/>
+            <a:normAutofit/>
           </a:bodyPr>
           <a:lstStyle/>
           <a:p>
@@ -11044,7 +11568,10 @@
               </a:defRPr>
             </a:pPr>
             <a:r>
-              <a:rPr>
+              <a:rPr sz="1220" b="0">
+                <a:solidFill>
+                  <a:srgbClr val="475467"/>
+                </a:solidFill>
                 <a:latin typeface="Microsoft YaHei"/>
               </a:rPr>
               <a:t>支持 bind/connect/listen/accept/sendto/recvfrom/sendmsg/recvmsg 的主路径和常见 socket option。当前不接入真实网卡，IPv6/raw socket 等按语义返回不支持错误码。</a:t>
@@ -11174,7 +11701,7 @@
         </p:spPr>
         <p:txBody>
           <a:bodyPr wrap="square" lIns="27432" rIns="27432" anchor="t">
-            <a:spAutoFit/>
+            <a:normAutofit/>
           </a:bodyPr>
           <a:lstStyle/>
           <a:p>
@@ -11187,7 +11714,10 @@
               </a:defRPr>
             </a:pPr>
             <a:r>
-              <a:rPr>
+              <a:rPr sz="900" b="0">
+                <a:solidFill>
+                  <a:srgbClr val="667085"/>
+                </a:solidFill>
                 <a:latin typeface="Microsoft YaHei"/>
               </a:rPr>
               <a:t>19 / 25</a:t>
@@ -11213,7 +11743,7 @@
         </p:spPr>
         <p:txBody>
           <a:bodyPr wrap="square" lIns="27432" rIns="27432" anchor="t">
-            <a:spAutoFit/>
+            <a:normAutofit/>
           </a:bodyPr>
           <a:lstStyle/>
           <a:p>
@@ -11226,7 +11756,10 @@
               </a:defRPr>
             </a:pPr>
             <a:r>
-              <a:rPr>
+              <a:rPr sz="2400" b="1">
+                <a:solidFill>
+                  <a:srgbClr val="202124"/>
+                </a:solidFill>
                 <a:latin typeface="Microsoft YaHei"/>
               </a:rPr>
               <a:t>设备与块 I/O</a:t>
@@ -11252,7 +11785,7 @@
         </p:spPr>
         <p:txBody>
           <a:bodyPr wrap="square" lIns="27432" rIns="27432" anchor="t">
-            <a:spAutoFit/>
+            <a:normAutofit/>
           </a:bodyPr>
           <a:lstStyle/>
           <a:p>
@@ -11265,7 +11798,10 @@
               </a:defRPr>
             </a:pPr>
             <a:r>
-              <a:rPr>
+              <a:rPr sz="1350" b="0">
+                <a:solidFill>
+                  <a:srgbClr val="475467"/>
+                </a:solidFill>
                 <a:latin typeface="Microsoft YaHei"/>
               </a:rPr>
               <a:t>VirtIO block 支撑 Ext4，devfs 支撑用户态兼容入口</a:t>
@@ -11422,7 +11958,7 @@
         </p:spPr>
         <p:txBody>
           <a:bodyPr wrap="square" lIns="27432" rIns="27432" anchor="t">
-            <a:spAutoFit/>
+            <a:normAutofit/>
           </a:bodyPr>
           <a:lstStyle/>
           <a:p>
@@ -11435,7 +11971,10 @@
               </a:defRPr>
             </a:pPr>
             <a:r>
-              <a:rPr>
+              <a:rPr sz="1500" b="1">
+                <a:solidFill>
+                  <a:srgbClr val="202124"/>
+                </a:solidFill>
                 <a:latin typeface="Microsoft YaHei"/>
               </a:rPr>
               <a:t>块设备路径</a:t>
@@ -11461,7 +12000,7 @@
         </p:spPr>
         <p:txBody>
           <a:bodyPr wrap="square" lIns="73152" rIns="27432">
-            <a:spAutoFit/>
+            <a:normAutofit/>
           </a:bodyPr>
           <a:lstStyle/>
           <a:p>
@@ -11477,7 +12016,10 @@
               </a:defRPr>
             </a:pPr>
             <a:r>
-              <a:rPr>
+              <a:rPr sz="1220" b="0">
+                <a:solidFill>
+                  <a:srgbClr val="475467"/>
+                </a:solidFill>
                 <a:latin typeface="Microsoft YaHei"/>
               </a:rPr>
               <a:t>RISC-V 使用 VirtIO MMIO transport</a:t>
@@ -11496,7 +12038,10 @@
               </a:defRPr>
             </a:pPr>
             <a:r>
-              <a:rPr>
+              <a:rPr sz="1220" b="0">
+                <a:solidFill>
+                  <a:srgbClr val="475467"/>
+                </a:solidFill>
                 <a:latin typeface="Microsoft YaHei"/>
               </a:rPr>
               <a:t>LoongArch 通过 PCI 扫描找到 virtio-blk</a:t>
@@ -11515,7 +12060,10 @@
               </a:defRPr>
             </a:pPr>
             <a:r>
-              <a:rPr>
+              <a:rPr sz="1220" b="0">
+                <a:solidFill>
+                  <a:srgbClr val="475467"/>
+                </a:solidFill>
                 <a:latin typeface="Microsoft YaHei"/>
               </a:rPr>
               <a:t>VirtIoHalImpl 管理 DMA 页帧和虚实地址转换</a:t>
@@ -11534,7 +12082,10 @@
               </a:defRPr>
             </a:pPr>
             <a:r>
-              <a:rPr>
+              <a:rPr sz="1220" b="0">
+                <a:solidFill>
+                  <a:srgbClr val="475467"/>
+                </a:solidFill>
                 <a:latin typeface="Microsoft YaHei"/>
               </a:rPr>
               <a:t>Disk 适配层把连续读写转换为块读写，供 lwext4 使用</a:t>
@@ -11648,7 +12199,7 @@
         </p:spPr>
         <p:txBody>
           <a:bodyPr wrap="square" lIns="27432" rIns="27432" anchor="t">
-            <a:spAutoFit/>
+            <a:normAutofit/>
           </a:bodyPr>
           <a:lstStyle/>
           <a:p>
@@ -11661,7 +12212,10 @@
               </a:defRPr>
             </a:pPr>
             <a:r>
-              <a:rPr>
+              <a:rPr sz="1500" b="1">
+                <a:solidFill>
+                  <a:srgbClr val="202124"/>
+                </a:solidFill>
                 <a:latin typeface="Microsoft YaHei"/>
               </a:rPr>
               <a:t>设备文件路径</a:t>
@@ -11687,7 +12241,7 @@
         </p:spPr>
         <p:txBody>
           <a:bodyPr wrap="square" lIns="73152" rIns="27432">
-            <a:spAutoFit/>
+            <a:normAutofit/>
           </a:bodyPr>
           <a:lstStyle/>
           <a:p>
@@ -11703,7 +12257,10 @@
               </a:defRPr>
             </a:pPr>
             <a:r>
-              <a:rPr>
+              <a:rPr sz="1220" b="0">
+                <a:solidFill>
+                  <a:srgbClr val="475467"/>
+                </a:solidFill>
                 <a:latin typeface="Microsoft YaHei"/>
               </a:rPr>
               <a:t>/dev/null、/dev/zero、/dev/random、/dev/urandom</a:t>
@@ -11722,7 +12279,10 @@
               </a:defRPr>
             </a:pPr>
             <a:r>
-              <a:rPr>
+              <a:rPr sz="1220" b="0">
+                <a:solidFill>
+                  <a:srgbClr val="475467"/>
+                </a:solidFill>
                 <a:latin typeface="Microsoft YaHei"/>
               </a:rPr>
               <a:t>/dev/misc/rtc 当前作为 RTC 兼容 stub</a:t>
@@ -11741,7 +12301,10 @@
               </a:defRPr>
             </a:pPr>
             <a:r>
-              <a:rPr>
+              <a:rPr sz="1220" b="0">
+                <a:solidFill>
+                  <a:srgbClr val="475467"/>
+                </a:solidFill>
                 <a:latin typeface="Microsoft YaHei"/>
               </a:rPr>
               <a:t>/dev/loop-control 查询可用 loop 设备</a:t>
@@ -11760,7 +12323,10 @@
               </a:defRPr>
             </a:pPr>
             <a:r>
-              <a:rPr>
+              <a:rPr sz="1220" b="0">
+                <a:solidFill>
+                  <a:srgbClr val="475467"/>
+                </a:solidFill>
                 <a:latin typeface="Microsoft YaHei"/>
               </a:rPr>
               <a:t>/dev/loop0 通过 ioctl 绑定普通文件作为块设备后端</a:t>
@@ -11890,7 +12456,7 @@
         </p:spPr>
         <p:txBody>
           <a:bodyPr wrap="square" lIns="27432" rIns="27432" anchor="t">
-            <a:spAutoFit/>
+            <a:normAutofit/>
           </a:bodyPr>
           <a:lstStyle/>
           <a:p>
@@ -11903,7 +12469,10 @@
               </a:defRPr>
             </a:pPr>
             <a:r>
-              <a:rPr>
+              <a:rPr sz="900" b="0">
+                <a:solidFill>
+                  <a:srgbClr val="667085"/>
+                </a:solidFill>
                 <a:latin typeface="Microsoft YaHei"/>
               </a:rPr>
               <a:t>02 / 25</a:t>
@@ -11929,7 +12498,7 @@
         </p:spPr>
         <p:txBody>
           <a:bodyPr wrap="square" lIns="27432" rIns="27432" anchor="t">
-            <a:spAutoFit/>
+            <a:normAutofit/>
           </a:bodyPr>
           <a:lstStyle/>
           <a:p>
@@ -11942,7 +12511,10 @@
               </a:defRPr>
             </a:pPr>
             <a:r>
-              <a:rPr>
+              <a:rPr sz="2400" b="1">
+                <a:solidFill>
+                  <a:srgbClr val="202124"/>
+                </a:solidFill>
                 <a:latin typeface="Microsoft YaHei"/>
               </a:rPr>
               <a:t>汇报目录</a:t>
@@ -11968,7 +12540,7 @@
         </p:spPr>
         <p:txBody>
           <a:bodyPr wrap="square" lIns="27432" rIns="27432" anchor="t">
-            <a:spAutoFit/>
+            <a:normAutofit/>
           </a:bodyPr>
           <a:lstStyle/>
           <a:p>
@@ -11981,7 +12553,10 @@
               </a:defRPr>
             </a:pPr>
             <a:r>
-              <a:rPr>
+              <a:rPr sz="1350" b="0">
+                <a:solidFill>
+                  <a:srgbClr val="475467"/>
+                </a:solidFill>
                 <a:latin typeface="Microsoft YaHei"/>
               </a:rPr>
               <a:t>25 页进展汇报，重点展开进度、完成度和优化路线</a:t>
@@ -12128,8 +12703,8 @@
         </p:nvSpPr>
         <p:spPr>
           <a:xfrm>
-            <a:off x="923544" y="1435607"/>
-            <a:ext cx="10332719" cy="256032"/>
+            <a:off x="868680" y="1435607"/>
+            <a:ext cx="3657600" cy="292608"/>
           </a:xfrm>
           <a:prstGeom prst="rect">
             <a:avLst/>
@@ -12138,7 +12713,7 @@
         </p:spPr>
         <p:txBody>
           <a:bodyPr wrap="square" lIns="27432" rIns="27432" anchor="t">
-            <a:spAutoFit/>
+            <a:normAutofit/>
           </a:bodyPr>
           <a:lstStyle/>
           <a:p>
@@ -12151,7 +12726,10 @@
               </a:defRPr>
             </a:pPr>
             <a:r>
-              <a:rPr>
+              <a:rPr sz="1500" b="1">
+                <a:solidFill>
+                  <a:srgbClr val="202124"/>
+                </a:solidFill>
                 <a:latin typeface="Microsoft YaHei"/>
               </a:rPr>
               <a:t>01  项目定位与总体目标</a:t>
@@ -12167,8 +12745,8 @@
         </p:nvSpPr>
         <p:spPr>
           <a:xfrm>
-            <a:off x="2194560" y="1481328"/>
-            <a:ext cx="8686800" cy="201168"/>
+            <a:off x="4617720" y="1481328"/>
+            <a:ext cx="5486400" cy="292608"/>
           </a:xfrm>
           <a:prstGeom prst="rect">
             <a:avLst/>
@@ -12177,7 +12755,7 @@
         </p:spPr>
         <p:txBody>
           <a:bodyPr wrap="square" lIns="27432" rIns="27432" anchor="t">
-            <a:spAutoFit/>
+            <a:normAutofit/>
           </a:bodyPr>
           <a:lstStyle/>
           <a:p>
@@ -12190,7 +12768,10 @@
               </a:defRPr>
             </a:pPr>
             <a:r>
-              <a:rPr>
+              <a:rPr sz="1280" b="0">
+                <a:solidFill>
+                  <a:srgbClr val="475467"/>
+                </a:solidFill>
                 <a:latin typeface="Microsoft YaHei"/>
               </a:rPr>
               <a:t>说明项目背景和初赛阶段关注点</a:t>
@@ -12294,8 +12875,8 @@
         </p:nvSpPr>
         <p:spPr>
           <a:xfrm>
-            <a:off x="923544" y="2276856"/>
-            <a:ext cx="10332719" cy="256032"/>
+            <a:off x="868680" y="2276856"/>
+            <a:ext cx="3657600" cy="292608"/>
           </a:xfrm>
           <a:prstGeom prst="rect">
             <a:avLst/>
@@ -12304,7 +12885,7 @@
         </p:spPr>
         <p:txBody>
           <a:bodyPr wrap="square" lIns="27432" rIns="27432" anchor="t">
-            <a:spAutoFit/>
+            <a:normAutofit/>
           </a:bodyPr>
           <a:lstStyle/>
           <a:p>
@@ -12317,7 +12898,10 @@
               </a:defRPr>
             </a:pPr>
             <a:r>
-              <a:rPr>
+              <a:rPr sz="1500" b="1">
+                <a:solidFill>
+                  <a:srgbClr val="202124"/>
+                </a:solidFill>
                 <a:latin typeface="Microsoft YaHei"/>
               </a:rPr>
               <a:t>02  开发进度与阶段产物</a:t>
@@ -12333,8 +12917,8 @@
         </p:nvSpPr>
         <p:spPr>
           <a:xfrm>
-            <a:off x="2194560" y="2322576"/>
-            <a:ext cx="8686800" cy="201168"/>
+            <a:off x="4617720" y="2322576"/>
+            <a:ext cx="5486400" cy="292608"/>
           </a:xfrm>
           <a:prstGeom prst="rect">
             <a:avLst/>
@@ -12343,7 +12927,7 @@
         </p:spPr>
         <p:txBody>
           <a:bodyPr wrap="square" lIns="27432" rIns="27432" anchor="t">
-            <a:spAutoFit/>
+            <a:normAutofit/>
           </a:bodyPr>
           <a:lstStyle/>
           <a:p>
@@ -12356,7 +12940,10 @@
               </a:defRPr>
             </a:pPr>
             <a:r>
-              <a:rPr>
+              <a:rPr sz="1280" b="0">
+                <a:solidFill>
+                  <a:srgbClr val="475467"/>
+                </a:solidFill>
                 <a:latin typeface="Microsoft YaHei"/>
               </a:rPr>
               <a:t>按阶段解释功能推进路径和产出</a:t>
@@ -12460,8 +13047,8 @@
         </p:nvSpPr>
         <p:spPr>
           <a:xfrm>
-            <a:off x="923544" y="3118104"/>
-            <a:ext cx="10332719" cy="256032"/>
+            <a:off x="868680" y="3118104"/>
+            <a:ext cx="3657600" cy="292608"/>
           </a:xfrm>
           <a:prstGeom prst="rect">
             <a:avLst/>
@@ -12470,7 +13057,7 @@
         </p:spPr>
         <p:txBody>
           <a:bodyPr wrap="square" lIns="27432" rIns="27432" anchor="t">
-            <a:spAutoFit/>
+            <a:normAutofit/>
           </a:bodyPr>
           <a:lstStyle/>
           <a:p>
@@ -12483,7 +13070,10 @@
               </a:defRPr>
             </a:pPr>
             <a:r>
-              <a:rPr>
+              <a:rPr sz="1500" b="1">
+                <a:solidFill>
+                  <a:srgbClr val="202124"/>
+                </a:solidFill>
                 <a:latin typeface="Microsoft YaHei"/>
               </a:rPr>
               <a:t>03  核心模块功能完成度</a:t>
@@ -12499,8 +13089,8 @@
         </p:nvSpPr>
         <p:spPr>
           <a:xfrm>
-            <a:off x="2194560" y="3163824"/>
-            <a:ext cx="8686800" cy="201168"/>
+            <a:off x="4617720" y="3163824"/>
+            <a:ext cx="5486400" cy="292608"/>
           </a:xfrm>
           <a:prstGeom prst="rect">
             <a:avLst/>
@@ -12509,7 +13099,7 @@
         </p:spPr>
         <p:txBody>
           <a:bodyPr wrap="square" lIns="27432" rIns="27432" anchor="t">
-            <a:spAutoFit/>
+            <a:normAutofit/>
           </a:bodyPr>
           <a:lstStyle/>
           <a:p>
@@ -12522,7 +13112,10 @@
               </a:defRPr>
             </a:pPr>
             <a:r>
-              <a:rPr>
+              <a:rPr sz="1280" b="0">
+                <a:solidFill>
+                  <a:srgbClr val="475467"/>
+                </a:solidFill>
                 <a:latin typeface="Microsoft YaHei"/>
               </a:rPr>
               <a:t>逐模块说明已完成主路径和边界</a:t>
@@ -12626,8 +13219,8 @@
         </p:nvSpPr>
         <p:spPr>
           <a:xfrm>
-            <a:off x="923544" y="3959352"/>
-            <a:ext cx="10332719" cy="256032"/>
+            <a:off x="868680" y="3959352"/>
+            <a:ext cx="3657600" cy="292608"/>
           </a:xfrm>
           <a:prstGeom prst="rect">
             <a:avLst/>
@@ -12636,7 +13229,7 @@
         </p:spPr>
         <p:txBody>
           <a:bodyPr wrap="square" lIns="27432" rIns="27432" anchor="t">
-            <a:spAutoFit/>
+            <a:normAutofit/>
           </a:bodyPr>
           <a:lstStyle/>
           <a:p>
@@ -12649,7 +13242,10 @@
               </a:defRPr>
             </a:pPr>
             <a:r>
-              <a:rPr>
+              <a:rPr sz="1500" b="1">
+                <a:solidFill>
+                  <a:srgbClr val="202124"/>
+                </a:solidFill>
                 <a:latin typeface="Microsoft YaHei"/>
               </a:rPr>
               <a:t>04  本地测试与当前问题</a:t>
@@ -12665,8 +13261,8 @@
         </p:nvSpPr>
         <p:spPr>
           <a:xfrm>
-            <a:off x="2194560" y="4005072"/>
-            <a:ext cx="8686800" cy="201168"/>
+            <a:off x="4617720" y="4005072"/>
+            <a:ext cx="5486400" cy="292608"/>
           </a:xfrm>
           <a:prstGeom prst="rect">
             <a:avLst/>
@@ -12675,7 +13271,7 @@
         </p:spPr>
         <p:txBody>
           <a:bodyPr wrap="square" lIns="27432" rIns="27432" anchor="t">
-            <a:spAutoFit/>
+            <a:normAutofit/>
           </a:bodyPr>
           <a:lstStyle/>
           <a:p>
@@ -12688,7 +13284,10 @@
               </a:defRPr>
             </a:pPr>
             <a:r>
-              <a:rPr>
+              <a:rPr sz="1280" b="0">
+                <a:solidFill>
+                  <a:srgbClr val="475467"/>
+                </a:solidFill>
                 <a:latin typeface="Microsoft YaHei"/>
               </a:rPr>
               <a:t>用 LTP 报告说明验证方式和剩余风险</a:t>
@@ -12792,8 +13391,8 @@
         </p:nvSpPr>
         <p:spPr>
           <a:xfrm>
-            <a:off x="923544" y="4800600"/>
-            <a:ext cx="10332719" cy="256032"/>
+            <a:off x="868680" y="4800600"/>
+            <a:ext cx="3657600" cy="292608"/>
           </a:xfrm>
           <a:prstGeom prst="rect">
             <a:avLst/>
@@ -12802,7 +13401,7 @@
         </p:spPr>
         <p:txBody>
           <a:bodyPr wrap="square" lIns="27432" rIns="27432" anchor="t">
-            <a:spAutoFit/>
+            <a:normAutofit/>
           </a:bodyPr>
           <a:lstStyle/>
           <a:p>
@@ -12815,7 +13414,10 @@
               </a:defRPr>
             </a:pPr>
             <a:r>
-              <a:rPr>
+              <a:rPr sz="1500" b="1">
+                <a:solidFill>
+                  <a:srgbClr val="202124"/>
+                </a:solidFill>
                 <a:latin typeface="Microsoft YaHei"/>
               </a:rPr>
               <a:t>05  后续优化计划</a:t>
@@ -12831,8 +13433,8 @@
         </p:nvSpPr>
         <p:spPr>
           <a:xfrm>
-            <a:off x="2194560" y="4846320"/>
-            <a:ext cx="8686800" cy="201168"/>
+            <a:off x="4617720" y="4846320"/>
+            <a:ext cx="5486400" cy="292608"/>
           </a:xfrm>
           <a:prstGeom prst="rect">
             <a:avLst/>
@@ -12841,7 +13443,7 @@
         </p:spPr>
         <p:txBody>
           <a:bodyPr wrap="square" lIns="27432" rIns="27432" anchor="t">
-            <a:spAutoFit/>
+            <a:normAutofit/>
           </a:bodyPr>
           <a:lstStyle/>
           <a:p>
@@ -12854,7 +13456,10 @@
               </a:defRPr>
             </a:pPr>
             <a:r>
-              <a:rPr>
+              <a:rPr sz="1280" b="0">
+                <a:solidFill>
+                  <a:srgbClr val="475467"/>
+                </a:solidFill>
                 <a:latin typeface="Microsoft YaHei"/>
               </a:rPr>
               <a:t>给出下一阶段优先级和落地任务</a:t>
@@ -12984,7 +13589,7 @@
         </p:spPr>
         <p:txBody>
           <a:bodyPr wrap="square" lIns="27432" rIns="27432" anchor="t">
-            <a:spAutoFit/>
+            <a:normAutofit/>
           </a:bodyPr>
           <a:lstStyle/>
           <a:p>
@@ -12997,6 +13602,12 @@
               </a:defRPr>
             </a:pPr>
             <a:r>
+              <a:rPr sz="900" b="0">
+                <a:solidFill>
+                  <a:srgbClr val="667085"/>
+                </a:solidFill>
+                <a:latin typeface="Microsoft YaHei"/>
+              </a:rPr>
               <a:t>20 / 25</a:t>
             </a:r>
           </a:p>
@@ -13020,7 +13631,7 @@
         </p:spPr>
         <p:txBody>
           <a:bodyPr wrap="square" lIns="27432" rIns="27432" anchor="t">
-            <a:spAutoFit/>
+            <a:normAutofit/>
           </a:bodyPr>
           <a:lstStyle/>
           <a:p>
@@ -13033,6 +13644,12 @@
               </a:defRPr>
             </a:pPr>
             <a:r>
+              <a:rPr sz="2400" b="1">
+                <a:solidFill>
+                  <a:srgbClr val="202124"/>
+                </a:solidFill>
+                <a:latin typeface="Microsoft YaHei"/>
+              </a:rPr>
               <a:t>测试方法</a:t>
             </a:r>
           </a:p>
@@ -13056,7 +13673,7 @@
         </p:spPr>
         <p:txBody>
           <a:bodyPr wrap="square" lIns="27432" rIns="27432" anchor="t">
-            <a:spAutoFit/>
+            <a:normAutofit/>
           </a:bodyPr>
           <a:lstStyle/>
           <a:p>
@@ -13069,6 +13686,12 @@
               </a:defRPr>
             </a:pPr>
             <a:r>
+              <a:rPr sz="1350" b="0">
+                <a:solidFill>
+                  <a:srgbClr val="475467"/>
+                </a:solidFill>
+                <a:latin typeface="Microsoft YaHei"/>
+              </a:rPr>
               <a:t>全量输出、逐用例报告和 Linux baseline 对比</a:t>
             </a:r>
           </a:p>
@@ -13223,7 +13846,7 @@
         </p:spPr>
         <p:txBody>
           <a:bodyPr wrap="square" lIns="27432" rIns="27432" anchor="t">
-            <a:spAutoFit/>
+            <a:normAutofit/>
           </a:bodyPr>
           <a:lstStyle/>
           <a:p>
@@ -13236,6 +13859,12 @@
               </a:defRPr>
             </a:pPr>
             <a:r>
+              <a:rPr sz="1500" b="1">
+                <a:solidFill>
+                  <a:srgbClr val="202124"/>
+                </a:solidFill>
+                <a:latin typeface="Microsoft YaHei"/>
+              </a:rPr>
               <a:t>输入与平台</a:t>
             </a:r>
           </a:p>
@@ -13259,7 +13888,7 @@
         </p:spPr>
         <p:txBody>
           <a:bodyPr wrap="square" lIns="27432" rIns="27432" anchor="t">
-            <a:spAutoFit/>
+            <a:normAutofit/>
           </a:bodyPr>
           <a:lstStyle/>
           <a:p>
@@ -13272,18 +13901,42 @@
               </a:defRPr>
             </a:pPr>
             <a:r>
+              <a:rPr sz="1220" b="0">
+                <a:solidFill>
+                  <a:srgbClr val="475467"/>
+                </a:solidFill>
+                <a:latin typeface="Microsoft YaHei"/>
+              </a:rPr>
               <a:t>rv-output.txt：RISC-V 64 全量测例输出</a:t>
             </a:r>
             <a:br/>
             <a:r>
+              <a:rPr sz="1220" b="0">
+                <a:solidFill>
+                  <a:srgbClr val="475467"/>
+                </a:solidFill>
+                <a:latin typeface="Microsoft YaHei"/>
+              </a:rPr>
               <a:t>la-output.txt：LoongArch 64 全量测例输出</a:t>
             </a:r>
             <a:br/>
             <a:r>
+              <a:rPr sz="1220" b="0">
+                <a:solidFill>
+                  <a:srgbClr val="475467"/>
+                </a:solidFill>
+                <a:latin typeface="Microsoft YaHei"/>
+              </a:rPr>
               <a:t>glibc + musl 双 libc 组合</a:t>
             </a:r>
             <a:br/>
             <a:r>
+              <a:rPr sz="1220" b="0">
+                <a:solidFill>
+                  <a:srgbClr val="475467"/>
+                </a:solidFill>
+                <a:latin typeface="Microsoft YaHei"/>
+              </a:rPr>
               <a:t>每个平台覆盖约 688 个 LTP case</a:t>
             </a:r>
           </a:p>
@@ -13395,7 +14048,7 @@
         </p:spPr>
         <p:txBody>
           <a:bodyPr wrap="square" lIns="27432" rIns="27432" anchor="t">
-            <a:spAutoFit/>
+            <a:normAutofit/>
           </a:bodyPr>
           <a:lstStyle/>
           <a:p>
@@ -13408,6 +14061,12 @@
               </a:defRPr>
             </a:pPr>
             <a:r>
+              <a:rPr sz="1500" b="1">
+                <a:solidFill>
+                  <a:srgbClr val="202124"/>
+                </a:solidFill>
+                <a:latin typeface="Microsoft YaHei"/>
+              </a:rPr>
               <a:t>报告统计</a:t>
             </a:r>
           </a:p>
@@ -13431,7 +14090,7 @@
         </p:spPr>
         <p:txBody>
           <a:bodyPr wrap="square" lIns="27432" rIns="27432" anchor="t">
-            <a:spAutoFit/>
+            <a:normAutofit/>
           </a:bodyPr>
           <a:lstStyle/>
           <a:p>
@@ -13444,18 +14103,42 @@
               </a:defRPr>
             </a:pPr>
             <a:r>
+              <a:rPr sz="1220" b="0">
+                <a:solidFill>
+                  <a:srgbClr val="475467"/>
+                </a:solidFill>
+                <a:latin typeface="Microsoft YaHei"/>
+              </a:rPr>
               <a:t>judge/local-report/ 生成逐用例 CSV</a:t>
             </a:r>
             <a:br/>
             <a:r>
+              <a:rPr sz="1220" b="0">
+                <a:solidFill>
+                  <a:srgbClr val="475467"/>
+                </a:solidFill>
+                <a:latin typeface="Microsoft YaHei"/>
+              </a:rPr>
               <a:t>记录 TPASS/TFAIL/TBROK/TCONF/WARN/ALL</a:t>
             </a:r>
             <a:br/>
             <a:r>
+              <a:rPr sz="1220" b="0">
+                <a:solidFill>
+                  <a:srgbClr val="475467"/>
+                </a:solidFill>
+                <a:latin typeface="Microsoft YaHei"/>
+              </a:rPr>
               <a:t>TOTAL 行作为汇报统计口径</a:t>
             </a:r>
             <a:br/>
             <a:r>
+              <a:rPr sz="1220" b="0">
+                <a:solidFill>
+                  <a:srgbClr val="475467"/>
+                </a:solidFill>
+                <a:latin typeface="Microsoft YaHei"/>
+              </a:rPr>
               <a:t>用于观察四组合通过率</a:t>
             </a:r>
           </a:p>
@@ -13567,7 +14250,7 @@
         </p:spPr>
         <p:txBody>
           <a:bodyPr wrap="square" lIns="27432" rIns="27432" anchor="t">
-            <a:spAutoFit/>
+            <a:normAutofit/>
           </a:bodyPr>
           <a:lstStyle/>
           <a:p>
@@ -13580,6 +14263,12 @@
               </a:defRPr>
             </a:pPr>
             <a:r>
+              <a:rPr sz="1500" b="1">
+                <a:solidFill>
+                  <a:srgbClr val="202124"/>
+                </a:solidFill>
+                <a:latin typeface="Microsoft YaHei"/>
+              </a:rPr>
               <a:t>差异分析</a:t>
             </a:r>
           </a:p>
@@ -13603,7 +14292,7 @@
         </p:spPr>
         <p:txBody>
           <a:bodyPr wrap="square" lIns="27432" rIns="27432" anchor="t">
-            <a:spAutoFit/>
+            <a:normAutofit/>
           </a:bodyPr>
           <a:lstStyle/>
           <a:p>
@@ -13616,18 +14305,42 @@
               </a:defRPr>
             </a:pPr>
             <a:r>
+              <a:rPr sz="1220" b="0">
+                <a:solidFill>
+                  <a:srgbClr val="475467"/>
+                </a:solidFill>
+                <a:latin typeface="Microsoft YaHei"/>
+              </a:rPr>
               <a:t>judge/local-compare/ 与 Linux baseline 对比</a:t>
             </a:r>
             <a:br/>
             <a:r>
+              <a:rPr sz="1220" b="0">
+                <a:solidFill>
+                  <a:srgbClr val="475467"/>
+                </a:solidFill>
+                <a:latin typeface="Microsoft YaHei"/>
+              </a:rPr>
               <a:t>统计 missing/failed/partial/broken/skipped</a:t>
             </a:r>
             <a:br/>
             <a:r>
+              <a:rPr sz="1220" b="0">
+                <a:solidFill>
+                  <a:srgbClr val="475467"/>
+                </a:solidFill>
+                <a:latin typeface="Microsoft YaHei"/>
+              </a:rPr>
               <a:t>计算 lost_passed</a:t>
             </a:r>
             <a:br/>
             <a:r>
+              <a:rPr sz="1220" b="0">
+                <a:solidFill>
+                  <a:srgbClr val="475467"/>
+                </a:solidFill>
+                <a:latin typeface="Microsoft YaHei"/>
+              </a:rPr>
               <a:t>定位高收益修复项</a:t>
             </a:r>
           </a:p>
@@ -13755,12 +14468,12 @@
         </p:spPr>
         <p:txBody>
           <a:bodyPr wrap="square">
-            <a:spAutoFit/>
+            <a:normAutofit/>
           </a:bodyPr>
           <a:lstStyle/>
           <a:p>
             <a:r>
-              <a:rPr sz="2200" b="1">
+              <a:rPr sz="2400" b="1">
                 <a:solidFill>
                   <a:srgbClr val="202124"/>
                 </a:solidFill>
@@ -13789,12 +14502,12 @@
         </p:spPr>
         <p:txBody>
           <a:bodyPr wrap="square">
-            <a:spAutoFit/>
+            <a:normAutofit/>
           </a:bodyPr>
           <a:lstStyle/>
           <a:p>
             <a:r>
-              <a:rPr sz="1250" b="0">
+              <a:rPr sz="1350" b="0">
                 <a:solidFill>
                   <a:srgbClr val="475467"/>
                 </a:solidFill>
@@ -13823,12 +14536,12 @@
         </p:spPr>
         <p:txBody>
           <a:bodyPr wrap="square">
-            <a:spAutoFit/>
+            <a:normAutofit/>
           </a:bodyPr>
           <a:lstStyle/>
           <a:p>
             <a:r>
-              <a:rPr sz="850" b="0">
+              <a:rPr sz="900" b="0">
                 <a:solidFill>
                   <a:srgbClr val="667085"/>
                 </a:solidFill>
@@ -13848,8 +14561,8 @@
           <p:nvPr/>
         </p:nvGraphicFramePr>
         <p:xfrm>
-          <a:off x="566928" y="1325880"/>
-          <a:ext cx="5074920" cy="2971800"/>
+          <a:off x="502920" y="1143000"/>
+          <a:ext cx="5349240" cy="3246120"/>
         </p:xfrm>
         <a:graphic>
           <a:graphicData uri="http://schemas.openxmlformats.org/drawingml/2006/chart">
@@ -13866,8 +14579,8 @@
           <p:nvPr/>
         </p:nvGraphicFramePr>
         <p:xfrm>
-          <a:off x="5943600" y="1325880"/>
-          <a:ext cx="4800600" cy="2971800"/>
+          <a:off x="5989320" y="1143000"/>
+          <a:ext cx="5074920" cy="3246120"/>
         </p:xfrm>
         <a:graphic>
           <a:graphicData uri="http://schemas.openxmlformats.org/drawingml/2006/chart">
@@ -13928,8 +14641,8 @@
         </p:nvSpPr>
         <p:spPr>
           <a:xfrm>
-            <a:off x="713232" y="4727448"/>
-            <a:ext cx="2999232" cy="201168"/>
+            <a:off x="713232" y="4617720"/>
+            <a:ext cx="2999232" cy="219456"/>
           </a:xfrm>
           <a:prstGeom prst="rect">
             <a:avLst/>
@@ -13938,12 +14651,12 @@
         </p:spPr>
         <p:txBody>
           <a:bodyPr wrap="square">
-            <a:spAutoFit/>
+            <a:normAutofit/>
           </a:bodyPr>
           <a:lstStyle/>
           <a:p>
             <a:r>
-              <a:rPr sz="1050" b="1">
+              <a:rPr sz="1350" b="1">
                 <a:solidFill>
                   <a:srgbClr val="202124"/>
                 </a:solidFill>
@@ -13962,8 +14675,8 @@
         </p:nvSpPr>
         <p:spPr>
           <a:xfrm>
-            <a:off x="713232" y="5001768"/>
-            <a:ext cx="2999232" cy="438912"/>
+            <a:off x="713232" y="4882896"/>
+            <a:ext cx="2999232" cy="566928"/>
           </a:xfrm>
           <a:prstGeom prst="rect">
             <a:avLst/>
@@ -13972,12 +14685,12 @@
         </p:spPr>
         <p:txBody>
           <a:bodyPr wrap="square">
-            <a:spAutoFit/>
+            <a:normAutofit/>
           </a:bodyPr>
           <a:lstStyle/>
           <a:p>
             <a:r>
-              <a:rPr sz="880" b="0">
+              <a:rPr sz="1120" b="0">
                 <a:solidFill>
                   <a:srgbClr val="475467"/>
                 </a:solidFill>
@@ -14041,8 +14754,8 @@
         </p:nvSpPr>
         <p:spPr>
           <a:xfrm>
-            <a:off x="4187952" y="4727448"/>
-            <a:ext cx="2999232" cy="201168"/>
+            <a:off x="4187952" y="4617720"/>
+            <a:ext cx="2999232" cy="219456"/>
           </a:xfrm>
           <a:prstGeom prst="rect">
             <a:avLst/>
@@ -14051,12 +14764,12 @@
         </p:spPr>
         <p:txBody>
           <a:bodyPr wrap="square">
-            <a:spAutoFit/>
+            <a:normAutofit/>
           </a:bodyPr>
           <a:lstStyle/>
           <a:p>
             <a:r>
-              <a:rPr sz="1050" b="1">
+              <a:rPr sz="1350" b="1">
                 <a:solidFill>
                   <a:srgbClr val="202124"/>
                 </a:solidFill>
@@ -14075,8 +14788,8 @@
         </p:nvSpPr>
         <p:spPr>
           <a:xfrm>
-            <a:off x="4187952" y="5001768"/>
-            <a:ext cx="2999232" cy="438912"/>
+            <a:off x="4187952" y="4882896"/>
+            <a:ext cx="2999232" cy="566928"/>
           </a:xfrm>
           <a:prstGeom prst="rect">
             <a:avLst/>
@@ -14085,12 +14798,12 @@
         </p:spPr>
         <p:txBody>
           <a:bodyPr wrap="square">
-            <a:spAutoFit/>
+            <a:normAutofit/>
           </a:bodyPr>
           <a:lstStyle/>
           <a:p>
             <a:r>
-              <a:rPr sz="880" b="0">
+              <a:rPr sz="1120" b="0">
                 <a:solidFill>
                   <a:srgbClr val="475467"/>
                 </a:solidFill>
@@ -14154,8 +14867,8 @@
         </p:nvSpPr>
         <p:spPr>
           <a:xfrm>
-            <a:off x="7662672" y="4727448"/>
-            <a:ext cx="2953512" cy="201168"/>
+            <a:off x="7662672" y="4617720"/>
+            <a:ext cx="2953512" cy="219456"/>
           </a:xfrm>
           <a:prstGeom prst="rect">
             <a:avLst/>
@@ -14164,12 +14877,12 @@
         </p:spPr>
         <p:txBody>
           <a:bodyPr wrap="square">
-            <a:spAutoFit/>
+            <a:normAutofit/>
           </a:bodyPr>
           <a:lstStyle/>
           <a:p>
             <a:r>
-              <a:rPr sz="1050" b="1">
+              <a:rPr sz="1350" b="1">
                 <a:solidFill>
                   <a:srgbClr val="202124"/>
                 </a:solidFill>
@@ -14188,8 +14901,8 @@
         </p:nvSpPr>
         <p:spPr>
           <a:xfrm>
-            <a:off x="7662672" y="5001768"/>
-            <a:ext cx="2953512" cy="438912"/>
+            <a:off x="7662672" y="4882896"/>
+            <a:ext cx="2953512" cy="566928"/>
           </a:xfrm>
           <a:prstGeom prst="rect">
             <a:avLst/>
@@ -14198,12 +14911,12 @@
         </p:spPr>
         <p:txBody>
           <a:bodyPr wrap="square">
-            <a:spAutoFit/>
+            <a:normAutofit/>
           </a:bodyPr>
           <a:lstStyle/>
           <a:p>
             <a:r>
-              <a:rPr sz="880" b="0">
+              <a:rPr sz="1120" b="0">
                 <a:solidFill>
                   <a:srgbClr val="475467"/>
                 </a:solidFill>
@@ -14222,8 +14935,8 @@
         </p:nvSpPr>
         <p:spPr>
           <a:xfrm>
-            <a:off x="566928" y="5715000"/>
-            <a:ext cx="9966960" cy="256032"/>
+            <a:off x="566928" y="5687568"/>
+            <a:ext cx="9966960" cy="292608"/>
           </a:xfrm>
           <a:prstGeom prst="rect">
             <a:avLst/>
@@ -14232,12 +14945,12 @@
         </p:spPr>
         <p:txBody>
           <a:bodyPr wrap="square">
-            <a:spAutoFit/>
+            <a:normAutofit/>
           </a:bodyPr>
           <a:lstStyle/>
           <a:p>
             <a:r>
-              <a:rPr sz="1050" b="0">
+              <a:rPr sz="1150" b="0">
                 <a:solidFill>
                   <a:srgbClr val="475467"/>
                 </a:solidFill>
@@ -14370,7 +15083,7 @@
         </p:spPr>
         <p:txBody>
           <a:bodyPr wrap="square" lIns="27432" rIns="27432" anchor="t">
-            <a:spAutoFit/>
+            <a:normAutofit/>
           </a:bodyPr>
           <a:lstStyle/>
           <a:p>
@@ -14383,6 +15096,12 @@
               </a:defRPr>
             </a:pPr>
             <a:r>
+              <a:rPr sz="900" b="0">
+                <a:solidFill>
+                  <a:srgbClr val="667085"/>
+                </a:solidFill>
+                <a:latin typeface="Microsoft YaHei"/>
+              </a:rPr>
               <a:t>22 / 25</a:t>
             </a:r>
           </a:p>
@@ -14406,7 +15125,7 @@
         </p:spPr>
         <p:txBody>
           <a:bodyPr wrap="square" lIns="27432" rIns="27432" anchor="t">
-            <a:spAutoFit/>
+            <a:normAutofit/>
           </a:bodyPr>
           <a:lstStyle/>
           <a:p>
@@ -14419,6 +15138,12 @@
               </a:defRPr>
             </a:pPr>
             <a:r>
+              <a:rPr sz="2400" b="1">
+                <a:solidFill>
+                  <a:srgbClr val="202124"/>
+                </a:solidFill>
+                <a:latin typeface="Microsoft YaHei"/>
+              </a:rPr>
               <a:t>与 Linux baseline 的差异分析</a:t>
             </a:r>
           </a:p>
@@ -14442,7 +15167,7 @@
         </p:spPr>
         <p:txBody>
           <a:bodyPr wrap="square" lIns="27432" rIns="27432" anchor="t">
-            <a:spAutoFit/>
+            <a:normAutofit/>
           </a:bodyPr>
           <a:lstStyle/>
           <a:p>
@@ -14455,6 +15180,12 @@
               </a:defRPr>
             </a:pPr>
             <a:r>
+              <a:rPr sz="1350" b="0">
+                <a:solidFill>
+                  <a:srgbClr val="475467"/>
+                </a:solidFill>
+                <a:latin typeface="Microsoft YaHei"/>
+              </a:rPr>
               <a:t>剩余差距集中在文件系统与 I/O 边界</a:t>
             </a:r>
           </a:p>
@@ -14609,7 +15340,7 @@
         </p:spPr>
         <p:txBody>
           <a:bodyPr wrap="square" lIns="27432" rIns="27432" anchor="t">
-            <a:spAutoFit/>
+            <a:normAutofit/>
           </a:bodyPr>
           <a:lstStyle/>
           <a:p>
@@ -14622,6 +15353,12 @@
               </a:defRPr>
             </a:pPr>
             <a:r>
+              <a:rPr sz="1500" b="1">
+                <a:solidFill>
+                  <a:srgbClr val="202124"/>
+                </a:solidFill>
+                <a:latin typeface="Microsoft YaHei"/>
+              </a:rPr>
               <a:t>compare 总览</a:t>
             </a:r>
           </a:p>
@@ -14645,7 +15382,7 @@
         </p:spPr>
         <p:txBody>
           <a:bodyPr wrap="square" lIns="27432" rIns="27432" anchor="t">
-            <a:spAutoFit/>
+            <a:normAutofit/>
           </a:bodyPr>
           <a:lstStyle/>
           <a:p>
@@ -14658,6 +15395,12 @@
               </a:defRPr>
             </a:pPr>
             <a:r>
+              <a:rPr sz="1220" b="0">
+                <a:solidFill>
+                  <a:srgbClr val="475467"/>
+                </a:solidFill>
+                <a:latin typeface="Microsoft YaHei"/>
+              </a:rPr>
               <a:t>RISC-V compare 记录数 glibc/musl 为 105/105，lost_passed 为 766/761；LoongArch compare 记录数为 107/119，lost_passed 为 715/738。</a:t>
             </a:r>
           </a:p>
@@ -14769,7 +15512,7 @@
         </p:spPr>
         <p:txBody>
           <a:bodyPr wrap="square" lIns="27432" rIns="27432" anchor="t">
-            <a:spAutoFit/>
+            <a:normAutofit/>
           </a:bodyPr>
           <a:lstStyle/>
           <a:p>
@@ -14782,6 +15525,12 @@
               </a:defRPr>
             </a:pPr>
             <a:r>
+              <a:rPr sz="1500" b="1">
+                <a:solidFill>
+                  <a:srgbClr val="202124"/>
+                </a:solidFill>
+                <a:latin typeface="Microsoft YaHei"/>
+              </a:rPr>
               <a:t>架构差异</a:t>
             </a:r>
           </a:p>
@@ -14805,7 +15554,7 @@
         </p:spPr>
         <p:txBody>
           <a:bodyPr wrap="square" lIns="27432" rIns="27432" anchor="t">
-            <a:spAutoFit/>
+            <a:normAutofit/>
           </a:bodyPr>
           <a:lstStyle/>
           <a:p>
@@ -14818,6 +15567,12 @@
               </a:defRPr>
             </a:pPr>
             <a:r>
+              <a:rPr sz="1220" b="0">
+                <a:solidFill>
+                  <a:srgbClr val="475467"/>
+                </a:solidFill>
+                <a:latin typeface="Microsoft YaHei"/>
+              </a:rPr>
               <a:t>LoongArch 合计通过率略高；RISC-V glibc 差异最高，主要受到 splice07、chdir01 等 I/O 与目录语义影响。</a:t>
             </a:r>
           </a:p>
@@ -14929,7 +15684,7 @@
         </p:spPr>
         <p:txBody>
           <a:bodyPr wrap="square" lIns="27432" rIns="27432" anchor="t">
-            <a:spAutoFit/>
+            <a:normAutofit/>
           </a:bodyPr>
           <a:lstStyle/>
           <a:p>
@@ -14942,6 +15697,12 @@
               </a:defRPr>
             </a:pPr>
             <a:r>
+              <a:rPr sz="1500" b="1">
+                <a:solidFill>
+                  <a:srgbClr val="202124"/>
+                </a:solidFill>
+                <a:latin typeface="Microsoft YaHei"/>
+              </a:rPr>
               <a:t>主要 missing</a:t>
             </a:r>
           </a:p>
@@ -14965,7 +15726,7 @@
         </p:spPr>
         <p:txBody>
           <a:bodyPr wrap="square" lIns="27432" rIns="27432" anchor="t">
-            <a:spAutoFit/>
+            <a:normAutofit/>
           </a:bodyPr>
           <a:lstStyle/>
           <a:p>
@@ -14978,22 +15739,52 @@
               </a:defRPr>
             </a:pPr>
             <a:r>
+              <a:rPr sz="1220" b="0">
+                <a:solidFill>
+                  <a:srgbClr val="475467"/>
+                </a:solidFill>
+                <a:latin typeface="Microsoft YaHei"/>
+              </a:rPr>
               <a:t>tar_tests.sh：68</a:t>
             </a:r>
             <a:br/>
             <a:r>
+              <a:rPr sz="1220" b="0">
+                <a:solidFill>
+                  <a:srgbClr val="475467"/>
+                </a:solidFill>
+                <a:latin typeface="Microsoft YaHei"/>
+              </a:rPr>
               <a:t>creat09：48</a:t>
             </a:r>
             <a:br/>
             <a:r>
+              <a:rPr sz="1220" b="0">
+                <a:solidFill>
+                  <a:srgbClr val="475467"/>
+                </a:solidFill>
+                <a:latin typeface="Microsoft YaHei"/>
+              </a:rPr>
               <a:t>file01.sh：36</a:t>
             </a:r>
             <a:br/>
             <a:r>
+              <a:rPr sz="1220" b="0">
+                <a:solidFill>
+                  <a:srgbClr val="475467"/>
+                </a:solidFill>
+                <a:latin typeface="Microsoft YaHei"/>
+              </a:rPr>
               <a:t>du01.sh：23</a:t>
             </a:r>
             <a:br/>
             <a:r>
+              <a:rPr sz="1220" b="0">
+                <a:solidFill>
+                  <a:srgbClr val="475467"/>
+                </a:solidFill>
+                <a:latin typeface="Microsoft YaHei"/>
+              </a:rPr>
               <a:t>这些项在四个组合中反复出现。</a:t>
             </a:r>
           </a:p>
@@ -15105,7 +15896,7 @@
         </p:spPr>
         <p:txBody>
           <a:bodyPr wrap="square" lIns="27432" rIns="27432" anchor="t">
-            <a:spAutoFit/>
+            <a:normAutofit/>
           </a:bodyPr>
           <a:lstStyle/>
           <a:p>
@@ -15118,6 +15909,12 @@
               </a:defRPr>
             </a:pPr>
             <a:r>
+              <a:rPr sz="1350" b="1">
+                <a:solidFill>
+                  <a:srgbClr val="202124"/>
+                </a:solidFill>
+                <a:latin typeface="Microsoft YaHei"/>
+              </a:rPr>
               <a:t>主要 failed / partial</a:t>
             </a:r>
           </a:p>
@@ -15141,7 +15938,7 @@
         </p:spPr>
         <p:txBody>
           <a:bodyPr wrap="square" lIns="27432" rIns="27432" anchor="t">
-            <a:spAutoFit/>
+            <a:normAutofit/>
           </a:bodyPr>
           <a:lstStyle/>
           <a:p>
@@ -15154,18 +15951,42 @@
               </a:defRPr>
             </a:pPr>
             <a:r>
+              <a:rPr sz="1220" b="0">
+                <a:solidFill>
+                  <a:srgbClr val="475467"/>
+                </a:solidFill>
+                <a:latin typeface="Microsoft YaHei"/>
+              </a:rPr>
               <a:t>splice07：RISC-V lost 50</a:t>
             </a:r>
             <a:br/>
             <a:r>
+              <a:rPr sz="1220" b="0">
+                <a:solidFill>
+                  <a:srgbClr val="475467"/>
+                </a:solidFill>
+                <a:latin typeface="Microsoft YaHei"/>
+              </a:rPr>
               <a:t>chdir01：lost 42-46</a:t>
             </a:r>
             <a:br/>
             <a:r>
+              <a:rPr sz="1220" b="0">
+                <a:solidFill>
+                  <a:srgbClr val="475467"/>
+                </a:solidFill>
+                <a:latin typeface="Microsoft YaHei"/>
+              </a:rPr>
               <a:t>fsync01：lost 30</a:t>
             </a:r>
             <a:br/>
             <a:r>
+              <a:rPr sz="1220" b="0">
+                <a:solidFill>
+                  <a:srgbClr val="475467"/>
+                </a:solidFill>
+                <a:latin typeface="Microsoft YaHei"/>
+              </a:rPr>
               <a:t>rename01/03：lost 24 左右</a:t>
             </a:r>
           </a:p>
@@ -15277,7 +16098,7 @@
         </p:spPr>
         <p:txBody>
           <a:bodyPr wrap="square" lIns="27432" rIns="27432" anchor="t">
-            <a:spAutoFit/>
+            <a:normAutofit/>
           </a:bodyPr>
           <a:lstStyle/>
           <a:p>
@@ -15290,6 +16111,12 @@
               </a:defRPr>
             </a:pPr>
             <a:r>
+              <a:rPr sz="1500" b="1">
+                <a:solidFill>
+                  <a:srgbClr val="202124"/>
+                </a:solidFill>
+                <a:latin typeface="Microsoft YaHei"/>
+              </a:rPr>
               <a:t>修复方向</a:t>
             </a:r>
           </a:p>
@@ -15313,7 +16140,7 @@
         </p:spPr>
         <p:txBody>
           <a:bodyPr wrap="square" lIns="27432" rIns="27432" anchor="t">
-            <a:spAutoFit/>
+            <a:normAutofit/>
           </a:bodyPr>
           <a:lstStyle/>
           <a:p>
@@ -15326,6 +16153,12 @@
               </a:defRPr>
             </a:pPr>
             <a:r>
+              <a:rPr sz="1220" b="0">
+                <a:solidFill>
+                  <a:srgbClr val="475467"/>
+                </a:solidFill>
+                <a:latin typeface="Microsoft YaHei"/>
+              </a:rPr>
               <a:t>优先检查目录切换、文件创建、同步写回、目录项更新、splice/sendfile 与脚本类工具依赖。</a:t>
             </a:r>
           </a:p>
@@ -15453,7 +16286,7 @@
         </p:spPr>
         <p:txBody>
           <a:bodyPr wrap="square" lIns="27432" rIns="27432" anchor="t">
-            <a:spAutoFit/>
+            <a:normAutofit/>
           </a:bodyPr>
           <a:lstStyle/>
           <a:p>
@@ -15466,6 +16299,12 @@
               </a:defRPr>
             </a:pPr>
             <a:r>
+              <a:rPr sz="900" b="0">
+                <a:solidFill>
+                  <a:srgbClr val="667085"/>
+                </a:solidFill>
+                <a:latin typeface="Microsoft YaHei"/>
+              </a:rPr>
               <a:t>23 / 25</a:t>
             </a:r>
           </a:p>
@@ -15489,7 +16328,7 @@
         </p:spPr>
         <p:txBody>
           <a:bodyPr wrap="square" lIns="27432" rIns="27432" anchor="t">
-            <a:spAutoFit/>
+            <a:normAutofit/>
           </a:bodyPr>
           <a:lstStyle/>
           <a:p>
@@ -15502,6 +16341,12 @@
               </a:defRPr>
             </a:pPr>
             <a:r>
+              <a:rPr sz="2400" b="1">
+                <a:solidFill>
+                  <a:srgbClr val="202124"/>
+                </a:solidFill>
+                <a:latin typeface="Microsoft YaHei"/>
+              </a:rPr>
               <a:t>后续优化计划</a:t>
             </a:r>
           </a:p>
@@ -15525,7 +16370,7 @@
         </p:spPr>
         <p:txBody>
           <a:bodyPr wrap="square" lIns="27432" rIns="27432" anchor="t">
-            <a:spAutoFit/>
+            <a:normAutofit/>
           </a:bodyPr>
           <a:lstStyle/>
           <a:p>
@@ -15538,6 +16383,12 @@
               </a:defRPr>
             </a:pPr>
             <a:r>
+              <a:rPr sz="1350" b="0">
+                <a:solidFill>
+                  <a:srgbClr val="475467"/>
+                </a:solidFill>
+                <a:latin typeface="Microsoft YaHei"/>
+              </a:rPr>
               <a:t>优先处理 lost_passed 最高的边界</a:t>
             </a:r>
           </a:p>
@@ -15692,7 +16543,7 @@
         </p:spPr>
         <p:txBody>
           <a:bodyPr wrap="square" lIns="27432" rIns="27432" anchor="t">
-            <a:spAutoFit/>
+            <a:normAutofit/>
           </a:bodyPr>
           <a:lstStyle/>
           <a:p>
@@ -15705,6 +16556,12 @@
               </a:defRPr>
             </a:pPr>
             <a:r>
+              <a:rPr sz="1500" b="1">
+                <a:solidFill>
+                  <a:srgbClr val="202124"/>
+                </a:solidFill>
+                <a:latin typeface="Microsoft YaHei"/>
+              </a:rPr>
               <a:t>P0 文件系统差异收敛</a:t>
             </a:r>
           </a:p>
@@ -15728,7 +16585,7 @@
         </p:spPr>
         <p:txBody>
           <a:bodyPr wrap="square" lIns="27432" rIns="27432" anchor="t">
-            <a:spAutoFit/>
+            <a:normAutofit/>
           </a:bodyPr>
           <a:lstStyle/>
           <a:p>
@@ -15741,6 +16598,12 @@
               </a:defRPr>
             </a:pPr>
             <a:r>
+              <a:rPr sz="1200" b="0">
+                <a:solidFill>
+                  <a:srgbClr val="475467"/>
+                </a:solidFill>
+                <a:latin typeface="Microsoft YaHei"/>
+              </a:rPr>
               <a:t>tar_tests.sh、creat09、file01.sh、chdir01、fsync01、rename01/03、splice07。</a:t>
             </a:r>
           </a:p>
@@ -15852,7 +16715,7 @@
         </p:spPr>
         <p:txBody>
           <a:bodyPr wrap="square" lIns="27432" rIns="27432" anchor="t">
-            <a:spAutoFit/>
+            <a:normAutofit/>
           </a:bodyPr>
           <a:lstStyle/>
           <a:p>
@@ -15865,6 +16728,12 @@
               </a:defRPr>
             </a:pPr>
             <a:r>
+              <a:rPr sz="1500" b="1">
+                <a:solidFill>
+                  <a:srgbClr val="202124"/>
+                </a:solidFill>
+                <a:latin typeface="Microsoft YaHei"/>
+              </a:rPr>
               <a:t>P0 ABI 细节补齐</a:t>
             </a:r>
           </a:p>
@@ -15888,7 +16757,7 @@
         </p:spPr>
         <p:txBody>
           <a:bodyPr wrap="square" lIns="27432" rIns="27432" anchor="t">
-            <a:spAutoFit/>
+            <a:normAutofit/>
           </a:bodyPr>
           <a:lstStyle/>
           <a:p>
@@ -15901,6 +16770,12 @@
               </a:defRPr>
             </a:pPr>
             <a:r>
+              <a:rPr sz="1200" b="0">
+                <a:solidFill>
+                  <a:srgbClr val="475467"/>
+                </a:solidFill>
+                <a:latin typeface="Microsoft YaHei"/>
+              </a:rPr>
               <a:t>openat/openat2、权限检查、xattr、mount、socket option、SysV IPC、资源限制。</a:t>
             </a:r>
           </a:p>
@@ -16012,7 +16887,7 @@
         </p:spPr>
         <p:txBody>
           <a:bodyPr wrap="square" lIns="27432" rIns="27432" anchor="t">
-            <a:spAutoFit/>
+            <a:normAutofit/>
           </a:bodyPr>
           <a:lstStyle/>
           <a:p>
@@ -16025,6 +16900,12 @@
               </a:defRPr>
             </a:pPr>
             <a:r>
+              <a:rPr sz="1500" b="1">
+                <a:solidFill>
+                  <a:srgbClr val="202124"/>
+                </a:solidFill>
+                <a:latin typeface="Microsoft YaHei"/>
+              </a:rPr>
               <a:t>P1 生命周期稳定</a:t>
             </a:r>
           </a:p>
@@ -16048,7 +16929,7 @@
         </p:spPr>
         <p:txBody>
           <a:bodyPr wrap="square" lIns="27432" rIns="27432" anchor="t">
-            <a:spAutoFit/>
+            <a:normAutofit/>
           </a:bodyPr>
           <a:lstStyle/>
           <a:p>
@@ -16061,6 +16942,12 @@
               </a:defRPr>
             </a:pPr>
             <a:r>
+              <a:rPr sz="1200" b="0">
+                <a:solidFill>
+                  <a:srgbClr val="475467"/>
+                </a:solidFill>
+                <a:latin typeface="Microsoft YaHei"/>
+              </a:rPr>
               <a:t>fork/clone/execve/exit/wait4 与 COW、mmap、futex、robust list 的组合场景。</a:t>
             </a:r>
           </a:p>
@@ -16172,7 +17059,7 @@
         </p:spPr>
         <p:txBody>
           <a:bodyPr wrap="square" lIns="27432" rIns="27432" anchor="t">
-            <a:spAutoFit/>
+            <a:normAutofit/>
           </a:bodyPr>
           <a:lstStyle/>
           <a:p>
@@ -16185,6 +17072,12 @@
               </a:defRPr>
             </a:pPr>
             <a:r>
+              <a:rPr sz="1500" b="1">
+                <a:solidFill>
+                  <a:srgbClr val="202124"/>
+                </a:solidFill>
+                <a:latin typeface="Microsoft YaHei"/>
+              </a:rPr>
               <a:t>P1 双架构对照</a:t>
             </a:r>
           </a:p>
@@ -16208,7 +17101,7 @@
         </p:spPr>
         <p:txBody>
           <a:bodyPr wrap="square" lIns="27432" rIns="27432" anchor="t">
-            <a:spAutoFit/>
+            <a:normAutofit/>
           </a:bodyPr>
           <a:lstStyle/>
           <a:p>
@@ -16221,6 +17114,12 @@
               </a:defRPr>
             </a:pPr>
             <a:r>
+              <a:rPr sz="1200" b="0">
+                <a:solidFill>
+                  <a:srgbClr val="475467"/>
+                </a:solidFill>
+                <a:latin typeface="Microsoft YaHei"/>
+              </a:rPr>
               <a:t>固定 RISC-V 与 LoongArch 在 trap、页表、时钟、设备、用户 ABI 上的回归矩阵。</a:t>
             </a:r>
           </a:p>
@@ -16332,7 +17231,7 @@
         </p:spPr>
         <p:txBody>
           <a:bodyPr wrap="square" lIns="27432" rIns="27432" anchor="t">
-            <a:spAutoFit/>
+            <a:normAutofit/>
           </a:bodyPr>
           <a:lstStyle/>
           <a:p>
@@ -16345,6 +17244,12 @@
               </a:defRPr>
             </a:pPr>
             <a:r>
+              <a:rPr sz="1500" b="1">
+                <a:solidFill>
+                  <a:srgbClr val="202124"/>
+                </a:solidFill>
+                <a:latin typeface="Microsoft YaHei"/>
+              </a:rPr>
               <a:t>P2 网络与设备扩展</a:t>
             </a:r>
           </a:p>
@@ -16368,7 +17273,7 @@
         </p:spPr>
         <p:txBody>
           <a:bodyPr wrap="square" lIns="27432" rIns="27432" anchor="t">
-            <a:spAutoFit/>
+            <a:normAutofit/>
           </a:bodyPr>
           <a:lstStyle/>
           <a:p>
@@ -16381,6 +17286,12 @@
               </a:defRPr>
             </a:pPr>
             <a:r>
+              <a:rPr sz="1200" b="0">
+                <a:solidFill>
+                  <a:srgbClr val="475467"/>
+                </a:solidFill>
+                <a:latin typeface="Microsoft YaHei"/>
+              </a:rPr>
               <a:t>在回环网络基础上评估 VirtIO-net，完善 tty/random/rtc/loop 等设备文件语义。</a:t>
             </a:r>
           </a:p>
@@ -16508,7 +17419,7 @@
         </p:spPr>
         <p:txBody>
           <a:bodyPr wrap="square" lIns="27432" rIns="27432" anchor="t">
-            <a:spAutoFit/>
+            <a:normAutofit/>
           </a:bodyPr>
           <a:lstStyle/>
           <a:p>
@@ -16521,6 +17432,12 @@
               </a:defRPr>
             </a:pPr>
             <a:r>
+              <a:rPr sz="900" b="0">
+                <a:solidFill>
+                  <a:srgbClr val="667085"/>
+                </a:solidFill>
+                <a:latin typeface="Microsoft YaHei"/>
+              </a:rPr>
               <a:t>24 / 25</a:t>
             </a:r>
           </a:p>
@@ -16544,7 +17461,7 @@
         </p:spPr>
         <p:txBody>
           <a:bodyPr wrap="square" lIns="27432" rIns="27432" anchor="t">
-            <a:spAutoFit/>
+            <a:normAutofit/>
           </a:bodyPr>
           <a:lstStyle/>
           <a:p>
@@ -16557,6 +17474,12 @@
               </a:defRPr>
             </a:pPr>
             <a:r>
+              <a:rPr sz="2400" b="1">
+                <a:solidFill>
+                  <a:srgbClr val="202124"/>
+                </a:solidFill>
+                <a:latin typeface="Microsoft YaHei"/>
+              </a:rPr>
               <a:t>近期里程碑</a:t>
             </a:r>
           </a:p>
@@ -16580,7 +17503,7 @@
         </p:spPr>
         <p:txBody>
           <a:bodyPr wrap="square" lIns="27432" rIns="27432" anchor="t">
-            <a:spAutoFit/>
+            <a:normAutofit/>
           </a:bodyPr>
           <a:lstStyle/>
           <a:p>
@@ -16593,6 +17516,12 @@
               </a:defRPr>
             </a:pPr>
             <a:r>
+              <a:rPr sz="1350" b="0">
+                <a:solidFill>
+                  <a:srgbClr val="475467"/>
+                </a:solidFill>
+                <a:latin typeface="Microsoft YaHei"/>
+              </a:rPr>
               <a:t>把全量报告转化为固定回归流程</a:t>
             </a:r>
           </a:p>
@@ -16747,7 +17676,7 @@
         </p:spPr>
         <p:txBody>
           <a:bodyPr wrap="square" lIns="27432" rIns="27432" anchor="t">
-            <a:spAutoFit/>
+            <a:normAutofit/>
           </a:bodyPr>
           <a:lstStyle/>
           <a:p>
@@ -16760,6 +17689,12 @@
               </a:defRPr>
             </a:pPr>
             <a:r>
+              <a:rPr sz="1500" b="1">
+                <a:solidFill>
+                  <a:srgbClr val="202124"/>
+                </a:solidFill>
+                <a:latin typeface="Microsoft YaHei"/>
+              </a:rPr>
               <a:t>短期：差异收敛</a:t>
             </a:r>
           </a:p>
@@ -16783,7 +17718,7 @@
         </p:spPr>
         <p:txBody>
           <a:bodyPr wrap="square" lIns="27432" rIns="27432" anchor="t">
-            <a:spAutoFit/>
+            <a:normAutofit/>
           </a:bodyPr>
           <a:lstStyle/>
           <a:p>
@@ -16796,18 +17731,42 @@
               </a:defRPr>
             </a:pPr>
             <a:r>
+              <a:rPr sz="1220" b="0">
+                <a:solidFill>
+                  <a:srgbClr val="475467"/>
+                </a:solidFill>
+                <a:latin typeface="Microsoft YaHei"/>
+              </a:rPr>
               <a:t>按 lost_passed 排序建立修复队列</a:t>
             </a:r>
             <a:br/>
             <a:r>
+              <a:rPr sz="1220" b="0">
+                <a:solidFill>
+                  <a:srgbClr val="475467"/>
+                </a:solidFill>
+                <a:latin typeface="Microsoft YaHei"/>
+              </a:rPr>
               <a:t>优先处理文件系统与 I/O 边界</a:t>
             </a:r>
             <a:br/>
             <a:r>
+              <a:rPr sz="1220" b="0">
+                <a:solidFill>
+                  <a:srgbClr val="475467"/>
+                </a:solidFill>
+                <a:latin typeface="Microsoft YaHei"/>
+              </a:rPr>
               <a:t>保留对应 rv/la 日志片段</a:t>
             </a:r>
             <a:br/>
             <a:r>
+              <a:rPr sz="1220" b="0">
+                <a:solidFill>
+                  <a:srgbClr val="475467"/>
+                </a:solidFill>
+                <a:latin typeface="Microsoft YaHei"/>
+              </a:rPr>
               <a:t>每次修复同步更新 local-report</a:t>
             </a:r>
           </a:p>
@@ -16919,7 +17878,7 @@
         </p:spPr>
         <p:txBody>
           <a:bodyPr wrap="square" lIns="27432" rIns="27432" anchor="t">
-            <a:spAutoFit/>
+            <a:normAutofit/>
           </a:bodyPr>
           <a:lstStyle/>
           <a:p>
@@ -16932,6 +17891,12 @@
               </a:defRPr>
             </a:pPr>
             <a:r>
+              <a:rPr sz="1500" b="1">
+                <a:solidFill>
+                  <a:srgbClr val="202124"/>
+                </a:solidFill>
+                <a:latin typeface="Microsoft YaHei"/>
+              </a:rPr>
               <a:t>中期：路径加固</a:t>
             </a:r>
           </a:p>
@@ -16955,7 +17920,7 @@
         </p:spPr>
         <p:txBody>
           <a:bodyPr wrap="square" lIns="27432" rIns="27432" anchor="t">
-            <a:spAutoFit/>
+            <a:normAutofit/>
           </a:bodyPr>
           <a:lstStyle/>
           <a:p>
@@ -16968,18 +17933,42 @@
               </a:defRPr>
             </a:pPr>
             <a:r>
+              <a:rPr sz="1220" b="0">
+                <a:solidFill>
+                  <a:srgbClr val="475467"/>
+                </a:solidFill>
+                <a:latin typeface="Microsoft YaHei"/>
+              </a:rPr>
               <a:t>Ext4 写回和目录项更新</a:t>
             </a:r>
             <a:br/>
             <a:r>
+              <a:rPr sz="1220" b="0">
+                <a:solidFill>
+                  <a:srgbClr val="475467"/>
+                </a:solidFill>
+                <a:latin typeface="Microsoft YaHei"/>
+              </a:rPr>
               <a:t>COW/mmap/fork/exit 组合</a:t>
             </a:r>
             <a:br/>
             <a:r>
+              <a:rPr sz="1220" b="0">
+                <a:solidFill>
+                  <a:srgbClr val="475467"/>
+                </a:solidFill>
+                <a:latin typeface="Microsoft YaHei"/>
+              </a:rPr>
               <a:t>futex/robust list 退出边界</a:t>
             </a:r>
             <a:br/>
             <a:r>
+              <a:rPr sz="1220" b="0">
+                <a:solidFill>
+                  <a:srgbClr val="475467"/>
+                </a:solidFill>
+                <a:latin typeface="Microsoft YaHei"/>
+              </a:rPr>
               <a:t>socket 非阻塞和 poll 状态</a:t>
             </a:r>
           </a:p>
@@ -17091,7 +18080,7 @@
         </p:spPr>
         <p:txBody>
           <a:bodyPr wrap="square" lIns="27432" rIns="27432" anchor="t">
-            <a:spAutoFit/>
+            <a:normAutofit/>
           </a:bodyPr>
           <a:lstStyle/>
           <a:p>
@@ -17104,6 +18093,12 @@
               </a:defRPr>
             </a:pPr>
             <a:r>
+              <a:rPr sz="1500" b="1">
+                <a:solidFill>
+                  <a:srgbClr val="202124"/>
+                </a:solidFill>
+                <a:latin typeface="Microsoft YaHei"/>
+              </a:rPr>
               <a:t>长期：能力扩展</a:t>
             </a:r>
           </a:p>
@@ -17127,7 +18122,7 @@
         </p:spPr>
         <p:txBody>
           <a:bodyPr wrap="square" lIns="27432" rIns="27432" anchor="t">
-            <a:spAutoFit/>
+            <a:normAutofit/>
           </a:bodyPr>
           <a:lstStyle/>
           <a:p>
@@ -17140,18 +18135,42 @@
               </a:defRPr>
             </a:pPr>
             <a:r>
+              <a:rPr sz="1220" b="0">
+                <a:solidFill>
+                  <a:srgbClr val="475467"/>
+                </a:solidFill>
+                <a:latin typeface="Microsoft YaHei"/>
+              </a:rPr>
               <a:t>VirtIO-net 或更完整网络设备</a:t>
             </a:r>
             <a:br/>
             <a:r>
+              <a:rPr sz="1220" b="0">
+                <a:solidFill>
+                  <a:srgbClr val="475467"/>
+                </a:solidFill>
+                <a:latin typeface="Microsoft YaHei"/>
+              </a:rPr>
               <a:t>更完整 tty/random/rtc/loop 语义</a:t>
             </a:r>
             <a:br/>
             <a:r>
+              <a:rPr sz="1220" b="0">
+                <a:solidFill>
+                  <a:srgbClr val="475467"/>
+                </a:solidFill>
+                <a:latin typeface="Microsoft YaHei"/>
+              </a:rPr>
               <a:t>双架构固定回归脚本</a:t>
             </a:r>
             <a:br/>
             <a:r>
+              <a:rPr sz="1220" b="0">
+                <a:solidFill>
+                  <a:srgbClr val="475467"/>
+                </a:solidFill>
+                <a:latin typeface="Microsoft YaHei"/>
+              </a:rPr>
               <a:t>文档与测试数据同步维护</a:t>
             </a:r>
           </a:p>
@@ -17279,7 +18298,7 @@
         </p:spPr>
         <p:txBody>
           <a:bodyPr wrap="square" lIns="27432" rIns="27432" anchor="t">
-            <a:spAutoFit/>
+            <a:normAutofit/>
           </a:bodyPr>
           <a:lstStyle/>
           <a:p>
@@ -17292,6 +18311,12 @@
               </a:defRPr>
             </a:pPr>
             <a:r>
+              <a:rPr sz="900" b="0">
+                <a:solidFill>
+                  <a:srgbClr val="667085"/>
+                </a:solidFill>
+                <a:latin typeface="Microsoft YaHei"/>
+              </a:rPr>
               <a:t>25 / 25</a:t>
             </a:r>
           </a:p>
@@ -17315,7 +18340,7 @@
         </p:spPr>
         <p:txBody>
           <a:bodyPr wrap="square" lIns="27432" rIns="27432" anchor="t">
-            <a:spAutoFit/>
+            <a:normAutofit/>
           </a:bodyPr>
           <a:lstStyle/>
           <a:p>
@@ -17328,6 +18353,12 @@
               </a:defRPr>
             </a:pPr>
             <a:r>
+              <a:rPr sz="2400" b="1">
+                <a:solidFill>
+                  <a:srgbClr val="202124"/>
+                </a:solidFill>
+                <a:latin typeface="Microsoft YaHei"/>
+              </a:rPr>
               <a:t>总结</a:t>
             </a:r>
           </a:p>
@@ -17351,7 +18382,7 @@
         </p:spPr>
         <p:txBody>
           <a:bodyPr wrap="square" lIns="27432" rIns="27432" anchor="t">
-            <a:spAutoFit/>
+            <a:normAutofit/>
           </a:bodyPr>
           <a:lstStyle/>
           <a:p>
@@ -17364,6 +18395,12 @@
               </a:defRPr>
             </a:pPr>
             <a:r>
+              <a:rPr sz="1350" b="0">
+                <a:solidFill>
+                  <a:srgbClr val="475467"/>
+                </a:solidFill>
+                <a:latin typeface="Microsoft YaHei"/>
+              </a:rPr>
               <a:t>最终版 RespOS 已进入测试驱动收敛阶段</a:t>
             </a:r>
           </a:p>
@@ -17518,7 +18555,7 @@
         </p:spPr>
         <p:txBody>
           <a:bodyPr wrap="square" lIns="27432" rIns="27432" anchor="t">
-            <a:spAutoFit/>
+            <a:normAutofit/>
           </a:bodyPr>
           <a:lstStyle/>
           <a:p>
@@ -17531,6 +18568,12 @@
               </a:defRPr>
             </a:pPr>
             <a:r>
+              <a:rPr sz="1500" b="1">
+                <a:solidFill>
+                  <a:srgbClr val="202124"/>
+                </a:solidFill>
+                <a:latin typeface="Microsoft YaHei"/>
+              </a:rPr>
               <a:t>当前成果</a:t>
             </a:r>
           </a:p>
@@ -17554,7 +18597,7 @@
         </p:spPr>
         <p:txBody>
           <a:bodyPr wrap="square" lIns="27432" rIns="27432" anchor="t">
-            <a:spAutoFit/>
+            <a:normAutofit/>
           </a:bodyPr>
           <a:lstStyle/>
           <a:p>
@@ -17567,6 +18610,12 @@
               </a:defRPr>
             </a:pPr>
             <a:r>
+              <a:rPr sz="1220" b="0">
+                <a:solidFill>
+                  <a:srgbClr val="475467"/>
+                </a:solidFill>
+                <a:latin typeface="Microsoft YaHei"/>
+              </a:rPr>
               <a:t>216 个 syscall dispatch；四组 LTP 断言通过率 96.91%-97.63%；RISC-V 与 LoongArch 均完成全量输出和 CSV 报告。</a:t>
             </a:r>
           </a:p>
@@ -17678,7 +18727,7 @@
         </p:spPr>
         <p:txBody>
           <a:bodyPr wrap="square" lIns="27432" rIns="27432" anchor="t">
-            <a:spAutoFit/>
+            <a:normAutofit/>
           </a:bodyPr>
           <a:lstStyle/>
           <a:p>
@@ -17691,6 +18740,12 @@
               </a:defRPr>
             </a:pPr>
             <a:r>
+              <a:rPr sz="1500" b="1">
+                <a:solidFill>
+                  <a:srgbClr val="202124"/>
+                </a:solidFill>
+                <a:latin typeface="Microsoft YaHei"/>
+              </a:rPr>
               <a:t>当前重点</a:t>
             </a:r>
           </a:p>
@@ -17714,7 +18769,7 @@
         </p:spPr>
         <p:txBody>
           <a:bodyPr wrap="square" lIns="27432" rIns="27432" anchor="t">
-            <a:spAutoFit/>
+            <a:normAutofit/>
           </a:bodyPr>
           <a:lstStyle/>
           <a:p>
@@ -17727,6 +18782,12 @@
               </a:defRPr>
             </a:pPr>
             <a:r>
+              <a:rPr sz="1220" b="0">
+                <a:solidFill>
+                  <a:srgbClr val="475467"/>
+                </a:solidFill>
+                <a:latin typeface="Microsoft YaHei"/>
+              </a:rPr>
               <a:t>差异集中在文件系统和 I/O：tar/file 脚本、creat、chdir、fsync、rename、splice/sendfile、权限与路径错误码。</a:t>
             </a:r>
           </a:p>
@@ -17838,7 +18899,7 @@
         </p:spPr>
         <p:txBody>
           <a:bodyPr wrap="square" lIns="27432" rIns="27432" anchor="t">
-            <a:spAutoFit/>
+            <a:normAutofit/>
           </a:bodyPr>
           <a:lstStyle/>
           <a:p>
@@ -17851,6 +18912,12 @@
               </a:defRPr>
             </a:pPr>
             <a:r>
+              <a:rPr sz="1500" b="1">
+                <a:solidFill>
+                  <a:srgbClr val="202124"/>
+                </a:solidFill>
+                <a:latin typeface="Microsoft YaHei"/>
+              </a:rPr>
               <a:t>后续方向</a:t>
             </a:r>
           </a:p>
@@ -17874,7 +18941,7 @@
         </p:spPr>
         <p:txBody>
           <a:bodyPr wrap="square" lIns="27432" rIns="27432" anchor="t">
-            <a:spAutoFit/>
+            <a:normAutofit/>
           </a:bodyPr>
           <a:lstStyle/>
           <a:p>
@@ -17887,6 +18954,12 @@
               </a:defRPr>
             </a:pPr>
             <a:r>
+              <a:rPr sz="1220" b="0">
+                <a:solidFill>
+                  <a:srgbClr val="475467"/>
+                </a:solidFill>
+                <a:latin typeface="Microsoft YaHei"/>
+              </a:rPr>
               <a:t>按 lost_passed 排序推进高收益修复，并固定 RISC-V/LoongArch 与 glibc/musl 四组合回归。</a:t>
             </a:r>
           </a:p>
@@ -17910,7 +18983,7 @@
         </p:spPr>
         <p:txBody>
           <a:bodyPr wrap="square" lIns="27432" rIns="27432" anchor="t">
-            <a:spAutoFit/>
+            <a:normAutofit/>
           </a:bodyPr>
           <a:lstStyle/>
           <a:p>
@@ -17923,6 +18996,12 @@
               </a:defRPr>
             </a:pPr>
             <a:r>
+              <a:rPr sz="1350" b="1">
+                <a:solidFill>
+                  <a:srgbClr val="202124"/>
+                </a:solidFill>
+                <a:latin typeface="Microsoft YaHei"/>
+              </a:rPr>
               <a:t>RespOS 初赛进展汇报</a:t>
             </a:r>
           </a:p>
@@ -18050,7 +19129,7 @@
         </p:spPr>
         <p:txBody>
           <a:bodyPr wrap="square" lIns="27432" rIns="27432" anchor="t">
-            <a:spAutoFit/>
+            <a:normAutofit/>
           </a:bodyPr>
           <a:lstStyle/>
           <a:p>
@@ -18063,7 +19142,10 @@
               </a:defRPr>
             </a:pPr>
             <a:r>
-              <a:rPr>
+              <a:rPr sz="900" b="0">
+                <a:solidFill>
+                  <a:srgbClr val="667085"/>
+                </a:solidFill>
                 <a:latin typeface="Microsoft YaHei"/>
               </a:rPr>
               <a:t>03 / 25</a:t>
@@ -18089,7 +19171,7 @@
         </p:spPr>
         <p:txBody>
           <a:bodyPr wrap="square" lIns="27432" rIns="27432" anchor="t">
-            <a:spAutoFit/>
+            <a:normAutofit/>
           </a:bodyPr>
           <a:lstStyle/>
           <a:p>
@@ -18102,7 +19184,10 @@
               </a:defRPr>
             </a:pPr>
             <a:r>
-              <a:rPr>
+              <a:rPr sz="2400" b="1">
+                <a:solidFill>
+                  <a:srgbClr val="202124"/>
+                </a:solidFill>
                 <a:latin typeface="Microsoft YaHei"/>
               </a:rPr>
               <a:t>项目定位</a:t>
@@ -18128,7 +19213,7 @@
         </p:spPr>
         <p:txBody>
           <a:bodyPr wrap="square" lIns="27432" rIns="27432" anchor="t">
-            <a:spAutoFit/>
+            <a:normAutofit/>
           </a:bodyPr>
           <a:lstStyle/>
           <a:p>
@@ -18141,7 +19226,10 @@
               </a:defRPr>
             </a:pPr>
             <a:r>
-              <a:rPr>
+              <a:rPr sz="1350" b="0">
+                <a:solidFill>
+                  <a:srgbClr val="475467"/>
+                </a:solidFill>
                 <a:latin typeface="Microsoft YaHei"/>
               </a:rPr>
               <a:t>面向初赛测例和教学型内核演进的 Rust 类 Unix 宏内核</a:t>
@@ -18298,7 +19386,7 @@
         </p:spPr>
         <p:txBody>
           <a:bodyPr wrap="square" lIns="27432" rIns="27432" anchor="t">
-            <a:spAutoFit/>
+            <a:normAutofit/>
           </a:bodyPr>
           <a:lstStyle/>
           <a:p>
@@ -18311,7 +19399,10 @@
               </a:defRPr>
             </a:pPr>
             <a:r>
-              <a:rPr>
+              <a:rPr sz="1350" b="1">
+                <a:solidFill>
+                  <a:srgbClr val="202124"/>
+                </a:solidFill>
                 <a:latin typeface="Microsoft YaHei"/>
               </a:rPr>
               <a:t>不是只做 syscall 表</a:t>
@@ -18337,7 +19428,7 @@
         </p:spPr>
         <p:txBody>
           <a:bodyPr wrap="square" lIns="27432" rIns="27432" anchor="t">
-            <a:spAutoFit/>
+            <a:normAutofit/>
           </a:bodyPr>
           <a:lstStyle/>
           <a:p>
@@ -18350,7 +19441,10 @@
               </a:defRPr>
             </a:pPr>
             <a:r>
-              <a:rPr>
+              <a:rPr sz="1220" b="0">
+                <a:solidFill>
+                  <a:srgbClr val="475467"/>
+                </a:solidFill>
                 <a:latin typeface="Microsoft YaHei"/>
               </a:rPr>
               <a:t>初赛测例会穿透任务、内存、文件、信号、时间、网络和设备路径，因此目标是补齐用户程序运行链路。</a:t>
@@ -18464,7 +19558,7 @@
         </p:spPr>
         <p:txBody>
           <a:bodyPr wrap="square" lIns="27432" rIns="27432" anchor="t">
-            <a:spAutoFit/>
+            <a:normAutofit/>
           </a:bodyPr>
           <a:lstStyle/>
           <a:p>
@@ -18477,7 +19571,10 @@
               </a:defRPr>
             </a:pPr>
             <a:r>
-              <a:rPr>
+              <a:rPr sz="1500" b="1">
+                <a:solidFill>
+                  <a:srgbClr val="202124"/>
+                </a:solidFill>
                 <a:latin typeface="Microsoft YaHei"/>
               </a:rPr>
               <a:t>双架构运行</a:t>
@@ -18503,7 +19600,7 @@
         </p:spPr>
         <p:txBody>
           <a:bodyPr wrap="square" lIns="27432" rIns="27432" anchor="t">
-            <a:spAutoFit/>
+            <a:normAutofit/>
           </a:bodyPr>
           <a:lstStyle/>
           <a:p>
@@ -18516,7 +19613,10 @@
               </a:defRPr>
             </a:pPr>
             <a:r>
-              <a:rPr>
+              <a:rPr sz="1220" b="0">
+                <a:solidFill>
+                  <a:srgbClr val="475467"/>
+                </a:solidFill>
                 <a:latin typeface="Microsoft YaHei"/>
               </a:rPr>
               <a:t>当前代码同时维护 RISC-V 64 与 LoongArch 64 路径，架构差异集中在 arch 层。</a:t>
@@ -18630,7 +19730,7 @@
         </p:spPr>
         <p:txBody>
           <a:bodyPr wrap="square" lIns="27432" rIns="27432" anchor="t">
-            <a:spAutoFit/>
+            <a:normAutofit/>
           </a:bodyPr>
           <a:lstStyle/>
           <a:p>
@@ -18643,7 +19743,10 @@
               </a:defRPr>
             </a:pPr>
             <a:r>
-              <a:rPr>
+              <a:rPr sz="1500" b="1">
+                <a:solidFill>
+                  <a:srgbClr val="202124"/>
+                </a:solidFill>
                 <a:latin typeface="Microsoft YaHei"/>
               </a:rPr>
               <a:t>测例驱动开发</a:t>
@@ -18669,7 +19772,7 @@
         </p:spPr>
         <p:txBody>
           <a:bodyPr wrap="square" lIns="27432" rIns="27432" anchor="t">
-            <a:spAutoFit/>
+            <a:normAutofit/>
           </a:bodyPr>
           <a:lstStyle/>
           <a:p>
@@ -18682,7 +19785,10 @@
               </a:defRPr>
             </a:pPr>
             <a:r>
-              <a:rPr>
+              <a:rPr sz="1220" b="0">
+                <a:solidFill>
+                  <a:srgbClr val="475467"/>
+                </a:solidFill>
                 <a:latin typeface="Microsoft YaHei"/>
               </a:rPr>
               <a:t>以 busybox、libc 初始化流程和 LTP 输出作为功能闭环验证依据。</a:t>
@@ -18796,7 +19902,7 @@
         </p:spPr>
         <p:txBody>
           <a:bodyPr wrap="square" lIns="27432" rIns="27432" anchor="t">
-            <a:spAutoFit/>
+            <a:normAutofit/>
           </a:bodyPr>
           <a:lstStyle/>
           <a:p>
@@ -18809,7 +19915,10 @@
               </a:defRPr>
             </a:pPr>
             <a:r>
-              <a:rPr>
+              <a:rPr sz="1500" b="1">
+                <a:solidFill>
+                  <a:srgbClr val="202124"/>
+                </a:solidFill>
                 <a:latin typeface="Microsoft YaHei"/>
               </a:rPr>
               <a:t>阶段性目标</a:t>
@@ -18835,7 +19944,7 @@
         </p:spPr>
         <p:txBody>
           <a:bodyPr wrap="square" lIns="27432" rIns="27432" anchor="t">
-            <a:spAutoFit/>
+            <a:normAutofit/>
           </a:bodyPr>
           <a:lstStyle/>
           <a:p>
@@ -18848,7 +19957,10 @@
               </a:defRPr>
             </a:pPr>
             <a:r>
-              <a:rPr>
+              <a:rPr sz="1220" b="0">
+                <a:solidFill>
+                  <a:srgbClr val="475467"/>
+                </a:solidFill>
                 <a:latin typeface="Microsoft YaHei"/>
               </a:rPr>
               <a:t>构建一个能稳定运行用户态负载、能通过日志定位问题、能继续围绕 Linux ABI 细节迭代的宏内核。当前重点已经从“能否启动和进入用户态”转向“复杂系统调用组合是否符合 Linux 行为、双架构是否一致、长测是否稳定”。</a:t>
@@ -18978,7 +20090,7 @@
         </p:spPr>
         <p:txBody>
           <a:bodyPr wrap="square" lIns="27432" rIns="27432" anchor="t">
-            <a:spAutoFit/>
+            <a:normAutofit/>
           </a:bodyPr>
           <a:lstStyle/>
           <a:p>
@@ -18991,7 +20103,10 @@
               </a:defRPr>
             </a:pPr>
             <a:r>
-              <a:rPr>
+              <a:rPr sz="900" b="0">
+                <a:solidFill>
+                  <a:srgbClr val="667085"/>
+                </a:solidFill>
                 <a:latin typeface="Microsoft YaHei"/>
               </a:rPr>
               <a:t>04 / 25</a:t>
@@ -19017,7 +20132,7 @@
         </p:spPr>
         <p:txBody>
           <a:bodyPr wrap="square" lIns="27432" rIns="27432" anchor="t">
-            <a:spAutoFit/>
+            <a:normAutofit/>
           </a:bodyPr>
           <a:lstStyle/>
           <a:p>
@@ -19030,7 +20145,10 @@
               </a:defRPr>
             </a:pPr>
             <a:r>
-              <a:rPr>
+              <a:rPr sz="2400" b="1">
+                <a:solidFill>
+                  <a:srgbClr val="202124"/>
+                </a:solidFill>
                 <a:latin typeface="Microsoft YaHei"/>
               </a:rPr>
               <a:t>初赛阶段工作范围</a:t>
@@ -19056,7 +20174,7 @@
         </p:spPr>
         <p:txBody>
           <a:bodyPr wrap="square" lIns="27432" rIns="27432" anchor="t">
-            <a:spAutoFit/>
+            <a:normAutofit/>
           </a:bodyPr>
           <a:lstStyle/>
           <a:p>
@@ -19069,7 +20187,10 @@
               </a:defRPr>
             </a:pPr>
             <a:r>
-              <a:rPr>
+              <a:rPr sz="1350" b="0">
+                <a:solidFill>
+                  <a:srgbClr val="475467"/>
+                </a:solidFill>
                 <a:latin typeface="Microsoft YaHei"/>
               </a:rPr>
               <a:t>围绕用户程序可运行性补齐基础设施</a:t>
@@ -19226,7 +20347,7 @@
         </p:spPr>
         <p:txBody>
           <a:bodyPr wrap="square" lIns="27432" rIns="27432" anchor="t">
-            <a:spAutoFit/>
+            <a:normAutofit/>
           </a:bodyPr>
           <a:lstStyle/>
           <a:p>
@@ -19239,7 +20360,10 @@
               </a:defRPr>
             </a:pPr>
             <a:r>
-              <a:rPr>
+              <a:rPr sz="1500" b="1">
+                <a:solidFill>
+                  <a:srgbClr val="202124"/>
+                </a:solidFill>
                 <a:latin typeface="Microsoft YaHei"/>
               </a:rPr>
               <a:t>主要覆盖</a:t>
@@ -19265,7 +20389,7 @@
         </p:spPr>
         <p:txBody>
           <a:bodyPr wrap="square" lIns="73152" rIns="27432">
-            <a:spAutoFit/>
+            <a:normAutofit/>
           </a:bodyPr>
           <a:lstStyle/>
           <a:p>
@@ -19281,7 +20405,10 @@
               </a:defRPr>
             </a:pPr>
             <a:r>
-              <a:rPr>
+              <a:rPr sz="1220" b="0">
+                <a:solidFill>
+                  <a:srgbClr val="475467"/>
+                </a:solidFill>
                 <a:latin typeface="Microsoft YaHei"/>
               </a:rPr>
               <a:t>进程与线程：fork/clone/execve/wait4/exit</a:t>
@@ -19300,7 +20427,10 @@
               </a:defRPr>
             </a:pPr>
             <a:r>
-              <a:rPr>
+              <a:rPr sz="1220" b="0">
+                <a:solidFill>
+                  <a:srgbClr val="475467"/>
+                </a:solidFill>
                 <a:latin typeface="Microsoft YaHei"/>
               </a:rPr>
               <a:t>虚拟内存：ELF、用户栈、auxv、mmap、brk、COW</a:t>
@@ -19319,7 +20449,10 @@
               </a:defRPr>
             </a:pPr>
             <a:r>
-              <a:rPr>
+              <a:rPr sz="1220" b="0">
+                <a:solidFill>
+                  <a:srgbClr val="475467"/>
+                </a:solidFill>
                 <a:latin typeface="Microsoft YaHei"/>
               </a:rPr>
               <a:t>文件系统：VFS、Ext4、procfs、devfs、fd 表</a:t>
@@ -19338,7 +20471,10 @@
               </a:defRPr>
             </a:pPr>
             <a:r>
-              <a:rPr>
+              <a:rPr sz="1220" b="0">
+                <a:solidFill>
+                  <a:srgbClr val="475467"/>
+                </a:solidFill>
                 <a:latin typeface="Microsoft YaHei"/>
               </a:rPr>
               <a:t>兼容接口：Linux errno、信号、时间、socket、IPC</a:t>
@@ -19357,7 +20493,10 @@
               </a:defRPr>
             </a:pPr>
             <a:r>
-              <a:rPr>
+              <a:rPr sz="1220" b="0">
+                <a:solidFill>
+                  <a:srgbClr val="475467"/>
+                </a:solidFill>
                 <a:latin typeface="Microsoft YaHei"/>
               </a:rPr>
               <a:t>设备与平台：VirtIO block、控制台、双架构页表和 trap</a:t>
@@ -19471,7 +20610,7 @@
         </p:spPr>
         <p:txBody>
           <a:bodyPr wrap="square" lIns="27432" rIns="27432" anchor="t">
-            <a:spAutoFit/>
+            <a:normAutofit/>
           </a:bodyPr>
           <a:lstStyle/>
           <a:p>
@@ -19484,7 +20623,10 @@
               </a:defRPr>
             </a:pPr>
             <a:r>
-              <a:rPr>
+              <a:rPr sz="1500" b="1">
+                <a:solidFill>
+                  <a:srgbClr val="202124"/>
+                </a:solidFill>
                 <a:latin typeface="Microsoft YaHei"/>
               </a:rPr>
               <a:t>暂不作为重点</a:t>
@@ -19510,7 +20652,7 @@
         </p:spPr>
         <p:txBody>
           <a:bodyPr wrap="square" lIns="73152" rIns="27432">
-            <a:spAutoFit/>
+            <a:normAutofit/>
           </a:bodyPr>
           <a:lstStyle/>
           <a:p>
@@ -19526,7 +20668,10 @@
               </a:defRPr>
             </a:pPr>
             <a:r>
-              <a:rPr>
+              <a:rPr sz="1220" b="0">
+                <a:solidFill>
+                  <a:srgbClr val="475467"/>
+                </a:solidFill>
                 <a:latin typeface="Microsoft YaHei"/>
               </a:rPr>
               <a:t>复杂调度策略和多核负载均衡</a:t>
@@ -19545,7 +20690,10 @@
               </a:defRPr>
             </a:pPr>
             <a:r>
-              <a:rPr>
+              <a:rPr sz="1220" b="0">
+                <a:solidFill>
+                  <a:srgbClr val="475467"/>
+                </a:solidFill>
                 <a:latin typeface="Microsoft YaHei"/>
               </a:rPr>
               <a:t>真实网卡驱动和完整网络协议覆盖</a:t>
@@ -19564,7 +20712,10 @@
               </a:defRPr>
             </a:pPr>
             <a:r>
-              <a:rPr>
+              <a:rPr sz="1220" b="0">
+                <a:solidFill>
+                  <a:srgbClr val="475467"/>
+                </a:solidFill>
                 <a:latin typeface="Microsoft YaHei"/>
               </a:rPr>
               <a:t>通用设备模型、热插拔和完整设备树解析</a:t>
@@ -19583,7 +20734,10 @@
               </a:defRPr>
             </a:pPr>
             <a:r>
-              <a:rPr>
+              <a:rPr sz="1220" b="0">
+                <a:solidFill>
+                  <a:srgbClr val="475467"/>
+                </a:solidFill>
                 <a:latin typeface="Microsoft YaHei"/>
               </a:rPr>
               <a:t>完整复刻 Linux 的全部 /proc、/sys 与 ioctl 语义</a:t>
@@ -19602,7 +20756,10 @@
               </a:defRPr>
             </a:pPr>
             <a:r>
-              <a:rPr>
+              <a:rPr sz="1220" b="0">
+                <a:solidFill>
+                  <a:srgbClr val="475467"/>
+                </a:solidFill>
                 <a:latin typeface="Microsoft YaHei"/>
               </a:rPr>
               <a:t>没有测例支撑且收益较低的大范围重构</a:t>
@@ -19732,7 +20889,7 @@
         </p:spPr>
         <p:txBody>
           <a:bodyPr wrap="square" lIns="27432" rIns="27432" anchor="t">
-            <a:spAutoFit/>
+            <a:normAutofit/>
           </a:bodyPr>
           <a:lstStyle/>
           <a:p>
@@ -19745,7 +20902,10 @@
               </a:defRPr>
             </a:pPr>
             <a:r>
-              <a:rPr>
+              <a:rPr sz="900" b="0">
+                <a:solidFill>
+                  <a:srgbClr val="667085"/>
+                </a:solidFill>
                 <a:latin typeface="Microsoft YaHei"/>
               </a:rPr>
               <a:t>05 / 25</a:t>
@@ -19771,7 +20931,7 @@
         </p:spPr>
         <p:txBody>
           <a:bodyPr wrap="square" lIns="27432" rIns="27432" anchor="t">
-            <a:spAutoFit/>
+            <a:normAutofit/>
           </a:bodyPr>
           <a:lstStyle/>
           <a:p>
@@ -19784,7 +20944,10 @@
               </a:defRPr>
             </a:pPr>
             <a:r>
-              <a:rPr>
+              <a:rPr sz="2400" b="1">
+                <a:solidFill>
+                  <a:srgbClr val="202124"/>
+                </a:solidFill>
                 <a:latin typeface="Microsoft YaHei"/>
               </a:rPr>
               <a:t>仓库结构与阶段产物</a:t>
@@ -19810,7 +20973,7 @@
         </p:spPr>
         <p:txBody>
           <a:bodyPr wrap="square" lIns="27432" rIns="27432" anchor="t">
-            <a:spAutoFit/>
+            <a:normAutofit/>
           </a:bodyPr>
           <a:lstStyle/>
           <a:p>
@@ -19823,7 +20986,10 @@
               </a:defRPr>
             </a:pPr>
             <a:r>
-              <a:rPr>
+              <a:rPr sz="1350" b="0">
+                <a:solidFill>
+                  <a:srgbClr val="475467"/>
+                </a:solidFill>
                 <a:latin typeface="Microsoft YaHei"/>
               </a:rPr>
               <a:t>代码、测试和文档分离维护</a:t>
@@ -19980,7 +21146,7 @@
         </p:spPr>
         <p:txBody>
           <a:bodyPr wrap="square" lIns="27432" rIns="27432" anchor="t">
-            <a:spAutoFit/>
+            <a:normAutofit/>
           </a:bodyPr>
           <a:lstStyle/>
           <a:p>
@@ -19993,7 +21159,10 @@
               </a:defRPr>
             </a:pPr>
             <a:r>
-              <a:rPr>
+              <a:rPr sz="1500" b="1">
+                <a:solidFill>
+                  <a:srgbClr val="202124"/>
+                </a:solidFill>
                 <a:latin typeface="Microsoft YaHei"/>
               </a:rPr>
               <a:t>内核与用户态</a:t>
@@ -20019,7 +21188,7 @@
         </p:spPr>
         <p:txBody>
           <a:bodyPr wrap="square" lIns="27432" rIns="27432" anchor="t">
-            <a:spAutoFit/>
+            <a:normAutofit/>
           </a:bodyPr>
           <a:lstStyle/>
           <a:p>
@@ -20032,35 +21201,50 @@
               </a:defRPr>
             </a:pPr>
             <a:r>
-              <a:rPr>
+              <a:rPr sz="1220" b="0">
+                <a:solidFill>
+                  <a:srgbClr val="475467"/>
+                </a:solidFill>
                 <a:latin typeface="Microsoft YaHei"/>
               </a:rPr>
               <a:t>os/ 内核主体</a:t>
             </a:r>
             <a:br/>
             <a:r>
-              <a:rPr>
+              <a:rPr sz="1220" b="0">
+                <a:solidFill>
+                  <a:srgbClr val="475467"/>
+                </a:solidFill>
                 <a:latin typeface="Microsoft YaHei"/>
               </a:rPr>
               <a:t>user/ 用户态库和测试程序</a:t>
             </a:r>
             <a:br/>
             <a:r>
-              <a:rPr>
+              <a:rPr sz="1220" b="0">
+                <a:solidFill>
+                  <a:srgbClr val="475467"/>
+                </a:solidFill>
                 <a:latin typeface="Microsoft YaHei"/>
               </a:rPr>
               <a:t>os/src/arch 双架构代码</a:t>
             </a:r>
             <a:br/>
             <a:r>
-              <a:rPr>
+              <a:rPr sz="1220" b="0">
+                <a:solidFill>
+                  <a:srgbClr val="475467"/>
+                </a:solidFill>
                 <a:latin typeface="Microsoft YaHei"/>
               </a:rPr>
               <a:t>os/src/syscall 系统调用分发</a:t>
             </a:r>
             <a:br/>
             <a:r>
-              <a:rPr>
+              <a:rPr sz="1220" b="0">
+                <a:solidFill>
+                  <a:srgbClr val="475467"/>
+                </a:solidFill>
                 <a:latin typeface="Microsoft YaHei"/>
               </a:rPr>
               <a:t>os/src/fs/mm/task/net 等核心模块</a:t>
@@ -20174,7 +21358,7 @@
         </p:spPr>
         <p:txBody>
           <a:bodyPr wrap="square" lIns="27432" rIns="27432" anchor="t">
-            <a:spAutoFit/>
+            <a:normAutofit/>
           </a:bodyPr>
           <a:lstStyle/>
           <a:p>
@@ -20187,7 +21371,10 @@
               </a:defRPr>
             </a:pPr>
             <a:r>
-              <a:rPr>
+              <a:rPr sz="1500" b="1">
+                <a:solidFill>
+                  <a:srgbClr val="202124"/>
+                </a:solidFill>
                 <a:latin typeface="Microsoft YaHei"/>
               </a:rPr>
               <a:t>测试与日志</a:t>
@@ -20213,7 +21400,7 @@
         </p:spPr>
         <p:txBody>
           <a:bodyPr wrap="square" lIns="27432" rIns="27432" anchor="t">
-            <a:spAutoFit/>
+            <a:normAutofit/>
           </a:bodyPr>
           <a:lstStyle/>
           <a:p>
@@ -20226,42 +21413,60 @@
               </a:defRPr>
             </a:pPr>
             <a:r>
-              <a:rPr>
+              <a:rPr sz="1220" b="0">
+                <a:solidFill>
+                  <a:srgbClr val="475467"/>
+                </a:solidFill>
                 <a:latin typeface="Microsoft YaHei"/>
               </a:rPr>
               <a:t>user/oscomp_ltp_list.txt</a:t>
             </a:r>
             <a:br/>
             <a:r>
-              <a:rPr>
+              <a:rPr sz="1220" b="0">
+                <a:solidFill>
+                  <a:srgbClr val="475467"/>
+                </a:solidFill>
                 <a:latin typeface="Microsoft YaHei"/>
               </a:rPr>
               <a:t>debug-rvoutput.txt</a:t>
             </a:r>
             <a:br/>
             <a:r>
-              <a:rPr>
+              <a:rPr sz="1220" b="0">
+                <a:solidFill>
+                  <a:srgbClr val="475467"/>
+                </a:solidFill>
                 <a:latin typeface="Microsoft YaHei"/>
               </a:rPr>
               <a:t>debug-laoutput.txt</a:t>
             </a:r>
             <a:br/>
             <a:r>
-              <a:rPr>
+              <a:rPr sz="1220" b="0">
+                <a:solidFill>
+                  <a:srgbClr val="475467"/>
+                </a:solidFill>
                 <a:latin typeface="Microsoft YaHei"/>
               </a:rPr>
               <a:t>rv-output.txt / la-output.txt</a:t>
             </a:r>
             <a:br/>
             <a:r>
-              <a:rPr>
+              <a:rPr sz="1220" b="0">
+                <a:solidFill>
+                  <a:srgbClr val="475467"/>
+                </a:solidFill>
                 <a:latin typeface="Microsoft YaHei"/>
               </a:rPr>
               <a:t>judge/local-report/</a:t>
             </a:r>
             <a:br/>
             <a:r>
-              <a:rPr>
+              <a:rPr sz="1220" b="0">
+                <a:solidFill>
+                  <a:srgbClr val="475467"/>
+                </a:solidFill>
                 <a:latin typeface="Microsoft YaHei"/>
               </a:rPr>
               <a:t>judge/local-compare/</a:t>
@@ -20375,7 +21580,7 @@
         </p:spPr>
         <p:txBody>
           <a:bodyPr wrap="square" lIns="27432" rIns="27432" anchor="t">
-            <a:spAutoFit/>
+            <a:normAutofit/>
           </a:bodyPr>
           <a:lstStyle/>
           <a:p>
@@ -20388,7 +21593,10 @@
               </a:defRPr>
             </a:pPr>
             <a:r>
-              <a:rPr>
+              <a:rPr sz="1500" b="1">
+                <a:solidFill>
+                  <a:srgbClr val="202124"/>
+                </a:solidFill>
                 <a:latin typeface="Microsoft YaHei"/>
               </a:rPr>
               <a:t>第三方与文档</a:t>
@@ -20414,7 +21622,7 @@
         </p:spPr>
         <p:txBody>
           <a:bodyPr wrap="square" lIns="27432" rIns="27432" anchor="t">
-            <a:spAutoFit/>
+            <a:normAutofit/>
           </a:bodyPr>
           <a:lstStyle/>
           <a:p>
@@ -20427,42 +21635,60 @@
               </a:defRPr>
             </a:pPr>
             <a:r>
-              <a:rPr>
+              <a:rPr sz="1220" b="0">
+                <a:solidFill>
+                  <a:srgbClr val="475467"/>
+                </a:solidFill>
                 <a:latin typeface="Microsoft YaHei"/>
               </a:rPr>
               <a:t>vendor/lwext4_rust</a:t>
             </a:r>
             <a:br/>
             <a:r>
-              <a:rPr>
+              <a:rPr sz="1220" b="0">
+                <a:solidFill>
+                  <a:srgbClr val="475467"/>
+                </a:solidFill>
                 <a:latin typeface="Microsoft YaHei"/>
               </a:rPr>
               <a:t>vendor/smoltcp</a:t>
             </a:r>
             <a:br/>
             <a:r>
-              <a:rPr>
+              <a:rPr sz="1220" b="0">
+                <a:solidFill>
+                  <a:srgbClr val="475467"/>
+                </a:solidFill>
                 <a:latin typeface="Microsoft YaHei"/>
               </a:rPr>
               <a:t>vendor/riscv</a:t>
             </a:r>
             <a:br/>
             <a:r>
-              <a:rPr>
+              <a:rPr sz="1220" b="0">
+                <a:solidFill>
+                  <a:srgbClr val="475467"/>
+                </a:solidFill>
                 <a:latin typeface="Microsoft YaHei"/>
               </a:rPr>
               <a:t>docs/初赛文档/main.typ</a:t>
             </a:r>
             <a:br/>
             <a:r>
-              <a:rPr>
+              <a:rPr sz="1220" b="0">
+                <a:solidFill>
+                  <a:srgbClr val="475467"/>
+                </a:solidFill>
                 <a:latin typeface="Microsoft YaHei"/>
               </a:rPr>
               <a:t>初赛文档.pdf</a:t>
             </a:r>
             <a:br/>
             <a:r>
-              <a:rPr>
+              <a:rPr sz="1220" b="0">
+                <a:solidFill>
+                  <a:srgbClr val="475467"/>
+                </a:solidFill>
                 <a:latin typeface="Microsoft YaHei"/>
               </a:rPr>
               <a:t>进展汇报 PPT</a:t>
@@ -20592,7 +21818,7 @@
         </p:spPr>
         <p:txBody>
           <a:bodyPr wrap="square" lIns="27432" rIns="27432" anchor="t">
-            <a:spAutoFit/>
+            <a:normAutofit/>
           </a:bodyPr>
           <a:lstStyle/>
           <a:p>
@@ -20605,6 +21831,12 @@
               </a:defRPr>
             </a:pPr>
             <a:r>
+              <a:rPr sz="900" b="0">
+                <a:solidFill>
+                  <a:srgbClr val="667085"/>
+                </a:solidFill>
+                <a:latin typeface="Microsoft YaHei"/>
+              </a:rPr>
               <a:t>06 / 25</a:t>
             </a:r>
           </a:p>
@@ -20628,7 +21860,7 @@
         </p:spPr>
         <p:txBody>
           <a:bodyPr wrap="square" lIns="27432" rIns="27432" anchor="t">
-            <a:spAutoFit/>
+            <a:normAutofit/>
           </a:bodyPr>
           <a:lstStyle/>
           <a:p>
@@ -20641,6 +21873,12 @@
               </a:defRPr>
             </a:pPr>
             <a:r>
+              <a:rPr sz="2400" b="1">
+                <a:solidFill>
+                  <a:srgbClr val="202124"/>
+                </a:solidFill>
+                <a:latin typeface="Microsoft YaHei"/>
+              </a:rPr>
               <a:t>开发进度时间线</a:t>
             </a:r>
           </a:p>
@@ -20664,7 +21902,7 @@
         </p:spPr>
         <p:txBody>
           <a:bodyPr wrap="square" lIns="27432" rIns="27432" anchor="t">
-            <a:spAutoFit/>
+            <a:normAutofit/>
           </a:bodyPr>
           <a:lstStyle/>
           <a:p>
@@ -20677,6 +21915,12 @@
               </a:defRPr>
             </a:pPr>
             <a:r>
+              <a:rPr sz="1350" b="0">
+                <a:solidFill>
+                  <a:srgbClr val="475467"/>
+                </a:solidFill>
+                <a:latin typeface="Microsoft YaHei"/>
+              </a:rPr>
               <a:t>最终版已经完成双架构全量测例回归</a:t>
             </a:r>
           </a:p>
@@ -20831,7 +22075,7 @@
         </p:spPr>
         <p:txBody>
           <a:bodyPr wrap="square" lIns="27432" rIns="27432" anchor="t">
-            <a:spAutoFit/>
+            <a:normAutofit/>
           </a:bodyPr>
           <a:lstStyle/>
           <a:p>
@@ -20844,6 +22088,12 @@
               </a:defRPr>
             </a:pPr>
             <a:r>
+              <a:rPr sz="1500" b="1">
+                <a:solidFill>
+                  <a:srgbClr val="202124"/>
+                </a:solidFill>
+                <a:latin typeface="Microsoft YaHei"/>
+              </a:rPr>
               <a:t>基础内核</a:t>
             </a:r>
           </a:p>
@@ -20867,7 +22117,7 @@
         </p:spPr>
         <p:txBody>
           <a:bodyPr wrap="square" lIns="27432" rIns="27432" anchor="t">
-            <a:spAutoFit/>
+            <a:normAutofit/>
           </a:bodyPr>
           <a:lstStyle/>
           <a:p>
@@ -20880,6 +22130,12 @@
               </a:defRPr>
             </a:pPr>
             <a:r>
+              <a:rPr sz="1220" b="0">
+                <a:solidFill>
+                  <a:srgbClr val="475467"/>
+                </a:solidFill>
+                <a:latin typeface="Microsoft YaHei"/>
+              </a:rPr>
               <a:t>启动、trap、页表、堆和页帧分配</a:t>
             </a:r>
           </a:p>
@@ -21034,7 +22290,7 @@
         </p:spPr>
         <p:txBody>
           <a:bodyPr wrap="square" lIns="27432" rIns="27432" anchor="t">
-            <a:spAutoFit/>
+            <a:normAutofit/>
           </a:bodyPr>
           <a:lstStyle/>
           <a:p>
@@ -21047,6 +22303,12 @@
               </a:defRPr>
             </a:pPr>
             <a:r>
+              <a:rPr sz="1500" b="1">
+                <a:solidFill>
+                  <a:srgbClr val="202124"/>
+                </a:solidFill>
+                <a:latin typeface="Microsoft YaHei"/>
+              </a:rPr>
               <a:t>用户态链路</a:t>
             </a:r>
           </a:p>
@@ -21070,7 +22332,7 @@
         </p:spPr>
         <p:txBody>
           <a:bodyPr wrap="square" lIns="27432" rIns="27432" anchor="t">
-            <a:spAutoFit/>
+            <a:normAutofit/>
           </a:bodyPr>
           <a:lstStyle/>
           <a:p>
@@ -21083,6 +22345,12 @@
               </a:defRPr>
             </a:pPr>
             <a:r>
+              <a:rPr sz="1220" b="0">
+                <a:solidFill>
+                  <a:srgbClr val="475467"/>
+                </a:solidFill>
+                <a:latin typeface="Microsoft YaHei"/>
+              </a:rPr>
               <a:t>TCB、调度、fd、VFS、Ext4、ELF</a:t>
             </a:r>
           </a:p>
@@ -21237,7 +22505,7 @@
         </p:spPr>
         <p:txBody>
           <a:bodyPr wrap="square" lIns="27432" rIns="27432" anchor="t">
-            <a:spAutoFit/>
+            <a:normAutofit/>
           </a:bodyPr>
           <a:lstStyle/>
           <a:p>
@@ -21250,6 +22518,12 @@
               </a:defRPr>
             </a:pPr>
             <a:r>
+              <a:rPr sz="1500" b="1">
+                <a:solidFill>
+                  <a:srgbClr val="202124"/>
+                </a:solidFill>
+                <a:latin typeface="Microsoft YaHei"/>
+              </a:rPr>
               <a:t>兼容语义</a:t>
             </a:r>
           </a:p>
@@ -21273,7 +22547,7 @@
         </p:spPr>
         <p:txBody>
           <a:bodyPr wrap="square" lIns="27432" rIns="27432" anchor="t">
-            <a:spAutoFit/>
+            <a:normAutofit/>
           </a:bodyPr>
           <a:lstStyle/>
           <a:p>
@@ -21286,6 +22560,12 @@
               </a:defRPr>
             </a:pPr>
             <a:r>
+              <a:rPr sz="1220" b="0">
+                <a:solidFill>
+                  <a:srgbClr val="475467"/>
+                </a:solidFill>
+                <a:latin typeface="Microsoft YaHei"/>
+              </a:rPr>
               <a:t>mmap/COW、信号、IPC、时间、socket</a:t>
             </a:r>
           </a:p>
@@ -21440,7 +22720,7 @@
         </p:spPr>
         <p:txBody>
           <a:bodyPr wrap="square" lIns="27432" rIns="27432" anchor="t">
-            <a:spAutoFit/>
+            <a:normAutofit/>
           </a:bodyPr>
           <a:lstStyle/>
           <a:p>
@@ -21453,6 +22733,12 @@
               </a:defRPr>
             </a:pPr>
             <a:r>
+              <a:rPr sz="1500" b="1">
+                <a:solidFill>
+                  <a:srgbClr val="202124"/>
+                </a:solidFill>
+                <a:latin typeface="Microsoft YaHei"/>
+              </a:rPr>
               <a:t>双架构收敛</a:t>
             </a:r>
           </a:p>
@@ -21476,7 +22762,7 @@
         </p:spPr>
         <p:txBody>
           <a:bodyPr wrap="square" lIns="27432" rIns="27432" anchor="t">
-            <a:spAutoFit/>
+            <a:normAutofit/>
           </a:bodyPr>
           <a:lstStyle/>
           <a:p>
@@ -21489,6 +22775,12 @@
               </a:defRPr>
             </a:pPr>
             <a:r>
+              <a:rPr sz="1220" b="0">
+                <a:solidFill>
+                  <a:srgbClr val="475467"/>
+                </a:solidFill>
+                <a:latin typeface="Microsoft YaHei"/>
+              </a:rPr>
               <a:t>LoongArch 页表/TLB、PCI、UART、RISC-V SBI</a:t>
             </a:r>
           </a:p>
@@ -21643,7 +22935,7 @@
         </p:spPr>
         <p:txBody>
           <a:bodyPr wrap="square" lIns="27432" rIns="27432" anchor="t">
-            <a:spAutoFit/>
+            <a:normAutofit/>
           </a:bodyPr>
           <a:lstStyle/>
           <a:p>
@@ -21656,6 +22948,12 @@
               </a:defRPr>
             </a:pPr>
             <a:r>
+              <a:rPr sz="1500" b="1">
+                <a:solidFill>
+                  <a:srgbClr val="202124"/>
+                </a:solidFill>
+                <a:latin typeface="Microsoft YaHei"/>
+              </a:rPr>
               <a:t>全量回归</a:t>
             </a:r>
           </a:p>
@@ -21679,7 +22977,7 @@
         </p:spPr>
         <p:txBody>
           <a:bodyPr wrap="square" lIns="27432" rIns="27432" anchor="t">
-            <a:spAutoFit/>
+            <a:normAutofit/>
           </a:bodyPr>
           <a:lstStyle/>
           <a:p>
@@ -21692,6 +22990,12 @@
               </a:defRPr>
             </a:pPr>
             <a:r>
+              <a:rPr sz="1220" b="0">
+                <a:solidFill>
+                  <a:srgbClr val="475467"/>
+                </a:solidFill>
+                <a:latin typeface="Microsoft YaHei"/>
+              </a:rPr>
               <a:t>rv-output/la-output、local-report、local-compare</a:t>
             </a:r>
           </a:p>
@@ -21803,7 +23107,7 @@
         </p:spPr>
         <p:txBody>
           <a:bodyPr wrap="square" lIns="27432" rIns="27432" anchor="t">
-            <a:spAutoFit/>
+            <a:normAutofit/>
           </a:bodyPr>
           <a:lstStyle/>
           <a:p>
@@ -21816,6 +23120,12 @@
               </a:defRPr>
             </a:pPr>
             <a:r>
+              <a:rPr sz="1500" b="1">
+                <a:solidFill>
+                  <a:srgbClr val="202124"/>
+                </a:solidFill>
+                <a:latin typeface="Microsoft YaHei"/>
+              </a:rPr>
               <a:t>当前判断</a:t>
             </a:r>
           </a:p>
@@ -21839,7 +23149,7 @@
         </p:spPr>
         <p:txBody>
           <a:bodyPr wrap="square" lIns="27432" rIns="27432" anchor="t">
-            <a:spAutoFit/>
+            <a:normAutofit/>
           </a:bodyPr>
           <a:lstStyle/>
           <a:p>
@@ -21852,6 +23162,12 @@
               </a:defRPr>
             </a:pPr>
             <a:r>
+              <a:rPr sz="1200" b="0">
+                <a:solidFill>
+                  <a:srgbClr val="475467"/>
+                </a:solidFill>
+                <a:latin typeface="Microsoft YaHei"/>
+              </a:rPr>
               <a:t>主路径已经打通并完成全量 LTP 回归；后续收益最高的工作是按 compare CSV 收敛文件系统/I/O 差异，而不是继续扩张模块数量。</a:t>
             </a:r>
           </a:p>
@@ -21893,7 +23209,7 @@
         </p:spPr>
         <p:txBody>
           <a:bodyPr wrap="square" lIns="27432" rIns="27432" anchor="t">
-            <a:spAutoFit/>
+            <a:normAutofit/>
           </a:bodyPr>
           <a:lstStyle/>
           <a:p>
@@ -21906,6 +23222,12 @@
               </a:defRPr>
             </a:pPr>
             <a:r>
+              <a:rPr sz="900" b="0">
+                <a:solidFill>
+                  <a:srgbClr val="667085"/>
+                </a:solidFill>
+                <a:latin typeface="Microsoft YaHei"/>
+              </a:rPr>
               <a:t>07 / 25</a:t>
             </a:r>
           </a:p>
@@ -21929,7 +23251,7 @@
         </p:spPr>
         <p:txBody>
           <a:bodyPr wrap="square" lIns="27432" rIns="27432" anchor="t">
-            <a:spAutoFit/>
+            <a:normAutofit/>
           </a:bodyPr>
           <a:lstStyle/>
           <a:p>
@@ -21942,6 +23264,12 @@
               </a:defRPr>
             </a:pPr>
             <a:r>
+              <a:rPr sz="2400" b="1">
+                <a:solidFill>
+                  <a:srgbClr val="202124"/>
+                </a:solidFill>
+                <a:latin typeface="Microsoft YaHei"/>
+              </a:rPr>
               <a:t>总体架构</a:t>
             </a:r>
           </a:p>
@@ -21965,7 +23293,7 @@
         </p:spPr>
         <p:txBody>
           <a:bodyPr wrap="square" lIns="27432" rIns="27432" anchor="t">
-            <a:spAutoFit/>
+            <a:normAutofit/>
           </a:bodyPr>
           <a:lstStyle/>
           <a:p>
@@ -21978,6 +23306,12 @@
               </a:defRPr>
             </a:pPr>
             <a:r>
+              <a:rPr sz="1350" b="0">
+                <a:solidFill>
+                  <a:srgbClr val="475467"/>
+                </a:solidFill>
+                <a:latin typeface="Microsoft YaHei"/>
+              </a:rPr>
               <a:t>宏内核结构，关键路径直接协作</a:t>
             </a:r>
           </a:p>
@@ -21999,8 +23333,8 @@
         </p:blipFill>
         <p:spPr>
           <a:xfrm>
-            <a:off x="1363827" y="1078992"/>
-            <a:ext cx="9464040" cy="5364928"/>
+            <a:off x="1234440" y="1051560"/>
+            <a:ext cx="9144000" cy="4773168"/>
           </a:xfrm>
           <a:prstGeom prst="rect">
             <a:avLst/>
@@ -22015,8 +23349,8 @@
         </p:nvSpPr>
         <p:spPr>
           <a:xfrm>
-            <a:off x="658368" y="5870448"/>
-            <a:ext cx="10561320" cy="347472"/>
+            <a:off x="685800" y="5925312"/>
+            <a:ext cx="9738360" cy="274320"/>
           </a:xfrm>
           <a:prstGeom prst="rect">
             <a:avLst/>
@@ -22024,57 +23358,19 @@
           <a:noFill/>
         </p:spPr>
         <p:txBody>
-          <a:bodyPr wrap="none">
-            <a:spAutoFit/>
+          <a:bodyPr wrap="square">
+            <a:normAutofit/>
           </a:bodyPr>
           <a:lstStyle/>
           <a:p>
-            <a:pPr>
-              <a:defRPr sz="1300">
-                <a:solidFill>
-                  <a:srgbClr val="475467"/>
-                </a:solidFill>
-                <a:latin typeface="Microsoft YaHei"/>
-              </a:defRPr>
-            </a:pPr>
-            <a:r>
-              <a:t>架构图来自 docs/初赛文档/figures/architecture.svg，展示用户态测试负载、系统调用入口、内核核心服务与双架构硬件抽象的协作边界。</a:t>
-            </a:r>
-          </a:p>
-        </p:txBody>
-      </p:sp>
-      <p:sp>
-        <p:nvSpPr>
-          <p:cNvPr id="9" name="TextBox 8"/>
-          <p:cNvSpPr txBox="1"/>
-          <p:nvPr/>
-        </p:nvSpPr>
-        <p:spPr>
-          <a:xfrm>
-            <a:off x="10378440" y="6446520"/>
-            <a:ext cx="1280160" cy="201168"/>
-          </a:xfrm>
-          <a:prstGeom prst="rect">
-            <a:avLst/>
-          </a:prstGeom>
-          <a:noFill/>
-        </p:spPr>
-        <p:txBody>
-          <a:bodyPr wrap="none">
-            <a:spAutoFit/>
-          </a:bodyPr>
-          <a:lstStyle/>
-          <a:p>
-            <a:pPr>
-              <a:defRPr sz="1300">
-                <a:solidFill>
-                  <a:srgbClr val="475467"/>
-                </a:solidFill>
-                <a:latin typeface="Microsoft YaHei"/>
-              </a:defRPr>
-            </a:pPr>
-            <a:r>
-              <a:t>07 / 25</a:t>
+            <a:r>
+              <a:rPr sz="1180" b="0">
+                <a:solidFill>
+                  <a:srgbClr val="475467"/>
+                </a:solidFill>
+                <a:latin typeface="Microsoft YaHei"/>
+              </a:rPr>
+              <a:t>架构图展示用户态测试负载、系统调用入口、内核核心服务与双架构硬件抽象的协作边界。</a:t>
             </a:r>
           </a:p>
         </p:txBody>
@@ -22201,7 +23497,7 @@
         </p:spPr>
         <p:txBody>
           <a:bodyPr wrap="square" lIns="27432" rIns="27432" anchor="t">
-            <a:spAutoFit/>
+            <a:normAutofit/>
           </a:bodyPr>
           <a:lstStyle/>
           <a:p>
@@ -22214,7 +23510,10 @@
               </a:defRPr>
             </a:pPr>
             <a:r>
-              <a:rPr>
+              <a:rPr sz="900" b="0">
+                <a:solidFill>
+                  <a:srgbClr val="667085"/>
+                </a:solidFill>
                 <a:latin typeface="Microsoft YaHei"/>
               </a:rPr>
               <a:t>08 / 25</a:t>
@@ -22240,7 +23539,7 @@
         </p:spPr>
         <p:txBody>
           <a:bodyPr wrap="square" lIns="27432" rIns="27432" anchor="t">
-            <a:spAutoFit/>
+            <a:normAutofit/>
           </a:bodyPr>
           <a:lstStyle/>
           <a:p>
@@ -22253,7 +23552,10 @@
               </a:defRPr>
             </a:pPr>
             <a:r>
-              <a:rPr>
+              <a:rPr sz="2400" b="1">
+                <a:solidFill>
+                  <a:srgbClr val="202124"/>
+                </a:solidFill>
                 <a:latin typeface="Microsoft YaHei"/>
               </a:rPr>
               <a:t>双架构硬件抽象层</a:t>
@@ -22279,7 +23581,7 @@
         </p:spPr>
         <p:txBody>
           <a:bodyPr wrap="square" lIns="27432" rIns="27432" anchor="t">
-            <a:spAutoFit/>
+            <a:normAutofit/>
           </a:bodyPr>
           <a:lstStyle/>
           <a:p>
@@ -22292,7 +23594,10 @@
               </a:defRPr>
             </a:pPr>
             <a:r>
-              <a:rPr>
+              <a:rPr sz="1350" b="0">
+                <a:solidFill>
+                  <a:srgbClr val="475467"/>
+                </a:solidFill>
                 <a:latin typeface="Microsoft YaHei"/>
               </a:rPr>
               <a:t>同名模块 + 条件编译 + 统一 re-export</a:t>
@@ -22449,7 +23754,7 @@
         </p:spPr>
         <p:txBody>
           <a:bodyPr wrap="square" lIns="27432" rIns="27432" anchor="t">
-            <a:spAutoFit/>
+            <a:normAutofit/>
           </a:bodyPr>
           <a:lstStyle/>
           <a:p>
@@ -22462,7 +23767,10 @@
               </a:defRPr>
             </a:pPr>
             <a:r>
-              <a:rPr>
+              <a:rPr sz="1500" b="1">
+                <a:solidFill>
+                  <a:srgbClr val="202124"/>
+                </a:solidFill>
                 <a:latin typeface="Microsoft YaHei"/>
               </a:rPr>
               <a:t>统一接口</a:t>
@@ -22488,7 +23796,7 @@
         </p:spPr>
         <p:txBody>
           <a:bodyPr wrap="square" lIns="73152" rIns="27432">
-            <a:spAutoFit/>
+            <a:normAutofit/>
           </a:bodyPr>
           <a:lstStyle/>
           <a:p>
@@ -22504,7 +23812,10 @@
               </a:defRPr>
             </a:pPr>
             <a:r>
-              <a:rPr>
+              <a:rPr sz="1220" b="0">
+                <a:solidFill>
+                  <a:srgbClr val="475467"/>
+                </a:solidFill>
                 <a:latin typeface="Microsoft YaHei"/>
               </a:rPr>
               <a:t>arch/mod.rs 根据 target_arch 导出 rv64 或 loongarch64</a:t>
@@ -22523,7 +23834,10 @@
               </a:defRPr>
             </a:pPr>
             <a:r>
-              <a:rPr>
+              <a:rPr sz="1220" b="0">
+                <a:solidFill>
+                  <a:srgbClr val="475467"/>
+                </a:solidFill>
                 <a:latin typeface="Microsoft YaHei"/>
               </a:rPr>
               <a:t>上层共享 read_mmu_token/write_mmu_token/sfence/timer/trap/mm/task</a:t>
@@ -22542,7 +23856,10 @@
               </a:defRPr>
             </a:pPr>
             <a:r>
-              <a:rPr>
+              <a:rPr sz="1220" b="0">
+                <a:solidFill>
+                  <a:srgbClr val="475467"/>
+                </a:solidFill>
                 <a:latin typeface="Microsoft YaHei"/>
               </a:rPr>
               <a:t>MemorySet 调用同名 PageTable 接口，不感知底层 PTE 编码</a:t>
@@ -22561,7 +23878,10 @@
               </a:defRPr>
             </a:pPr>
             <a:r>
-              <a:rPr>
+              <a:rPr sz="1220" b="0">
+                <a:solidFill>
+                  <a:srgbClr val="475467"/>
+                </a:solidFill>
                 <a:latin typeface="Microsoft YaHei"/>
               </a:rPr>
               <a:t>中断守卫、任务切换和 timer 接口对上层保持同名语义</a:t>
@@ -22675,7 +23995,7 @@
         </p:spPr>
         <p:txBody>
           <a:bodyPr wrap="square" lIns="27432" rIns="27432" anchor="t">
-            <a:spAutoFit/>
+            <a:normAutofit/>
           </a:bodyPr>
           <a:lstStyle/>
           <a:p>
@@ -22688,7 +24008,10 @@
               </a:defRPr>
             </a:pPr>
             <a:r>
-              <a:rPr>
+              <a:rPr sz="1500" b="1">
+                <a:solidFill>
+                  <a:srgbClr val="202124"/>
+                </a:solidFill>
                 <a:latin typeface="Microsoft YaHei"/>
               </a:rPr>
               <a:t>架构差异</a:t>
@@ -22714,7 +24037,7 @@
         </p:spPr>
         <p:txBody>
           <a:bodyPr wrap="square" lIns="73152" rIns="27432">
-            <a:spAutoFit/>
+            <a:normAutofit/>
           </a:bodyPr>
           <a:lstStyle/>
           <a:p>
@@ -22730,7 +24053,10 @@
               </a:defRPr>
             </a:pPr>
             <a:r>
-              <a:rPr>
+              <a:rPr sz="1220" b="0">
+                <a:solidFill>
+                  <a:srgbClr val="475467"/>
+                </a:solidFill>
                 <a:latin typeface="Microsoft YaHei"/>
               </a:rPr>
               <a:t>RISC-V 使用 satp、sfence.vma、sret、SBI legacy console</a:t>
@@ -22749,7 +24075,10 @@
               </a:defRPr>
             </a:pPr>
             <a:r>
-              <a:rPr>
+              <a:rPr sz="1220" b="0">
+                <a:solidFill>
+                  <a:srgbClr val="475467"/>
+                </a:solidFill>
                 <a:latin typeface="Microsoft YaHei"/>
               </a:rPr>
               <a:t>LoongArch 使用 PGDL/PGDH、TLB refill、ertn、UART MMIO</a:t>
@@ -22768,7 +24097,10 @@
               </a:defRPr>
             </a:pPr>
             <a:r>
-              <a:rPr>
+              <a:rPr sz="1220" b="0">
+                <a:solidFill>
+                  <a:srgbClr val="475467"/>
+                </a:solidFill>
                 <a:latin typeface="Microsoft YaHei"/>
               </a:rPr>
               <a:t>LoongArch 启动阶段依赖 DMW，再切换到高地址页表</a:t>
@@ -22787,7 +24119,10 @@
               </a:defRPr>
             </a:pPr>
             <a:r>
-              <a:rPr>
+              <a:rPr sz="1220" b="0">
+                <a:solidFill>
+                  <a:srgbClr val="475467"/>
+                </a:solidFill>
                 <a:latin typeface="Microsoft YaHei"/>
               </a:rPr>
               <a:t>两套 TrapContext 的寄存器编号和 syscall 参数位置不同</a:t>
@@ -22917,7 +24252,7 @@
         </p:spPr>
         <p:txBody>
           <a:bodyPr wrap="square" lIns="27432" rIns="27432" anchor="t">
-            <a:spAutoFit/>
+            <a:normAutofit/>
           </a:bodyPr>
           <a:lstStyle/>
           <a:p>
@@ -22930,7 +24265,10 @@
               </a:defRPr>
             </a:pPr>
             <a:r>
-              <a:rPr>
+              <a:rPr sz="900" b="0">
+                <a:solidFill>
+                  <a:srgbClr val="667085"/>
+                </a:solidFill>
                 <a:latin typeface="Microsoft YaHei"/>
               </a:rPr>
               <a:t>09 / 25</a:t>
@@ -22956,7 +24294,7 @@
         </p:spPr>
         <p:txBody>
           <a:bodyPr wrap="square" lIns="27432" rIns="27432" anchor="t">
-            <a:spAutoFit/>
+            <a:normAutofit/>
           </a:bodyPr>
           <a:lstStyle/>
           <a:p>
@@ -22969,7 +24307,10 @@
               </a:defRPr>
             </a:pPr>
             <a:r>
-              <a:rPr>
+              <a:rPr sz="2400" b="1">
+                <a:solidFill>
+                  <a:srgbClr val="202124"/>
+                </a:solidFill>
                 <a:latin typeface="Microsoft YaHei"/>
               </a:rPr>
               <a:t>启动与 trap 路径</a:t>
@@ -22995,7 +24336,7 @@
         </p:spPr>
         <p:txBody>
           <a:bodyPr wrap="square" lIns="27432" rIns="27432" anchor="t">
-            <a:spAutoFit/>
+            <a:normAutofit/>
           </a:bodyPr>
           <a:lstStyle/>
           <a:p>
@@ -23008,7 +24349,10 @@
               </a:defRPr>
             </a:pPr>
             <a:r>
-              <a:rPr>
+              <a:rPr sz="1350" b="0">
+                <a:solidFill>
+                  <a:srgbClr val="475467"/>
+                </a:solidFill>
                 <a:latin typeface="Microsoft YaHei"/>
               </a:rPr>
               <a:t>用户态和内核态切换是所有系统调用的共同边界</a:t>
@@ -23165,7 +24509,7 @@
         </p:spPr>
         <p:txBody>
           <a:bodyPr wrap="square" lIns="27432" rIns="27432" anchor="t">
-            <a:spAutoFit/>
+            <a:normAutofit/>
           </a:bodyPr>
           <a:lstStyle/>
           <a:p>
@@ -23178,7 +24522,10 @@
               </a:defRPr>
             </a:pPr>
             <a:r>
-              <a:rPr>
+              <a:rPr sz="1500" b="1">
+                <a:solidFill>
+                  <a:srgbClr val="202124"/>
+                </a:solidFill>
                 <a:latin typeface="Microsoft YaHei"/>
               </a:rPr>
               <a:t>启动路径</a:t>
@@ -23195,7 +24542,7 @@
         <p:spPr>
           <a:xfrm>
             <a:off x="877824" y="1673352"/>
-            <a:ext cx="4800600" cy="1444752"/>
+            <a:ext cx="4800600" cy="1078992"/>
           </a:xfrm>
           <a:prstGeom prst="rect">
             <a:avLst/>
@@ -23204,7 +24551,7 @@
         </p:spPr>
         <p:txBody>
           <a:bodyPr wrap="square" lIns="27432" rIns="27432" anchor="t">
-            <a:spAutoFit/>
+            <a:normAutofit/>
           </a:bodyPr>
           <a:lstStyle/>
           <a:p>
@@ -23217,7 +24564,10 @@
               </a:defRPr>
             </a:pPr>
             <a:r>
-              <a:rPr>
+              <a:rPr sz="1160" b="0">
+                <a:solidFill>
+                  <a:srgbClr val="475467"/>
+                </a:solidFill>
                 <a:latin typeface="Microsoft YaHei"/>
               </a:rPr>
               <a:t>RISC-V 在汇编入口建立 boot_pagetable 并写 satp；LoongArch 先使用 DMW 直映运行，随后构造临时页表并跳到高半区。进入 rust_main_high 后，trap、mm、net、initproc 和 timer 初始化顺序重新汇合。</a:t>
@@ -23331,7 +24681,7 @@
         </p:spPr>
         <p:txBody>
           <a:bodyPr wrap="square" lIns="27432" rIns="27432" anchor="t">
-            <a:spAutoFit/>
+            <a:normAutofit/>
           </a:bodyPr>
           <a:lstStyle/>
           <a:p>
@@ -23344,7 +24694,10 @@
               </a:defRPr>
             </a:pPr>
             <a:r>
-              <a:rPr>
+              <a:rPr sz="1500" b="1">
+                <a:solidFill>
+                  <a:srgbClr val="202124"/>
+                </a:solidFill>
                 <a:latin typeface="Microsoft YaHei"/>
               </a:rPr>
               <a:t>trap 路径</a:t>
@@ -23361,7 +24714,7 @@
         <p:spPr>
           <a:xfrm>
             <a:off x="6364224" y="1673352"/>
-            <a:ext cx="4800600" cy="1444752"/>
+            <a:ext cx="4800600" cy="1078992"/>
           </a:xfrm>
           <a:prstGeom prst="rect">
             <a:avLst/>
@@ -23370,7 +24723,7 @@
         </p:spPr>
         <p:txBody>
           <a:bodyPr wrap="square" lIns="27432" rIns="27432" anchor="t">
-            <a:spAutoFit/>
+            <a:normAutofit/>
           </a:bodyPr>
           <a:lstStyle/>
           <a:p>
@@ -23383,7 +24736,10 @@
               </a:defRPr>
             </a:pPr>
             <a:r>
-              <a:rPr>
+              <a:rPr sz="1160" b="0">
+                <a:solidFill>
+                  <a:srgbClr val="475467"/>
+                </a:solidFill>
                 <a:latin typeface="Microsoft YaHei"/>
               </a:rPr>
               <a:t>入口汇编保存 TrapContext，Rust trap_handler 分发系统调用、页错误和时钟中断，返回前检查定时器和待处理信号，再由 __restore/sret 或 ertn 回到用户态。</a:t>
@@ -23452,8 +24808,8 @@
         </p:blipFill>
         <p:spPr>
           <a:xfrm>
-            <a:off x="2323947" y="2871216"/>
-            <a:ext cx="7543800" cy="3852053"/>
+            <a:off x="2423160" y="3136392"/>
+            <a:ext cx="7040880" cy="2697480"/>
           </a:xfrm>
           <a:prstGeom prst="rect">
             <a:avLst/>
@@ -23468,8 +24824,8 @@
         </p:nvSpPr>
         <p:spPr>
           <a:xfrm>
-            <a:off x="868680" y="5989320"/>
-            <a:ext cx="9875520" cy="320040"/>
+            <a:off x="868680" y="5925312"/>
+            <a:ext cx="9646920" cy="274320"/>
           </a:xfrm>
           <a:prstGeom prst="rect">
             <a:avLst/>
@@ -23477,21 +24833,19 @@
           <a:noFill/>
         </p:spPr>
         <p:txBody>
-          <a:bodyPr wrap="none">
-            <a:spAutoFit/>
+          <a:bodyPr wrap="square">
+            <a:normAutofit/>
           </a:bodyPr>
           <a:lstStyle/>
           <a:p>
-            <a:pPr>
-              <a:defRPr sz="1300">
-                <a:solidFill>
-                  <a:srgbClr val="475467"/>
-                </a:solidFill>
-                <a:latin typeface="Microsoft YaHei"/>
-              </a:defRPr>
-            </a:pPr>
-            <a:r>
-              <a:t>trap-flow.svg 对应系统调用、异常和时钟中断的共同入口：保存 TrapContext 后进入 Rust 分发，再按 syscall、page fault、timer/yield 等路径返回或调度。</a:t>
+            <a:r>
+              <a:rPr sz="1140" b="0">
+                <a:solidFill>
+                  <a:srgbClr val="475467"/>
+                </a:solidFill>
+                <a:latin typeface="Microsoft YaHei"/>
+              </a:rPr>
+              <a:t>trap 路径图对应系统调用、异常和时钟中断的共同入口：保存 TrapContext 后进入 Rust 分发，再返回用户态或触发调度。</a:t>
             </a:r>
           </a:p>
         </p:txBody>
